--- a/seminar/seminar-dekita.pptx
+++ b/seminar/seminar-dekita.pptx
@@ -54,9 +54,18 @@
     <p:sldId id="302" r:id="rId48"/>
     <p:sldId id="303" r:id="rId49"/>
     <p:sldId id="304" r:id="rId50"/>
+    <p:sldId id="305" r:id="rId51"/>
+    <p:sldId id="306" r:id="rId52"/>
+    <p:sldId id="307" r:id="rId53"/>
+    <p:sldId id="308" r:id="rId54"/>
+    <p:sldId id="309" r:id="rId55"/>
+    <p:sldId id="310" r:id="rId56"/>
+    <p:sldId id="311" r:id="rId57"/>
+    <p:sldId id="312" r:id="rId58"/>
+    <p:sldId id="313" r:id="rId59"/>
   </p:sldIdLst>
   <p:notesMasterIdLst>
-    <p:notesMasterId r:id="rId51"/>
+    <p:notesMasterId r:id="rId60"/>
   </p:notesMasterIdLst>
   <p:sldSz cx="9144000" cy="5143500"/>
   <p:notesSz cx="5143500" cy="9144000"/>
@@ -4446,6 +4455,798 @@
             <a:fld id="{F7021451-1387-4CA6-816F-3879F97B5CBC}" type="slidenum">
               <a:rPr lang="en-US"/>
               <a:t>5</a:t>
+            </a:fld>
+            <a:endParaRPr lang="en-US"/>
+          </a:p>
+        </p:txBody>
+      </p:sp>
+    </p:spTree>
+    <p:extLst>
+      <p:ext uri="{BB962C8B-B14F-4D97-AF65-F5344CB8AC3E}">
+        <p14:creationId xmlns:p14="http://schemas.microsoft.com/office/powerpoint/2010/main" val="1024086991"/>
+      </p:ext>
+    </p:extLst>
+  </p:cSld>
+  <p:clrMapOvr>
+    <a:masterClrMapping/>
+  </p:clrMapOvr>
+</p:notes>
+</file>
+
+<file path=ppt/notesSlides/notesSlide50.xml><?xml version="1.0" encoding="utf-8"?>
+<p:notes xmlns:a="http://schemas.openxmlformats.org/drawingml/2006/main" xmlns:r="http://schemas.openxmlformats.org/officeDocument/2006/relationships" xmlns:p="http://schemas.openxmlformats.org/presentationml/2006/main">
+  <p:cSld>
+    <p:spTree>
+      <p:nvGrpSpPr>
+        <p:cNvPr id="1" name=""/>
+        <p:cNvGrpSpPr/>
+        <p:nvPr/>
+      </p:nvGrpSpPr>
+      <p:grpSpPr>
+        <a:xfrm>
+          <a:off x="0" y="0"/>
+          <a:ext cx="0" cy="0"/>
+          <a:chOff x="0" y="0"/>
+          <a:chExt cx="0" cy="0"/>
+        </a:xfrm>
+      </p:grpSpPr>
+      <p:sp>
+        <p:nvSpPr>
+          <p:cNvPr id="2" name="Slide Image Placeholder 1"/>
+          <p:cNvSpPr>
+            <a:spLocks noGrp="1" noRot="1" noChangeAspect="1"/>
+          </p:cNvSpPr>
+          <p:nvPr>
+            <p:ph type="sldImg"/>
+          </p:nvPr>
+        </p:nvSpPr>
+        <p:spPr/>
+      </p:sp>
+      <p:sp>
+        <p:nvSpPr>
+          <p:cNvPr id="3" name="Notes Placeholder 2"/>
+          <p:cNvSpPr>
+            <a:spLocks noGrp="1"/>
+          </p:cNvSpPr>
+          <p:nvPr>
+            <p:ph type="body" idx="1"/>
+          </p:nvPr>
+        </p:nvSpPr>
+        <p:spPr/>
+        <p:txBody>
+          <a:bodyPr/>
+          <a:lstStyle/>
+          <a:p>
+            <a:r>
+              <a:rPr lang="en-US" dirty="0"/>
+              <a:t/>
+            </a:r>
+            <a:endParaRPr lang="en-US" dirty="0"/>
+          </a:p>
+        </p:txBody>
+      </p:sp>
+      <p:sp>
+        <p:nvSpPr>
+          <p:cNvPr id="4" name="Slide Number Placeholder 3"/>
+          <p:cNvSpPr>
+            <a:spLocks noGrp="1"/>
+          </p:cNvSpPr>
+          <p:nvPr>
+            <p:ph type="sldNum" sz="quarter" idx="10"/>
+          </p:nvPr>
+        </p:nvSpPr>
+        <p:spPr/>
+        <p:txBody>
+          <a:bodyPr/>
+          <a:lstStyle/>
+          <a:p>
+            <a:fld id="{F7021451-1387-4CA6-816F-3879F97B5CBC}" type="slidenum">
+              <a:rPr lang="en-US"/>
+              <a:t>50</a:t>
+            </a:fld>
+            <a:endParaRPr lang="en-US"/>
+          </a:p>
+        </p:txBody>
+      </p:sp>
+    </p:spTree>
+    <p:extLst>
+      <p:ext uri="{BB962C8B-B14F-4D97-AF65-F5344CB8AC3E}">
+        <p14:creationId xmlns:p14="http://schemas.microsoft.com/office/powerpoint/2010/main" val="1024086991"/>
+      </p:ext>
+    </p:extLst>
+  </p:cSld>
+  <p:clrMapOvr>
+    <a:masterClrMapping/>
+  </p:clrMapOvr>
+</p:notes>
+</file>
+
+<file path=ppt/notesSlides/notesSlide51.xml><?xml version="1.0" encoding="utf-8"?>
+<p:notes xmlns:a="http://schemas.openxmlformats.org/drawingml/2006/main" xmlns:r="http://schemas.openxmlformats.org/officeDocument/2006/relationships" xmlns:p="http://schemas.openxmlformats.org/presentationml/2006/main">
+  <p:cSld>
+    <p:spTree>
+      <p:nvGrpSpPr>
+        <p:cNvPr id="1" name=""/>
+        <p:cNvGrpSpPr/>
+        <p:nvPr/>
+      </p:nvGrpSpPr>
+      <p:grpSpPr>
+        <a:xfrm>
+          <a:off x="0" y="0"/>
+          <a:ext cx="0" cy="0"/>
+          <a:chOff x="0" y="0"/>
+          <a:chExt cx="0" cy="0"/>
+        </a:xfrm>
+      </p:grpSpPr>
+      <p:sp>
+        <p:nvSpPr>
+          <p:cNvPr id="2" name="Slide Image Placeholder 1"/>
+          <p:cNvSpPr>
+            <a:spLocks noGrp="1" noRot="1" noChangeAspect="1"/>
+          </p:cNvSpPr>
+          <p:nvPr>
+            <p:ph type="sldImg"/>
+          </p:nvPr>
+        </p:nvSpPr>
+        <p:spPr/>
+      </p:sp>
+      <p:sp>
+        <p:nvSpPr>
+          <p:cNvPr id="3" name="Notes Placeholder 2"/>
+          <p:cNvSpPr>
+            <a:spLocks noGrp="1"/>
+          </p:cNvSpPr>
+          <p:nvPr>
+            <p:ph type="body" idx="1"/>
+          </p:nvPr>
+        </p:nvSpPr>
+        <p:spPr/>
+        <p:txBody>
+          <a:bodyPr/>
+          <a:lstStyle/>
+          <a:p>
+            <a:r>
+              <a:rPr lang="en-US" dirty="0"/>
+              <a:t/>
+            </a:r>
+            <a:endParaRPr lang="en-US" dirty="0"/>
+          </a:p>
+        </p:txBody>
+      </p:sp>
+      <p:sp>
+        <p:nvSpPr>
+          <p:cNvPr id="4" name="Slide Number Placeholder 3"/>
+          <p:cNvSpPr>
+            <a:spLocks noGrp="1"/>
+          </p:cNvSpPr>
+          <p:nvPr>
+            <p:ph type="sldNum" sz="quarter" idx="10"/>
+          </p:nvPr>
+        </p:nvSpPr>
+        <p:spPr/>
+        <p:txBody>
+          <a:bodyPr/>
+          <a:lstStyle/>
+          <a:p>
+            <a:fld id="{F7021451-1387-4CA6-816F-3879F97B5CBC}" type="slidenum">
+              <a:rPr lang="en-US"/>
+              <a:t>51</a:t>
+            </a:fld>
+            <a:endParaRPr lang="en-US"/>
+          </a:p>
+        </p:txBody>
+      </p:sp>
+    </p:spTree>
+    <p:extLst>
+      <p:ext uri="{BB962C8B-B14F-4D97-AF65-F5344CB8AC3E}">
+        <p14:creationId xmlns:p14="http://schemas.microsoft.com/office/powerpoint/2010/main" val="1024086991"/>
+      </p:ext>
+    </p:extLst>
+  </p:cSld>
+  <p:clrMapOvr>
+    <a:masterClrMapping/>
+  </p:clrMapOvr>
+</p:notes>
+</file>
+
+<file path=ppt/notesSlides/notesSlide52.xml><?xml version="1.0" encoding="utf-8"?>
+<p:notes xmlns:a="http://schemas.openxmlformats.org/drawingml/2006/main" xmlns:r="http://schemas.openxmlformats.org/officeDocument/2006/relationships" xmlns:p="http://schemas.openxmlformats.org/presentationml/2006/main">
+  <p:cSld>
+    <p:spTree>
+      <p:nvGrpSpPr>
+        <p:cNvPr id="1" name=""/>
+        <p:cNvGrpSpPr/>
+        <p:nvPr/>
+      </p:nvGrpSpPr>
+      <p:grpSpPr>
+        <a:xfrm>
+          <a:off x="0" y="0"/>
+          <a:ext cx="0" cy="0"/>
+          <a:chOff x="0" y="0"/>
+          <a:chExt cx="0" cy="0"/>
+        </a:xfrm>
+      </p:grpSpPr>
+      <p:sp>
+        <p:nvSpPr>
+          <p:cNvPr id="2" name="Slide Image Placeholder 1"/>
+          <p:cNvSpPr>
+            <a:spLocks noGrp="1" noRot="1" noChangeAspect="1"/>
+          </p:cNvSpPr>
+          <p:nvPr>
+            <p:ph type="sldImg"/>
+          </p:nvPr>
+        </p:nvSpPr>
+        <p:spPr/>
+      </p:sp>
+      <p:sp>
+        <p:nvSpPr>
+          <p:cNvPr id="3" name="Notes Placeholder 2"/>
+          <p:cNvSpPr>
+            <a:spLocks noGrp="1"/>
+          </p:cNvSpPr>
+          <p:nvPr>
+            <p:ph type="body" idx="1"/>
+          </p:nvPr>
+        </p:nvSpPr>
+        <p:spPr/>
+        <p:txBody>
+          <a:bodyPr/>
+          <a:lstStyle/>
+          <a:p>
+            <a:r>
+              <a:rPr lang="en-US" dirty="0"/>
+              <a:t/>
+            </a:r>
+            <a:endParaRPr lang="en-US" dirty="0"/>
+          </a:p>
+        </p:txBody>
+      </p:sp>
+      <p:sp>
+        <p:nvSpPr>
+          <p:cNvPr id="4" name="Slide Number Placeholder 3"/>
+          <p:cNvSpPr>
+            <a:spLocks noGrp="1"/>
+          </p:cNvSpPr>
+          <p:nvPr>
+            <p:ph type="sldNum" sz="quarter" idx="10"/>
+          </p:nvPr>
+        </p:nvSpPr>
+        <p:spPr/>
+        <p:txBody>
+          <a:bodyPr/>
+          <a:lstStyle/>
+          <a:p>
+            <a:fld id="{F7021451-1387-4CA6-816F-3879F97B5CBC}" type="slidenum">
+              <a:rPr lang="en-US"/>
+              <a:t>52</a:t>
+            </a:fld>
+            <a:endParaRPr lang="en-US"/>
+          </a:p>
+        </p:txBody>
+      </p:sp>
+    </p:spTree>
+    <p:extLst>
+      <p:ext uri="{BB962C8B-B14F-4D97-AF65-F5344CB8AC3E}">
+        <p14:creationId xmlns:p14="http://schemas.microsoft.com/office/powerpoint/2010/main" val="1024086991"/>
+      </p:ext>
+    </p:extLst>
+  </p:cSld>
+  <p:clrMapOvr>
+    <a:masterClrMapping/>
+  </p:clrMapOvr>
+</p:notes>
+</file>
+
+<file path=ppt/notesSlides/notesSlide53.xml><?xml version="1.0" encoding="utf-8"?>
+<p:notes xmlns:a="http://schemas.openxmlformats.org/drawingml/2006/main" xmlns:r="http://schemas.openxmlformats.org/officeDocument/2006/relationships" xmlns:p="http://schemas.openxmlformats.org/presentationml/2006/main">
+  <p:cSld>
+    <p:spTree>
+      <p:nvGrpSpPr>
+        <p:cNvPr id="1" name=""/>
+        <p:cNvGrpSpPr/>
+        <p:nvPr/>
+      </p:nvGrpSpPr>
+      <p:grpSpPr>
+        <a:xfrm>
+          <a:off x="0" y="0"/>
+          <a:ext cx="0" cy="0"/>
+          <a:chOff x="0" y="0"/>
+          <a:chExt cx="0" cy="0"/>
+        </a:xfrm>
+      </p:grpSpPr>
+      <p:sp>
+        <p:nvSpPr>
+          <p:cNvPr id="2" name="Slide Image Placeholder 1"/>
+          <p:cNvSpPr>
+            <a:spLocks noGrp="1" noRot="1" noChangeAspect="1"/>
+          </p:cNvSpPr>
+          <p:nvPr>
+            <p:ph type="sldImg"/>
+          </p:nvPr>
+        </p:nvSpPr>
+        <p:spPr/>
+      </p:sp>
+      <p:sp>
+        <p:nvSpPr>
+          <p:cNvPr id="3" name="Notes Placeholder 2"/>
+          <p:cNvSpPr>
+            <a:spLocks noGrp="1"/>
+          </p:cNvSpPr>
+          <p:nvPr>
+            <p:ph type="body" idx="1"/>
+          </p:nvPr>
+        </p:nvSpPr>
+        <p:spPr/>
+        <p:txBody>
+          <a:bodyPr/>
+          <a:lstStyle/>
+          <a:p>
+            <a:r>
+              <a:rPr lang="en-US" dirty="0"/>
+              <a:t/>
+            </a:r>
+            <a:endParaRPr lang="en-US" dirty="0"/>
+          </a:p>
+        </p:txBody>
+      </p:sp>
+      <p:sp>
+        <p:nvSpPr>
+          <p:cNvPr id="4" name="Slide Number Placeholder 3"/>
+          <p:cNvSpPr>
+            <a:spLocks noGrp="1"/>
+          </p:cNvSpPr>
+          <p:nvPr>
+            <p:ph type="sldNum" sz="quarter" idx="10"/>
+          </p:nvPr>
+        </p:nvSpPr>
+        <p:spPr/>
+        <p:txBody>
+          <a:bodyPr/>
+          <a:lstStyle/>
+          <a:p>
+            <a:fld id="{F7021451-1387-4CA6-816F-3879F97B5CBC}" type="slidenum">
+              <a:rPr lang="en-US"/>
+              <a:t>53</a:t>
+            </a:fld>
+            <a:endParaRPr lang="en-US"/>
+          </a:p>
+        </p:txBody>
+      </p:sp>
+    </p:spTree>
+    <p:extLst>
+      <p:ext uri="{BB962C8B-B14F-4D97-AF65-F5344CB8AC3E}">
+        <p14:creationId xmlns:p14="http://schemas.microsoft.com/office/powerpoint/2010/main" val="1024086991"/>
+      </p:ext>
+    </p:extLst>
+  </p:cSld>
+  <p:clrMapOvr>
+    <a:masterClrMapping/>
+  </p:clrMapOvr>
+</p:notes>
+</file>
+
+<file path=ppt/notesSlides/notesSlide54.xml><?xml version="1.0" encoding="utf-8"?>
+<p:notes xmlns:a="http://schemas.openxmlformats.org/drawingml/2006/main" xmlns:r="http://schemas.openxmlformats.org/officeDocument/2006/relationships" xmlns:p="http://schemas.openxmlformats.org/presentationml/2006/main">
+  <p:cSld>
+    <p:spTree>
+      <p:nvGrpSpPr>
+        <p:cNvPr id="1" name=""/>
+        <p:cNvGrpSpPr/>
+        <p:nvPr/>
+      </p:nvGrpSpPr>
+      <p:grpSpPr>
+        <a:xfrm>
+          <a:off x="0" y="0"/>
+          <a:ext cx="0" cy="0"/>
+          <a:chOff x="0" y="0"/>
+          <a:chExt cx="0" cy="0"/>
+        </a:xfrm>
+      </p:grpSpPr>
+      <p:sp>
+        <p:nvSpPr>
+          <p:cNvPr id="2" name="Slide Image Placeholder 1"/>
+          <p:cNvSpPr>
+            <a:spLocks noGrp="1" noRot="1" noChangeAspect="1"/>
+          </p:cNvSpPr>
+          <p:nvPr>
+            <p:ph type="sldImg"/>
+          </p:nvPr>
+        </p:nvSpPr>
+        <p:spPr/>
+      </p:sp>
+      <p:sp>
+        <p:nvSpPr>
+          <p:cNvPr id="3" name="Notes Placeholder 2"/>
+          <p:cNvSpPr>
+            <a:spLocks noGrp="1"/>
+          </p:cNvSpPr>
+          <p:nvPr>
+            <p:ph type="body" idx="1"/>
+          </p:nvPr>
+        </p:nvSpPr>
+        <p:spPr/>
+        <p:txBody>
+          <a:bodyPr/>
+          <a:lstStyle/>
+          <a:p>
+            <a:r>
+              <a:rPr lang="en-US" dirty="0"/>
+              <a:t/>
+            </a:r>
+            <a:endParaRPr lang="en-US" dirty="0"/>
+          </a:p>
+        </p:txBody>
+      </p:sp>
+      <p:sp>
+        <p:nvSpPr>
+          <p:cNvPr id="4" name="Slide Number Placeholder 3"/>
+          <p:cNvSpPr>
+            <a:spLocks noGrp="1"/>
+          </p:cNvSpPr>
+          <p:nvPr>
+            <p:ph type="sldNum" sz="quarter" idx="10"/>
+          </p:nvPr>
+        </p:nvSpPr>
+        <p:spPr/>
+        <p:txBody>
+          <a:bodyPr/>
+          <a:lstStyle/>
+          <a:p>
+            <a:fld id="{F7021451-1387-4CA6-816F-3879F97B5CBC}" type="slidenum">
+              <a:rPr lang="en-US"/>
+              <a:t>54</a:t>
+            </a:fld>
+            <a:endParaRPr lang="en-US"/>
+          </a:p>
+        </p:txBody>
+      </p:sp>
+    </p:spTree>
+    <p:extLst>
+      <p:ext uri="{BB962C8B-B14F-4D97-AF65-F5344CB8AC3E}">
+        <p14:creationId xmlns:p14="http://schemas.microsoft.com/office/powerpoint/2010/main" val="1024086991"/>
+      </p:ext>
+    </p:extLst>
+  </p:cSld>
+  <p:clrMapOvr>
+    <a:masterClrMapping/>
+  </p:clrMapOvr>
+</p:notes>
+</file>
+
+<file path=ppt/notesSlides/notesSlide55.xml><?xml version="1.0" encoding="utf-8"?>
+<p:notes xmlns:a="http://schemas.openxmlformats.org/drawingml/2006/main" xmlns:r="http://schemas.openxmlformats.org/officeDocument/2006/relationships" xmlns:p="http://schemas.openxmlformats.org/presentationml/2006/main">
+  <p:cSld>
+    <p:spTree>
+      <p:nvGrpSpPr>
+        <p:cNvPr id="1" name=""/>
+        <p:cNvGrpSpPr/>
+        <p:nvPr/>
+      </p:nvGrpSpPr>
+      <p:grpSpPr>
+        <a:xfrm>
+          <a:off x="0" y="0"/>
+          <a:ext cx="0" cy="0"/>
+          <a:chOff x="0" y="0"/>
+          <a:chExt cx="0" cy="0"/>
+        </a:xfrm>
+      </p:grpSpPr>
+      <p:sp>
+        <p:nvSpPr>
+          <p:cNvPr id="2" name="Slide Image Placeholder 1"/>
+          <p:cNvSpPr>
+            <a:spLocks noGrp="1" noRot="1" noChangeAspect="1"/>
+          </p:cNvSpPr>
+          <p:nvPr>
+            <p:ph type="sldImg"/>
+          </p:nvPr>
+        </p:nvSpPr>
+        <p:spPr/>
+      </p:sp>
+      <p:sp>
+        <p:nvSpPr>
+          <p:cNvPr id="3" name="Notes Placeholder 2"/>
+          <p:cNvSpPr>
+            <a:spLocks noGrp="1"/>
+          </p:cNvSpPr>
+          <p:nvPr>
+            <p:ph type="body" idx="1"/>
+          </p:nvPr>
+        </p:nvSpPr>
+        <p:spPr/>
+        <p:txBody>
+          <a:bodyPr/>
+          <a:lstStyle/>
+          <a:p>
+            <a:r>
+              <a:rPr lang="en-US" dirty="0"/>
+              <a:t/>
+            </a:r>
+            <a:endParaRPr lang="en-US" dirty="0"/>
+          </a:p>
+        </p:txBody>
+      </p:sp>
+      <p:sp>
+        <p:nvSpPr>
+          <p:cNvPr id="4" name="Slide Number Placeholder 3"/>
+          <p:cNvSpPr>
+            <a:spLocks noGrp="1"/>
+          </p:cNvSpPr>
+          <p:nvPr>
+            <p:ph type="sldNum" sz="quarter" idx="10"/>
+          </p:nvPr>
+        </p:nvSpPr>
+        <p:spPr/>
+        <p:txBody>
+          <a:bodyPr/>
+          <a:lstStyle/>
+          <a:p>
+            <a:fld id="{F7021451-1387-4CA6-816F-3879F97B5CBC}" type="slidenum">
+              <a:rPr lang="en-US"/>
+              <a:t>55</a:t>
+            </a:fld>
+            <a:endParaRPr lang="en-US"/>
+          </a:p>
+        </p:txBody>
+      </p:sp>
+    </p:spTree>
+    <p:extLst>
+      <p:ext uri="{BB962C8B-B14F-4D97-AF65-F5344CB8AC3E}">
+        <p14:creationId xmlns:p14="http://schemas.microsoft.com/office/powerpoint/2010/main" val="1024086991"/>
+      </p:ext>
+    </p:extLst>
+  </p:cSld>
+  <p:clrMapOvr>
+    <a:masterClrMapping/>
+  </p:clrMapOvr>
+</p:notes>
+</file>
+
+<file path=ppt/notesSlides/notesSlide56.xml><?xml version="1.0" encoding="utf-8"?>
+<p:notes xmlns:a="http://schemas.openxmlformats.org/drawingml/2006/main" xmlns:r="http://schemas.openxmlformats.org/officeDocument/2006/relationships" xmlns:p="http://schemas.openxmlformats.org/presentationml/2006/main">
+  <p:cSld>
+    <p:spTree>
+      <p:nvGrpSpPr>
+        <p:cNvPr id="1" name=""/>
+        <p:cNvGrpSpPr/>
+        <p:nvPr/>
+      </p:nvGrpSpPr>
+      <p:grpSpPr>
+        <a:xfrm>
+          <a:off x="0" y="0"/>
+          <a:ext cx="0" cy="0"/>
+          <a:chOff x="0" y="0"/>
+          <a:chExt cx="0" cy="0"/>
+        </a:xfrm>
+      </p:grpSpPr>
+      <p:sp>
+        <p:nvSpPr>
+          <p:cNvPr id="2" name="Slide Image Placeholder 1"/>
+          <p:cNvSpPr>
+            <a:spLocks noGrp="1" noRot="1" noChangeAspect="1"/>
+          </p:cNvSpPr>
+          <p:nvPr>
+            <p:ph type="sldImg"/>
+          </p:nvPr>
+        </p:nvSpPr>
+        <p:spPr/>
+      </p:sp>
+      <p:sp>
+        <p:nvSpPr>
+          <p:cNvPr id="3" name="Notes Placeholder 2"/>
+          <p:cNvSpPr>
+            <a:spLocks noGrp="1"/>
+          </p:cNvSpPr>
+          <p:nvPr>
+            <p:ph type="body" idx="1"/>
+          </p:nvPr>
+        </p:nvSpPr>
+        <p:spPr/>
+        <p:txBody>
+          <a:bodyPr/>
+          <a:lstStyle/>
+          <a:p>
+            <a:r>
+              <a:rPr lang="en-US" dirty="0"/>
+              <a:t/>
+            </a:r>
+            <a:endParaRPr lang="en-US" dirty="0"/>
+          </a:p>
+        </p:txBody>
+      </p:sp>
+      <p:sp>
+        <p:nvSpPr>
+          <p:cNvPr id="4" name="Slide Number Placeholder 3"/>
+          <p:cNvSpPr>
+            <a:spLocks noGrp="1"/>
+          </p:cNvSpPr>
+          <p:nvPr>
+            <p:ph type="sldNum" sz="quarter" idx="10"/>
+          </p:nvPr>
+        </p:nvSpPr>
+        <p:spPr/>
+        <p:txBody>
+          <a:bodyPr/>
+          <a:lstStyle/>
+          <a:p>
+            <a:fld id="{F7021451-1387-4CA6-816F-3879F97B5CBC}" type="slidenum">
+              <a:rPr lang="en-US"/>
+              <a:t>56</a:t>
+            </a:fld>
+            <a:endParaRPr lang="en-US"/>
+          </a:p>
+        </p:txBody>
+      </p:sp>
+    </p:spTree>
+    <p:extLst>
+      <p:ext uri="{BB962C8B-B14F-4D97-AF65-F5344CB8AC3E}">
+        <p14:creationId xmlns:p14="http://schemas.microsoft.com/office/powerpoint/2010/main" val="1024086991"/>
+      </p:ext>
+    </p:extLst>
+  </p:cSld>
+  <p:clrMapOvr>
+    <a:masterClrMapping/>
+  </p:clrMapOvr>
+</p:notes>
+</file>
+
+<file path=ppt/notesSlides/notesSlide57.xml><?xml version="1.0" encoding="utf-8"?>
+<p:notes xmlns:a="http://schemas.openxmlformats.org/drawingml/2006/main" xmlns:r="http://schemas.openxmlformats.org/officeDocument/2006/relationships" xmlns:p="http://schemas.openxmlformats.org/presentationml/2006/main">
+  <p:cSld>
+    <p:spTree>
+      <p:nvGrpSpPr>
+        <p:cNvPr id="1" name=""/>
+        <p:cNvGrpSpPr/>
+        <p:nvPr/>
+      </p:nvGrpSpPr>
+      <p:grpSpPr>
+        <a:xfrm>
+          <a:off x="0" y="0"/>
+          <a:ext cx="0" cy="0"/>
+          <a:chOff x="0" y="0"/>
+          <a:chExt cx="0" cy="0"/>
+        </a:xfrm>
+      </p:grpSpPr>
+      <p:sp>
+        <p:nvSpPr>
+          <p:cNvPr id="2" name="Slide Image Placeholder 1"/>
+          <p:cNvSpPr>
+            <a:spLocks noGrp="1" noRot="1" noChangeAspect="1"/>
+          </p:cNvSpPr>
+          <p:nvPr>
+            <p:ph type="sldImg"/>
+          </p:nvPr>
+        </p:nvSpPr>
+        <p:spPr/>
+      </p:sp>
+      <p:sp>
+        <p:nvSpPr>
+          <p:cNvPr id="3" name="Notes Placeholder 2"/>
+          <p:cNvSpPr>
+            <a:spLocks noGrp="1"/>
+          </p:cNvSpPr>
+          <p:nvPr>
+            <p:ph type="body" idx="1"/>
+          </p:nvPr>
+        </p:nvSpPr>
+        <p:spPr/>
+        <p:txBody>
+          <a:bodyPr/>
+          <a:lstStyle/>
+          <a:p>
+            <a:r>
+              <a:rPr lang="en-US" dirty="0"/>
+              <a:t/>
+            </a:r>
+            <a:endParaRPr lang="en-US" dirty="0"/>
+          </a:p>
+        </p:txBody>
+      </p:sp>
+      <p:sp>
+        <p:nvSpPr>
+          <p:cNvPr id="4" name="Slide Number Placeholder 3"/>
+          <p:cNvSpPr>
+            <a:spLocks noGrp="1"/>
+          </p:cNvSpPr>
+          <p:nvPr>
+            <p:ph type="sldNum" sz="quarter" idx="10"/>
+          </p:nvPr>
+        </p:nvSpPr>
+        <p:spPr/>
+        <p:txBody>
+          <a:bodyPr/>
+          <a:lstStyle/>
+          <a:p>
+            <a:fld id="{F7021451-1387-4CA6-816F-3879F97B5CBC}" type="slidenum">
+              <a:rPr lang="en-US"/>
+              <a:t>57</a:t>
+            </a:fld>
+            <a:endParaRPr lang="en-US"/>
+          </a:p>
+        </p:txBody>
+      </p:sp>
+    </p:spTree>
+    <p:extLst>
+      <p:ext uri="{BB962C8B-B14F-4D97-AF65-F5344CB8AC3E}">
+        <p14:creationId xmlns:p14="http://schemas.microsoft.com/office/powerpoint/2010/main" val="1024086991"/>
+      </p:ext>
+    </p:extLst>
+  </p:cSld>
+  <p:clrMapOvr>
+    <a:masterClrMapping/>
+  </p:clrMapOvr>
+</p:notes>
+</file>
+
+<file path=ppt/notesSlides/notesSlide58.xml><?xml version="1.0" encoding="utf-8"?>
+<p:notes xmlns:a="http://schemas.openxmlformats.org/drawingml/2006/main" xmlns:r="http://schemas.openxmlformats.org/officeDocument/2006/relationships" xmlns:p="http://schemas.openxmlformats.org/presentationml/2006/main">
+  <p:cSld>
+    <p:spTree>
+      <p:nvGrpSpPr>
+        <p:cNvPr id="1" name=""/>
+        <p:cNvGrpSpPr/>
+        <p:nvPr/>
+      </p:nvGrpSpPr>
+      <p:grpSpPr>
+        <a:xfrm>
+          <a:off x="0" y="0"/>
+          <a:ext cx="0" cy="0"/>
+          <a:chOff x="0" y="0"/>
+          <a:chExt cx="0" cy="0"/>
+        </a:xfrm>
+      </p:grpSpPr>
+      <p:sp>
+        <p:nvSpPr>
+          <p:cNvPr id="2" name="Slide Image Placeholder 1"/>
+          <p:cNvSpPr>
+            <a:spLocks noGrp="1" noRot="1" noChangeAspect="1"/>
+          </p:cNvSpPr>
+          <p:nvPr>
+            <p:ph type="sldImg"/>
+          </p:nvPr>
+        </p:nvSpPr>
+        <p:spPr/>
+      </p:sp>
+      <p:sp>
+        <p:nvSpPr>
+          <p:cNvPr id="3" name="Notes Placeholder 2"/>
+          <p:cNvSpPr>
+            <a:spLocks noGrp="1"/>
+          </p:cNvSpPr>
+          <p:nvPr>
+            <p:ph type="body" idx="1"/>
+          </p:nvPr>
+        </p:nvSpPr>
+        <p:spPr/>
+        <p:txBody>
+          <a:bodyPr/>
+          <a:lstStyle/>
+          <a:p>
+            <a:r>
+              <a:rPr lang="en-US" dirty="0"/>
+              <a:t/>
+            </a:r>
+            <a:endParaRPr lang="en-US" dirty="0"/>
+          </a:p>
+        </p:txBody>
+      </p:sp>
+      <p:sp>
+        <p:nvSpPr>
+          <p:cNvPr id="4" name="Slide Number Placeholder 3"/>
+          <p:cNvSpPr>
+            <a:spLocks noGrp="1"/>
+          </p:cNvSpPr>
+          <p:nvPr>
+            <p:ph type="sldNum" sz="quarter" idx="10"/>
+          </p:nvPr>
+        </p:nvSpPr>
+        <p:spPr/>
+        <p:txBody>
+          <a:bodyPr/>
+          <a:lstStyle/>
+          <a:p>
+            <a:fld id="{F7021451-1387-4CA6-816F-3879F97B5CBC}" type="slidenum">
+              <a:rPr lang="en-US"/>
+              <a:t>58</a:t>
             </a:fld>
             <a:endParaRPr lang="en-US"/>
           </a:p>
@@ -25785,6 +26586,5174 @@
 </p:sld>
 </file>
 
+<file path=ppt/slides/slide50.xml><?xml version="1.0" encoding="utf-8"?>
+<p:sld xmlns:a="http://schemas.openxmlformats.org/drawingml/2006/main" xmlns:r="http://schemas.openxmlformats.org/officeDocument/2006/relationships" xmlns:p="http://schemas.openxmlformats.org/presentationml/2006/main">
+  <p:cSld name="Slide 50">
+    <p:bg>
+      <p:bgPr>
+        <a:solidFill>
+          <a:srgbClr val="FFFFFF"/>
+        </a:solidFill>
+      </p:bgPr>
+    </p:bg>
+    <p:spTree>
+      <p:nvGrpSpPr>
+        <p:cNvPr id="1" name=""/>
+        <p:cNvGrpSpPr/>
+        <p:nvPr/>
+      </p:nvGrpSpPr>
+      <p:grpSpPr>
+        <a:xfrm>
+          <a:off x="0" y="0"/>
+          <a:ext cx="0" cy="0"/>
+          <a:chOff x="0" y="0"/>
+          <a:chExt cx="0" cy="0"/>
+        </a:xfrm>
+      </p:grpSpPr>
+      <p:sp>
+        <p:nvSpPr>
+          <p:cNvPr id="2" name="Text 0"/>
+          <p:cNvSpPr txBox="1"/>
+          <p:nvPr/>
+        </p:nvSpPr>
+        <p:spPr>
+          <a:xfrm>
+            <a:off x="457200" y="237744"/>
+            <a:ext cx="6400800" cy="274320"/>
+          </a:xfrm>
+          <a:prstGeom prst="rect">
+            <a:avLst/>
+          </a:prstGeom>
+          <a:noFill/>
+          <a:ln/>
+        </p:spPr>
+        <p:txBody>
+          <a:bodyPr wrap="square" lIns="0" tIns="0" rIns="0" bIns="0" rtlCol="0" anchor="ctr"/>
+          <a:lstStyle/>
+          <a:p>
+            <a:pPr indent="0" marL="0">
+              <a:buNone/>
+            </a:pPr>
+            <a:r>
+              <a:rPr lang="en-US" sz="1200" b="1" spc="200" kern="0" dirty="0">
+                <a:solidFill>
+                  <a:srgbClr val="7A1524"/>
+                </a:solidFill>
+                <a:latin typeface="Yu Gothic" pitchFamily="34" charset="0"/>
+                <a:ea typeface="Yu Gothic" pitchFamily="34" charset="-122"/>
+                <a:cs typeface="Yu Gothic" pitchFamily="34" charset="-120"/>
+              </a:rPr>
+              <a:t>今日の続き</a:t>
+            </a:r>
+            <a:endParaRPr lang="en-US" sz="1200" dirty="0"/>
+          </a:p>
+        </p:txBody>
+      </p:sp>
+      <p:sp>
+        <p:nvSpPr>
+          <p:cNvPr id="3" name="Text 1"/>
+          <p:cNvSpPr txBox="1"/>
+          <p:nvPr/>
+        </p:nvSpPr>
+        <p:spPr>
+          <a:xfrm>
+            <a:off x="8138160" y="4832604"/>
+            <a:ext cx="548640" cy="256032"/>
+          </a:xfrm>
+          <a:prstGeom prst="rect">
+            <a:avLst/>
+          </a:prstGeom>
+          <a:noFill/>
+          <a:ln/>
+        </p:spPr>
+        <p:txBody>
+          <a:bodyPr wrap="square" lIns="0" tIns="0" rIns="0" bIns="0" rtlCol="0" anchor="ctr"/>
+          <a:lstStyle/>
+          <a:p>
+            <a:pPr algn="r" indent="0" marL="0">
+              <a:buNone/>
+            </a:pPr>
+            <a:r>
+              <a:rPr lang="en-US" sz="1100" dirty="0">
+                <a:solidFill>
+                  <a:srgbClr val="6B6360"/>
+                </a:solidFill>
+                <a:latin typeface="Yu Gothic" pitchFamily="34" charset="0"/>
+                <a:ea typeface="Yu Gothic" pitchFamily="34" charset="-122"/>
+                <a:cs typeface="Yu Gothic" pitchFamily="34" charset="-120"/>
+              </a:rPr>
+              <a:t>50</a:t>
+            </a:r>
+            <a:endParaRPr lang="en-US" sz="1100" dirty="0"/>
+          </a:p>
+        </p:txBody>
+      </p:sp>
+      <p:sp>
+        <p:nvSpPr>
+          <p:cNvPr id="4" name="Text 2"/>
+          <p:cNvSpPr txBox="1"/>
+          <p:nvPr/>
+        </p:nvSpPr>
+        <p:spPr>
+          <a:xfrm>
+            <a:off x="457200" y="777240"/>
+            <a:ext cx="8229600" cy="1188720"/>
+          </a:xfrm>
+          <a:prstGeom prst="rect">
+            <a:avLst/>
+          </a:prstGeom>
+          <a:noFill/>
+          <a:ln/>
+        </p:spPr>
+        <p:txBody>
+          <a:bodyPr wrap="square" lIns="0" tIns="0" rIns="0" bIns="0" rtlCol="0" anchor="t"/>
+          <a:lstStyle/>
+          <a:p>
+            <a:pPr algn="l" indent="0" marL="0">
+              <a:lnSpc>
+                <a:spcPts val="4640"/>
+              </a:lnSpc>
+              <a:buNone/>
+            </a:pPr>
+            <a:r>
+              <a:rPr lang="en-US" sz="3200" b="1" dirty="0">
+                <a:solidFill>
+                  <a:srgbClr val="141416"/>
+                </a:solidFill>
+                <a:latin typeface="Yu Mincho" pitchFamily="34" charset="0"/>
+                <a:ea typeface="Yu Mincho" pitchFamily="34" charset="-122"/>
+                <a:cs typeface="Yu Mincho" pitchFamily="34" charset="-120"/>
+              </a:rPr>
+              <a:t>今日の続きは、一人でもできます</a:t>
+            </a:r>
+            <a:endParaRPr lang="en-US" sz="3200" dirty="0"/>
+          </a:p>
+        </p:txBody>
+      </p:sp>
+      <p:sp>
+        <p:nvSpPr>
+          <p:cNvPr id="5" name="Text 3"/>
+          <p:cNvSpPr txBox="1"/>
+          <p:nvPr/>
+        </p:nvSpPr>
+        <p:spPr>
+          <a:xfrm>
+            <a:off x="457200" y="1737360"/>
+            <a:ext cx="8229600" cy="1005840"/>
+          </a:xfrm>
+          <a:prstGeom prst="rect">
+            <a:avLst/>
+          </a:prstGeom>
+          <a:noFill/>
+          <a:ln/>
+        </p:spPr>
+        <p:txBody>
+          <a:bodyPr wrap="square" lIns="0" tIns="0" rIns="0" bIns="0" rtlCol="0" anchor="ctr"/>
+          <a:lstStyle/>
+          <a:p>
+            <a:pPr indent="0" marL="0">
+              <a:lnSpc>
+                <a:spcPts val="3200"/>
+              </a:lnSpc>
+              <a:buNone/>
+            </a:pPr>
+            <a:r>
+              <a:rPr lang="en-US" sz="1900" dirty="0">
+                <a:solidFill>
+                  <a:srgbClr val="3B3634"/>
+                </a:solidFill>
+                <a:latin typeface="Yu Gothic" pitchFamily="34" charset="0"/>
+                <a:ea typeface="Yu Gothic" pitchFamily="34" charset="-122"/>
+                <a:cs typeface="Yu Gothic" pitchFamily="34" charset="-120"/>
+              </a:rPr>
+              <a:t>今日やったことは、今日だけで終わりません。</a:t>
+            </a:r>
+            <a:endParaRPr lang="en-US" sz="1900" dirty="0"/>
+          </a:p>
+          <a:p>
+            <a:pPr indent="0" marL="0">
+              <a:lnSpc>
+                <a:spcPts val="3200"/>
+              </a:lnSpc>
+              <a:buNone/>
+            </a:pPr>
+            <a:r>
+              <a:rPr lang="en-US" sz="1900" dirty="0">
+                <a:solidFill>
+                  <a:srgbClr val="3B3634"/>
+                </a:solidFill>
+                <a:latin typeface="Yu Gothic" pitchFamily="34" charset="0"/>
+                <a:ea typeface="Yu Gothic" pitchFamily="34" charset="-122"/>
+                <a:cs typeface="Yu Gothic" pitchFamily="34" charset="-120"/>
+              </a:rPr>
+              <a:t>持ち帰って続けられるように、2つのシートをお渡しします。</a:t>
+            </a:r>
+            <a:endParaRPr lang="en-US" sz="1900" dirty="0"/>
+          </a:p>
+        </p:txBody>
+      </p:sp>
+      <p:sp>
+        <p:nvSpPr>
+          <p:cNvPr id="6" name="Shape 4"/>
+          <p:cNvSpPr/>
+          <p:nvPr/>
+        </p:nvSpPr>
+        <p:spPr>
+          <a:xfrm>
+            <a:off x="457200" y="2880360"/>
+            <a:ext cx="8229600" cy="731520"/>
+          </a:xfrm>
+          <a:prstGeom prst="roundRect">
+            <a:avLst>
+              <a:gd name="adj" fmla="val 8750"/>
+            </a:avLst>
+          </a:prstGeom>
+          <a:solidFill>
+            <a:srgbClr val="7A1524"/>
+          </a:solidFill>
+          <a:ln w="12700">
+            <a:solidFill>
+              <a:srgbClr val="7A1524"/>
+            </a:solidFill>
+            <a:prstDash val="solid"/>
+          </a:ln>
+        </p:spPr>
+      </p:sp>
+      <p:sp>
+        <p:nvSpPr>
+          <p:cNvPr id="7" name="Text 5"/>
+          <p:cNvSpPr txBox="1"/>
+          <p:nvPr/>
+        </p:nvSpPr>
+        <p:spPr>
+          <a:xfrm>
+            <a:off x="822960" y="2880360"/>
+            <a:ext cx="1371600" cy="731520"/>
+          </a:xfrm>
+          <a:prstGeom prst="rect">
+            <a:avLst/>
+          </a:prstGeom>
+          <a:noFill/>
+          <a:ln/>
+        </p:spPr>
+        <p:txBody>
+          <a:bodyPr wrap="square" lIns="0" tIns="0" rIns="0" bIns="0" rtlCol="0" anchor="ctr"/>
+          <a:lstStyle/>
+          <a:p>
+            <a:pPr indent="0" marL="0">
+              <a:buNone/>
+            </a:pPr>
+            <a:r>
+              <a:rPr lang="en-US" sz="1400" b="1" spc="200" kern="0" dirty="0">
+                <a:solidFill>
+                  <a:srgbClr val="F0B9C3"/>
+                </a:solidFill>
+                <a:latin typeface="Yu Gothic" pitchFamily="34" charset="0"/>
+                <a:ea typeface="Yu Gothic" pitchFamily="34" charset="-122"/>
+                <a:cs typeface="Yu Gothic" pitchFamily="34" charset="-120"/>
+              </a:rPr>
+              <a:t>特典 01</a:t>
+            </a:r>
+            <a:endParaRPr lang="en-US" sz="1400" dirty="0"/>
+          </a:p>
+        </p:txBody>
+      </p:sp>
+      <p:sp>
+        <p:nvSpPr>
+          <p:cNvPr id="8" name="Text 6"/>
+          <p:cNvSpPr txBox="1"/>
+          <p:nvPr/>
+        </p:nvSpPr>
+        <p:spPr>
+          <a:xfrm>
+            <a:off x="2286000" y="2880360"/>
+            <a:ext cx="6126480" cy="731520"/>
+          </a:xfrm>
+          <a:prstGeom prst="rect">
+            <a:avLst/>
+          </a:prstGeom>
+          <a:noFill/>
+          <a:ln/>
+        </p:spPr>
+        <p:txBody>
+          <a:bodyPr wrap="square" lIns="0" tIns="0" rIns="0" bIns="0" rtlCol="0" anchor="ctr"/>
+          <a:lstStyle/>
+          <a:p>
+            <a:pPr indent="0" marL="0">
+              <a:buNone/>
+            </a:pPr>
+            <a:r>
+              <a:rPr lang="en-US" sz="1900" b="1" dirty="0">
+                <a:solidFill>
+                  <a:srgbClr val="FFFFFF"/>
+                </a:solidFill>
+                <a:latin typeface="Yu Mincho" pitchFamily="34" charset="0"/>
+                <a:ea typeface="Yu Mincho" pitchFamily="34" charset="-122"/>
+                <a:cs typeface="Yu Mincho" pitchFamily="34" charset="-120"/>
+              </a:rPr>
+              <a:t>できたのかけら 見つけるワークシート</a:t>
+            </a:r>
+            <a:endParaRPr lang="en-US" sz="1900" dirty="0"/>
+          </a:p>
+        </p:txBody>
+      </p:sp>
+      <p:sp>
+        <p:nvSpPr>
+          <p:cNvPr id="9" name="Shape 7"/>
+          <p:cNvSpPr/>
+          <p:nvPr/>
+        </p:nvSpPr>
+        <p:spPr>
+          <a:xfrm>
+            <a:off x="457200" y="3721608"/>
+            <a:ext cx="8229600" cy="731520"/>
+          </a:xfrm>
+          <a:prstGeom prst="roundRect">
+            <a:avLst>
+              <a:gd name="adj" fmla="val 8750"/>
+            </a:avLst>
+          </a:prstGeom>
+          <a:solidFill>
+            <a:srgbClr val="540E19"/>
+          </a:solidFill>
+          <a:ln w="12700">
+            <a:solidFill>
+              <a:srgbClr val="540E19"/>
+            </a:solidFill>
+            <a:prstDash val="solid"/>
+          </a:ln>
+        </p:spPr>
+      </p:sp>
+      <p:sp>
+        <p:nvSpPr>
+          <p:cNvPr id="10" name="Text 8"/>
+          <p:cNvSpPr txBox="1"/>
+          <p:nvPr/>
+        </p:nvSpPr>
+        <p:spPr>
+          <a:xfrm>
+            <a:off x="822960" y="3721608"/>
+            <a:ext cx="1371600" cy="731520"/>
+          </a:xfrm>
+          <a:prstGeom prst="rect">
+            <a:avLst/>
+          </a:prstGeom>
+          <a:noFill/>
+          <a:ln/>
+        </p:spPr>
+        <p:txBody>
+          <a:bodyPr wrap="square" lIns="0" tIns="0" rIns="0" bIns="0" rtlCol="0" anchor="ctr"/>
+          <a:lstStyle/>
+          <a:p>
+            <a:pPr indent="0" marL="0">
+              <a:buNone/>
+            </a:pPr>
+            <a:r>
+              <a:rPr lang="en-US" sz="1400" b="1" spc="200" kern="0" dirty="0">
+                <a:solidFill>
+                  <a:srgbClr val="F0B9C3"/>
+                </a:solidFill>
+                <a:latin typeface="Yu Gothic" pitchFamily="34" charset="0"/>
+                <a:ea typeface="Yu Gothic" pitchFamily="34" charset="-122"/>
+                <a:cs typeface="Yu Gothic" pitchFamily="34" charset="-120"/>
+              </a:rPr>
+              <a:t>特典 02</a:t>
+            </a:r>
+            <a:endParaRPr lang="en-US" sz="1400" dirty="0"/>
+          </a:p>
+        </p:txBody>
+      </p:sp>
+      <p:sp>
+        <p:nvSpPr>
+          <p:cNvPr id="11" name="Text 9"/>
+          <p:cNvSpPr txBox="1"/>
+          <p:nvPr/>
+        </p:nvSpPr>
+        <p:spPr>
+          <a:xfrm>
+            <a:off x="2286000" y="3721608"/>
+            <a:ext cx="6126480" cy="731520"/>
+          </a:xfrm>
+          <a:prstGeom prst="rect">
+            <a:avLst/>
+          </a:prstGeom>
+          <a:noFill/>
+          <a:ln/>
+        </p:spPr>
+        <p:txBody>
+          <a:bodyPr wrap="square" lIns="0" tIns="0" rIns="0" bIns="0" rtlCol="0" anchor="ctr"/>
+          <a:lstStyle/>
+          <a:p>
+            <a:pPr indent="0" marL="0">
+              <a:buNone/>
+            </a:pPr>
+            <a:r>
+              <a:rPr lang="en-US" sz="1900" b="1" dirty="0">
+                <a:solidFill>
+                  <a:srgbClr val="FFFFFF"/>
+                </a:solidFill>
+                <a:latin typeface="Yu Mincho" pitchFamily="34" charset="0"/>
+                <a:ea typeface="Yu Mincho" pitchFamily="34" charset="-122"/>
+                <a:cs typeface="Yu Mincho" pitchFamily="34" charset="-120"/>
+              </a:rPr>
+              <a:t>「できた」を結果につなげるチェックシート</a:t>
+            </a:r>
+            <a:endParaRPr lang="en-US" sz="1900" dirty="0"/>
+          </a:p>
+        </p:txBody>
+      </p:sp>
+    </p:spTree>
+  </p:cSld>
+  <p:clrMapOvr>
+    <a:masterClrMapping/>
+  </p:clrMapOvr>
+</p:sld>
+</file>
+
+<file path=ppt/slides/slide51.xml><?xml version="1.0" encoding="utf-8"?>
+<p:sld xmlns:a="http://schemas.openxmlformats.org/drawingml/2006/main" xmlns:r="http://schemas.openxmlformats.org/officeDocument/2006/relationships" xmlns:p="http://schemas.openxmlformats.org/presentationml/2006/main">
+  <p:cSld name="Slide 51">
+    <p:bg>
+      <p:bgPr>
+        <a:solidFill>
+          <a:srgbClr val="FFFFFF"/>
+        </a:solidFill>
+      </p:bgPr>
+    </p:bg>
+    <p:spTree>
+      <p:nvGrpSpPr>
+        <p:cNvPr id="1" name=""/>
+        <p:cNvGrpSpPr/>
+        <p:nvPr/>
+      </p:nvGrpSpPr>
+      <p:grpSpPr>
+        <a:xfrm>
+          <a:off x="0" y="0"/>
+          <a:ext cx="0" cy="0"/>
+          <a:chOff x="0" y="0"/>
+          <a:chExt cx="0" cy="0"/>
+        </a:xfrm>
+      </p:grpSpPr>
+      <p:sp>
+        <p:nvSpPr>
+          <p:cNvPr id="2" name="Text 0"/>
+          <p:cNvSpPr txBox="1"/>
+          <p:nvPr/>
+        </p:nvSpPr>
+        <p:spPr>
+          <a:xfrm>
+            <a:off x="457200" y="237744"/>
+            <a:ext cx="6400800" cy="274320"/>
+          </a:xfrm>
+          <a:prstGeom prst="rect">
+            <a:avLst/>
+          </a:prstGeom>
+          <a:noFill/>
+          <a:ln/>
+        </p:spPr>
+        <p:txBody>
+          <a:bodyPr wrap="square" lIns="0" tIns="0" rIns="0" bIns="0" rtlCol="0" anchor="ctr"/>
+          <a:lstStyle/>
+          <a:p>
+            <a:pPr indent="0" marL="0">
+              <a:buNone/>
+            </a:pPr>
+            <a:r>
+              <a:rPr lang="en-US" sz="1200" b="1" spc="200" kern="0" dirty="0">
+                <a:solidFill>
+                  <a:srgbClr val="7A1524"/>
+                </a:solidFill>
+                <a:latin typeface="Yu Gothic" pitchFamily="34" charset="0"/>
+                <a:ea typeface="Yu Gothic" pitchFamily="34" charset="-122"/>
+                <a:cs typeface="Yu Gothic" pitchFamily="34" charset="-120"/>
+              </a:rPr>
+              <a:t>今日の続き</a:t>
+            </a:r>
+            <a:endParaRPr lang="en-US" sz="1200" dirty="0"/>
+          </a:p>
+        </p:txBody>
+      </p:sp>
+      <p:sp>
+        <p:nvSpPr>
+          <p:cNvPr id="3" name="Text 1"/>
+          <p:cNvSpPr txBox="1"/>
+          <p:nvPr/>
+        </p:nvSpPr>
+        <p:spPr>
+          <a:xfrm>
+            <a:off x="8138160" y="4832604"/>
+            <a:ext cx="548640" cy="256032"/>
+          </a:xfrm>
+          <a:prstGeom prst="rect">
+            <a:avLst/>
+          </a:prstGeom>
+          <a:noFill/>
+          <a:ln/>
+        </p:spPr>
+        <p:txBody>
+          <a:bodyPr wrap="square" lIns="0" tIns="0" rIns="0" bIns="0" rtlCol="0" anchor="ctr"/>
+          <a:lstStyle/>
+          <a:p>
+            <a:pPr algn="r" indent="0" marL="0">
+              <a:buNone/>
+            </a:pPr>
+            <a:r>
+              <a:rPr lang="en-US" sz="1100" dirty="0">
+                <a:solidFill>
+                  <a:srgbClr val="6B6360"/>
+                </a:solidFill>
+                <a:latin typeface="Yu Gothic" pitchFamily="34" charset="0"/>
+                <a:ea typeface="Yu Gothic" pitchFamily="34" charset="-122"/>
+                <a:cs typeface="Yu Gothic" pitchFamily="34" charset="-120"/>
+              </a:rPr>
+              <a:t>51</a:t>
+            </a:r>
+            <a:endParaRPr lang="en-US" sz="1100" dirty="0"/>
+          </a:p>
+        </p:txBody>
+      </p:sp>
+      <p:sp>
+        <p:nvSpPr>
+          <p:cNvPr id="4" name="Text 2"/>
+          <p:cNvSpPr txBox="1"/>
+          <p:nvPr/>
+        </p:nvSpPr>
+        <p:spPr>
+          <a:xfrm>
+            <a:off x="457200" y="731520"/>
+            <a:ext cx="2743200" cy="365760"/>
+          </a:xfrm>
+          <a:prstGeom prst="rect">
+            <a:avLst/>
+          </a:prstGeom>
+          <a:noFill/>
+          <a:ln/>
+        </p:spPr>
+        <p:txBody>
+          <a:bodyPr wrap="square" lIns="0" tIns="0" rIns="0" bIns="0" rtlCol="0" anchor="ctr"/>
+          <a:lstStyle/>
+          <a:p>
+            <a:pPr indent="0" marL="0">
+              <a:buNone/>
+            </a:pPr>
+            <a:r>
+              <a:rPr lang="en-US" sz="1600" b="1" spc="200" kern="0" dirty="0">
+                <a:solidFill>
+                  <a:srgbClr val="A02236"/>
+                </a:solidFill>
+                <a:latin typeface="Yu Gothic" pitchFamily="34" charset="0"/>
+                <a:ea typeface="Yu Gothic" pitchFamily="34" charset="-122"/>
+                <a:cs typeface="Yu Gothic" pitchFamily="34" charset="-120"/>
+              </a:rPr>
+              <a:t>特典 01</a:t>
+            </a:r>
+            <a:endParaRPr lang="en-US" sz="1600" dirty="0"/>
+          </a:p>
+        </p:txBody>
+      </p:sp>
+      <p:sp>
+        <p:nvSpPr>
+          <p:cNvPr id="5" name="Text 3"/>
+          <p:cNvSpPr txBox="1"/>
+          <p:nvPr/>
+        </p:nvSpPr>
+        <p:spPr>
+          <a:xfrm>
+            <a:off x="457200" y="1005840"/>
+            <a:ext cx="8229600" cy="1188720"/>
+          </a:xfrm>
+          <a:prstGeom prst="rect">
+            <a:avLst/>
+          </a:prstGeom>
+          <a:noFill/>
+          <a:ln/>
+        </p:spPr>
+        <p:txBody>
+          <a:bodyPr wrap="square" lIns="0" tIns="0" rIns="0" bIns="0" rtlCol="0" anchor="t"/>
+          <a:lstStyle/>
+          <a:p>
+            <a:pPr algn="l" indent="0" marL="0">
+              <a:lnSpc>
+                <a:spcPts val="4060"/>
+              </a:lnSpc>
+              <a:buNone/>
+            </a:pPr>
+            <a:r>
+              <a:rPr lang="en-US" sz="2800" b="1" dirty="0">
+                <a:solidFill>
+                  <a:srgbClr val="141416"/>
+                </a:solidFill>
+                <a:latin typeface="Yu Mincho" pitchFamily="34" charset="0"/>
+                <a:ea typeface="Yu Mincho" pitchFamily="34" charset="-122"/>
+                <a:cs typeface="Yu Mincho" pitchFamily="34" charset="-120"/>
+              </a:rPr>
+              <a:t>できたのかけら 見つけるワークシート</a:t>
+            </a:r>
+            <a:endParaRPr lang="en-US" sz="2800" dirty="0"/>
+          </a:p>
+        </p:txBody>
+      </p:sp>
+      <p:sp>
+        <p:nvSpPr>
+          <p:cNvPr id="6" name="Text 4"/>
+          <p:cNvSpPr txBox="1"/>
+          <p:nvPr/>
+        </p:nvSpPr>
+        <p:spPr>
+          <a:xfrm>
+            <a:off x="457200" y="1691640"/>
+            <a:ext cx="8229600" cy="365760"/>
+          </a:xfrm>
+          <a:prstGeom prst="rect">
+            <a:avLst/>
+          </a:prstGeom>
+          <a:noFill/>
+          <a:ln/>
+        </p:spPr>
+        <p:txBody>
+          <a:bodyPr wrap="square" lIns="0" tIns="0" rIns="0" bIns="0" rtlCol="0" anchor="ctr"/>
+          <a:lstStyle/>
+          <a:p>
+            <a:pPr indent="0" marL="0">
+              <a:buNone/>
+            </a:pPr>
+            <a:r>
+              <a:rPr lang="en-US" sz="1800" dirty="0">
+                <a:solidFill>
+                  <a:srgbClr val="3B3634"/>
+                </a:solidFill>
+                <a:latin typeface="Yu Gothic" pitchFamily="34" charset="0"/>
+                <a:ea typeface="Yu Gothic" pitchFamily="34" charset="-122"/>
+                <a:cs typeface="Yu Gothic" pitchFamily="34" charset="-120"/>
+              </a:rPr>
+              <a:t>「できた」を見つけるための、振り返りワークシートです。</a:t>
+            </a:r>
+            <a:endParaRPr lang="en-US" sz="1800" dirty="0"/>
+          </a:p>
+        </p:txBody>
+      </p:sp>
+      <p:sp>
+        <p:nvSpPr>
+          <p:cNvPr id="7" name="Shape 5"/>
+          <p:cNvSpPr/>
+          <p:nvPr/>
+        </p:nvSpPr>
+        <p:spPr>
+          <a:xfrm>
+            <a:off x="457200" y="2194560"/>
+            <a:ext cx="2606040" cy="548640"/>
+          </a:xfrm>
+          <a:prstGeom prst="roundRect">
+            <a:avLst>
+              <a:gd name="adj" fmla="val 11667"/>
+            </a:avLst>
+          </a:prstGeom>
+          <a:solidFill>
+            <a:srgbClr val="FAF3F4"/>
+          </a:solidFill>
+          <a:ln w="12700">
+            <a:solidFill>
+              <a:srgbClr val="FAF3F4"/>
+            </a:solidFill>
+            <a:prstDash val="solid"/>
+          </a:ln>
+        </p:spPr>
+      </p:sp>
+      <p:sp>
+        <p:nvSpPr>
+          <p:cNvPr id="8" name="Text 6"/>
+          <p:cNvSpPr txBox="1"/>
+          <p:nvPr/>
+        </p:nvSpPr>
+        <p:spPr>
+          <a:xfrm>
+            <a:off x="457200" y="2194560"/>
+            <a:ext cx="2606040" cy="548640"/>
+          </a:xfrm>
+          <a:prstGeom prst="rect">
+            <a:avLst/>
+          </a:prstGeom>
+          <a:noFill/>
+          <a:ln/>
+        </p:spPr>
+        <p:txBody>
+          <a:bodyPr wrap="square" lIns="0" tIns="0" rIns="0" bIns="0" rtlCol="0" anchor="ctr"/>
+          <a:lstStyle/>
+          <a:p>
+            <a:pPr algn="ctr" indent="0" marL="0">
+              <a:buNone/>
+            </a:pPr>
+            <a:r>
+              <a:rPr lang="en-US" sz="1500" b="1" dirty="0">
+                <a:solidFill>
+                  <a:srgbClr val="7A1524"/>
+                </a:solidFill>
+                <a:latin typeface="Yu Gothic" pitchFamily="34" charset="0"/>
+                <a:ea typeface="Yu Gothic" pitchFamily="34" charset="-122"/>
+                <a:cs typeface="Yu Gothic" pitchFamily="34" charset="-120"/>
+              </a:rPr>
+              <a:t>最近できたこと</a:t>
+            </a:r>
+            <a:endParaRPr lang="en-US" sz="1500" dirty="0"/>
+          </a:p>
+        </p:txBody>
+      </p:sp>
+      <p:sp>
+        <p:nvSpPr>
+          <p:cNvPr id="9" name="Shape 7"/>
+          <p:cNvSpPr/>
+          <p:nvPr/>
+        </p:nvSpPr>
+        <p:spPr>
+          <a:xfrm>
+            <a:off x="3246120" y="2194560"/>
+            <a:ext cx="2606040" cy="548640"/>
+          </a:xfrm>
+          <a:prstGeom prst="roundRect">
+            <a:avLst>
+              <a:gd name="adj" fmla="val 11667"/>
+            </a:avLst>
+          </a:prstGeom>
+          <a:solidFill>
+            <a:srgbClr val="FAF3F4"/>
+          </a:solidFill>
+          <a:ln w="12700">
+            <a:solidFill>
+              <a:srgbClr val="FAF3F4"/>
+            </a:solidFill>
+            <a:prstDash val="solid"/>
+          </a:ln>
+        </p:spPr>
+      </p:sp>
+      <p:sp>
+        <p:nvSpPr>
+          <p:cNvPr id="10" name="Text 8"/>
+          <p:cNvSpPr txBox="1"/>
+          <p:nvPr/>
+        </p:nvSpPr>
+        <p:spPr>
+          <a:xfrm>
+            <a:off x="3246120" y="2194560"/>
+            <a:ext cx="2606040" cy="548640"/>
+          </a:xfrm>
+          <a:prstGeom prst="rect">
+            <a:avLst/>
+          </a:prstGeom>
+          <a:noFill/>
+          <a:ln/>
+        </p:spPr>
+        <p:txBody>
+          <a:bodyPr wrap="square" lIns="0" tIns="0" rIns="0" bIns="0" rtlCol="0" anchor="ctr"/>
+          <a:lstStyle/>
+          <a:p>
+            <a:pPr algn="ctr" indent="0" marL="0">
+              <a:buNone/>
+            </a:pPr>
+            <a:r>
+              <a:rPr lang="en-US" sz="1500" b="1" dirty="0">
+                <a:solidFill>
+                  <a:srgbClr val="7A1524"/>
+                </a:solidFill>
+                <a:latin typeface="Yu Gothic" pitchFamily="34" charset="0"/>
+                <a:ea typeface="Yu Gothic" pitchFamily="34" charset="-122"/>
+                <a:cs typeface="Yu Gothic" pitchFamily="34" charset="-120"/>
+              </a:rPr>
+              <a:t>続けられたこと</a:t>
+            </a:r>
+            <a:endParaRPr lang="en-US" sz="1500" dirty="0"/>
+          </a:p>
+        </p:txBody>
+      </p:sp>
+      <p:sp>
+        <p:nvSpPr>
+          <p:cNvPr id="11" name="Shape 9"/>
+          <p:cNvSpPr/>
+          <p:nvPr/>
+        </p:nvSpPr>
+        <p:spPr>
+          <a:xfrm>
+            <a:off x="6035040" y="2194560"/>
+            <a:ext cx="2606040" cy="548640"/>
+          </a:xfrm>
+          <a:prstGeom prst="roundRect">
+            <a:avLst>
+              <a:gd name="adj" fmla="val 11667"/>
+            </a:avLst>
+          </a:prstGeom>
+          <a:solidFill>
+            <a:srgbClr val="FAF3F4"/>
+          </a:solidFill>
+          <a:ln w="12700">
+            <a:solidFill>
+              <a:srgbClr val="FAF3F4"/>
+            </a:solidFill>
+            <a:prstDash val="solid"/>
+          </a:ln>
+        </p:spPr>
+      </p:sp>
+      <p:sp>
+        <p:nvSpPr>
+          <p:cNvPr id="12" name="Text 10"/>
+          <p:cNvSpPr txBox="1"/>
+          <p:nvPr/>
+        </p:nvSpPr>
+        <p:spPr>
+          <a:xfrm>
+            <a:off x="6035040" y="2194560"/>
+            <a:ext cx="2606040" cy="548640"/>
+          </a:xfrm>
+          <a:prstGeom prst="rect">
+            <a:avLst/>
+          </a:prstGeom>
+          <a:noFill/>
+          <a:ln/>
+        </p:spPr>
+        <p:txBody>
+          <a:bodyPr wrap="square" lIns="0" tIns="0" rIns="0" bIns="0" rtlCol="0" anchor="ctr"/>
+          <a:lstStyle/>
+          <a:p>
+            <a:pPr algn="ctr" indent="0" marL="0">
+              <a:buNone/>
+            </a:pPr>
+            <a:r>
+              <a:rPr lang="en-US" sz="1500" b="1" dirty="0">
+                <a:solidFill>
+                  <a:srgbClr val="7A1524"/>
+                </a:solidFill>
+                <a:latin typeface="Yu Gothic" pitchFamily="34" charset="0"/>
+                <a:ea typeface="Yu Gothic" pitchFamily="34" charset="-122"/>
+                <a:cs typeface="Yu Gothic" pitchFamily="34" charset="-120"/>
+              </a:rPr>
+              <a:t>挑戦したこと</a:t>
+            </a:r>
+            <a:endParaRPr lang="en-US" sz="1500" dirty="0"/>
+          </a:p>
+        </p:txBody>
+      </p:sp>
+      <p:sp>
+        <p:nvSpPr>
+          <p:cNvPr id="13" name="Shape 11"/>
+          <p:cNvSpPr/>
+          <p:nvPr/>
+        </p:nvSpPr>
+        <p:spPr>
+          <a:xfrm>
+            <a:off x="457200" y="2852928"/>
+            <a:ext cx="2606040" cy="548640"/>
+          </a:xfrm>
+          <a:prstGeom prst="roundRect">
+            <a:avLst>
+              <a:gd name="adj" fmla="val 11667"/>
+            </a:avLst>
+          </a:prstGeom>
+          <a:solidFill>
+            <a:srgbClr val="FAF3F4"/>
+          </a:solidFill>
+          <a:ln w="12700">
+            <a:solidFill>
+              <a:srgbClr val="FAF3F4"/>
+            </a:solidFill>
+            <a:prstDash val="solid"/>
+          </a:ln>
+        </p:spPr>
+      </p:sp>
+      <p:sp>
+        <p:nvSpPr>
+          <p:cNvPr id="14" name="Text 12"/>
+          <p:cNvSpPr txBox="1"/>
+          <p:nvPr/>
+        </p:nvSpPr>
+        <p:spPr>
+          <a:xfrm>
+            <a:off x="457200" y="2852928"/>
+            <a:ext cx="2606040" cy="548640"/>
+          </a:xfrm>
+          <a:prstGeom prst="rect">
+            <a:avLst/>
+          </a:prstGeom>
+          <a:noFill/>
+          <a:ln/>
+        </p:spPr>
+        <p:txBody>
+          <a:bodyPr wrap="square" lIns="0" tIns="0" rIns="0" bIns="0" rtlCol="0" anchor="ctr"/>
+          <a:lstStyle/>
+          <a:p>
+            <a:pPr algn="ctr" indent="0" marL="0">
+              <a:buNone/>
+            </a:pPr>
+            <a:r>
+              <a:rPr lang="en-US" sz="1500" b="1" dirty="0">
+                <a:solidFill>
+                  <a:srgbClr val="7A1524"/>
+                </a:solidFill>
+                <a:latin typeface="Yu Gothic" pitchFamily="34" charset="0"/>
+                <a:ea typeface="Yu Gothic" pitchFamily="34" charset="-122"/>
+                <a:cs typeface="Yu Gothic" pitchFamily="34" charset="-120"/>
+              </a:rPr>
+              <a:t>休めたこと</a:t>
+            </a:r>
+            <a:endParaRPr lang="en-US" sz="1500" dirty="0"/>
+          </a:p>
+        </p:txBody>
+      </p:sp>
+      <p:sp>
+        <p:nvSpPr>
+          <p:cNvPr id="15" name="Shape 13"/>
+          <p:cNvSpPr/>
+          <p:nvPr/>
+        </p:nvSpPr>
+        <p:spPr>
+          <a:xfrm>
+            <a:off x="3246120" y="2852928"/>
+            <a:ext cx="2606040" cy="548640"/>
+          </a:xfrm>
+          <a:prstGeom prst="roundRect">
+            <a:avLst>
+              <a:gd name="adj" fmla="val 11667"/>
+            </a:avLst>
+          </a:prstGeom>
+          <a:solidFill>
+            <a:srgbClr val="FAF3F4"/>
+          </a:solidFill>
+          <a:ln w="12700">
+            <a:solidFill>
+              <a:srgbClr val="FAF3F4"/>
+            </a:solidFill>
+            <a:prstDash val="solid"/>
+          </a:ln>
+        </p:spPr>
+      </p:sp>
+      <p:sp>
+        <p:nvSpPr>
+          <p:cNvPr id="16" name="Text 14"/>
+          <p:cNvSpPr txBox="1"/>
+          <p:nvPr/>
+        </p:nvSpPr>
+        <p:spPr>
+          <a:xfrm>
+            <a:off x="3246120" y="2852928"/>
+            <a:ext cx="2606040" cy="548640"/>
+          </a:xfrm>
+          <a:prstGeom prst="rect">
+            <a:avLst/>
+          </a:prstGeom>
+          <a:noFill/>
+          <a:ln/>
+        </p:spPr>
+        <p:txBody>
+          <a:bodyPr wrap="square" lIns="0" tIns="0" rIns="0" bIns="0" rtlCol="0" anchor="ctr"/>
+          <a:lstStyle/>
+          <a:p>
+            <a:pPr algn="ctr" indent="0" marL="0">
+              <a:buNone/>
+            </a:pPr>
+            <a:r>
+              <a:rPr lang="en-US" sz="1500" b="1" dirty="0">
+                <a:solidFill>
+                  <a:srgbClr val="7A1524"/>
+                </a:solidFill>
+                <a:latin typeface="Yu Gothic" pitchFamily="34" charset="0"/>
+                <a:ea typeface="Yu Gothic" pitchFamily="34" charset="-122"/>
+                <a:cs typeface="Yu Gothic" pitchFamily="34" charset="-120"/>
+              </a:rPr>
+              <a:t>失敗した後にできたこと</a:t>
+            </a:r>
+            <a:endParaRPr lang="en-US" sz="1500" dirty="0"/>
+          </a:p>
+        </p:txBody>
+      </p:sp>
+      <p:sp>
+        <p:nvSpPr>
+          <p:cNvPr id="17" name="Text 15"/>
+          <p:cNvSpPr txBox="1"/>
+          <p:nvPr/>
+        </p:nvSpPr>
+        <p:spPr>
+          <a:xfrm>
+            <a:off x="457200" y="3547872"/>
+            <a:ext cx="8229600" cy="365760"/>
+          </a:xfrm>
+          <a:prstGeom prst="rect">
+            <a:avLst/>
+          </a:prstGeom>
+          <a:noFill/>
+          <a:ln/>
+        </p:spPr>
+        <p:txBody>
+          <a:bodyPr wrap="square" lIns="0" tIns="0" rIns="0" bIns="0" rtlCol="0" anchor="ctr"/>
+          <a:lstStyle/>
+          <a:p>
+            <a:pPr indent="0" marL="0">
+              <a:buNone/>
+            </a:pPr>
+            <a:r>
+              <a:rPr lang="en-US" sz="1700" dirty="0">
+                <a:solidFill>
+                  <a:srgbClr val="3B3634"/>
+                </a:solidFill>
+                <a:latin typeface="Yu Gothic" pitchFamily="34" charset="0"/>
+                <a:ea typeface="Yu Gothic" pitchFamily="34" charset="-122"/>
+                <a:cs typeface="Yu Gothic" pitchFamily="34" charset="-120"/>
+              </a:rPr>
+              <a:t>を振り返りながら、「自分はどうやって進んできたか」を見つけます。</a:t>
+            </a:r>
+            <a:endParaRPr lang="en-US" sz="1700" dirty="0"/>
+          </a:p>
+        </p:txBody>
+      </p:sp>
+      <p:sp>
+        <p:nvSpPr>
+          <p:cNvPr id="18" name="Text 16"/>
+          <p:cNvSpPr txBox="1"/>
+          <p:nvPr/>
+        </p:nvSpPr>
+        <p:spPr>
+          <a:xfrm>
+            <a:off x="457200" y="3895344"/>
+            <a:ext cx="8229600" cy="292608"/>
+          </a:xfrm>
+          <a:prstGeom prst="rect">
+            <a:avLst/>
+          </a:prstGeom>
+          <a:noFill/>
+          <a:ln/>
+        </p:spPr>
+        <p:txBody>
+          <a:bodyPr wrap="square" lIns="0" tIns="0" rIns="0" bIns="0" rtlCol="0" anchor="ctr"/>
+          <a:lstStyle/>
+          <a:p>
+            <a:pPr indent="0" marL="0">
+              <a:buNone/>
+            </a:pPr>
+            <a:r>
+              <a:rPr lang="en-US" sz="1400" dirty="0">
+                <a:solidFill>
+                  <a:srgbClr val="6B6360"/>
+                </a:solidFill>
+                <a:latin typeface="Yu Gothic" pitchFamily="34" charset="0"/>
+                <a:ea typeface="Yu Gothic" pitchFamily="34" charset="-122"/>
+                <a:cs typeface="Yu Gothic" pitchFamily="34" charset="-120"/>
+              </a:rPr>
+              <a:t>ワークショップのあとも、練習や試合の振り返りに繰り返し使えます。</a:t>
+            </a:r>
+            <a:endParaRPr lang="en-US" sz="1400" dirty="0"/>
+          </a:p>
+        </p:txBody>
+      </p:sp>
+      <p:sp>
+        <p:nvSpPr>
+          <p:cNvPr id="19" name="Shape 17"/>
+          <p:cNvSpPr/>
+          <p:nvPr/>
+        </p:nvSpPr>
+        <p:spPr>
+          <a:xfrm>
+            <a:off x="457200" y="4279392"/>
+            <a:ext cx="8229600" cy="502920"/>
+          </a:xfrm>
+          <a:prstGeom prst="roundRect">
+            <a:avLst>
+              <a:gd name="adj" fmla="val 14545"/>
+            </a:avLst>
+          </a:prstGeom>
+          <a:solidFill>
+            <a:srgbClr val="540E19"/>
+          </a:solidFill>
+          <a:ln w="12700">
+            <a:solidFill>
+              <a:srgbClr val="540E19"/>
+            </a:solidFill>
+            <a:prstDash val="solid"/>
+          </a:ln>
+        </p:spPr>
+      </p:sp>
+      <p:sp>
+        <p:nvSpPr>
+          <p:cNvPr id="20" name="Text 18"/>
+          <p:cNvSpPr txBox="1"/>
+          <p:nvPr/>
+        </p:nvSpPr>
+        <p:spPr>
+          <a:xfrm>
+            <a:off x="822960" y="4279392"/>
+            <a:ext cx="7498080" cy="502920"/>
+          </a:xfrm>
+          <a:prstGeom prst="rect">
+            <a:avLst/>
+          </a:prstGeom>
+          <a:noFill/>
+          <a:ln/>
+        </p:spPr>
+        <p:txBody>
+          <a:bodyPr wrap="square" lIns="0" tIns="0" rIns="0" bIns="0" rtlCol="0" anchor="ctr"/>
+          <a:lstStyle/>
+          <a:p>
+            <a:pPr indent="0" marL="0">
+              <a:lnSpc>
+                <a:spcPts val="2660"/>
+              </a:lnSpc>
+              <a:buNone/>
+            </a:pPr>
+            <a:r>
+              <a:rPr lang="en-US" sz="1900" b="1" dirty="0">
+                <a:solidFill>
+                  <a:srgbClr val="FFFFFF"/>
+                </a:solidFill>
+                <a:latin typeface="Yu Mincho" pitchFamily="34" charset="0"/>
+                <a:ea typeface="Yu Mincho" pitchFamily="34" charset="-122"/>
+                <a:cs typeface="Yu Mincho" pitchFamily="34" charset="-120"/>
+              </a:rPr>
+              <a:t>「できた」は、探せば増える。</a:t>
+            </a:r>
+            <a:endParaRPr lang="en-US" sz="1900" dirty="0"/>
+          </a:p>
+        </p:txBody>
+      </p:sp>
+    </p:spTree>
+  </p:cSld>
+  <p:clrMapOvr>
+    <a:masterClrMapping/>
+  </p:clrMapOvr>
+</p:sld>
+</file>
+
+<file path=ppt/slides/slide52.xml><?xml version="1.0" encoding="utf-8"?>
+<p:sld xmlns:a="http://schemas.openxmlformats.org/drawingml/2006/main" xmlns:r="http://schemas.openxmlformats.org/officeDocument/2006/relationships" xmlns:p="http://schemas.openxmlformats.org/presentationml/2006/main">
+  <p:cSld name="Slide 52">
+    <p:bg>
+      <p:bgPr>
+        <a:solidFill>
+          <a:srgbClr val="FFFFFF"/>
+        </a:solidFill>
+      </p:bgPr>
+    </p:bg>
+    <p:spTree>
+      <p:nvGrpSpPr>
+        <p:cNvPr id="1" name=""/>
+        <p:cNvGrpSpPr/>
+        <p:nvPr/>
+      </p:nvGrpSpPr>
+      <p:grpSpPr>
+        <a:xfrm>
+          <a:off x="0" y="0"/>
+          <a:ext cx="0" cy="0"/>
+          <a:chOff x="0" y="0"/>
+          <a:chExt cx="0" cy="0"/>
+        </a:xfrm>
+      </p:grpSpPr>
+      <p:sp>
+        <p:nvSpPr>
+          <p:cNvPr id="2" name="Text 0"/>
+          <p:cNvSpPr txBox="1"/>
+          <p:nvPr/>
+        </p:nvSpPr>
+        <p:spPr>
+          <a:xfrm>
+            <a:off x="457200" y="237744"/>
+            <a:ext cx="6400800" cy="274320"/>
+          </a:xfrm>
+          <a:prstGeom prst="rect">
+            <a:avLst/>
+          </a:prstGeom>
+          <a:noFill/>
+          <a:ln/>
+        </p:spPr>
+        <p:txBody>
+          <a:bodyPr wrap="square" lIns="0" tIns="0" rIns="0" bIns="0" rtlCol="0" anchor="ctr"/>
+          <a:lstStyle/>
+          <a:p>
+            <a:pPr indent="0" marL="0">
+              <a:buNone/>
+            </a:pPr>
+            <a:r>
+              <a:rPr lang="en-US" sz="1200" b="1" spc="200" kern="0" dirty="0">
+                <a:solidFill>
+                  <a:srgbClr val="7A1524"/>
+                </a:solidFill>
+                <a:latin typeface="Yu Gothic" pitchFamily="34" charset="0"/>
+                <a:ea typeface="Yu Gothic" pitchFamily="34" charset="-122"/>
+                <a:cs typeface="Yu Gothic" pitchFamily="34" charset="-120"/>
+              </a:rPr>
+              <a:t>今日の続き</a:t>
+            </a:r>
+            <a:endParaRPr lang="en-US" sz="1200" dirty="0"/>
+          </a:p>
+        </p:txBody>
+      </p:sp>
+      <p:sp>
+        <p:nvSpPr>
+          <p:cNvPr id="3" name="Text 1"/>
+          <p:cNvSpPr txBox="1"/>
+          <p:nvPr/>
+        </p:nvSpPr>
+        <p:spPr>
+          <a:xfrm>
+            <a:off x="8138160" y="4832604"/>
+            <a:ext cx="548640" cy="256032"/>
+          </a:xfrm>
+          <a:prstGeom prst="rect">
+            <a:avLst/>
+          </a:prstGeom>
+          <a:noFill/>
+          <a:ln/>
+        </p:spPr>
+        <p:txBody>
+          <a:bodyPr wrap="square" lIns="0" tIns="0" rIns="0" bIns="0" rtlCol="0" anchor="ctr"/>
+          <a:lstStyle/>
+          <a:p>
+            <a:pPr algn="r" indent="0" marL="0">
+              <a:buNone/>
+            </a:pPr>
+            <a:r>
+              <a:rPr lang="en-US" sz="1100" dirty="0">
+                <a:solidFill>
+                  <a:srgbClr val="6B6360"/>
+                </a:solidFill>
+                <a:latin typeface="Yu Gothic" pitchFamily="34" charset="0"/>
+                <a:ea typeface="Yu Gothic" pitchFamily="34" charset="-122"/>
+                <a:cs typeface="Yu Gothic" pitchFamily="34" charset="-120"/>
+              </a:rPr>
+              <a:t>52</a:t>
+            </a:r>
+            <a:endParaRPr lang="en-US" sz="1100" dirty="0"/>
+          </a:p>
+        </p:txBody>
+      </p:sp>
+      <p:sp>
+        <p:nvSpPr>
+          <p:cNvPr id="4" name="Text 2"/>
+          <p:cNvSpPr txBox="1"/>
+          <p:nvPr/>
+        </p:nvSpPr>
+        <p:spPr>
+          <a:xfrm>
+            <a:off x="457200" y="731520"/>
+            <a:ext cx="2743200" cy="365760"/>
+          </a:xfrm>
+          <a:prstGeom prst="rect">
+            <a:avLst/>
+          </a:prstGeom>
+          <a:noFill/>
+          <a:ln/>
+        </p:spPr>
+        <p:txBody>
+          <a:bodyPr wrap="square" lIns="0" tIns="0" rIns="0" bIns="0" rtlCol="0" anchor="ctr"/>
+          <a:lstStyle/>
+          <a:p>
+            <a:pPr indent="0" marL="0">
+              <a:buNone/>
+            </a:pPr>
+            <a:r>
+              <a:rPr lang="en-US" sz="1600" b="1" spc="200" kern="0" dirty="0">
+                <a:solidFill>
+                  <a:srgbClr val="A02236"/>
+                </a:solidFill>
+                <a:latin typeface="Yu Gothic" pitchFamily="34" charset="0"/>
+                <a:ea typeface="Yu Gothic" pitchFamily="34" charset="-122"/>
+                <a:cs typeface="Yu Gothic" pitchFamily="34" charset="-120"/>
+              </a:rPr>
+              <a:t>特典 02</a:t>
+            </a:r>
+            <a:endParaRPr lang="en-US" sz="1600" dirty="0"/>
+          </a:p>
+        </p:txBody>
+      </p:sp>
+      <p:sp>
+        <p:nvSpPr>
+          <p:cNvPr id="5" name="Text 3"/>
+          <p:cNvSpPr txBox="1"/>
+          <p:nvPr/>
+        </p:nvSpPr>
+        <p:spPr>
+          <a:xfrm>
+            <a:off x="457200" y="1005840"/>
+            <a:ext cx="8229600" cy="1188720"/>
+          </a:xfrm>
+          <a:prstGeom prst="rect">
+            <a:avLst/>
+          </a:prstGeom>
+          <a:noFill/>
+          <a:ln/>
+        </p:spPr>
+        <p:txBody>
+          <a:bodyPr wrap="square" lIns="0" tIns="0" rIns="0" bIns="0" rtlCol="0" anchor="t"/>
+          <a:lstStyle/>
+          <a:p>
+            <a:pPr algn="l" indent="0" marL="0">
+              <a:lnSpc>
+                <a:spcPts val="3915"/>
+              </a:lnSpc>
+              <a:buNone/>
+            </a:pPr>
+            <a:r>
+              <a:rPr lang="en-US" sz="2700" b="1" dirty="0">
+                <a:solidFill>
+                  <a:srgbClr val="141416"/>
+                </a:solidFill>
+                <a:latin typeface="Yu Mincho" pitchFamily="34" charset="0"/>
+                <a:ea typeface="Yu Mincho" pitchFamily="34" charset="-122"/>
+                <a:cs typeface="Yu Mincho" pitchFamily="34" charset="-120"/>
+              </a:rPr>
+              <a:t>「できた」を結果につなげるチェックシート</a:t>
+            </a:r>
+            <a:endParaRPr lang="en-US" sz="2700" dirty="0"/>
+          </a:p>
+        </p:txBody>
+      </p:sp>
+      <p:sp>
+        <p:nvSpPr>
+          <p:cNvPr id="6" name="Text 4"/>
+          <p:cNvSpPr txBox="1"/>
+          <p:nvPr/>
+        </p:nvSpPr>
+        <p:spPr>
+          <a:xfrm>
+            <a:off x="457200" y="1691640"/>
+            <a:ext cx="8229600" cy="365760"/>
+          </a:xfrm>
+          <a:prstGeom prst="rect">
+            <a:avLst/>
+          </a:prstGeom>
+          <a:noFill/>
+          <a:ln/>
+        </p:spPr>
+        <p:txBody>
+          <a:bodyPr wrap="square" lIns="0" tIns="0" rIns="0" bIns="0" rtlCol="0" anchor="ctr"/>
+          <a:lstStyle/>
+          <a:p>
+            <a:pPr indent="0" marL="0">
+              <a:buNone/>
+            </a:pPr>
+            <a:r>
+              <a:rPr lang="en-US" sz="1800" dirty="0">
+                <a:solidFill>
+                  <a:srgbClr val="3B3634"/>
+                </a:solidFill>
+                <a:latin typeface="Yu Gothic" pitchFamily="34" charset="0"/>
+                <a:ea typeface="Yu Gothic" pitchFamily="34" charset="-122"/>
+                <a:cs typeface="Yu Gothic" pitchFamily="34" charset="-120"/>
+              </a:rPr>
+              <a:t>「できた」で終わらず、次の行動につなげるためのチェックシートです。</a:t>
+            </a:r>
+            <a:endParaRPr lang="en-US" sz="1800" dirty="0"/>
+          </a:p>
+        </p:txBody>
+      </p:sp>
+      <p:sp>
+        <p:nvSpPr>
+          <p:cNvPr id="7" name="Shape 5"/>
+          <p:cNvSpPr/>
+          <p:nvPr/>
+        </p:nvSpPr>
+        <p:spPr>
+          <a:xfrm>
+            <a:off x="457200" y="2194560"/>
+            <a:ext cx="2606040" cy="548640"/>
+          </a:xfrm>
+          <a:prstGeom prst="roundRect">
+            <a:avLst>
+              <a:gd name="adj" fmla="val 11667"/>
+            </a:avLst>
+          </a:prstGeom>
+          <a:solidFill>
+            <a:srgbClr val="FAF3F4"/>
+          </a:solidFill>
+          <a:ln w="12700">
+            <a:solidFill>
+              <a:srgbClr val="FAF3F4"/>
+            </a:solidFill>
+            <a:prstDash val="solid"/>
+          </a:ln>
+        </p:spPr>
+      </p:sp>
+      <p:sp>
+        <p:nvSpPr>
+          <p:cNvPr id="8" name="Text 6"/>
+          <p:cNvSpPr txBox="1"/>
+          <p:nvPr/>
+        </p:nvSpPr>
+        <p:spPr>
+          <a:xfrm>
+            <a:off x="457200" y="2194560"/>
+            <a:ext cx="2606040" cy="548640"/>
+          </a:xfrm>
+          <a:prstGeom prst="rect">
+            <a:avLst/>
+          </a:prstGeom>
+          <a:noFill/>
+          <a:ln/>
+        </p:spPr>
+        <p:txBody>
+          <a:bodyPr wrap="square" lIns="0" tIns="0" rIns="0" bIns="0" rtlCol="0" anchor="ctr"/>
+          <a:lstStyle/>
+          <a:p>
+            <a:pPr algn="ctr" indent="0" marL="0">
+              <a:buNone/>
+            </a:pPr>
+            <a:r>
+              <a:rPr lang="en-US" sz="1500" b="1" dirty="0">
+                <a:solidFill>
+                  <a:srgbClr val="7A1524"/>
+                </a:solidFill>
+                <a:latin typeface="Yu Gothic" pitchFamily="34" charset="0"/>
+                <a:ea typeface="Yu Gothic" pitchFamily="34" charset="-122"/>
+                <a:cs typeface="Yu Gothic" pitchFamily="34" charset="-120"/>
+              </a:rPr>
+              <a:t>今回、何ができた？</a:t>
+            </a:r>
+            <a:endParaRPr lang="en-US" sz="1500" dirty="0"/>
+          </a:p>
+        </p:txBody>
+      </p:sp>
+      <p:sp>
+        <p:nvSpPr>
+          <p:cNvPr id="9" name="Shape 7"/>
+          <p:cNvSpPr/>
+          <p:nvPr/>
+        </p:nvSpPr>
+        <p:spPr>
+          <a:xfrm>
+            <a:off x="3246120" y="2194560"/>
+            <a:ext cx="2606040" cy="548640"/>
+          </a:xfrm>
+          <a:prstGeom prst="roundRect">
+            <a:avLst>
+              <a:gd name="adj" fmla="val 11667"/>
+            </a:avLst>
+          </a:prstGeom>
+          <a:solidFill>
+            <a:srgbClr val="FAF3F4"/>
+          </a:solidFill>
+          <a:ln w="12700">
+            <a:solidFill>
+              <a:srgbClr val="FAF3F4"/>
+            </a:solidFill>
+            <a:prstDash val="solid"/>
+          </a:ln>
+        </p:spPr>
+      </p:sp>
+      <p:sp>
+        <p:nvSpPr>
+          <p:cNvPr id="10" name="Text 8"/>
+          <p:cNvSpPr txBox="1"/>
+          <p:nvPr/>
+        </p:nvSpPr>
+        <p:spPr>
+          <a:xfrm>
+            <a:off x="3246120" y="2194560"/>
+            <a:ext cx="2606040" cy="548640"/>
+          </a:xfrm>
+          <a:prstGeom prst="rect">
+            <a:avLst/>
+          </a:prstGeom>
+          <a:noFill/>
+          <a:ln/>
+        </p:spPr>
+        <p:txBody>
+          <a:bodyPr wrap="square" lIns="0" tIns="0" rIns="0" bIns="0" rtlCol="0" anchor="ctr"/>
+          <a:lstStyle/>
+          <a:p>
+            <a:pPr algn="ctr" indent="0" marL="0">
+              <a:buNone/>
+            </a:pPr>
+            <a:r>
+              <a:rPr lang="en-US" sz="1500" b="1" dirty="0">
+                <a:solidFill>
+                  <a:srgbClr val="7A1524"/>
+                </a:solidFill>
+                <a:latin typeface="Yu Gothic" pitchFamily="34" charset="0"/>
+                <a:ea typeface="Yu Gothic" pitchFamily="34" charset="-122"/>
+                <a:cs typeface="Yu Gothic" pitchFamily="34" charset="-120"/>
+              </a:rPr>
+              <a:t>なぜできた？</a:t>
+            </a:r>
+            <a:endParaRPr lang="en-US" sz="1500" dirty="0"/>
+          </a:p>
+        </p:txBody>
+      </p:sp>
+      <p:sp>
+        <p:nvSpPr>
+          <p:cNvPr id="11" name="Shape 9"/>
+          <p:cNvSpPr/>
+          <p:nvPr/>
+        </p:nvSpPr>
+        <p:spPr>
+          <a:xfrm>
+            <a:off x="6035040" y="2194560"/>
+            <a:ext cx="2606040" cy="548640"/>
+          </a:xfrm>
+          <a:prstGeom prst="roundRect">
+            <a:avLst>
+              <a:gd name="adj" fmla="val 11667"/>
+            </a:avLst>
+          </a:prstGeom>
+          <a:solidFill>
+            <a:srgbClr val="FAF3F4"/>
+          </a:solidFill>
+          <a:ln w="12700">
+            <a:solidFill>
+              <a:srgbClr val="FAF3F4"/>
+            </a:solidFill>
+            <a:prstDash val="solid"/>
+          </a:ln>
+        </p:spPr>
+      </p:sp>
+      <p:sp>
+        <p:nvSpPr>
+          <p:cNvPr id="12" name="Text 10"/>
+          <p:cNvSpPr txBox="1"/>
+          <p:nvPr/>
+        </p:nvSpPr>
+        <p:spPr>
+          <a:xfrm>
+            <a:off x="6035040" y="2194560"/>
+            <a:ext cx="2606040" cy="548640"/>
+          </a:xfrm>
+          <a:prstGeom prst="rect">
+            <a:avLst/>
+          </a:prstGeom>
+          <a:noFill/>
+          <a:ln/>
+        </p:spPr>
+        <p:txBody>
+          <a:bodyPr wrap="square" lIns="0" tIns="0" rIns="0" bIns="0" rtlCol="0" anchor="ctr"/>
+          <a:lstStyle/>
+          <a:p>
+            <a:pPr algn="ctr" indent="0" marL="0">
+              <a:buNone/>
+            </a:pPr>
+            <a:r>
+              <a:rPr lang="en-US" sz="1500" b="1" dirty="0">
+                <a:solidFill>
+                  <a:srgbClr val="7A1524"/>
+                </a:solidFill>
+                <a:latin typeface="Yu Gothic" pitchFamily="34" charset="0"/>
+                <a:ea typeface="Yu Gothic" pitchFamily="34" charset="-122"/>
+                <a:cs typeface="Yu Gothic" pitchFamily="34" charset="-120"/>
+              </a:rPr>
+              <a:t>自分のどんな力を使った？</a:t>
+            </a:r>
+            <a:endParaRPr lang="en-US" sz="1500" dirty="0"/>
+          </a:p>
+        </p:txBody>
+      </p:sp>
+      <p:sp>
+        <p:nvSpPr>
+          <p:cNvPr id="13" name="Shape 11"/>
+          <p:cNvSpPr/>
+          <p:nvPr/>
+        </p:nvSpPr>
+        <p:spPr>
+          <a:xfrm>
+            <a:off x="457200" y="2852928"/>
+            <a:ext cx="2606040" cy="548640"/>
+          </a:xfrm>
+          <a:prstGeom prst="roundRect">
+            <a:avLst>
+              <a:gd name="adj" fmla="val 11667"/>
+            </a:avLst>
+          </a:prstGeom>
+          <a:solidFill>
+            <a:srgbClr val="FAF3F4"/>
+          </a:solidFill>
+          <a:ln w="12700">
+            <a:solidFill>
+              <a:srgbClr val="FAF3F4"/>
+            </a:solidFill>
+            <a:prstDash val="solid"/>
+          </a:ln>
+        </p:spPr>
+      </p:sp>
+      <p:sp>
+        <p:nvSpPr>
+          <p:cNvPr id="14" name="Text 12"/>
+          <p:cNvSpPr txBox="1"/>
+          <p:nvPr/>
+        </p:nvSpPr>
+        <p:spPr>
+          <a:xfrm>
+            <a:off x="457200" y="2852928"/>
+            <a:ext cx="2606040" cy="548640"/>
+          </a:xfrm>
+          <a:prstGeom prst="rect">
+            <a:avLst/>
+          </a:prstGeom>
+          <a:noFill/>
+          <a:ln/>
+        </p:spPr>
+        <p:txBody>
+          <a:bodyPr wrap="square" lIns="0" tIns="0" rIns="0" bIns="0" rtlCol="0" anchor="ctr"/>
+          <a:lstStyle/>
+          <a:p>
+            <a:pPr algn="ctr" indent="0" marL="0">
+              <a:buNone/>
+            </a:pPr>
+            <a:r>
+              <a:rPr lang="en-US" sz="1500" b="1" dirty="0">
+                <a:solidFill>
+                  <a:srgbClr val="7A1524"/>
+                </a:solidFill>
+                <a:latin typeface="Yu Gothic" pitchFamily="34" charset="0"/>
+                <a:ea typeface="Yu Gothic" pitchFamily="34" charset="-122"/>
+                <a:cs typeface="Yu Gothic" pitchFamily="34" charset="-120"/>
+              </a:rPr>
+              <a:t>次の目標にも使える？</a:t>
+            </a:r>
+            <a:endParaRPr lang="en-US" sz="1500" dirty="0"/>
+          </a:p>
+        </p:txBody>
+      </p:sp>
+      <p:sp>
+        <p:nvSpPr>
+          <p:cNvPr id="15" name="Shape 13"/>
+          <p:cNvSpPr/>
+          <p:nvPr/>
+        </p:nvSpPr>
+        <p:spPr>
+          <a:xfrm>
+            <a:off x="3246120" y="2852928"/>
+            <a:ext cx="2606040" cy="548640"/>
+          </a:xfrm>
+          <a:prstGeom prst="roundRect">
+            <a:avLst>
+              <a:gd name="adj" fmla="val 11667"/>
+            </a:avLst>
+          </a:prstGeom>
+          <a:solidFill>
+            <a:srgbClr val="FAF3F4"/>
+          </a:solidFill>
+          <a:ln w="12700">
+            <a:solidFill>
+              <a:srgbClr val="FAF3F4"/>
+            </a:solidFill>
+            <a:prstDash val="solid"/>
+          </a:ln>
+        </p:spPr>
+      </p:sp>
+      <p:sp>
+        <p:nvSpPr>
+          <p:cNvPr id="16" name="Text 14"/>
+          <p:cNvSpPr txBox="1"/>
+          <p:nvPr/>
+        </p:nvSpPr>
+        <p:spPr>
+          <a:xfrm>
+            <a:off x="3246120" y="2852928"/>
+            <a:ext cx="2606040" cy="548640"/>
+          </a:xfrm>
+          <a:prstGeom prst="rect">
+            <a:avLst/>
+          </a:prstGeom>
+          <a:noFill/>
+          <a:ln/>
+        </p:spPr>
+        <p:txBody>
+          <a:bodyPr wrap="square" lIns="0" tIns="0" rIns="0" bIns="0" rtlCol="0" anchor="ctr"/>
+          <a:lstStyle/>
+          <a:p>
+            <a:pPr algn="ctr" indent="0" marL="0">
+              <a:buNone/>
+            </a:pPr>
+            <a:r>
+              <a:rPr lang="en-US" sz="1500" b="1" dirty="0">
+                <a:solidFill>
+                  <a:srgbClr val="7A1524"/>
+                </a:solidFill>
+                <a:latin typeface="Yu Gothic" pitchFamily="34" charset="0"/>
+                <a:ea typeface="Yu Gothic" pitchFamily="34" charset="-122"/>
+                <a:cs typeface="Yu Gothic" pitchFamily="34" charset="-120"/>
+              </a:rPr>
+              <a:t>次に何をする？</a:t>
+            </a:r>
+            <a:endParaRPr lang="en-US" sz="1500" dirty="0"/>
+          </a:p>
+        </p:txBody>
+      </p:sp>
+      <p:sp>
+        <p:nvSpPr>
+          <p:cNvPr id="17" name="Shape 15"/>
+          <p:cNvSpPr/>
+          <p:nvPr/>
+        </p:nvSpPr>
+        <p:spPr>
+          <a:xfrm>
+            <a:off x="6035040" y="2852928"/>
+            <a:ext cx="2606040" cy="548640"/>
+          </a:xfrm>
+          <a:prstGeom prst="roundRect">
+            <a:avLst>
+              <a:gd name="adj" fmla="val 11667"/>
+            </a:avLst>
+          </a:prstGeom>
+          <a:solidFill>
+            <a:srgbClr val="FAF3F4"/>
+          </a:solidFill>
+          <a:ln w="12700">
+            <a:solidFill>
+              <a:srgbClr val="FAF3F4"/>
+            </a:solidFill>
+            <a:prstDash val="solid"/>
+          </a:ln>
+        </p:spPr>
+      </p:sp>
+      <p:sp>
+        <p:nvSpPr>
+          <p:cNvPr id="18" name="Text 16"/>
+          <p:cNvSpPr txBox="1"/>
+          <p:nvPr/>
+        </p:nvSpPr>
+        <p:spPr>
+          <a:xfrm>
+            <a:off x="6035040" y="2852928"/>
+            <a:ext cx="2606040" cy="548640"/>
+          </a:xfrm>
+          <a:prstGeom prst="rect">
+            <a:avLst/>
+          </a:prstGeom>
+          <a:noFill/>
+          <a:ln/>
+        </p:spPr>
+        <p:txBody>
+          <a:bodyPr wrap="square" lIns="0" tIns="0" rIns="0" bIns="0" rtlCol="0" anchor="ctr"/>
+          <a:lstStyle/>
+          <a:p>
+            <a:pPr algn="ctr" indent="0" marL="0">
+              <a:buNone/>
+            </a:pPr>
+            <a:r>
+              <a:rPr lang="en-US" sz="1500" b="1" dirty="0">
+                <a:solidFill>
+                  <a:srgbClr val="7A1524"/>
+                </a:solidFill>
+                <a:latin typeface="Yu Gothic" pitchFamily="34" charset="0"/>
+                <a:ea typeface="Yu Gothic" pitchFamily="34" charset="-122"/>
+                <a:cs typeface="Yu Gothic" pitchFamily="34" charset="-120"/>
+              </a:rPr>
+              <a:t>何をやらない？</a:t>
+            </a:r>
+            <a:endParaRPr lang="en-US" sz="1500" dirty="0"/>
+          </a:p>
+        </p:txBody>
+      </p:sp>
+      <p:sp>
+        <p:nvSpPr>
+          <p:cNvPr id="19" name="Text 17"/>
+          <p:cNvSpPr txBox="1"/>
+          <p:nvPr/>
+        </p:nvSpPr>
+        <p:spPr>
+          <a:xfrm>
+            <a:off x="457200" y="3611880"/>
+            <a:ext cx="8229600" cy="365760"/>
+          </a:xfrm>
+          <a:prstGeom prst="rect">
+            <a:avLst/>
+          </a:prstGeom>
+          <a:noFill/>
+          <a:ln/>
+        </p:spPr>
+        <p:txBody>
+          <a:bodyPr wrap="square" lIns="0" tIns="0" rIns="0" bIns="0" rtlCol="0" anchor="ctr"/>
+          <a:lstStyle/>
+          <a:p>
+            <a:pPr indent="0" marL="0">
+              <a:buNone/>
+            </a:pPr>
+            <a:r>
+              <a:rPr lang="en-US" sz="1700" dirty="0">
+                <a:solidFill>
+                  <a:srgbClr val="3B3634"/>
+                </a:solidFill>
+                <a:latin typeface="Yu Gothic" pitchFamily="34" charset="0"/>
+                <a:ea typeface="Yu Gothic" pitchFamily="34" charset="-122"/>
+                <a:cs typeface="Yu Gothic" pitchFamily="34" charset="-120"/>
+              </a:rPr>
+              <a:t>「私、ちゃんと進んでた」を「じゃあ次、こうしよう」に変えるための1枚です。</a:t>
+            </a:r>
+            <a:endParaRPr lang="en-US" sz="1700" dirty="0"/>
+          </a:p>
+        </p:txBody>
+      </p:sp>
+      <p:sp>
+        <p:nvSpPr>
+          <p:cNvPr id="20" name="Shape 18"/>
+          <p:cNvSpPr/>
+          <p:nvPr/>
+        </p:nvSpPr>
+        <p:spPr>
+          <a:xfrm>
+            <a:off x="457200" y="4160520"/>
+            <a:ext cx="8229600" cy="621792"/>
+          </a:xfrm>
+          <a:prstGeom prst="roundRect">
+            <a:avLst>
+              <a:gd name="adj" fmla="val 11765"/>
+            </a:avLst>
+          </a:prstGeom>
+          <a:solidFill>
+            <a:srgbClr val="540E19"/>
+          </a:solidFill>
+          <a:ln w="12700">
+            <a:solidFill>
+              <a:srgbClr val="540E19"/>
+            </a:solidFill>
+            <a:prstDash val="solid"/>
+          </a:ln>
+        </p:spPr>
+      </p:sp>
+      <p:sp>
+        <p:nvSpPr>
+          <p:cNvPr id="21" name="Text 19"/>
+          <p:cNvSpPr txBox="1"/>
+          <p:nvPr/>
+        </p:nvSpPr>
+        <p:spPr>
+          <a:xfrm>
+            <a:off x="822960" y="4160520"/>
+            <a:ext cx="7498080" cy="621792"/>
+          </a:xfrm>
+          <a:prstGeom prst="rect">
+            <a:avLst/>
+          </a:prstGeom>
+          <a:noFill/>
+          <a:ln/>
+        </p:spPr>
+        <p:txBody>
+          <a:bodyPr wrap="square" lIns="0" tIns="0" rIns="0" bIns="0" rtlCol="0" anchor="ctr"/>
+          <a:lstStyle/>
+          <a:p>
+            <a:pPr indent="0" marL="0">
+              <a:lnSpc>
+                <a:spcPts val="2800"/>
+              </a:lnSpc>
+              <a:buNone/>
+            </a:pPr>
+            <a:r>
+              <a:rPr lang="en-US" sz="2000" b="1" dirty="0">
+                <a:solidFill>
+                  <a:srgbClr val="FFFFFF"/>
+                </a:solidFill>
+                <a:latin typeface="Yu Mincho" pitchFamily="34" charset="0"/>
+                <a:ea typeface="Yu Mincho" pitchFamily="34" charset="-122"/>
+                <a:cs typeface="Yu Mincho" pitchFamily="34" charset="-120"/>
+              </a:rPr>
+              <a:t>振り返りを、次の一本へ。</a:t>
+            </a:r>
+            <a:endParaRPr lang="en-US" sz="2000" dirty="0"/>
+          </a:p>
+        </p:txBody>
+      </p:sp>
+    </p:spTree>
+  </p:cSld>
+  <p:clrMapOvr>
+    <a:masterClrMapping/>
+  </p:clrMapOvr>
+</p:sld>
+</file>
+
+<file path=ppt/slides/slide53.xml><?xml version="1.0" encoding="utf-8"?>
+<p:sld xmlns:a="http://schemas.openxmlformats.org/drawingml/2006/main" xmlns:r="http://schemas.openxmlformats.org/officeDocument/2006/relationships" xmlns:p="http://schemas.openxmlformats.org/presentationml/2006/main">
+  <p:cSld name="Slide 53">
+    <p:bg>
+      <p:bgPr>
+        <a:solidFill>
+          <a:srgbClr val="FFFFFF"/>
+        </a:solidFill>
+      </p:bgPr>
+    </p:bg>
+    <p:spTree>
+      <p:nvGrpSpPr>
+        <p:cNvPr id="1" name=""/>
+        <p:cNvGrpSpPr/>
+        <p:nvPr/>
+      </p:nvGrpSpPr>
+      <p:grpSpPr>
+        <a:xfrm>
+          <a:off x="0" y="0"/>
+          <a:ext cx="0" cy="0"/>
+          <a:chOff x="0" y="0"/>
+          <a:chExt cx="0" cy="0"/>
+        </a:xfrm>
+      </p:grpSpPr>
+      <p:sp>
+        <p:nvSpPr>
+          <p:cNvPr id="2" name="Text 0"/>
+          <p:cNvSpPr txBox="1"/>
+          <p:nvPr/>
+        </p:nvSpPr>
+        <p:spPr>
+          <a:xfrm>
+            <a:off x="457200" y="237744"/>
+            <a:ext cx="6400800" cy="274320"/>
+          </a:xfrm>
+          <a:prstGeom prst="rect">
+            <a:avLst/>
+          </a:prstGeom>
+          <a:noFill/>
+          <a:ln/>
+        </p:spPr>
+        <p:txBody>
+          <a:bodyPr wrap="square" lIns="0" tIns="0" rIns="0" bIns="0" rtlCol="0" anchor="ctr"/>
+          <a:lstStyle/>
+          <a:p>
+            <a:pPr indent="0" marL="0">
+              <a:buNone/>
+            </a:pPr>
+            <a:r>
+              <a:rPr lang="en-US" sz="1200" b="1" spc="200" kern="0" dirty="0">
+                <a:solidFill>
+                  <a:srgbClr val="7A1524"/>
+                </a:solidFill>
+                <a:latin typeface="Yu Gothic" pitchFamily="34" charset="0"/>
+                <a:ea typeface="Yu Gothic" pitchFamily="34" charset="-122"/>
+                <a:cs typeface="Yu Gothic" pitchFamily="34" charset="-120"/>
+              </a:rPr>
+              <a:t>ここから先</a:t>
+            </a:r>
+            <a:endParaRPr lang="en-US" sz="1200" dirty="0"/>
+          </a:p>
+        </p:txBody>
+      </p:sp>
+      <p:sp>
+        <p:nvSpPr>
+          <p:cNvPr id="3" name="Text 1"/>
+          <p:cNvSpPr txBox="1"/>
+          <p:nvPr/>
+        </p:nvSpPr>
+        <p:spPr>
+          <a:xfrm>
+            <a:off x="8138160" y="4832604"/>
+            <a:ext cx="548640" cy="256032"/>
+          </a:xfrm>
+          <a:prstGeom prst="rect">
+            <a:avLst/>
+          </a:prstGeom>
+          <a:noFill/>
+          <a:ln/>
+        </p:spPr>
+        <p:txBody>
+          <a:bodyPr wrap="square" lIns="0" tIns="0" rIns="0" bIns="0" rtlCol="0" anchor="ctr"/>
+          <a:lstStyle/>
+          <a:p>
+            <a:pPr algn="r" indent="0" marL="0">
+              <a:buNone/>
+            </a:pPr>
+            <a:r>
+              <a:rPr lang="en-US" sz="1100" dirty="0">
+                <a:solidFill>
+                  <a:srgbClr val="6B6360"/>
+                </a:solidFill>
+                <a:latin typeface="Yu Gothic" pitchFamily="34" charset="0"/>
+                <a:ea typeface="Yu Gothic" pitchFamily="34" charset="-122"/>
+                <a:cs typeface="Yu Gothic" pitchFamily="34" charset="-120"/>
+              </a:rPr>
+              <a:t>53</a:t>
+            </a:r>
+            <a:endParaRPr lang="en-US" sz="1100" dirty="0"/>
+          </a:p>
+        </p:txBody>
+      </p:sp>
+      <p:sp>
+        <p:nvSpPr>
+          <p:cNvPr id="4" name="Text 2"/>
+          <p:cNvSpPr txBox="1"/>
+          <p:nvPr/>
+        </p:nvSpPr>
+        <p:spPr>
+          <a:xfrm>
+            <a:off x="457200" y="777240"/>
+            <a:ext cx="8229600" cy="1188720"/>
+          </a:xfrm>
+          <a:prstGeom prst="rect">
+            <a:avLst/>
+          </a:prstGeom>
+          <a:noFill/>
+          <a:ln/>
+        </p:spPr>
+        <p:txBody>
+          <a:bodyPr wrap="square" lIns="0" tIns="0" rIns="0" bIns="0" rtlCol="0" anchor="t"/>
+          <a:lstStyle/>
+          <a:p>
+            <a:pPr algn="l" indent="0" marL="0">
+              <a:lnSpc>
+                <a:spcPts val="4640"/>
+              </a:lnSpc>
+              <a:buNone/>
+            </a:pPr>
+            <a:r>
+              <a:rPr lang="en-US" sz="3200" b="1" dirty="0">
+                <a:solidFill>
+                  <a:srgbClr val="141416"/>
+                </a:solidFill>
+                <a:latin typeface="Yu Mincho" pitchFamily="34" charset="0"/>
+                <a:ea typeface="Yu Mincho" pitchFamily="34" charset="-122"/>
+                <a:cs typeface="Yu Mincho" pitchFamily="34" charset="-120"/>
+              </a:rPr>
+              <a:t>ここから先は、一人ひとり違います</a:t>
+            </a:r>
+            <a:endParaRPr lang="en-US" sz="3200" dirty="0"/>
+          </a:p>
+        </p:txBody>
+      </p:sp>
+      <p:sp>
+        <p:nvSpPr>
+          <p:cNvPr id="5" name="Shape 3"/>
+          <p:cNvSpPr/>
+          <p:nvPr/>
+        </p:nvSpPr>
+        <p:spPr>
+          <a:xfrm>
+            <a:off x="457200" y="1737360"/>
+            <a:ext cx="8229600" cy="777240"/>
+          </a:xfrm>
+          <a:prstGeom prst="roundRect">
+            <a:avLst>
+              <a:gd name="adj" fmla="val 8235"/>
+            </a:avLst>
+          </a:prstGeom>
+          <a:solidFill>
+            <a:srgbClr val="540E19"/>
+          </a:solidFill>
+          <a:ln w="12700">
+            <a:solidFill>
+              <a:srgbClr val="540E19"/>
+            </a:solidFill>
+            <a:prstDash val="solid"/>
+          </a:ln>
+        </p:spPr>
+      </p:sp>
+      <p:sp>
+        <p:nvSpPr>
+          <p:cNvPr id="6" name="Text 4"/>
+          <p:cNvSpPr txBox="1"/>
+          <p:nvPr/>
+        </p:nvSpPr>
+        <p:spPr>
+          <a:xfrm>
+            <a:off x="822960" y="1737360"/>
+            <a:ext cx="7498080" cy="777240"/>
+          </a:xfrm>
+          <a:prstGeom prst="rect">
+            <a:avLst/>
+          </a:prstGeom>
+          <a:noFill/>
+          <a:ln/>
+        </p:spPr>
+        <p:txBody>
+          <a:bodyPr wrap="square" lIns="0" tIns="0" rIns="0" bIns="0" rtlCol="0" anchor="ctr"/>
+          <a:lstStyle/>
+          <a:p>
+            <a:pPr indent="0" marL="0">
+              <a:buNone/>
+            </a:pPr>
+            <a:r>
+              <a:rPr lang="en-US" sz="2000" b="1" dirty="0">
+                <a:solidFill>
+                  <a:srgbClr val="FFFFFF"/>
+                </a:solidFill>
+                <a:latin typeface="Yu Mincho" pitchFamily="34" charset="0"/>
+                <a:ea typeface="Yu Mincho" pitchFamily="34" charset="-122"/>
+                <a:cs typeface="Yu Mincho" pitchFamily="34" charset="-120"/>
+              </a:rPr>
+              <a:t>同じ「試合で怖くなる」でも、原因は同じではありません。</a:t>
+            </a:r>
+            <a:endParaRPr lang="en-US" sz="2000" dirty="0"/>
+          </a:p>
+        </p:txBody>
+      </p:sp>
+      <p:sp>
+        <p:nvSpPr>
+          <p:cNvPr id="7" name="Shape 5"/>
+          <p:cNvSpPr/>
+          <p:nvPr/>
+        </p:nvSpPr>
+        <p:spPr>
+          <a:xfrm>
+            <a:off x="457200" y="2788920"/>
+            <a:ext cx="2606040" cy="576072"/>
+          </a:xfrm>
+          <a:prstGeom prst="roundRect">
+            <a:avLst>
+              <a:gd name="adj" fmla="val 11111"/>
+            </a:avLst>
+          </a:prstGeom>
+          <a:solidFill>
+            <a:srgbClr val="FAF3F4"/>
+          </a:solidFill>
+          <a:ln w="12700">
+            <a:solidFill>
+              <a:srgbClr val="FAF3F4"/>
+            </a:solidFill>
+            <a:prstDash val="solid"/>
+          </a:ln>
+        </p:spPr>
+      </p:sp>
+      <p:sp>
+        <p:nvSpPr>
+          <p:cNvPr id="8" name="Text 6"/>
+          <p:cNvSpPr txBox="1"/>
+          <p:nvPr/>
+        </p:nvSpPr>
+        <p:spPr>
+          <a:xfrm>
+            <a:off x="457200" y="2788920"/>
+            <a:ext cx="2606040" cy="576072"/>
+          </a:xfrm>
+          <a:prstGeom prst="rect">
+            <a:avLst/>
+          </a:prstGeom>
+          <a:noFill/>
+          <a:ln/>
+        </p:spPr>
+        <p:txBody>
+          <a:bodyPr wrap="square" lIns="0" tIns="0" rIns="0" bIns="0" rtlCol="0" anchor="ctr"/>
+          <a:lstStyle/>
+          <a:p>
+            <a:pPr algn="ctr" indent="0" marL="0">
+              <a:buNone/>
+            </a:pPr>
+            <a:r>
+              <a:rPr lang="en-US" sz="1600" b="1" dirty="0">
+                <a:solidFill>
+                  <a:srgbClr val="7A1524"/>
+                </a:solidFill>
+                <a:latin typeface="Yu Gothic" pitchFamily="34" charset="0"/>
+                <a:ea typeface="Yu Gothic" pitchFamily="34" charset="-122"/>
+                <a:cs typeface="Yu Gothic" pitchFamily="34" charset="-120"/>
+              </a:rPr>
+              <a:t>失敗経験</a:t>
+            </a:r>
+            <a:endParaRPr lang="en-US" sz="1600" dirty="0"/>
+          </a:p>
+        </p:txBody>
+      </p:sp>
+      <p:sp>
+        <p:nvSpPr>
+          <p:cNvPr id="9" name="Shape 7"/>
+          <p:cNvSpPr/>
+          <p:nvPr/>
+        </p:nvSpPr>
+        <p:spPr>
+          <a:xfrm>
+            <a:off x="3246120" y="2788920"/>
+            <a:ext cx="2606040" cy="576072"/>
+          </a:xfrm>
+          <a:prstGeom prst="roundRect">
+            <a:avLst>
+              <a:gd name="adj" fmla="val 11111"/>
+            </a:avLst>
+          </a:prstGeom>
+          <a:solidFill>
+            <a:srgbClr val="FAF3F4"/>
+          </a:solidFill>
+          <a:ln w="12700">
+            <a:solidFill>
+              <a:srgbClr val="FAF3F4"/>
+            </a:solidFill>
+            <a:prstDash val="solid"/>
+          </a:ln>
+        </p:spPr>
+      </p:sp>
+      <p:sp>
+        <p:nvSpPr>
+          <p:cNvPr id="10" name="Text 8"/>
+          <p:cNvSpPr txBox="1"/>
+          <p:nvPr/>
+        </p:nvSpPr>
+        <p:spPr>
+          <a:xfrm>
+            <a:off x="3246120" y="2788920"/>
+            <a:ext cx="2606040" cy="576072"/>
+          </a:xfrm>
+          <a:prstGeom prst="rect">
+            <a:avLst/>
+          </a:prstGeom>
+          <a:noFill/>
+          <a:ln/>
+        </p:spPr>
+        <p:txBody>
+          <a:bodyPr wrap="square" lIns="0" tIns="0" rIns="0" bIns="0" rtlCol="0" anchor="ctr"/>
+          <a:lstStyle/>
+          <a:p>
+            <a:pPr algn="ctr" indent="0" marL="0">
+              <a:buNone/>
+            </a:pPr>
+            <a:r>
+              <a:rPr lang="en-US" sz="1600" b="1" dirty="0">
+                <a:solidFill>
+                  <a:srgbClr val="7A1524"/>
+                </a:solidFill>
+                <a:latin typeface="Yu Gothic" pitchFamily="34" charset="0"/>
+                <a:ea typeface="Yu Gothic" pitchFamily="34" charset="-122"/>
+                <a:cs typeface="Yu Gothic" pitchFamily="34" charset="-120"/>
+              </a:rPr>
+              <a:t>目標設定</a:t>
+            </a:r>
+            <a:endParaRPr lang="en-US" sz="1600" dirty="0"/>
+          </a:p>
+        </p:txBody>
+      </p:sp>
+      <p:sp>
+        <p:nvSpPr>
+          <p:cNvPr id="11" name="Shape 9"/>
+          <p:cNvSpPr/>
+          <p:nvPr/>
+        </p:nvSpPr>
+        <p:spPr>
+          <a:xfrm>
+            <a:off x="6035040" y="2788920"/>
+            <a:ext cx="2606040" cy="576072"/>
+          </a:xfrm>
+          <a:prstGeom prst="roundRect">
+            <a:avLst>
+              <a:gd name="adj" fmla="val 11111"/>
+            </a:avLst>
+          </a:prstGeom>
+          <a:solidFill>
+            <a:srgbClr val="FAF3F4"/>
+          </a:solidFill>
+          <a:ln w="12700">
+            <a:solidFill>
+              <a:srgbClr val="FAF3F4"/>
+            </a:solidFill>
+            <a:prstDash val="solid"/>
+          </a:ln>
+        </p:spPr>
+      </p:sp>
+      <p:sp>
+        <p:nvSpPr>
+          <p:cNvPr id="12" name="Text 10"/>
+          <p:cNvSpPr txBox="1"/>
+          <p:nvPr/>
+        </p:nvSpPr>
+        <p:spPr>
+          <a:xfrm>
+            <a:off x="6035040" y="2788920"/>
+            <a:ext cx="2606040" cy="576072"/>
+          </a:xfrm>
+          <a:prstGeom prst="rect">
+            <a:avLst/>
+          </a:prstGeom>
+          <a:noFill/>
+          <a:ln/>
+        </p:spPr>
+        <p:txBody>
+          <a:bodyPr wrap="square" lIns="0" tIns="0" rIns="0" bIns="0" rtlCol="0" anchor="ctr"/>
+          <a:lstStyle/>
+          <a:p>
+            <a:pPr algn="ctr" indent="0" marL="0">
+              <a:buNone/>
+            </a:pPr>
+            <a:r>
+              <a:rPr lang="en-US" sz="1600" b="1" dirty="0">
+                <a:solidFill>
+                  <a:srgbClr val="7A1524"/>
+                </a:solidFill>
+                <a:latin typeface="Yu Gothic" pitchFamily="34" charset="0"/>
+                <a:ea typeface="Yu Gothic" pitchFamily="34" charset="-122"/>
+                <a:cs typeface="Yu Gothic" pitchFamily="34" charset="-120"/>
+              </a:rPr>
+              <a:t>他人との比較</a:t>
+            </a:r>
+            <a:endParaRPr lang="en-US" sz="1600" dirty="0"/>
+          </a:p>
+        </p:txBody>
+      </p:sp>
+      <p:sp>
+        <p:nvSpPr>
+          <p:cNvPr id="13" name="Shape 11"/>
+          <p:cNvSpPr/>
+          <p:nvPr/>
+        </p:nvSpPr>
+        <p:spPr>
+          <a:xfrm>
+            <a:off x="457200" y="3474720"/>
+            <a:ext cx="2606040" cy="576072"/>
+          </a:xfrm>
+          <a:prstGeom prst="roundRect">
+            <a:avLst>
+              <a:gd name="adj" fmla="val 11111"/>
+            </a:avLst>
+          </a:prstGeom>
+          <a:solidFill>
+            <a:srgbClr val="FAF3F4"/>
+          </a:solidFill>
+          <a:ln w="12700">
+            <a:solidFill>
+              <a:srgbClr val="FAF3F4"/>
+            </a:solidFill>
+            <a:prstDash val="solid"/>
+          </a:ln>
+        </p:spPr>
+      </p:sp>
+      <p:sp>
+        <p:nvSpPr>
+          <p:cNvPr id="14" name="Text 12"/>
+          <p:cNvSpPr txBox="1"/>
+          <p:nvPr/>
+        </p:nvSpPr>
+        <p:spPr>
+          <a:xfrm>
+            <a:off x="457200" y="3474720"/>
+            <a:ext cx="2606040" cy="576072"/>
+          </a:xfrm>
+          <a:prstGeom prst="rect">
+            <a:avLst/>
+          </a:prstGeom>
+          <a:noFill/>
+          <a:ln/>
+        </p:spPr>
+        <p:txBody>
+          <a:bodyPr wrap="square" lIns="0" tIns="0" rIns="0" bIns="0" rtlCol="0" anchor="ctr"/>
+          <a:lstStyle/>
+          <a:p>
+            <a:pPr algn="ctr" indent="0" marL="0">
+              <a:buNone/>
+            </a:pPr>
+            <a:r>
+              <a:rPr lang="en-US" sz="1600" b="1" dirty="0">
+                <a:solidFill>
+                  <a:srgbClr val="7A1524"/>
+                </a:solidFill>
+                <a:latin typeface="Yu Gothic" pitchFamily="34" charset="0"/>
+                <a:ea typeface="Yu Gothic" pitchFamily="34" charset="-122"/>
+                <a:cs typeface="Yu Gothic" pitchFamily="34" charset="-120"/>
+              </a:rPr>
+              <a:t>準備不足への不安</a:t>
+            </a:r>
+            <a:endParaRPr lang="en-US" sz="1600" dirty="0"/>
+          </a:p>
+        </p:txBody>
+      </p:sp>
+      <p:sp>
+        <p:nvSpPr>
+          <p:cNvPr id="15" name="Shape 13"/>
+          <p:cNvSpPr/>
+          <p:nvPr/>
+        </p:nvSpPr>
+        <p:spPr>
+          <a:xfrm>
+            <a:off x="3246120" y="3474720"/>
+            <a:ext cx="2606040" cy="576072"/>
+          </a:xfrm>
+          <a:prstGeom prst="roundRect">
+            <a:avLst>
+              <a:gd name="adj" fmla="val 11111"/>
+            </a:avLst>
+          </a:prstGeom>
+          <a:solidFill>
+            <a:srgbClr val="FAF3F4"/>
+          </a:solidFill>
+          <a:ln w="12700">
+            <a:solidFill>
+              <a:srgbClr val="FAF3F4"/>
+            </a:solidFill>
+            <a:prstDash val="solid"/>
+          </a:ln>
+        </p:spPr>
+      </p:sp>
+      <p:sp>
+        <p:nvSpPr>
+          <p:cNvPr id="16" name="Text 14"/>
+          <p:cNvSpPr txBox="1"/>
+          <p:nvPr/>
+        </p:nvSpPr>
+        <p:spPr>
+          <a:xfrm>
+            <a:off x="3246120" y="3474720"/>
+            <a:ext cx="2606040" cy="576072"/>
+          </a:xfrm>
+          <a:prstGeom prst="rect">
+            <a:avLst/>
+          </a:prstGeom>
+          <a:noFill/>
+          <a:ln/>
+        </p:spPr>
+        <p:txBody>
+          <a:bodyPr wrap="square" lIns="0" tIns="0" rIns="0" bIns="0" rtlCol="0" anchor="ctr"/>
+          <a:lstStyle/>
+          <a:p>
+            <a:pPr algn="ctr" indent="0" marL="0">
+              <a:buNone/>
+            </a:pPr>
+            <a:r>
+              <a:rPr lang="en-US" sz="1600" b="1" dirty="0">
+                <a:solidFill>
+                  <a:srgbClr val="7A1524"/>
+                </a:solidFill>
+                <a:latin typeface="Yu Gothic" pitchFamily="34" charset="0"/>
+                <a:ea typeface="Yu Gothic" pitchFamily="34" charset="-122"/>
+                <a:cs typeface="Yu Gothic" pitchFamily="34" charset="-120"/>
+              </a:rPr>
+              <a:t>試技前の思考</a:t>
+            </a:r>
+            <a:endParaRPr lang="en-US" sz="1600" dirty="0"/>
+          </a:p>
+        </p:txBody>
+      </p:sp>
+      <p:sp>
+        <p:nvSpPr>
+          <p:cNvPr id="17" name="Text 15"/>
+          <p:cNvSpPr txBox="1"/>
+          <p:nvPr/>
+        </p:nvSpPr>
+        <p:spPr>
+          <a:xfrm>
+            <a:off x="457200" y="4315968"/>
+            <a:ext cx="7498080" cy="411480"/>
+          </a:xfrm>
+          <a:prstGeom prst="rect">
+            <a:avLst/>
+          </a:prstGeom>
+          <a:noFill/>
+          <a:ln/>
+        </p:spPr>
+        <p:txBody>
+          <a:bodyPr wrap="square" lIns="0" tIns="0" rIns="0" bIns="0" rtlCol="0" anchor="ctr"/>
+          <a:lstStyle/>
+          <a:p>
+            <a:pPr indent="0" marL="0">
+              <a:buNone/>
+            </a:pPr>
+            <a:r>
+              <a:rPr lang="en-US" sz="1900" b="1" dirty="0">
+                <a:solidFill>
+                  <a:srgbClr val="7A1524"/>
+                </a:solidFill>
+                <a:latin typeface="Yu Gothic" pitchFamily="34" charset="0"/>
+                <a:ea typeface="Yu Gothic" pitchFamily="34" charset="-122"/>
+                <a:cs typeface="Yu Gothic" pitchFamily="34" charset="-120"/>
+              </a:rPr>
+              <a:t>だから、必要なトレーニングも変わります。</a:t>
+            </a:r>
+            <a:endParaRPr lang="en-US" sz="1900" dirty="0"/>
+          </a:p>
+        </p:txBody>
+      </p:sp>
+    </p:spTree>
+  </p:cSld>
+  <p:clrMapOvr>
+    <a:masterClrMapping/>
+  </p:clrMapOvr>
+</p:sld>
+</file>
+
+<file path=ppt/slides/slide54.xml><?xml version="1.0" encoding="utf-8"?>
+<p:sld xmlns:a="http://schemas.openxmlformats.org/drawingml/2006/main" xmlns:r="http://schemas.openxmlformats.org/officeDocument/2006/relationships" xmlns:p="http://schemas.openxmlformats.org/presentationml/2006/main">
+  <p:cSld name="Slide 54">
+    <p:bg>
+      <p:bgPr>
+        <a:solidFill>
+          <a:srgbClr val="540E19"/>
+        </a:solidFill>
+      </p:bgPr>
+    </p:bg>
+    <p:spTree>
+      <p:nvGrpSpPr>
+        <p:cNvPr id="1" name=""/>
+        <p:cNvGrpSpPr/>
+        <p:nvPr/>
+      </p:nvGrpSpPr>
+      <p:grpSpPr>
+        <a:xfrm>
+          <a:off x="0" y="0"/>
+          <a:ext cx="0" cy="0"/>
+          <a:chOff x="0" y="0"/>
+          <a:chExt cx="0" cy="0"/>
+        </a:xfrm>
+      </p:grpSpPr>
+      <p:sp>
+        <p:nvSpPr>
+          <p:cNvPr id="2" name="Text 0"/>
+          <p:cNvSpPr txBox="1"/>
+          <p:nvPr/>
+        </p:nvSpPr>
+        <p:spPr>
+          <a:xfrm>
+            <a:off x="457200" y="237744"/>
+            <a:ext cx="6400800" cy="274320"/>
+          </a:xfrm>
+          <a:prstGeom prst="rect">
+            <a:avLst/>
+          </a:prstGeom>
+          <a:noFill/>
+          <a:ln/>
+        </p:spPr>
+        <p:txBody>
+          <a:bodyPr wrap="square" lIns="0" tIns="0" rIns="0" bIns="0" rtlCol="0" anchor="ctr"/>
+          <a:lstStyle/>
+          <a:p>
+            <a:pPr indent="0" marL="0">
+              <a:buNone/>
+            </a:pPr>
+            <a:r>
+              <a:rPr lang="en-US" sz="1200" b="1" spc="200" kern="0" dirty="0">
+                <a:solidFill>
+                  <a:srgbClr val="F0B9C3"/>
+                </a:solidFill>
+                <a:latin typeface="Yu Gothic" pitchFamily="34" charset="0"/>
+                <a:ea typeface="Yu Gothic" pitchFamily="34" charset="-122"/>
+                <a:cs typeface="Yu Gothic" pitchFamily="34" charset="-120"/>
+              </a:rPr>
+              <a:t>ここから先</a:t>
+            </a:r>
+            <a:endParaRPr lang="en-US" sz="1200" dirty="0"/>
+          </a:p>
+        </p:txBody>
+      </p:sp>
+      <p:sp>
+        <p:nvSpPr>
+          <p:cNvPr id="3" name="Text 1"/>
+          <p:cNvSpPr txBox="1"/>
+          <p:nvPr/>
+        </p:nvSpPr>
+        <p:spPr>
+          <a:xfrm>
+            <a:off x="8138160" y="4832604"/>
+            <a:ext cx="548640" cy="256032"/>
+          </a:xfrm>
+          <a:prstGeom prst="rect">
+            <a:avLst/>
+          </a:prstGeom>
+          <a:noFill/>
+          <a:ln/>
+        </p:spPr>
+        <p:txBody>
+          <a:bodyPr wrap="square" lIns="0" tIns="0" rIns="0" bIns="0" rtlCol="0" anchor="ctr"/>
+          <a:lstStyle/>
+          <a:p>
+            <a:pPr algn="r" indent="0" marL="0">
+              <a:buNone/>
+            </a:pPr>
+            <a:r>
+              <a:rPr lang="en-US" sz="1100" dirty="0">
+                <a:solidFill>
+                  <a:srgbClr val="8A6870"/>
+                </a:solidFill>
+                <a:latin typeface="Yu Gothic" pitchFamily="34" charset="0"/>
+                <a:ea typeface="Yu Gothic" pitchFamily="34" charset="-122"/>
+                <a:cs typeface="Yu Gothic" pitchFamily="34" charset="-120"/>
+              </a:rPr>
+              <a:t>54</a:t>
+            </a:r>
+            <a:endParaRPr lang="en-US" sz="1100" dirty="0"/>
+          </a:p>
+        </p:txBody>
+      </p:sp>
+      <p:sp>
+        <p:nvSpPr>
+          <p:cNvPr id="4" name="Text 2"/>
+          <p:cNvSpPr txBox="1"/>
+          <p:nvPr/>
+        </p:nvSpPr>
+        <p:spPr>
+          <a:xfrm>
+            <a:off x="457200" y="822960"/>
+            <a:ext cx="8229600" cy="365760"/>
+          </a:xfrm>
+          <a:prstGeom prst="rect">
+            <a:avLst/>
+          </a:prstGeom>
+          <a:noFill/>
+          <a:ln/>
+        </p:spPr>
+        <p:txBody>
+          <a:bodyPr wrap="square" lIns="0" tIns="0" rIns="0" bIns="0" rtlCol="0" anchor="ctr"/>
+          <a:lstStyle/>
+          <a:p>
+            <a:pPr indent="0" marL="0">
+              <a:buNone/>
+            </a:pPr>
+            <a:r>
+              <a:rPr lang="en-US" sz="1700" dirty="0">
+                <a:solidFill>
+                  <a:srgbClr val="F0B9C3"/>
+                </a:solidFill>
+                <a:latin typeface="Yu Gothic" pitchFamily="34" charset="0"/>
+                <a:ea typeface="Yu Gothic" pitchFamily="34" charset="-122"/>
+                <a:cs typeface="Yu Gothic" pitchFamily="34" charset="-120"/>
+              </a:rPr>
+              <a:t>次の試合で絶対に取りたい一本がある方へ</a:t>
+            </a:r>
+            <a:endParaRPr lang="en-US" sz="1700" dirty="0"/>
+          </a:p>
+        </p:txBody>
+      </p:sp>
+      <p:sp>
+        <p:nvSpPr>
+          <p:cNvPr id="5" name="Text 3"/>
+          <p:cNvSpPr txBox="1"/>
+          <p:nvPr/>
+        </p:nvSpPr>
+        <p:spPr>
+          <a:xfrm>
+            <a:off x="457200" y="1280160"/>
+            <a:ext cx="8229600" cy="914400"/>
+          </a:xfrm>
+          <a:prstGeom prst="rect">
+            <a:avLst/>
+          </a:prstGeom>
+          <a:noFill/>
+          <a:ln/>
+        </p:spPr>
+        <p:txBody>
+          <a:bodyPr wrap="square" lIns="0" tIns="0" rIns="0" bIns="0" rtlCol="0" anchor="ctr"/>
+          <a:lstStyle/>
+          <a:p>
+            <a:pPr indent="0" marL="0">
+              <a:buNone/>
+            </a:pPr>
+            <a:r>
+              <a:rPr lang="en-US" sz="4600" b="1" dirty="0">
+                <a:solidFill>
+                  <a:srgbClr val="FFFFFF"/>
+                </a:solidFill>
+                <a:latin typeface="Yu Mincho" pitchFamily="34" charset="0"/>
+                <a:ea typeface="Yu Mincho" pitchFamily="34" charset="-122"/>
+                <a:cs typeface="Yu Mincho" pitchFamily="34" charset="-120"/>
+              </a:rPr>
+              <a:t>60分</a:t>
+            </a:r>
+            <a:pPr indent="0" marL="0">
+              <a:buNone/>
+            </a:pPr>
+            <a:r>
+              <a:rPr lang="en-US" sz="3400" b="1" dirty="0">
+                <a:solidFill>
+                  <a:srgbClr val="FFFFFF"/>
+                </a:solidFill>
+                <a:latin typeface="Yu Mincho" pitchFamily="34" charset="0"/>
+                <a:ea typeface="Yu Mincho" pitchFamily="34" charset="-122"/>
+                <a:cs typeface="Yu Mincho" pitchFamily="34" charset="-120"/>
+              </a:rPr>
+              <a:t>　無料個別相談</a:t>
+            </a:r>
+            <a:endParaRPr lang="en-US" sz="4600" dirty="0"/>
+          </a:p>
+        </p:txBody>
+      </p:sp>
+      <p:sp>
+        <p:nvSpPr>
+          <p:cNvPr id="6" name="Text 4"/>
+          <p:cNvSpPr txBox="1"/>
+          <p:nvPr/>
+        </p:nvSpPr>
+        <p:spPr>
+          <a:xfrm>
+            <a:off x="457200" y="2286000"/>
+            <a:ext cx="8229600" cy="320040"/>
+          </a:xfrm>
+          <a:prstGeom prst="rect">
+            <a:avLst/>
+          </a:prstGeom>
+          <a:noFill/>
+          <a:ln/>
+        </p:spPr>
+        <p:txBody>
+          <a:bodyPr wrap="square" lIns="0" tIns="0" rIns="0" bIns="0" rtlCol="0" anchor="ctr"/>
+          <a:lstStyle/>
+          <a:p>
+            <a:pPr indent="0" marL="0">
+              <a:buNone/>
+            </a:pPr>
+            <a:r>
+              <a:rPr lang="en-US" sz="1600" dirty="0">
+                <a:solidFill>
+                  <a:srgbClr val="F2E7E9"/>
+                </a:solidFill>
+                <a:latin typeface="Yu Gothic" pitchFamily="34" charset="0"/>
+                <a:ea typeface="Yu Gothic" pitchFamily="34" charset="-122"/>
+                <a:cs typeface="Yu Gothic" pitchFamily="34" charset="-120"/>
+              </a:rPr>
+              <a:t>あなたの</a:t>
+            </a:r>
+            <a:endParaRPr lang="en-US" sz="1600" dirty="0"/>
+          </a:p>
+        </p:txBody>
+      </p:sp>
+      <p:sp>
+        <p:nvSpPr>
+          <p:cNvPr id="7" name="Shape 5"/>
+          <p:cNvSpPr/>
+          <p:nvPr/>
+        </p:nvSpPr>
+        <p:spPr>
+          <a:xfrm>
+            <a:off x="457200" y="2697480"/>
+            <a:ext cx="2606040" cy="576072"/>
+          </a:xfrm>
+          <a:prstGeom prst="roundRect">
+            <a:avLst>
+              <a:gd name="adj" fmla="val 11111"/>
+            </a:avLst>
+          </a:prstGeom>
+          <a:solidFill>
+            <a:srgbClr val="3A0B12"/>
+          </a:solidFill>
+          <a:ln w="12700">
+            <a:solidFill>
+              <a:srgbClr val="3A0B12"/>
+            </a:solidFill>
+            <a:prstDash val="solid"/>
+          </a:ln>
+        </p:spPr>
+      </p:sp>
+      <p:sp>
+        <p:nvSpPr>
+          <p:cNvPr id="8" name="Text 6"/>
+          <p:cNvSpPr txBox="1"/>
+          <p:nvPr/>
+        </p:nvSpPr>
+        <p:spPr>
+          <a:xfrm>
+            <a:off x="457200" y="2697480"/>
+            <a:ext cx="2606040" cy="576072"/>
+          </a:xfrm>
+          <a:prstGeom prst="rect">
+            <a:avLst/>
+          </a:prstGeom>
+          <a:noFill/>
+          <a:ln/>
+        </p:spPr>
+        <p:txBody>
+          <a:bodyPr wrap="square" lIns="0" tIns="0" rIns="0" bIns="0" rtlCol="0" anchor="ctr"/>
+          <a:lstStyle/>
+          <a:p>
+            <a:pPr algn="ctr" indent="0" marL="0">
+              <a:buNone/>
+            </a:pPr>
+            <a:r>
+              <a:rPr lang="en-US" sz="1500" b="1" dirty="0">
+                <a:solidFill>
+                  <a:srgbClr val="FFFFFF"/>
+                </a:solidFill>
+                <a:latin typeface="Yu Gothic" pitchFamily="34" charset="0"/>
+                <a:ea typeface="Yu Gothic" pitchFamily="34" charset="-122"/>
+                <a:cs typeface="Yu Gothic" pitchFamily="34" charset="-120"/>
+              </a:rPr>
+              <a:t>次の目標</a:t>
+            </a:r>
+            <a:endParaRPr lang="en-US" sz="1500" dirty="0"/>
+          </a:p>
+        </p:txBody>
+      </p:sp>
+      <p:sp>
+        <p:nvSpPr>
+          <p:cNvPr id="9" name="Shape 7"/>
+          <p:cNvSpPr/>
+          <p:nvPr/>
+        </p:nvSpPr>
+        <p:spPr>
+          <a:xfrm>
+            <a:off x="3246120" y="2697480"/>
+            <a:ext cx="2606040" cy="576072"/>
+          </a:xfrm>
+          <a:prstGeom prst="roundRect">
+            <a:avLst>
+              <a:gd name="adj" fmla="val 11111"/>
+            </a:avLst>
+          </a:prstGeom>
+          <a:solidFill>
+            <a:srgbClr val="3A0B12"/>
+          </a:solidFill>
+          <a:ln w="12700">
+            <a:solidFill>
+              <a:srgbClr val="3A0B12"/>
+            </a:solidFill>
+            <a:prstDash val="solid"/>
+          </a:ln>
+        </p:spPr>
+      </p:sp>
+      <p:sp>
+        <p:nvSpPr>
+          <p:cNvPr id="10" name="Text 8"/>
+          <p:cNvSpPr txBox="1"/>
+          <p:nvPr/>
+        </p:nvSpPr>
+        <p:spPr>
+          <a:xfrm>
+            <a:off x="3246120" y="2697480"/>
+            <a:ext cx="2606040" cy="576072"/>
+          </a:xfrm>
+          <a:prstGeom prst="rect">
+            <a:avLst/>
+          </a:prstGeom>
+          <a:noFill/>
+          <a:ln/>
+        </p:spPr>
+        <p:txBody>
+          <a:bodyPr wrap="square" lIns="0" tIns="0" rIns="0" bIns="0" rtlCol="0" anchor="ctr"/>
+          <a:lstStyle/>
+          <a:p>
+            <a:pPr algn="ctr" indent="0" marL="0">
+              <a:buNone/>
+            </a:pPr>
+            <a:r>
+              <a:rPr lang="en-US" sz="1500" b="1" dirty="0">
+                <a:solidFill>
+                  <a:srgbClr val="FFFFFF"/>
+                </a:solidFill>
+                <a:latin typeface="Yu Gothic" pitchFamily="34" charset="0"/>
+                <a:ea typeface="Yu Gothic" pitchFamily="34" charset="-122"/>
+                <a:cs typeface="Yu Gothic" pitchFamily="34" charset="-120"/>
+              </a:rPr>
+              <a:t>今困っていること</a:t>
+            </a:r>
+            <a:endParaRPr lang="en-US" sz="1500" dirty="0"/>
+          </a:p>
+        </p:txBody>
+      </p:sp>
+      <p:sp>
+        <p:nvSpPr>
+          <p:cNvPr id="11" name="Shape 9"/>
+          <p:cNvSpPr/>
+          <p:nvPr/>
+        </p:nvSpPr>
+        <p:spPr>
+          <a:xfrm>
+            <a:off x="6035040" y="2697480"/>
+            <a:ext cx="2606040" cy="576072"/>
+          </a:xfrm>
+          <a:prstGeom prst="roundRect">
+            <a:avLst>
+              <a:gd name="adj" fmla="val 11111"/>
+            </a:avLst>
+          </a:prstGeom>
+          <a:solidFill>
+            <a:srgbClr val="3A0B12"/>
+          </a:solidFill>
+          <a:ln w="12700">
+            <a:solidFill>
+              <a:srgbClr val="3A0B12"/>
+            </a:solidFill>
+            <a:prstDash val="solid"/>
+          </a:ln>
+        </p:spPr>
+      </p:sp>
+      <p:sp>
+        <p:nvSpPr>
+          <p:cNvPr id="12" name="Text 10"/>
+          <p:cNvSpPr txBox="1"/>
+          <p:nvPr/>
+        </p:nvSpPr>
+        <p:spPr>
+          <a:xfrm>
+            <a:off x="6035040" y="2697480"/>
+            <a:ext cx="2606040" cy="576072"/>
+          </a:xfrm>
+          <a:prstGeom prst="rect">
+            <a:avLst/>
+          </a:prstGeom>
+          <a:noFill/>
+          <a:ln/>
+        </p:spPr>
+        <p:txBody>
+          <a:bodyPr wrap="square" lIns="0" tIns="0" rIns="0" bIns="0" rtlCol="0" anchor="ctr"/>
+          <a:lstStyle/>
+          <a:p>
+            <a:pPr algn="ctr" indent="0" marL="0">
+              <a:buNone/>
+            </a:pPr>
+            <a:r>
+              <a:rPr lang="en-US" sz="1500" b="1" dirty="0">
+                <a:solidFill>
+                  <a:srgbClr val="FFFFFF"/>
+                </a:solidFill>
+                <a:latin typeface="Yu Gothic" pitchFamily="34" charset="0"/>
+                <a:ea typeface="Yu Gothic" pitchFamily="34" charset="-122"/>
+                <a:cs typeface="Yu Gothic" pitchFamily="34" charset="-120"/>
+              </a:rPr>
+              <a:t>崩れやすい場面</a:t>
+            </a:r>
+            <a:endParaRPr lang="en-US" sz="1500" dirty="0"/>
+          </a:p>
+        </p:txBody>
+      </p:sp>
+      <p:sp>
+        <p:nvSpPr>
+          <p:cNvPr id="13" name="Shape 11"/>
+          <p:cNvSpPr/>
+          <p:nvPr/>
+        </p:nvSpPr>
+        <p:spPr>
+          <a:xfrm>
+            <a:off x="457200" y="3383280"/>
+            <a:ext cx="2606040" cy="576072"/>
+          </a:xfrm>
+          <a:prstGeom prst="roundRect">
+            <a:avLst>
+              <a:gd name="adj" fmla="val 11111"/>
+            </a:avLst>
+          </a:prstGeom>
+          <a:solidFill>
+            <a:srgbClr val="3A0B12"/>
+          </a:solidFill>
+          <a:ln w="12700">
+            <a:solidFill>
+              <a:srgbClr val="3A0B12"/>
+            </a:solidFill>
+            <a:prstDash val="solid"/>
+          </a:ln>
+        </p:spPr>
+      </p:sp>
+      <p:sp>
+        <p:nvSpPr>
+          <p:cNvPr id="14" name="Text 12"/>
+          <p:cNvSpPr txBox="1"/>
+          <p:nvPr/>
+        </p:nvSpPr>
+        <p:spPr>
+          <a:xfrm>
+            <a:off x="457200" y="3383280"/>
+            <a:ext cx="2606040" cy="576072"/>
+          </a:xfrm>
+          <a:prstGeom prst="rect">
+            <a:avLst/>
+          </a:prstGeom>
+          <a:noFill/>
+          <a:ln/>
+        </p:spPr>
+        <p:txBody>
+          <a:bodyPr wrap="square" lIns="0" tIns="0" rIns="0" bIns="0" rtlCol="0" anchor="ctr"/>
+          <a:lstStyle/>
+          <a:p>
+            <a:pPr algn="ctr" indent="0" marL="0">
+              <a:buNone/>
+            </a:pPr>
+            <a:r>
+              <a:rPr lang="en-US" sz="1500" b="1" dirty="0">
+                <a:solidFill>
+                  <a:srgbClr val="FFFFFF"/>
+                </a:solidFill>
+                <a:latin typeface="Yu Gothic" pitchFamily="34" charset="0"/>
+                <a:ea typeface="Yu Gothic" pitchFamily="34" charset="-122"/>
+                <a:cs typeface="Yu Gothic" pitchFamily="34" charset="-120"/>
+              </a:rPr>
+              <a:t>今必要なメンタルスキル</a:t>
+            </a:r>
+            <a:endParaRPr lang="en-US" sz="1500" dirty="0"/>
+          </a:p>
+        </p:txBody>
+      </p:sp>
+      <p:sp>
+        <p:nvSpPr>
+          <p:cNvPr id="15" name="Shape 13"/>
+          <p:cNvSpPr/>
+          <p:nvPr/>
+        </p:nvSpPr>
+        <p:spPr>
+          <a:xfrm>
+            <a:off x="3246120" y="3383280"/>
+            <a:ext cx="2606040" cy="576072"/>
+          </a:xfrm>
+          <a:prstGeom prst="roundRect">
+            <a:avLst>
+              <a:gd name="adj" fmla="val 11111"/>
+            </a:avLst>
+          </a:prstGeom>
+          <a:solidFill>
+            <a:srgbClr val="3A0B12"/>
+          </a:solidFill>
+          <a:ln w="12700">
+            <a:solidFill>
+              <a:srgbClr val="3A0B12"/>
+            </a:solidFill>
+            <a:prstDash val="solid"/>
+          </a:ln>
+        </p:spPr>
+      </p:sp>
+      <p:sp>
+        <p:nvSpPr>
+          <p:cNvPr id="16" name="Text 14"/>
+          <p:cNvSpPr txBox="1"/>
+          <p:nvPr/>
+        </p:nvSpPr>
+        <p:spPr>
+          <a:xfrm>
+            <a:off x="3246120" y="3383280"/>
+            <a:ext cx="2606040" cy="576072"/>
+          </a:xfrm>
+          <a:prstGeom prst="rect">
+            <a:avLst/>
+          </a:prstGeom>
+          <a:noFill/>
+          <a:ln/>
+        </p:spPr>
+        <p:txBody>
+          <a:bodyPr wrap="square" lIns="0" tIns="0" rIns="0" bIns="0" rtlCol="0" anchor="ctr"/>
+          <a:lstStyle/>
+          <a:p>
+            <a:pPr algn="ctr" indent="0" marL="0">
+              <a:buNone/>
+            </a:pPr>
+            <a:r>
+              <a:rPr lang="en-US" sz="1500" b="1" dirty="0">
+                <a:solidFill>
+                  <a:srgbClr val="FFFFFF"/>
+                </a:solidFill>
+                <a:latin typeface="Yu Gothic" pitchFamily="34" charset="0"/>
+                <a:ea typeface="Yu Gothic" pitchFamily="34" charset="-122"/>
+                <a:cs typeface="Yu Gothic" pitchFamily="34" charset="-120"/>
+              </a:rPr>
+              <a:t>次にやること</a:t>
+            </a:r>
+            <a:endParaRPr lang="en-US" sz="1500" dirty="0"/>
+          </a:p>
+        </p:txBody>
+      </p:sp>
+      <p:sp>
+        <p:nvSpPr>
+          <p:cNvPr id="17" name="Text 15"/>
+          <p:cNvSpPr txBox="1"/>
+          <p:nvPr/>
+        </p:nvSpPr>
+        <p:spPr>
+          <a:xfrm>
+            <a:off x="457200" y="4224528"/>
+            <a:ext cx="7498080" cy="411480"/>
+          </a:xfrm>
+          <a:prstGeom prst="rect">
+            <a:avLst/>
+          </a:prstGeom>
+          <a:noFill/>
+          <a:ln/>
+        </p:spPr>
+        <p:txBody>
+          <a:bodyPr wrap="square" lIns="0" tIns="0" rIns="0" bIns="0" rtlCol="0" anchor="ctr"/>
+          <a:lstStyle/>
+          <a:p>
+            <a:pPr indent="0" marL="0">
+              <a:buNone/>
+            </a:pPr>
+            <a:r>
+              <a:rPr lang="en-US" sz="1900" b="1" dirty="0">
+                <a:solidFill>
+                  <a:srgbClr val="F0B9C3"/>
+                </a:solidFill>
+                <a:latin typeface="Yu Gothic" pitchFamily="34" charset="0"/>
+                <a:ea typeface="Yu Gothic" pitchFamily="34" charset="-122"/>
+                <a:cs typeface="Yu Gothic" pitchFamily="34" charset="-120"/>
+              </a:rPr>
+              <a:t>を、一緒に整理します。</a:t>
+            </a:r>
+            <a:endParaRPr lang="en-US" sz="1900" dirty="0"/>
+          </a:p>
+        </p:txBody>
+      </p:sp>
+    </p:spTree>
+  </p:cSld>
+  <p:clrMapOvr>
+    <a:masterClrMapping/>
+  </p:clrMapOvr>
+</p:sld>
+</file>
+
+<file path=ppt/slides/slide55.xml><?xml version="1.0" encoding="utf-8"?>
+<p:sld xmlns:a="http://schemas.openxmlformats.org/drawingml/2006/main" xmlns:r="http://schemas.openxmlformats.org/officeDocument/2006/relationships" xmlns:p="http://schemas.openxmlformats.org/presentationml/2006/main">
+  <p:cSld name="Slide 55">
+    <p:bg>
+      <p:bgPr>
+        <a:solidFill>
+          <a:srgbClr val="FFFFFF"/>
+        </a:solidFill>
+      </p:bgPr>
+    </p:bg>
+    <p:spTree>
+      <p:nvGrpSpPr>
+        <p:cNvPr id="1" name=""/>
+        <p:cNvGrpSpPr/>
+        <p:nvPr/>
+      </p:nvGrpSpPr>
+      <p:grpSpPr>
+        <a:xfrm>
+          <a:off x="0" y="0"/>
+          <a:ext cx="0" cy="0"/>
+          <a:chOff x="0" y="0"/>
+          <a:chExt cx="0" cy="0"/>
+        </a:xfrm>
+      </p:grpSpPr>
+      <p:sp>
+        <p:nvSpPr>
+          <p:cNvPr id="2" name="Text 0"/>
+          <p:cNvSpPr txBox="1"/>
+          <p:nvPr/>
+        </p:nvSpPr>
+        <p:spPr>
+          <a:xfrm>
+            <a:off x="457200" y="237744"/>
+            <a:ext cx="6400800" cy="274320"/>
+          </a:xfrm>
+          <a:prstGeom prst="rect">
+            <a:avLst/>
+          </a:prstGeom>
+          <a:noFill/>
+          <a:ln/>
+        </p:spPr>
+        <p:txBody>
+          <a:bodyPr wrap="square" lIns="0" tIns="0" rIns="0" bIns="0" rtlCol="0" anchor="ctr"/>
+          <a:lstStyle/>
+          <a:p>
+            <a:pPr indent="0" marL="0">
+              <a:buNone/>
+            </a:pPr>
+            <a:r>
+              <a:rPr lang="en-US" sz="1200" b="1" spc="200" kern="0" dirty="0">
+                <a:solidFill>
+                  <a:srgbClr val="7A1524"/>
+                </a:solidFill>
+                <a:latin typeface="Yu Gothic" pitchFamily="34" charset="0"/>
+                <a:ea typeface="Yu Gothic" pitchFamily="34" charset="-122"/>
+                <a:cs typeface="Yu Gothic" pitchFamily="34" charset="-120"/>
+              </a:rPr>
+              <a:t>ここから先</a:t>
+            </a:r>
+            <a:endParaRPr lang="en-US" sz="1200" dirty="0"/>
+          </a:p>
+        </p:txBody>
+      </p:sp>
+      <p:sp>
+        <p:nvSpPr>
+          <p:cNvPr id="3" name="Text 1"/>
+          <p:cNvSpPr txBox="1"/>
+          <p:nvPr/>
+        </p:nvSpPr>
+        <p:spPr>
+          <a:xfrm>
+            <a:off x="8138160" y="4832604"/>
+            <a:ext cx="548640" cy="256032"/>
+          </a:xfrm>
+          <a:prstGeom prst="rect">
+            <a:avLst/>
+          </a:prstGeom>
+          <a:noFill/>
+          <a:ln/>
+        </p:spPr>
+        <p:txBody>
+          <a:bodyPr wrap="square" lIns="0" tIns="0" rIns="0" bIns="0" rtlCol="0" anchor="ctr"/>
+          <a:lstStyle/>
+          <a:p>
+            <a:pPr algn="r" indent="0" marL="0">
+              <a:buNone/>
+            </a:pPr>
+            <a:r>
+              <a:rPr lang="en-US" sz="1100" dirty="0">
+                <a:solidFill>
+                  <a:srgbClr val="6B6360"/>
+                </a:solidFill>
+                <a:latin typeface="Yu Gothic" pitchFamily="34" charset="0"/>
+                <a:ea typeface="Yu Gothic" pitchFamily="34" charset="-122"/>
+                <a:cs typeface="Yu Gothic" pitchFamily="34" charset="-120"/>
+              </a:rPr>
+              <a:t>55</a:t>
+            </a:r>
+            <a:endParaRPr lang="en-US" sz="1100" dirty="0"/>
+          </a:p>
+        </p:txBody>
+      </p:sp>
+      <p:sp>
+        <p:nvSpPr>
+          <p:cNvPr id="4" name="Text 2"/>
+          <p:cNvSpPr txBox="1"/>
+          <p:nvPr/>
+        </p:nvSpPr>
+        <p:spPr>
+          <a:xfrm>
+            <a:off x="457200" y="777240"/>
+            <a:ext cx="8229600" cy="1188720"/>
+          </a:xfrm>
+          <a:prstGeom prst="rect">
+            <a:avLst/>
+          </a:prstGeom>
+          <a:noFill/>
+          <a:ln/>
+        </p:spPr>
+        <p:txBody>
+          <a:bodyPr wrap="square" lIns="0" tIns="0" rIns="0" bIns="0" rtlCol="0" anchor="t"/>
+          <a:lstStyle/>
+          <a:p>
+            <a:pPr algn="l" indent="0" marL="0">
+              <a:lnSpc>
+                <a:spcPts val="4640"/>
+              </a:lnSpc>
+              <a:buNone/>
+            </a:pPr>
+            <a:r>
+              <a:rPr lang="en-US" sz="3200" b="1" dirty="0">
+                <a:solidFill>
+                  <a:srgbClr val="141416"/>
+                </a:solidFill>
+                <a:latin typeface="Yu Mincho" pitchFamily="34" charset="0"/>
+                <a:ea typeface="Yu Mincho" pitchFamily="34" charset="-122"/>
+                <a:cs typeface="Yu Mincho" pitchFamily="34" charset="-120"/>
+              </a:rPr>
+              <a:t>こんな方に来てほしいです</a:t>
+            </a:r>
+            <a:endParaRPr lang="en-US" sz="3200" dirty="0"/>
+          </a:p>
+        </p:txBody>
+      </p:sp>
+      <p:sp>
+        <p:nvSpPr>
+          <p:cNvPr id="5" name="Text 3"/>
+          <p:cNvSpPr txBox="1"/>
+          <p:nvPr/>
+        </p:nvSpPr>
+        <p:spPr>
+          <a:xfrm>
+            <a:off x="457200" y="1783080"/>
+            <a:ext cx="292608" cy="402336"/>
+          </a:xfrm>
+          <a:prstGeom prst="rect">
+            <a:avLst/>
+          </a:prstGeom>
+          <a:noFill/>
+          <a:ln/>
+        </p:spPr>
+        <p:txBody>
+          <a:bodyPr wrap="square" lIns="0" tIns="0" rIns="0" bIns="0" rtlCol="0" anchor="ctr"/>
+          <a:lstStyle/>
+          <a:p>
+            <a:pPr indent="0" marL="0">
+              <a:buNone/>
+            </a:pPr>
+            <a:r>
+              <a:rPr lang="en-US" sz="1800" b="1" dirty="0">
+                <a:solidFill>
+                  <a:srgbClr val="7A1524"/>
+                </a:solidFill>
+                <a:latin typeface="Yu Gothic" pitchFamily="34" charset="0"/>
+                <a:ea typeface="Yu Gothic" pitchFamily="34" charset="-122"/>
+                <a:cs typeface="Yu Gothic" pitchFamily="34" charset="-120"/>
+              </a:rPr>
+              <a:t>・</a:t>
+            </a:r>
+            <a:endParaRPr lang="en-US" sz="1800" dirty="0"/>
+          </a:p>
+        </p:txBody>
+      </p:sp>
+      <p:sp>
+        <p:nvSpPr>
+          <p:cNvPr id="6" name="Text 4"/>
+          <p:cNvSpPr txBox="1"/>
+          <p:nvPr/>
+        </p:nvSpPr>
+        <p:spPr>
+          <a:xfrm>
+            <a:off x="731520" y="1783080"/>
+            <a:ext cx="7955280" cy="402336"/>
+          </a:xfrm>
+          <a:prstGeom prst="rect">
+            <a:avLst/>
+          </a:prstGeom>
+          <a:noFill/>
+          <a:ln/>
+        </p:spPr>
+        <p:txBody>
+          <a:bodyPr wrap="square" lIns="0" tIns="0" rIns="0" bIns="0" rtlCol="0" anchor="ctr"/>
+          <a:lstStyle/>
+          <a:p>
+            <a:pPr indent="0" marL="0">
+              <a:buNone/>
+            </a:pPr>
+            <a:r>
+              <a:rPr lang="en-US" sz="1800" dirty="0">
+                <a:solidFill>
+                  <a:srgbClr val="3B3634"/>
+                </a:solidFill>
+                <a:latin typeface="Yu Gothic" pitchFamily="34" charset="0"/>
+                <a:ea typeface="Yu Gothic" pitchFamily="34" charset="-122"/>
+                <a:cs typeface="Yu Gothic" pitchFamily="34" charset="-120"/>
+              </a:rPr>
+              <a:t>絶対に取りたい記録がある</a:t>
+            </a:r>
+            <a:endParaRPr lang="en-US" sz="1800" dirty="0"/>
+          </a:p>
+        </p:txBody>
+      </p:sp>
+      <p:sp>
+        <p:nvSpPr>
+          <p:cNvPr id="7" name="Text 5"/>
+          <p:cNvSpPr txBox="1"/>
+          <p:nvPr/>
+        </p:nvSpPr>
+        <p:spPr>
+          <a:xfrm>
+            <a:off x="457200" y="2258568"/>
+            <a:ext cx="292608" cy="402336"/>
+          </a:xfrm>
+          <a:prstGeom prst="rect">
+            <a:avLst/>
+          </a:prstGeom>
+          <a:noFill/>
+          <a:ln/>
+        </p:spPr>
+        <p:txBody>
+          <a:bodyPr wrap="square" lIns="0" tIns="0" rIns="0" bIns="0" rtlCol="0" anchor="ctr"/>
+          <a:lstStyle/>
+          <a:p>
+            <a:pPr indent="0" marL="0">
+              <a:buNone/>
+            </a:pPr>
+            <a:r>
+              <a:rPr lang="en-US" sz="1800" b="1" dirty="0">
+                <a:solidFill>
+                  <a:srgbClr val="7A1524"/>
+                </a:solidFill>
+                <a:latin typeface="Yu Gothic" pitchFamily="34" charset="0"/>
+                <a:ea typeface="Yu Gothic" pitchFamily="34" charset="-122"/>
+                <a:cs typeface="Yu Gothic" pitchFamily="34" charset="-120"/>
+              </a:rPr>
+              <a:t>・</a:t>
+            </a:r>
+            <a:endParaRPr lang="en-US" sz="1800" dirty="0"/>
+          </a:p>
+        </p:txBody>
+      </p:sp>
+      <p:sp>
+        <p:nvSpPr>
+          <p:cNvPr id="8" name="Text 6"/>
+          <p:cNvSpPr txBox="1"/>
+          <p:nvPr/>
+        </p:nvSpPr>
+        <p:spPr>
+          <a:xfrm>
+            <a:off x="731520" y="2258568"/>
+            <a:ext cx="7955280" cy="402336"/>
+          </a:xfrm>
+          <a:prstGeom prst="rect">
+            <a:avLst/>
+          </a:prstGeom>
+          <a:noFill/>
+          <a:ln/>
+        </p:spPr>
+        <p:txBody>
+          <a:bodyPr wrap="square" lIns="0" tIns="0" rIns="0" bIns="0" rtlCol="0" anchor="ctr"/>
+          <a:lstStyle/>
+          <a:p>
+            <a:pPr indent="0" marL="0">
+              <a:buNone/>
+            </a:pPr>
+            <a:r>
+              <a:rPr lang="en-US" sz="1800" dirty="0">
+                <a:solidFill>
+                  <a:srgbClr val="3B3634"/>
+                </a:solidFill>
+                <a:latin typeface="Yu Gothic" pitchFamily="34" charset="0"/>
+                <a:ea typeface="Yu Gothic" pitchFamily="34" charset="-122"/>
+                <a:cs typeface="Yu Gothic" pitchFamily="34" charset="-120"/>
+              </a:rPr>
+              <a:t>勝ちたい試合がある</a:t>
+            </a:r>
+            <a:endParaRPr lang="en-US" sz="1800" dirty="0"/>
+          </a:p>
+        </p:txBody>
+      </p:sp>
+      <p:sp>
+        <p:nvSpPr>
+          <p:cNvPr id="9" name="Text 7"/>
+          <p:cNvSpPr txBox="1"/>
+          <p:nvPr/>
+        </p:nvSpPr>
+        <p:spPr>
+          <a:xfrm>
+            <a:off x="457200" y="2734056"/>
+            <a:ext cx="292608" cy="402336"/>
+          </a:xfrm>
+          <a:prstGeom prst="rect">
+            <a:avLst/>
+          </a:prstGeom>
+          <a:noFill/>
+          <a:ln/>
+        </p:spPr>
+        <p:txBody>
+          <a:bodyPr wrap="square" lIns="0" tIns="0" rIns="0" bIns="0" rtlCol="0" anchor="ctr"/>
+          <a:lstStyle/>
+          <a:p>
+            <a:pPr indent="0" marL="0">
+              <a:buNone/>
+            </a:pPr>
+            <a:r>
+              <a:rPr lang="en-US" sz="1800" b="1" dirty="0">
+                <a:solidFill>
+                  <a:srgbClr val="7A1524"/>
+                </a:solidFill>
+                <a:latin typeface="Yu Gothic" pitchFamily="34" charset="0"/>
+                <a:ea typeface="Yu Gothic" pitchFamily="34" charset="-122"/>
+                <a:cs typeface="Yu Gothic" pitchFamily="34" charset="-120"/>
+              </a:rPr>
+              <a:t>・</a:t>
+            </a:r>
+            <a:endParaRPr lang="en-US" sz="1800" dirty="0"/>
+          </a:p>
+        </p:txBody>
+      </p:sp>
+      <p:sp>
+        <p:nvSpPr>
+          <p:cNvPr id="10" name="Text 8"/>
+          <p:cNvSpPr txBox="1"/>
+          <p:nvPr/>
+        </p:nvSpPr>
+        <p:spPr>
+          <a:xfrm>
+            <a:off x="731520" y="2734056"/>
+            <a:ext cx="7955280" cy="402336"/>
+          </a:xfrm>
+          <a:prstGeom prst="rect">
+            <a:avLst/>
+          </a:prstGeom>
+          <a:noFill/>
+          <a:ln/>
+        </p:spPr>
+        <p:txBody>
+          <a:bodyPr wrap="square" lIns="0" tIns="0" rIns="0" bIns="0" rtlCol="0" anchor="ctr"/>
+          <a:lstStyle/>
+          <a:p>
+            <a:pPr indent="0" marL="0">
+              <a:buNone/>
+            </a:pPr>
+            <a:r>
+              <a:rPr lang="en-US" sz="1800" dirty="0">
+                <a:solidFill>
+                  <a:srgbClr val="3B3634"/>
+                </a:solidFill>
+                <a:latin typeface="Yu Gothic" pitchFamily="34" charset="0"/>
+                <a:ea typeface="Yu Gothic" pitchFamily="34" charset="-122"/>
+                <a:cs typeface="Yu Gothic" pitchFamily="34" charset="-120"/>
+              </a:rPr>
+              <a:t>練習の力を試合でも出したい</a:t>
+            </a:r>
+            <a:endParaRPr lang="en-US" sz="1800" dirty="0"/>
+          </a:p>
+        </p:txBody>
+      </p:sp>
+      <p:sp>
+        <p:nvSpPr>
+          <p:cNvPr id="11" name="Text 9"/>
+          <p:cNvSpPr txBox="1"/>
+          <p:nvPr/>
+        </p:nvSpPr>
+        <p:spPr>
+          <a:xfrm>
+            <a:off x="457200" y="3209544"/>
+            <a:ext cx="292608" cy="402336"/>
+          </a:xfrm>
+          <a:prstGeom prst="rect">
+            <a:avLst/>
+          </a:prstGeom>
+          <a:noFill/>
+          <a:ln/>
+        </p:spPr>
+        <p:txBody>
+          <a:bodyPr wrap="square" lIns="0" tIns="0" rIns="0" bIns="0" rtlCol="0" anchor="ctr"/>
+          <a:lstStyle/>
+          <a:p>
+            <a:pPr indent="0" marL="0">
+              <a:buNone/>
+            </a:pPr>
+            <a:r>
+              <a:rPr lang="en-US" sz="1800" b="1" dirty="0">
+                <a:solidFill>
+                  <a:srgbClr val="7A1524"/>
+                </a:solidFill>
+                <a:latin typeface="Yu Gothic" pitchFamily="34" charset="0"/>
+                <a:ea typeface="Yu Gothic" pitchFamily="34" charset="-122"/>
+                <a:cs typeface="Yu Gothic" pitchFamily="34" charset="-120"/>
+              </a:rPr>
+              <a:t>・</a:t>
+            </a:r>
+            <a:endParaRPr lang="en-US" sz="1800" dirty="0"/>
+          </a:p>
+        </p:txBody>
+      </p:sp>
+      <p:sp>
+        <p:nvSpPr>
+          <p:cNvPr id="12" name="Text 10"/>
+          <p:cNvSpPr txBox="1"/>
+          <p:nvPr/>
+        </p:nvSpPr>
+        <p:spPr>
+          <a:xfrm>
+            <a:off x="731520" y="3209544"/>
+            <a:ext cx="7955280" cy="402336"/>
+          </a:xfrm>
+          <a:prstGeom prst="rect">
+            <a:avLst/>
+          </a:prstGeom>
+          <a:noFill/>
+          <a:ln/>
+        </p:spPr>
+        <p:txBody>
+          <a:bodyPr wrap="square" lIns="0" tIns="0" rIns="0" bIns="0" rtlCol="0" anchor="ctr"/>
+          <a:lstStyle/>
+          <a:p>
+            <a:pPr indent="0" marL="0">
+              <a:buNone/>
+            </a:pPr>
+            <a:r>
+              <a:rPr lang="en-US" sz="1800" dirty="0">
+                <a:solidFill>
+                  <a:srgbClr val="3B3634"/>
+                </a:solidFill>
+                <a:latin typeface="Yu Gothic" pitchFamily="34" charset="0"/>
+                <a:ea typeface="Yu Gothic" pitchFamily="34" charset="-122"/>
+                <a:cs typeface="Yu Gothic" pitchFamily="34" charset="-120"/>
+              </a:rPr>
+              <a:t>一本の失敗を引きずりたくない</a:t>
+            </a:r>
+            <a:endParaRPr lang="en-US" sz="1800" dirty="0"/>
+          </a:p>
+        </p:txBody>
+      </p:sp>
+      <p:sp>
+        <p:nvSpPr>
+          <p:cNvPr id="13" name="Text 11"/>
+          <p:cNvSpPr txBox="1"/>
+          <p:nvPr/>
+        </p:nvSpPr>
+        <p:spPr>
+          <a:xfrm>
+            <a:off x="457200" y="3685032"/>
+            <a:ext cx="292608" cy="402336"/>
+          </a:xfrm>
+          <a:prstGeom prst="rect">
+            <a:avLst/>
+          </a:prstGeom>
+          <a:noFill/>
+          <a:ln/>
+        </p:spPr>
+        <p:txBody>
+          <a:bodyPr wrap="square" lIns="0" tIns="0" rIns="0" bIns="0" rtlCol="0" anchor="ctr"/>
+          <a:lstStyle/>
+          <a:p>
+            <a:pPr indent="0" marL="0">
+              <a:buNone/>
+            </a:pPr>
+            <a:r>
+              <a:rPr lang="en-US" sz="1800" b="1" dirty="0">
+                <a:solidFill>
+                  <a:srgbClr val="7A1524"/>
+                </a:solidFill>
+                <a:latin typeface="Yu Gothic" pitchFamily="34" charset="0"/>
+                <a:ea typeface="Yu Gothic" pitchFamily="34" charset="-122"/>
+                <a:cs typeface="Yu Gothic" pitchFamily="34" charset="-120"/>
+              </a:rPr>
+              <a:t>・</a:t>
+            </a:r>
+            <a:endParaRPr lang="en-US" sz="1800" dirty="0"/>
+          </a:p>
+        </p:txBody>
+      </p:sp>
+      <p:sp>
+        <p:nvSpPr>
+          <p:cNvPr id="14" name="Text 12"/>
+          <p:cNvSpPr txBox="1"/>
+          <p:nvPr/>
+        </p:nvSpPr>
+        <p:spPr>
+          <a:xfrm>
+            <a:off x="731520" y="3685032"/>
+            <a:ext cx="7955280" cy="402336"/>
+          </a:xfrm>
+          <a:prstGeom prst="rect">
+            <a:avLst/>
+          </a:prstGeom>
+          <a:noFill/>
+          <a:ln/>
+        </p:spPr>
+        <p:txBody>
+          <a:bodyPr wrap="square" lIns="0" tIns="0" rIns="0" bIns="0" rtlCol="0" anchor="ctr"/>
+          <a:lstStyle/>
+          <a:p>
+            <a:pPr indent="0" marL="0">
+              <a:buNone/>
+            </a:pPr>
+            <a:r>
+              <a:rPr lang="en-US" sz="1800" dirty="0">
+                <a:solidFill>
+                  <a:srgbClr val="3B3634"/>
+                </a:solidFill>
+                <a:latin typeface="Yu Gothic" pitchFamily="34" charset="0"/>
+                <a:ea typeface="Yu Gothic" pitchFamily="34" charset="-122"/>
+                <a:cs typeface="Yu Gothic" pitchFamily="34" charset="-120"/>
+              </a:rPr>
+              <a:t>試合をもっと楽しみたい</a:t>
+            </a:r>
+            <a:endParaRPr lang="en-US" sz="1800" dirty="0"/>
+          </a:p>
+        </p:txBody>
+      </p:sp>
+      <p:sp>
+        <p:nvSpPr>
+          <p:cNvPr id="15" name="Text 13"/>
+          <p:cNvSpPr txBox="1"/>
+          <p:nvPr/>
+        </p:nvSpPr>
+        <p:spPr>
+          <a:xfrm>
+            <a:off x="457200" y="4160520"/>
+            <a:ext cx="292608" cy="402336"/>
+          </a:xfrm>
+          <a:prstGeom prst="rect">
+            <a:avLst/>
+          </a:prstGeom>
+          <a:noFill/>
+          <a:ln/>
+        </p:spPr>
+        <p:txBody>
+          <a:bodyPr wrap="square" lIns="0" tIns="0" rIns="0" bIns="0" rtlCol="0" anchor="ctr"/>
+          <a:lstStyle/>
+          <a:p>
+            <a:pPr indent="0" marL="0">
+              <a:buNone/>
+            </a:pPr>
+            <a:r>
+              <a:rPr lang="en-US" sz="1800" b="1" dirty="0">
+                <a:solidFill>
+                  <a:srgbClr val="7A1524"/>
+                </a:solidFill>
+                <a:latin typeface="Yu Gothic" pitchFamily="34" charset="0"/>
+                <a:ea typeface="Yu Gothic" pitchFamily="34" charset="-122"/>
+                <a:cs typeface="Yu Gothic" pitchFamily="34" charset="-120"/>
+              </a:rPr>
+              <a:t>・</a:t>
+            </a:r>
+            <a:endParaRPr lang="en-US" sz="1800" dirty="0"/>
+          </a:p>
+        </p:txBody>
+      </p:sp>
+      <p:sp>
+        <p:nvSpPr>
+          <p:cNvPr id="16" name="Text 14"/>
+          <p:cNvSpPr txBox="1"/>
+          <p:nvPr/>
+        </p:nvSpPr>
+        <p:spPr>
+          <a:xfrm>
+            <a:off x="731520" y="4160520"/>
+            <a:ext cx="7955280" cy="402336"/>
+          </a:xfrm>
+          <a:prstGeom prst="rect">
+            <a:avLst/>
+          </a:prstGeom>
+          <a:noFill/>
+          <a:ln/>
+        </p:spPr>
+        <p:txBody>
+          <a:bodyPr wrap="square" lIns="0" tIns="0" rIns="0" bIns="0" rtlCol="0" anchor="ctr"/>
+          <a:lstStyle/>
+          <a:p>
+            <a:pPr indent="0" marL="0">
+              <a:buNone/>
+            </a:pPr>
+            <a:r>
+              <a:rPr lang="en-US" sz="1800" dirty="0">
+                <a:solidFill>
+                  <a:srgbClr val="3B3634"/>
+                </a:solidFill>
+                <a:latin typeface="Yu Gothic" pitchFamily="34" charset="0"/>
+                <a:ea typeface="Yu Gothic" pitchFamily="34" charset="-122"/>
+                <a:cs typeface="Yu Gothic" pitchFamily="34" charset="-120"/>
+              </a:rPr>
+              <a:t>メンタルもトレーニングしたい</a:t>
+            </a:r>
+            <a:endParaRPr lang="en-US" sz="1800" dirty="0"/>
+          </a:p>
+        </p:txBody>
+      </p:sp>
+    </p:spTree>
+  </p:cSld>
+  <p:clrMapOvr>
+    <a:masterClrMapping/>
+  </p:clrMapOvr>
+</p:sld>
+</file>
+
+<file path=ppt/slides/slide56.xml><?xml version="1.0" encoding="utf-8"?>
+<p:sld xmlns:a="http://schemas.openxmlformats.org/drawingml/2006/main" xmlns:r="http://schemas.openxmlformats.org/officeDocument/2006/relationships" xmlns:p="http://schemas.openxmlformats.org/presentationml/2006/main">
+  <p:cSld name="Slide 56">
+    <p:bg>
+      <p:bgPr>
+        <a:solidFill>
+          <a:srgbClr val="FFFFFF"/>
+        </a:solidFill>
+      </p:bgPr>
+    </p:bg>
+    <p:spTree>
+      <p:nvGrpSpPr>
+        <p:cNvPr id="1" name=""/>
+        <p:cNvGrpSpPr/>
+        <p:nvPr/>
+      </p:nvGrpSpPr>
+      <p:grpSpPr>
+        <a:xfrm>
+          <a:off x="0" y="0"/>
+          <a:ext cx="0" cy="0"/>
+          <a:chOff x="0" y="0"/>
+          <a:chExt cx="0" cy="0"/>
+        </a:xfrm>
+      </p:grpSpPr>
+      <p:sp>
+        <p:nvSpPr>
+          <p:cNvPr id="2" name="Text 0"/>
+          <p:cNvSpPr txBox="1"/>
+          <p:nvPr/>
+        </p:nvSpPr>
+        <p:spPr>
+          <a:xfrm>
+            <a:off x="457200" y="237744"/>
+            <a:ext cx="6400800" cy="274320"/>
+          </a:xfrm>
+          <a:prstGeom prst="rect">
+            <a:avLst/>
+          </a:prstGeom>
+          <a:noFill/>
+          <a:ln/>
+        </p:spPr>
+        <p:txBody>
+          <a:bodyPr wrap="square" lIns="0" tIns="0" rIns="0" bIns="0" rtlCol="0" anchor="ctr"/>
+          <a:lstStyle/>
+          <a:p>
+            <a:pPr indent="0" marL="0">
+              <a:buNone/>
+            </a:pPr>
+            <a:r>
+              <a:rPr lang="en-US" sz="1200" b="1" spc="200" kern="0" dirty="0">
+                <a:solidFill>
+                  <a:srgbClr val="7A1524"/>
+                </a:solidFill>
+                <a:latin typeface="Yu Gothic" pitchFamily="34" charset="0"/>
+                <a:ea typeface="Yu Gothic" pitchFamily="34" charset="-122"/>
+                <a:cs typeface="Yu Gothic" pitchFamily="34" charset="-120"/>
+              </a:rPr>
+              <a:t>ここから先</a:t>
+            </a:r>
+            <a:endParaRPr lang="en-US" sz="1200" dirty="0"/>
+          </a:p>
+        </p:txBody>
+      </p:sp>
+      <p:sp>
+        <p:nvSpPr>
+          <p:cNvPr id="3" name="Text 1"/>
+          <p:cNvSpPr txBox="1"/>
+          <p:nvPr/>
+        </p:nvSpPr>
+        <p:spPr>
+          <a:xfrm>
+            <a:off x="8138160" y="4832604"/>
+            <a:ext cx="548640" cy="256032"/>
+          </a:xfrm>
+          <a:prstGeom prst="rect">
+            <a:avLst/>
+          </a:prstGeom>
+          <a:noFill/>
+          <a:ln/>
+        </p:spPr>
+        <p:txBody>
+          <a:bodyPr wrap="square" lIns="0" tIns="0" rIns="0" bIns="0" rtlCol="0" anchor="ctr"/>
+          <a:lstStyle/>
+          <a:p>
+            <a:pPr algn="r" indent="0" marL="0">
+              <a:buNone/>
+            </a:pPr>
+            <a:r>
+              <a:rPr lang="en-US" sz="1100" dirty="0">
+                <a:solidFill>
+                  <a:srgbClr val="6B6360"/>
+                </a:solidFill>
+                <a:latin typeface="Yu Gothic" pitchFamily="34" charset="0"/>
+                <a:ea typeface="Yu Gothic" pitchFamily="34" charset="-122"/>
+                <a:cs typeface="Yu Gothic" pitchFamily="34" charset="-120"/>
+              </a:rPr>
+              <a:t>56</a:t>
+            </a:r>
+            <a:endParaRPr lang="en-US" sz="1100" dirty="0"/>
+          </a:p>
+        </p:txBody>
+      </p:sp>
+      <p:sp>
+        <p:nvSpPr>
+          <p:cNvPr id="4" name="Text 2"/>
+          <p:cNvSpPr txBox="1"/>
+          <p:nvPr/>
+        </p:nvSpPr>
+        <p:spPr>
+          <a:xfrm>
+            <a:off x="457200" y="777240"/>
+            <a:ext cx="8229600" cy="1188720"/>
+          </a:xfrm>
+          <a:prstGeom prst="rect">
+            <a:avLst/>
+          </a:prstGeom>
+          <a:noFill/>
+          <a:ln/>
+        </p:spPr>
+        <p:txBody>
+          <a:bodyPr wrap="square" lIns="0" tIns="0" rIns="0" bIns="0" rtlCol="0" anchor="t"/>
+          <a:lstStyle/>
+          <a:p>
+            <a:pPr algn="l" indent="0" marL="0">
+              <a:lnSpc>
+                <a:spcPts val="4060"/>
+              </a:lnSpc>
+              <a:buNone/>
+            </a:pPr>
+            <a:r>
+              <a:rPr lang="en-US" sz="2800" b="1" dirty="0">
+                <a:solidFill>
+                  <a:srgbClr val="141416"/>
+                </a:solidFill>
+                <a:latin typeface="Yu Mincho" pitchFamily="34" charset="0"/>
+                <a:ea typeface="Yu Mincho" pitchFamily="34" charset="-122"/>
+                <a:cs typeface="Yu Mincho" pitchFamily="34" charset="-120"/>
+              </a:rPr>
+              <a:t>個別相談で講座の案内をすることもあります</a:t>
+            </a:r>
+            <a:endParaRPr lang="en-US" sz="2800" dirty="0"/>
+          </a:p>
+        </p:txBody>
+      </p:sp>
+      <p:sp>
+        <p:nvSpPr>
+          <p:cNvPr id="5" name="Text 3"/>
+          <p:cNvSpPr txBox="1"/>
+          <p:nvPr/>
+        </p:nvSpPr>
+        <p:spPr>
+          <a:xfrm>
+            <a:off x="457200" y="1691640"/>
+            <a:ext cx="8229600" cy="1371600"/>
+          </a:xfrm>
+          <a:prstGeom prst="rect">
+            <a:avLst/>
+          </a:prstGeom>
+          <a:noFill/>
+          <a:ln/>
+        </p:spPr>
+        <p:txBody>
+          <a:bodyPr wrap="square" lIns="0" tIns="0" rIns="0" bIns="0" rtlCol="0" anchor="ctr"/>
+          <a:lstStyle/>
+          <a:p>
+            <a:pPr indent="0" marL="0">
+              <a:lnSpc>
+                <a:spcPts val="3000"/>
+              </a:lnSpc>
+              <a:buNone/>
+            </a:pPr>
+            <a:r>
+              <a:rPr lang="en-US" sz="1800" dirty="0">
+                <a:solidFill>
+                  <a:srgbClr val="3B3634"/>
+                </a:solidFill>
+                <a:latin typeface="Yu Gothic" pitchFamily="34" charset="0"/>
+                <a:ea typeface="Yu Gothic" pitchFamily="34" charset="-122"/>
+                <a:cs typeface="Yu Gothic" pitchFamily="34" charset="-120"/>
+              </a:rPr>
+              <a:t>必要だと感じた方には、</a:t>
+            </a:r>
+            <a:endParaRPr lang="en-US" sz="1800" dirty="0"/>
+          </a:p>
+          <a:p>
+            <a:pPr indent="0" marL="0">
+              <a:lnSpc>
+                <a:spcPts val="3000"/>
+              </a:lnSpc>
+              <a:buNone/>
+            </a:pPr>
+            <a:r>
+              <a:rPr lang="en-US" sz="1800" dirty="0">
+                <a:solidFill>
+                  <a:srgbClr val="3B3634"/>
+                </a:solidFill>
+                <a:latin typeface="Yu Gothic" pitchFamily="34" charset="0"/>
+                <a:ea typeface="Yu Gothic" pitchFamily="34" charset="-122"/>
+                <a:cs typeface="Yu Gothic" pitchFamily="34" charset="-120"/>
+              </a:rPr>
+              <a:t>「パワーリフターのための実践メンタルトレーニング」</a:t>
+            </a:r>
+            <a:endParaRPr lang="en-US" sz="1800" dirty="0"/>
+          </a:p>
+          <a:p>
+            <a:pPr indent="0" marL="0">
+              <a:lnSpc>
+                <a:spcPts val="3000"/>
+              </a:lnSpc>
+              <a:buNone/>
+            </a:pPr>
+            <a:r>
+              <a:rPr lang="en-US" sz="1800" dirty="0">
+                <a:solidFill>
+                  <a:srgbClr val="3B3634"/>
+                </a:solidFill>
+                <a:latin typeface="Yu Gothic" pitchFamily="34" charset="0"/>
+                <a:ea typeface="Yu Gothic" pitchFamily="34" charset="-122"/>
+                <a:cs typeface="Yu Gothic" pitchFamily="34" charset="-120"/>
+              </a:rPr>
+              <a:t>についてもお話しします。</a:t>
+            </a:r>
+            <a:endParaRPr lang="en-US" sz="1800" dirty="0"/>
+          </a:p>
+        </p:txBody>
+      </p:sp>
+      <p:sp>
+        <p:nvSpPr>
+          <p:cNvPr id="6" name="Shape 4"/>
+          <p:cNvSpPr/>
+          <p:nvPr/>
+        </p:nvSpPr>
+        <p:spPr>
+          <a:xfrm>
+            <a:off x="457200" y="3154680"/>
+            <a:ext cx="8229600" cy="731520"/>
+          </a:xfrm>
+          <a:prstGeom prst="roundRect">
+            <a:avLst>
+              <a:gd name="adj" fmla="val 8750"/>
+            </a:avLst>
+          </a:prstGeom>
+          <a:solidFill>
+            <a:srgbClr val="540E19"/>
+          </a:solidFill>
+          <a:ln w="12700">
+            <a:solidFill>
+              <a:srgbClr val="540E19"/>
+            </a:solidFill>
+            <a:prstDash val="solid"/>
+          </a:ln>
+        </p:spPr>
+      </p:sp>
+      <p:sp>
+        <p:nvSpPr>
+          <p:cNvPr id="7" name="Text 5"/>
+          <p:cNvSpPr txBox="1"/>
+          <p:nvPr/>
+        </p:nvSpPr>
+        <p:spPr>
+          <a:xfrm>
+            <a:off x="822960" y="3154680"/>
+            <a:ext cx="7498080" cy="731520"/>
+          </a:xfrm>
+          <a:prstGeom prst="rect">
+            <a:avLst/>
+          </a:prstGeom>
+          <a:noFill/>
+          <a:ln/>
+        </p:spPr>
+        <p:txBody>
+          <a:bodyPr wrap="square" lIns="0" tIns="0" rIns="0" bIns="0" rtlCol="0" anchor="ctr"/>
+          <a:lstStyle/>
+          <a:p>
+            <a:pPr indent="0" marL="0">
+              <a:buNone/>
+            </a:pPr>
+            <a:r>
+              <a:rPr lang="en-US" sz="2100" b="1" dirty="0">
+                <a:solidFill>
+                  <a:srgbClr val="FFFFFF"/>
+                </a:solidFill>
+                <a:latin typeface="Yu Mincho" pitchFamily="34" charset="0"/>
+                <a:ea typeface="Yu Mincho" pitchFamily="34" charset="-122"/>
+                <a:cs typeface="Yu Mincho" pitchFamily="34" charset="-120"/>
+              </a:rPr>
+              <a:t>でも、その場で決める必要はありません。</a:t>
+            </a:r>
+            <a:endParaRPr lang="en-US" sz="2100" dirty="0"/>
+          </a:p>
+        </p:txBody>
+      </p:sp>
+      <p:sp>
+        <p:nvSpPr>
+          <p:cNvPr id="8" name="Text 6"/>
+          <p:cNvSpPr txBox="1"/>
+          <p:nvPr/>
+        </p:nvSpPr>
+        <p:spPr>
+          <a:xfrm>
+            <a:off x="457200" y="4114800"/>
+            <a:ext cx="7498080" cy="411480"/>
+          </a:xfrm>
+          <a:prstGeom prst="rect">
+            <a:avLst/>
+          </a:prstGeom>
+          <a:noFill/>
+          <a:ln/>
+        </p:spPr>
+        <p:txBody>
+          <a:bodyPr wrap="square" lIns="0" tIns="0" rIns="0" bIns="0" rtlCol="0" anchor="ctr"/>
+          <a:lstStyle/>
+          <a:p>
+            <a:pPr indent="0" marL="0">
+              <a:buNone/>
+            </a:pPr>
+            <a:r>
+              <a:rPr lang="en-US" sz="1800" b="1" dirty="0">
+                <a:solidFill>
+                  <a:srgbClr val="7A1524"/>
+                </a:solidFill>
+                <a:latin typeface="Yu Gothic" pitchFamily="34" charset="0"/>
+                <a:ea typeface="Yu Gothic" pitchFamily="34" charset="-122"/>
+                <a:cs typeface="Yu Gothic" pitchFamily="34" charset="-120"/>
+              </a:rPr>
+              <a:t>まずは「自分には何が必要か」を整理することが目的です。</a:t>
+            </a:r>
+            <a:endParaRPr lang="en-US" sz="1800" dirty="0"/>
+          </a:p>
+        </p:txBody>
+      </p:sp>
+    </p:spTree>
+  </p:cSld>
+  <p:clrMapOvr>
+    <a:masterClrMapping/>
+  </p:clrMapOvr>
+</p:sld>
+</file>
+
+<file path=ppt/slides/slide57.xml><?xml version="1.0" encoding="utf-8"?>
+<p:sld xmlns:a="http://schemas.openxmlformats.org/drawingml/2006/main" xmlns:r="http://schemas.openxmlformats.org/officeDocument/2006/relationships" xmlns:p="http://schemas.openxmlformats.org/presentationml/2006/main">
+  <p:cSld name="Slide 57">
+    <p:bg>
+      <p:bgPr>
+        <a:solidFill>
+          <a:srgbClr val="FFFFFF"/>
+        </a:solidFill>
+      </p:bgPr>
+    </p:bg>
+    <p:spTree>
+      <p:nvGrpSpPr>
+        <p:cNvPr id="1" name=""/>
+        <p:cNvGrpSpPr/>
+        <p:nvPr/>
+      </p:nvGrpSpPr>
+      <p:grpSpPr>
+        <a:xfrm>
+          <a:off x="0" y="0"/>
+          <a:ext cx="0" cy="0"/>
+          <a:chOff x="0" y="0"/>
+          <a:chExt cx="0" cy="0"/>
+        </a:xfrm>
+      </p:grpSpPr>
+      <p:sp>
+        <p:nvSpPr>
+          <p:cNvPr id="2" name="Text 0"/>
+          <p:cNvSpPr txBox="1"/>
+          <p:nvPr/>
+        </p:nvSpPr>
+        <p:spPr>
+          <a:xfrm>
+            <a:off x="457200" y="237744"/>
+            <a:ext cx="6400800" cy="274320"/>
+          </a:xfrm>
+          <a:prstGeom prst="rect">
+            <a:avLst/>
+          </a:prstGeom>
+          <a:noFill/>
+          <a:ln/>
+        </p:spPr>
+        <p:txBody>
+          <a:bodyPr wrap="square" lIns="0" tIns="0" rIns="0" bIns="0" rtlCol="0" anchor="ctr"/>
+          <a:lstStyle/>
+          <a:p>
+            <a:pPr indent="0" marL="0">
+              <a:buNone/>
+            </a:pPr>
+            <a:r>
+              <a:rPr lang="en-US" sz="1200" b="1" spc="200" kern="0" dirty="0">
+                <a:solidFill>
+                  <a:srgbClr val="7A1524"/>
+                </a:solidFill>
+                <a:latin typeface="Yu Gothic" pitchFamily="34" charset="0"/>
+                <a:ea typeface="Yu Gothic" pitchFamily="34" charset="-122"/>
+                <a:cs typeface="Yu Gothic" pitchFamily="34" charset="-120"/>
+              </a:rPr>
+              <a:t>おわりに</a:t>
+            </a:r>
+            <a:endParaRPr lang="en-US" sz="1200" dirty="0"/>
+          </a:p>
+        </p:txBody>
+      </p:sp>
+      <p:sp>
+        <p:nvSpPr>
+          <p:cNvPr id="3" name="Text 1"/>
+          <p:cNvSpPr txBox="1"/>
+          <p:nvPr/>
+        </p:nvSpPr>
+        <p:spPr>
+          <a:xfrm>
+            <a:off x="8138160" y="4832604"/>
+            <a:ext cx="548640" cy="256032"/>
+          </a:xfrm>
+          <a:prstGeom prst="rect">
+            <a:avLst/>
+          </a:prstGeom>
+          <a:noFill/>
+          <a:ln/>
+        </p:spPr>
+        <p:txBody>
+          <a:bodyPr wrap="square" lIns="0" tIns="0" rIns="0" bIns="0" rtlCol="0" anchor="ctr"/>
+          <a:lstStyle/>
+          <a:p>
+            <a:pPr algn="r" indent="0" marL="0">
+              <a:buNone/>
+            </a:pPr>
+            <a:r>
+              <a:rPr lang="en-US" sz="1100" dirty="0">
+                <a:solidFill>
+                  <a:srgbClr val="6B6360"/>
+                </a:solidFill>
+                <a:latin typeface="Yu Gothic" pitchFamily="34" charset="0"/>
+                <a:ea typeface="Yu Gothic" pitchFamily="34" charset="-122"/>
+                <a:cs typeface="Yu Gothic" pitchFamily="34" charset="-120"/>
+              </a:rPr>
+              <a:t>57</a:t>
+            </a:r>
+            <a:endParaRPr lang="en-US" sz="1100" dirty="0"/>
+          </a:p>
+        </p:txBody>
+      </p:sp>
+      <p:sp>
+        <p:nvSpPr>
+          <p:cNvPr id="4" name="Text 2"/>
+          <p:cNvSpPr txBox="1"/>
+          <p:nvPr/>
+        </p:nvSpPr>
+        <p:spPr>
+          <a:xfrm>
+            <a:off x="457200" y="777240"/>
+            <a:ext cx="8229600" cy="1188720"/>
+          </a:xfrm>
+          <a:prstGeom prst="rect">
+            <a:avLst/>
+          </a:prstGeom>
+          <a:noFill/>
+          <a:ln/>
+        </p:spPr>
+        <p:txBody>
+          <a:bodyPr wrap="square" lIns="0" tIns="0" rIns="0" bIns="0" rtlCol="0" anchor="t"/>
+          <a:lstStyle/>
+          <a:p>
+            <a:pPr algn="l" indent="0" marL="0">
+              <a:lnSpc>
+                <a:spcPts val="4495"/>
+              </a:lnSpc>
+              <a:buNone/>
+            </a:pPr>
+            <a:r>
+              <a:rPr lang="en-US" sz="3100" b="1" dirty="0">
+                <a:solidFill>
+                  <a:srgbClr val="141416"/>
+                </a:solidFill>
+                <a:latin typeface="Yu Mincho" pitchFamily="34" charset="0"/>
+                <a:ea typeface="Yu Mincho" pitchFamily="34" charset="-122"/>
+                <a:cs typeface="Yu Mincho" pitchFamily="34" charset="-120"/>
+              </a:rPr>
+              <a:t>今日のゴールは、もう達成しています</a:t>
+            </a:r>
+            <a:endParaRPr lang="en-US" sz="3100" dirty="0"/>
+          </a:p>
+        </p:txBody>
+      </p:sp>
+      <p:sp>
+        <p:nvSpPr>
+          <p:cNvPr id="5" name="Shape 3"/>
+          <p:cNvSpPr/>
+          <p:nvPr/>
+        </p:nvSpPr>
+        <p:spPr>
+          <a:xfrm>
+            <a:off x="457200" y="1828800"/>
+            <a:ext cx="8229600" cy="685800"/>
+          </a:xfrm>
+          <a:prstGeom prst="roundRect">
+            <a:avLst>
+              <a:gd name="adj" fmla="val 8000"/>
+            </a:avLst>
+          </a:prstGeom>
+          <a:solidFill>
+            <a:srgbClr val="FAF3F4"/>
+          </a:solidFill>
+          <a:ln w="12700">
+            <a:solidFill>
+              <a:srgbClr val="FAF3F4"/>
+            </a:solidFill>
+            <a:prstDash val="solid"/>
+          </a:ln>
+        </p:spPr>
+      </p:sp>
+      <p:sp>
+        <p:nvSpPr>
+          <p:cNvPr id="6" name="Text 4"/>
+          <p:cNvSpPr txBox="1"/>
+          <p:nvPr/>
+        </p:nvSpPr>
+        <p:spPr>
+          <a:xfrm>
+            <a:off x="749808" y="1828800"/>
+            <a:ext cx="7644384" cy="685800"/>
+          </a:xfrm>
+          <a:prstGeom prst="rect">
+            <a:avLst/>
+          </a:prstGeom>
+          <a:noFill/>
+          <a:ln/>
+        </p:spPr>
+        <p:txBody>
+          <a:bodyPr wrap="square" lIns="0" tIns="0" rIns="0" bIns="0" rtlCol="0" anchor="ctr"/>
+          <a:lstStyle/>
+          <a:p>
+            <a:pPr indent="0" marL="0">
+              <a:buNone/>
+            </a:pPr>
+            <a:r>
+              <a:rPr lang="en-US" sz="1900" b="1" dirty="0">
+                <a:solidFill>
+                  <a:srgbClr val="7A1524"/>
+                </a:solidFill>
+                <a:latin typeface="Yu Gothic" pitchFamily="34" charset="0"/>
+                <a:ea typeface="Yu Gothic" pitchFamily="34" charset="-122"/>
+                <a:cs typeface="Yu Gothic" pitchFamily="34" charset="-120"/>
+              </a:rPr>
+              <a:t>「私、ちゃんと進んでた」　に気づく。</a:t>
+            </a:r>
+            <a:endParaRPr lang="en-US" sz="1900" dirty="0"/>
+          </a:p>
+        </p:txBody>
+      </p:sp>
+      <p:sp>
+        <p:nvSpPr>
+          <p:cNvPr id="7" name="Shape 5"/>
+          <p:cNvSpPr/>
+          <p:nvPr/>
+        </p:nvSpPr>
+        <p:spPr>
+          <a:xfrm>
+            <a:off x="457200" y="2606040"/>
+            <a:ext cx="8229600" cy="685800"/>
+          </a:xfrm>
+          <a:prstGeom prst="roundRect">
+            <a:avLst>
+              <a:gd name="adj" fmla="val 8000"/>
+            </a:avLst>
+          </a:prstGeom>
+          <a:solidFill>
+            <a:srgbClr val="FAF3F4"/>
+          </a:solidFill>
+          <a:ln w="12700">
+            <a:solidFill>
+              <a:srgbClr val="FAF3F4"/>
+            </a:solidFill>
+            <a:prstDash val="solid"/>
+          </a:ln>
+        </p:spPr>
+      </p:sp>
+      <p:sp>
+        <p:nvSpPr>
+          <p:cNvPr id="8" name="Text 6"/>
+          <p:cNvSpPr txBox="1"/>
+          <p:nvPr/>
+        </p:nvSpPr>
+        <p:spPr>
+          <a:xfrm>
+            <a:off x="749808" y="2606040"/>
+            <a:ext cx="7644384" cy="685800"/>
+          </a:xfrm>
+          <a:prstGeom prst="rect">
+            <a:avLst/>
+          </a:prstGeom>
+          <a:noFill/>
+          <a:ln/>
+        </p:spPr>
+        <p:txBody>
+          <a:bodyPr wrap="square" lIns="0" tIns="0" rIns="0" bIns="0" rtlCol="0" anchor="ctr"/>
+          <a:lstStyle/>
+          <a:p>
+            <a:pPr indent="0" marL="0">
+              <a:buNone/>
+            </a:pPr>
+            <a:r>
+              <a:rPr lang="en-US" sz="1900" b="1" dirty="0">
+                <a:solidFill>
+                  <a:srgbClr val="7A1524"/>
+                </a:solidFill>
+                <a:latin typeface="Yu Gothic" pitchFamily="34" charset="0"/>
+                <a:ea typeface="Yu Gothic" pitchFamily="34" charset="-122"/>
+                <a:cs typeface="Yu Gothic" pitchFamily="34" charset="-120"/>
+              </a:rPr>
+              <a:t>「じゃあ次、私は何をする？」　を自分で決める。</a:t>
+            </a:r>
+            <a:endParaRPr lang="en-US" sz="1900" dirty="0"/>
+          </a:p>
+        </p:txBody>
+      </p:sp>
+      <p:sp>
+        <p:nvSpPr>
+          <p:cNvPr id="9" name="Shape 7"/>
+          <p:cNvSpPr/>
+          <p:nvPr/>
+        </p:nvSpPr>
+        <p:spPr>
+          <a:xfrm>
+            <a:off x="457200" y="3703320"/>
+            <a:ext cx="8229600" cy="868680"/>
+          </a:xfrm>
+          <a:prstGeom prst="roundRect">
+            <a:avLst>
+              <a:gd name="adj" fmla="val 8421"/>
+            </a:avLst>
+          </a:prstGeom>
+          <a:solidFill>
+            <a:srgbClr val="540E19"/>
+          </a:solidFill>
+          <a:ln w="12700">
+            <a:solidFill>
+              <a:srgbClr val="540E19"/>
+            </a:solidFill>
+            <a:prstDash val="solid"/>
+          </a:ln>
+        </p:spPr>
+      </p:sp>
+      <p:sp>
+        <p:nvSpPr>
+          <p:cNvPr id="10" name="Text 8"/>
+          <p:cNvSpPr txBox="1"/>
+          <p:nvPr/>
+        </p:nvSpPr>
+        <p:spPr>
+          <a:xfrm>
+            <a:off x="822960" y="3703320"/>
+            <a:ext cx="7498080" cy="868680"/>
+          </a:xfrm>
+          <a:prstGeom prst="rect">
+            <a:avLst/>
+          </a:prstGeom>
+          <a:noFill/>
+          <a:ln/>
+        </p:spPr>
+        <p:txBody>
+          <a:bodyPr wrap="square" lIns="0" tIns="0" rIns="0" bIns="0" rtlCol="0" anchor="ctr"/>
+          <a:lstStyle/>
+          <a:p>
+            <a:pPr indent="0" marL="0">
+              <a:lnSpc>
+                <a:spcPts val="3080"/>
+              </a:lnSpc>
+              <a:buNone/>
+            </a:pPr>
+            <a:r>
+              <a:rPr lang="en-US" sz="2200" b="1" dirty="0">
+                <a:solidFill>
+                  <a:srgbClr val="FFFFFF"/>
+                </a:solidFill>
+                <a:latin typeface="Yu Mincho" pitchFamily="34" charset="0"/>
+                <a:ea typeface="Yu Mincho" pitchFamily="34" charset="-122"/>
+                <a:cs typeface="Yu Mincho" pitchFamily="34" charset="-120"/>
+              </a:rPr>
+              <a:t>今日決めた一歩を、ぜひ持ち帰ってください。</a:t>
+            </a:r>
+            <a:endParaRPr lang="en-US" sz="2200" dirty="0"/>
+          </a:p>
+        </p:txBody>
+      </p:sp>
+    </p:spTree>
+  </p:cSld>
+  <p:clrMapOvr>
+    <a:masterClrMapping/>
+  </p:clrMapOvr>
+</p:sld>
+</file>
+
+<file path=ppt/slides/slide58.xml><?xml version="1.0" encoding="utf-8"?>
+<p:sld xmlns:a="http://schemas.openxmlformats.org/drawingml/2006/main" xmlns:r="http://schemas.openxmlformats.org/officeDocument/2006/relationships" xmlns:p="http://schemas.openxmlformats.org/presentationml/2006/main">
+  <p:cSld name="Slide 58">
+    <p:bg>
+      <p:bgPr>
+        <a:solidFill>
+          <a:srgbClr val="540E19"/>
+        </a:solidFill>
+      </p:bgPr>
+    </p:bg>
+    <p:spTree>
+      <p:nvGrpSpPr>
+        <p:cNvPr id="1" name=""/>
+        <p:cNvGrpSpPr/>
+        <p:nvPr/>
+      </p:nvGrpSpPr>
+      <p:grpSpPr>
+        <a:xfrm>
+          <a:off x="0" y="0"/>
+          <a:ext cx="0" cy="0"/>
+          <a:chOff x="0" y="0"/>
+          <a:chExt cx="0" cy="0"/>
+        </a:xfrm>
+      </p:grpSpPr>
+      <p:sp>
+        <p:nvSpPr>
+          <p:cNvPr id="2" name="Text 0"/>
+          <p:cNvSpPr txBox="1"/>
+          <p:nvPr/>
+        </p:nvSpPr>
+        <p:spPr>
+          <a:xfrm>
+            <a:off x="8138160" y="4832604"/>
+            <a:ext cx="548640" cy="256032"/>
+          </a:xfrm>
+          <a:prstGeom prst="rect">
+            <a:avLst/>
+          </a:prstGeom>
+          <a:noFill/>
+          <a:ln/>
+        </p:spPr>
+        <p:txBody>
+          <a:bodyPr wrap="square" lIns="0" tIns="0" rIns="0" bIns="0" rtlCol="0" anchor="ctr"/>
+          <a:lstStyle/>
+          <a:p>
+            <a:pPr algn="r" indent="0" marL="0">
+              <a:buNone/>
+            </a:pPr>
+            <a:r>
+              <a:rPr lang="en-US" sz="1100" dirty="0">
+                <a:solidFill>
+                  <a:srgbClr val="8A6870"/>
+                </a:solidFill>
+                <a:latin typeface="Yu Gothic" pitchFamily="34" charset="0"/>
+                <a:ea typeface="Yu Gothic" pitchFamily="34" charset="-122"/>
+                <a:cs typeface="Yu Gothic" pitchFamily="34" charset="-120"/>
+              </a:rPr>
+              <a:t>58</a:t>
+            </a:r>
+            <a:endParaRPr lang="en-US" sz="1100" dirty="0"/>
+          </a:p>
+        </p:txBody>
+      </p:sp>
+      <p:sp>
+        <p:nvSpPr>
+          <p:cNvPr id="3" name="Text 1"/>
+          <p:cNvSpPr txBox="1"/>
+          <p:nvPr/>
+        </p:nvSpPr>
+        <p:spPr>
+          <a:xfrm>
+            <a:off x="457200" y="658368"/>
+            <a:ext cx="8229600" cy="1188720"/>
+          </a:xfrm>
+          <a:prstGeom prst="rect">
+            <a:avLst/>
+          </a:prstGeom>
+          <a:noFill/>
+          <a:ln/>
+        </p:spPr>
+        <p:txBody>
+          <a:bodyPr wrap="square" lIns="0" tIns="0" rIns="0" bIns="0" rtlCol="0" anchor="t"/>
+          <a:lstStyle/>
+          <a:p>
+            <a:pPr algn="l" indent="0" marL="0">
+              <a:lnSpc>
+                <a:spcPts val="4060"/>
+              </a:lnSpc>
+              <a:buNone/>
+            </a:pPr>
+            <a:r>
+              <a:rPr lang="en-US" sz="2800" b="1" dirty="0">
+                <a:solidFill>
+                  <a:srgbClr val="FFFFFF"/>
+                </a:solidFill>
+                <a:latin typeface="Yu Mincho" pitchFamily="34" charset="0"/>
+                <a:ea typeface="Yu Mincho" pitchFamily="34" charset="-122"/>
+                <a:cs typeface="Yu Mincho" pitchFamily="34" charset="-120"/>
+              </a:rPr>
+              <a:t>小さな「できた」は、次の一本につながる</a:t>
+            </a:r>
+            <a:endParaRPr lang="en-US" sz="2800" dirty="0"/>
+          </a:p>
+        </p:txBody>
+      </p:sp>
+      <p:sp>
+        <p:nvSpPr>
+          <p:cNvPr id="4" name="Shape 2"/>
+          <p:cNvSpPr/>
+          <p:nvPr/>
+        </p:nvSpPr>
+        <p:spPr>
+          <a:xfrm>
+            <a:off x="457200" y="1463040"/>
+            <a:ext cx="5120640" cy="402336"/>
+          </a:xfrm>
+          <a:prstGeom prst="roundRect">
+            <a:avLst>
+              <a:gd name="adj" fmla="val 11364"/>
+            </a:avLst>
+          </a:prstGeom>
+          <a:solidFill>
+            <a:srgbClr val="3A0B12"/>
+          </a:solidFill>
+          <a:ln w="12700">
+            <a:solidFill>
+              <a:srgbClr val="3A0B12"/>
+            </a:solidFill>
+            <a:prstDash val="solid"/>
+          </a:ln>
+        </p:spPr>
+      </p:sp>
+      <p:sp>
+        <p:nvSpPr>
+          <p:cNvPr id="5" name="Text 3"/>
+          <p:cNvSpPr txBox="1"/>
+          <p:nvPr/>
+        </p:nvSpPr>
+        <p:spPr>
+          <a:xfrm>
+            <a:off x="777240" y="1463040"/>
+            <a:ext cx="4663440" cy="402336"/>
+          </a:xfrm>
+          <a:prstGeom prst="rect">
+            <a:avLst/>
+          </a:prstGeom>
+          <a:noFill/>
+          <a:ln/>
+        </p:spPr>
+        <p:txBody>
+          <a:bodyPr wrap="square" lIns="0" tIns="0" rIns="0" bIns="0" rtlCol="0" anchor="ctr"/>
+          <a:lstStyle/>
+          <a:p>
+            <a:pPr indent="0" marL="0">
+              <a:buNone/>
+            </a:pPr>
+            <a:r>
+              <a:rPr lang="en-US" sz="1600" b="1" dirty="0">
+                <a:solidFill>
+                  <a:srgbClr val="FFFFFF"/>
+                </a:solidFill>
+                <a:latin typeface="Yu Gothic" pitchFamily="34" charset="0"/>
+                <a:ea typeface="Yu Gothic" pitchFamily="34" charset="-122"/>
+                <a:cs typeface="Yu Gothic" pitchFamily="34" charset="-120"/>
+              </a:rPr>
+              <a:t>できたを見つける。</a:t>
+            </a:r>
+            <a:endParaRPr lang="en-US" sz="1600" dirty="0"/>
+          </a:p>
+        </p:txBody>
+      </p:sp>
+      <p:sp>
+        <p:nvSpPr>
+          <p:cNvPr id="6" name="Text 4"/>
+          <p:cNvSpPr txBox="1"/>
+          <p:nvPr/>
+        </p:nvSpPr>
+        <p:spPr>
+          <a:xfrm>
+            <a:off x="457200" y="1837944"/>
+            <a:ext cx="457200" cy="128016"/>
+          </a:xfrm>
+          <a:prstGeom prst="rect">
+            <a:avLst/>
+          </a:prstGeom>
+          <a:noFill/>
+          <a:ln/>
+        </p:spPr>
+        <p:txBody>
+          <a:bodyPr wrap="square" lIns="0" tIns="0" rIns="0" bIns="0" rtlCol="0" anchor="ctr"/>
+          <a:lstStyle/>
+          <a:p>
+            <a:pPr algn="ctr" indent="0" marL="0">
+              <a:buNone/>
+            </a:pPr>
+            <a:r>
+              <a:rPr lang="en-US" sz="1000" dirty="0">
+                <a:solidFill>
+                  <a:srgbClr val="8A6870"/>
+                </a:solidFill>
+                <a:latin typeface="Yu Gothic" pitchFamily="34" charset="0"/>
+                <a:ea typeface="Yu Gothic" pitchFamily="34" charset="-122"/>
+                <a:cs typeface="Yu Gothic" pitchFamily="34" charset="-120"/>
+              </a:rPr>
+              <a:t>↓</a:t>
+            </a:r>
+            <a:endParaRPr lang="en-US" sz="1000" dirty="0"/>
+          </a:p>
+        </p:txBody>
+      </p:sp>
+      <p:sp>
+        <p:nvSpPr>
+          <p:cNvPr id="7" name="Shape 5"/>
+          <p:cNvSpPr/>
+          <p:nvPr/>
+        </p:nvSpPr>
+        <p:spPr>
+          <a:xfrm>
+            <a:off x="457200" y="1938528"/>
+            <a:ext cx="5120640" cy="402336"/>
+          </a:xfrm>
+          <a:prstGeom prst="roundRect">
+            <a:avLst>
+              <a:gd name="adj" fmla="val 11364"/>
+            </a:avLst>
+          </a:prstGeom>
+          <a:solidFill>
+            <a:srgbClr val="3A0B12"/>
+          </a:solidFill>
+          <a:ln w="12700">
+            <a:solidFill>
+              <a:srgbClr val="3A0B12"/>
+            </a:solidFill>
+            <a:prstDash val="solid"/>
+          </a:ln>
+        </p:spPr>
+      </p:sp>
+      <p:sp>
+        <p:nvSpPr>
+          <p:cNvPr id="8" name="Text 6"/>
+          <p:cNvSpPr txBox="1"/>
+          <p:nvPr/>
+        </p:nvSpPr>
+        <p:spPr>
+          <a:xfrm>
+            <a:off x="777240" y="1938528"/>
+            <a:ext cx="4663440" cy="402336"/>
+          </a:xfrm>
+          <a:prstGeom prst="rect">
+            <a:avLst/>
+          </a:prstGeom>
+          <a:noFill/>
+          <a:ln/>
+        </p:spPr>
+        <p:txBody>
+          <a:bodyPr wrap="square" lIns="0" tIns="0" rIns="0" bIns="0" rtlCol="0" anchor="ctr"/>
+          <a:lstStyle/>
+          <a:p>
+            <a:pPr indent="0" marL="0">
+              <a:buNone/>
+            </a:pPr>
+            <a:r>
+              <a:rPr lang="en-US" sz="1600" b="1" dirty="0">
+                <a:solidFill>
+                  <a:srgbClr val="FFFFFF"/>
+                </a:solidFill>
+                <a:latin typeface="Yu Gothic" pitchFamily="34" charset="0"/>
+                <a:ea typeface="Yu Gothic" pitchFamily="34" charset="-122"/>
+                <a:cs typeface="Yu Gothic" pitchFamily="34" charset="-120"/>
+              </a:rPr>
+              <a:t>自分を知る。</a:t>
+            </a:r>
+            <a:endParaRPr lang="en-US" sz="1600" dirty="0"/>
+          </a:p>
+        </p:txBody>
+      </p:sp>
+      <p:sp>
+        <p:nvSpPr>
+          <p:cNvPr id="9" name="Text 7"/>
+          <p:cNvSpPr txBox="1"/>
+          <p:nvPr/>
+        </p:nvSpPr>
+        <p:spPr>
+          <a:xfrm>
+            <a:off x="457200" y="2313432"/>
+            <a:ext cx="457200" cy="128016"/>
+          </a:xfrm>
+          <a:prstGeom prst="rect">
+            <a:avLst/>
+          </a:prstGeom>
+          <a:noFill/>
+          <a:ln/>
+        </p:spPr>
+        <p:txBody>
+          <a:bodyPr wrap="square" lIns="0" tIns="0" rIns="0" bIns="0" rtlCol="0" anchor="ctr"/>
+          <a:lstStyle/>
+          <a:p>
+            <a:pPr algn="ctr" indent="0" marL="0">
+              <a:buNone/>
+            </a:pPr>
+            <a:r>
+              <a:rPr lang="en-US" sz="1000" dirty="0">
+                <a:solidFill>
+                  <a:srgbClr val="8A6870"/>
+                </a:solidFill>
+                <a:latin typeface="Yu Gothic" pitchFamily="34" charset="0"/>
+                <a:ea typeface="Yu Gothic" pitchFamily="34" charset="-122"/>
+                <a:cs typeface="Yu Gothic" pitchFamily="34" charset="-120"/>
+              </a:rPr>
+              <a:t>↓</a:t>
+            </a:r>
+            <a:endParaRPr lang="en-US" sz="1000" dirty="0"/>
+          </a:p>
+        </p:txBody>
+      </p:sp>
+      <p:sp>
+        <p:nvSpPr>
+          <p:cNvPr id="10" name="Shape 8"/>
+          <p:cNvSpPr/>
+          <p:nvPr/>
+        </p:nvSpPr>
+        <p:spPr>
+          <a:xfrm>
+            <a:off x="457200" y="2414016"/>
+            <a:ext cx="5120640" cy="402336"/>
+          </a:xfrm>
+          <a:prstGeom prst="roundRect">
+            <a:avLst>
+              <a:gd name="adj" fmla="val 11364"/>
+            </a:avLst>
+          </a:prstGeom>
+          <a:solidFill>
+            <a:srgbClr val="3A0B12"/>
+          </a:solidFill>
+          <a:ln w="12700">
+            <a:solidFill>
+              <a:srgbClr val="3A0B12"/>
+            </a:solidFill>
+            <a:prstDash val="solid"/>
+          </a:ln>
+        </p:spPr>
+      </p:sp>
+      <p:sp>
+        <p:nvSpPr>
+          <p:cNvPr id="11" name="Text 9"/>
+          <p:cNvSpPr txBox="1"/>
+          <p:nvPr/>
+        </p:nvSpPr>
+        <p:spPr>
+          <a:xfrm>
+            <a:off x="777240" y="2414016"/>
+            <a:ext cx="4663440" cy="402336"/>
+          </a:xfrm>
+          <a:prstGeom prst="rect">
+            <a:avLst/>
+          </a:prstGeom>
+          <a:noFill/>
+          <a:ln/>
+        </p:spPr>
+        <p:txBody>
+          <a:bodyPr wrap="square" lIns="0" tIns="0" rIns="0" bIns="0" rtlCol="0" anchor="ctr"/>
+          <a:lstStyle/>
+          <a:p>
+            <a:pPr indent="0" marL="0">
+              <a:buNone/>
+            </a:pPr>
+            <a:r>
+              <a:rPr lang="en-US" sz="1600" b="1" dirty="0">
+                <a:solidFill>
+                  <a:srgbClr val="FFFFFF"/>
+                </a:solidFill>
+                <a:latin typeface="Yu Gothic" pitchFamily="34" charset="0"/>
+                <a:ea typeface="Yu Gothic" pitchFamily="34" charset="-122"/>
+                <a:cs typeface="Yu Gothic" pitchFamily="34" charset="-120"/>
+              </a:rPr>
+              <a:t>目標を決める。</a:t>
+            </a:r>
+            <a:endParaRPr lang="en-US" sz="1600" dirty="0"/>
+          </a:p>
+        </p:txBody>
+      </p:sp>
+      <p:sp>
+        <p:nvSpPr>
+          <p:cNvPr id="12" name="Text 10"/>
+          <p:cNvSpPr txBox="1"/>
+          <p:nvPr/>
+        </p:nvSpPr>
+        <p:spPr>
+          <a:xfrm>
+            <a:off x="457200" y="2788920"/>
+            <a:ext cx="457200" cy="128016"/>
+          </a:xfrm>
+          <a:prstGeom prst="rect">
+            <a:avLst/>
+          </a:prstGeom>
+          <a:noFill/>
+          <a:ln/>
+        </p:spPr>
+        <p:txBody>
+          <a:bodyPr wrap="square" lIns="0" tIns="0" rIns="0" bIns="0" rtlCol="0" anchor="ctr"/>
+          <a:lstStyle/>
+          <a:p>
+            <a:pPr algn="ctr" indent="0" marL="0">
+              <a:buNone/>
+            </a:pPr>
+            <a:r>
+              <a:rPr lang="en-US" sz="1000" dirty="0">
+                <a:solidFill>
+                  <a:srgbClr val="8A6870"/>
+                </a:solidFill>
+                <a:latin typeface="Yu Gothic" pitchFamily="34" charset="0"/>
+                <a:ea typeface="Yu Gothic" pitchFamily="34" charset="-122"/>
+                <a:cs typeface="Yu Gothic" pitchFamily="34" charset="-120"/>
+              </a:rPr>
+              <a:t>↓</a:t>
+            </a:r>
+            <a:endParaRPr lang="en-US" sz="1000" dirty="0"/>
+          </a:p>
+        </p:txBody>
+      </p:sp>
+      <p:sp>
+        <p:nvSpPr>
+          <p:cNvPr id="13" name="Shape 11"/>
+          <p:cNvSpPr/>
+          <p:nvPr/>
+        </p:nvSpPr>
+        <p:spPr>
+          <a:xfrm>
+            <a:off x="457200" y="2889504"/>
+            <a:ext cx="5120640" cy="402336"/>
+          </a:xfrm>
+          <a:prstGeom prst="roundRect">
+            <a:avLst>
+              <a:gd name="adj" fmla="val 11364"/>
+            </a:avLst>
+          </a:prstGeom>
+          <a:solidFill>
+            <a:srgbClr val="3A0B12"/>
+          </a:solidFill>
+          <a:ln w="12700">
+            <a:solidFill>
+              <a:srgbClr val="3A0B12"/>
+            </a:solidFill>
+            <a:prstDash val="solid"/>
+          </a:ln>
+        </p:spPr>
+      </p:sp>
+      <p:sp>
+        <p:nvSpPr>
+          <p:cNvPr id="14" name="Text 12"/>
+          <p:cNvSpPr txBox="1"/>
+          <p:nvPr/>
+        </p:nvSpPr>
+        <p:spPr>
+          <a:xfrm>
+            <a:off x="777240" y="2889504"/>
+            <a:ext cx="4663440" cy="402336"/>
+          </a:xfrm>
+          <a:prstGeom prst="rect">
+            <a:avLst/>
+          </a:prstGeom>
+          <a:noFill/>
+          <a:ln/>
+        </p:spPr>
+        <p:txBody>
+          <a:bodyPr wrap="square" lIns="0" tIns="0" rIns="0" bIns="0" rtlCol="0" anchor="ctr"/>
+          <a:lstStyle/>
+          <a:p>
+            <a:pPr indent="0" marL="0">
+              <a:buNone/>
+            </a:pPr>
+            <a:r>
+              <a:rPr lang="en-US" sz="1600" b="1" dirty="0">
+                <a:solidFill>
+                  <a:srgbClr val="FFFFFF"/>
+                </a:solidFill>
+                <a:latin typeface="Yu Gothic" pitchFamily="34" charset="0"/>
+                <a:ea typeface="Yu Gothic" pitchFamily="34" charset="-122"/>
+                <a:cs typeface="Yu Gothic" pitchFamily="34" charset="-120"/>
+              </a:rPr>
+              <a:t>行動を選ぶ。</a:t>
+            </a:r>
+            <a:endParaRPr lang="en-US" sz="1600" dirty="0"/>
+          </a:p>
+        </p:txBody>
+      </p:sp>
+      <p:sp>
+        <p:nvSpPr>
+          <p:cNvPr id="15" name="Text 13"/>
+          <p:cNvSpPr txBox="1"/>
+          <p:nvPr/>
+        </p:nvSpPr>
+        <p:spPr>
+          <a:xfrm>
+            <a:off x="457200" y="3264408"/>
+            <a:ext cx="457200" cy="128016"/>
+          </a:xfrm>
+          <a:prstGeom prst="rect">
+            <a:avLst/>
+          </a:prstGeom>
+          <a:noFill/>
+          <a:ln/>
+        </p:spPr>
+        <p:txBody>
+          <a:bodyPr wrap="square" lIns="0" tIns="0" rIns="0" bIns="0" rtlCol="0" anchor="ctr"/>
+          <a:lstStyle/>
+          <a:p>
+            <a:pPr algn="ctr" indent="0" marL="0">
+              <a:buNone/>
+            </a:pPr>
+            <a:r>
+              <a:rPr lang="en-US" sz="1000" dirty="0">
+                <a:solidFill>
+                  <a:srgbClr val="8A6870"/>
+                </a:solidFill>
+                <a:latin typeface="Yu Gothic" pitchFamily="34" charset="0"/>
+                <a:ea typeface="Yu Gothic" pitchFamily="34" charset="-122"/>
+                <a:cs typeface="Yu Gothic" pitchFamily="34" charset="-120"/>
+              </a:rPr>
+              <a:t>↓</a:t>
+            </a:r>
+            <a:endParaRPr lang="en-US" sz="1000" dirty="0"/>
+          </a:p>
+        </p:txBody>
+      </p:sp>
+      <p:sp>
+        <p:nvSpPr>
+          <p:cNvPr id="16" name="Shape 14"/>
+          <p:cNvSpPr/>
+          <p:nvPr/>
+        </p:nvSpPr>
+        <p:spPr>
+          <a:xfrm>
+            <a:off x="457200" y="3364992"/>
+            <a:ext cx="5120640" cy="402336"/>
+          </a:xfrm>
+          <a:prstGeom prst="roundRect">
+            <a:avLst>
+              <a:gd name="adj" fmla="val 11364"/>
+            </a:avLst>
+          </a:prstGeom>
+          <a:solidFill>
+            <a:srgbClr val="A02236"/>
+          </a:solidFill>
+          <a:ln w="12700">
+            <a:solidFill>
+              <a:srgbClr val="A02236"/>
+            </a:solidFill>
+            <a:prstDash val="solid"/>
+          </a:ln>
+        </p:spPr>
+      </p:sp>
+      <p:sp>
+        <p:nvSpPr>
+          <p:cNvPr id="17" name="Text 15"/>
+          <p:cNvSpPr txBox="1"/>
+          <p:nvPr/>
+        </p:nvSpPr>
+        <p:spPr>
+          <a:xfrm>
+            <a:off x="777240" y="3364992"/>
+            <a:ext cx="4663440" cy="402336"/>
+          </a:xfrm>
+          <a:prstGeom prst="rect">
+            <a:avLst/>
+          </a:prstGeom>
+          <a:noFill/>
+          <a:ln/>
+        </p:spPr>
+        <p:txBody>
+          <a:bodyPr wrap="square" lIns="0" tIns="0" rIns="0" bIns="0" rtlCol="0" anchor="ctr"/>
+          <a:lstStyle/>
+          <a:p>
+            <a:pPr indent="0" marL="0">
+              <a:buNone/>
+            </a:pPr>
+            <a:r>
+              <a:rPr lang="en-US" sz="1600" b="1" dirty="0">
+                <a:solidFill>
+                  <a:srgbClr val="FFFFFF"/>
+                </a:solidFill>
+                <a:latin typeface="Yu Gothic" pitchFamily="34" charset="0"/>
+                <a:ea typeface="Yu Gothic" pitchFamily="34" charset="-122"/>
+                <a:cs typeface="Yu Gothic" pitchFamily="34" charset="-120"/>
+              </a:rPr>
+              <a:t>また、できたが増える。</a:t>
+            </a:r>
+            <a:endParaRPr lang="en-US" sz="1600" dirty="0"/>
+          </a:p>
+        </p:txBody>
+      </p:sp>
+      <p:sp>
+        <p:nvSpPr>
+          <p:cNvPr id="18" name="Shape 16"/>
+          <p:cNvSpPr/>
+          <p:nvPr/>
+        </p:nvSpPr>
+        <p:spPr>
+          <a:xfrm>
+            <a:off x="5806440" y="1463040"/>
+            <a:ext cx="2880360" cy="2231136"/>
+          </a:xfrm>
+          <a:prstGeom prst="roundRect">
+            <a:avLst>
+              <a:gd name="adj" fmla="val 3279"/>
+            </a:avLst>
+          </a:prstGeom>
+          <a:solidFill>
+            <a:srgbClr val="3A0B12"/>
+          </a:solidFill>
+          <a:ln w="12700">
+            <a:solidFill>
+              <a:srgbClr val="3A0B12"/>
+            </a:solidFill>
+            <a:prstDash val="solid"/>
+          </a:ln>
+        </p:spPr>
+      </p:sp>
+      <p:sp>
+        <p:nvSpPr>
+          <p:cNvPr id="19" name="Text 17"/>
+          <p:cNvSpPr txBox="1"/>
+          <p:nvPr/>
+        </p:nvSpPr>
+        <p:spPr>
+          <a:xfrm>
+            <a:off x="6080760" y="1463040"/>
+            <a:ext cx="2331720" cy="2231136"/>
+          </a:xfrm>
+          <a:prstGeom prst="rect">
+            <a:avLst/>
+          </a:prstGeom>
+          <a:noFill/>
+          <a:ln/>
+        </p:spPr>
+        <p:txBody>
+          <a:bodyPr wrap="square" lIns="0" tIns="0" rIns="0" bIns="0" rtlCol="0" anchor="ctr"/>
+          <a:lstStyle/>
+          <a:p>
+            <a:pPr indent="0" marL="0">
+              <a:lnSpc>
+                <a:spcPts val="2800"/>
+              </a:lnSpc>
+              <a:buNone/>
+            </a:pPr>
+            <a:r>
+              <a:rPr lang="en-US" sz="1600" b="1" dirty="0">
+                <a:solidFill>
+                  <a:srgbClr val="F2E7E9"/>
+                </a:solidFill>
+                <a:latin typeface="Yu Gothic" pitchFamily="34" charset="0"/>
+                <a:ea typeface="Yu Gothic" pitchFamily="34" charset="-122"/>
+                <a:cs typeface="Yu Gothic" pitchFamily="34" charset="-120"/>
+              </a:rPr>
+              <a:t>その積み重ねが、</a:t>
+            </a:r>
+            <a:endParaRPr lang="en-US" sz="1600" dirty="0"/>
+          </a:p>
+          <a:p>
+            <a:pPr indent="0" marL="0">
+              <a:lnSpc>
+                <a:spcPts val="2800"/>
+              </a:lnSpc>
+              <a:buNone/>
+            </a:pPr>
+            <a:r>
+              <a:rPr lang="en-US" sz="1600" b="1" dirty="0">
+                <a:solidFill>
+                  <a:srgbClr val="F2E7E9"/>
+                </a:solidFill>
+                <a:latin typeface="Yu Gothic" pitchFamily="34" charset="0"/>
+                <a:ea typeface="Yu Gothic" pitchFamily="34" charset="-122"/>
+                <a:cs typeface="Yu Gothic" pitchFamily="34" charset="-120"/>
+              </a:rPr>
+              <a:t>「私なら次も進める」</a:t>
+            </a:r>
+            <a:endParaRPr lang="en-US" sz="1600" dirty="0"/>
+          </a:p>
+          <a:p>
+            <a:pPr indent="0" marL="0">
+              <a:lnSpc>
+                <a:spcPts val="2800"/>
+              </a:lnSpc>
+              <a:buNone/>
+            </a:pPr>
+            <a:r>
+              <a:rPr lang="en-US" sz="1600" b="1" dirty="0">
+                <a:solidFill>
+                  <a:srgbClr val="F2E7E9"/>
+                </a:solidFill>
+                <a:latin typeface="Yu Gothic" pitchFamily="34" charset="0"/>
+                <a:ea typeface="Yu Gothic" pitchFamily="34" charset="-122"/>
+                <a:cs typeface="Yu Gothic" pitchFamily="34" charset="-120"/>
+              </a:rPr>
+              <a:t>という自己信頼に</a:t>
+            </a:r>
+            <a:endParaRPr lang="en-US" sz="1600" dirty="0"/>
+          </a:p>
+          <a:p>
+            <a:pPr indent="0" marL="0">
+              <a:lnSpc>
+                <a:spcPts val="2800"/>
+              </a:lnSpc>
+              <a:buNone/>
+            </a:pPr>
+            <a:r>
+              <a:rPr lang="en-US" sz="1600" b="1" dirty="0">
+                <a:solidFill>
+                  <a:srgbClr val="F2E7E9"/>
+                </a:solidFill>
+                <a:latin typeface="Yu Gothic" pitchFamily="34" charset="0"/>
+                <a:ea typeface="Yu Gothic" pitchFamily="34" charset="-122"/>
+                <a:cs typeface="Yu Gothic" pitchFamily="34" charset="-120"/>
+              </a:rPr>
+              <a:t>なります。</a:t>
+            </a:r>
+            <a:endParaRPr lang="en-US" sz="1600" dirty="0"/>
+          </a:p>
+        </p:txBody>
+      </p:sp>
+      <p:sp>
+        <p:nvSpPr>
+          <p:cNvPr id="20" name="Shape 18"/>
+          <p:cNvSpPr/>
+          <p:nvPr/>
+        </p:nvSpPr>
+        <p:spPr>
+          <a:xfrm>
+            <a:off x="457200" y="3977640"/>
+            <a:ext cx="8229600" cy="777240"/>
+          </a:xfrm>
+          <a:prstGeom prst="roundRect">
+            <a:avLst>
+              <a:gd name="adj" fmla="val 9412"/>
+            </a:avLst>
+          </a:prstGeom>
+          <a:solidFill>
+            <a:srgbClr val="FFFFFF"/>
+          </a:solidFill>
+          <a:ln w="12700">
+            <a:solidFill>
+              <a:srgbClr val="FFFFFF"/>
+            </a:solidFill>
+            <a:prstDash val="solid"/>
+          </a:ln>
+        </p:spPr>
+      </p:sp>
+      <p:sp>
+        <p:nvSpPr>
+          <p:cNvPr id="21" name="Text 19"/>
+          <p:cNvSpPr txBox="1"/>
+          <p:nvPr/>
+        </p:nvSpPr>
+        <p:spPr>
+          <a:xfrm>
+            <a:off x="457200" y="3977640"/>
+            <a:ext cx="8229600" cy="777240"/>
+          </a:xfrm>
+          <a:prstGeom prst="rect">
+            <a:avLst/>
+          </a:prstGeom>
+          <a:noFill/>
+          <a:ln/>
+        </p:spPr>
+        <p:txBody>
+          <a:bodyPr wrap="square" lIns="0" tIns="0" rIns="0" bIns="0" rtlCol="0" anchor="ctr"/>
+          <a:lstStyle/>
+          <a:p>
+            <a:pPr algn="ctr" indent="0" marL="0">
+              <a:buNone/>
+            </a:pPr>
+            <a:r>
+              <a:rPr lang="en-US" sz="2200" b="1" dirty="0">
+                <a:solidFill>
+                  <a:srgbClr val="540E19"/>
+                </a:solidFill>
+                <a:latin typeface="Yu Mincho" pitchFamily="34" charset="0"/>
+                <a:ea typeface="Yu Mincho" pitchFamily="34" charset="-122"/>
+                <a:cs typeface="Yu Mincho" pitchFamily="34" charset="-120"/>
+              </a:rPr>
+              <a:t>今日はありがとうございました。</a:t>
+            </a:r>
+            <a:endParaRPr lang="en-US" sz="2200" dirty="0"/>
+          </a:p>
+        </p:txBody>
+      </p:sp>
+    </p:spTree>
+  </p:cSld>
+  <p:clrMapOvr>
+    <a:masterClrMapping/>
+  </p:clrMapOvr>
+</p:sld>
+</file>
+
 <file path=ppt/slides/slide6.xml><?xml version="1.0" encoding="utf-8"?>
 <p:sld xmlns:a="http://schemas.openxmlformats.org/drawingml/2006/main" xmlns:r="http://schemas.openxmlformats.org/officeDocument/2006/relationships" xmlns:p="http://schemas.openxmlformats.org/presentationml/2006/main">
   <p:cSld name="Slide 6">

--- a/seminar/seminar-dekita.pptx
+++ b/seminar/seminar-dekita.pptx
@@ -29109,7 +29109,7 @@
         </p:nvSpPr>
         <p:spPr>
           <a:xfrm>
-            <a:off x="8138160" y="4832604"/>
+            <a:off x="457200" y="4832604"/>
             <a:ext cx="548640" cy="256032"/>
           </a:xfrm>
           <a:prstGeom prst="rect">
@@ -29122,7 +29122,7 @@
           <a:bodyPr wrap="square" lIns="0" tIns="0" rIns="0" bIns="0" rtlCol="0" anchor="ctr"/>
           <a:lstStyle/>
           <a:p>
-            <a:pPr algn="r" indent="0" marL="0">
+            <a:pPr algn="l" indent="0" marL="0">
               <a:buNone/>
             </a:pPr>
             <a:r>
@@ -29148,8 +29148,8 @@
         </p:nvSpPr>
         <p:spPr>
           <a:xfrm>
-            <a:off x="457200" y="822960"/>
-            <a:ext cx="8229600" cy="365760"/>
+            <a:off x="457200" y="777240"/>
+            <a:ext cx="5760720" cy="365760"/>
           </a:xfrm>
           <a:prstGeom prst="rect">
             <a:avLst/>
@@ -29187,24 +29187,24 @@
         </p:nvSpPr>
         <p:spPr>
           <a:xfrm>
-            <a:off x="457200" y="1280160"/>
-            <a:ext cx="8229600" cy="914400"/>
-          </a:xfrm>
-          <a:prstGeom prst="rect">
-            <a:avLst/>
-          </a:prstGeom>
-          <a:noFill/>
-          <a:ln/>
-        </p:spPr>
-        <p:txBody>
-          <a:bodyPr wrap="square" lIns="0" tIns="0" rIns="0" bIns="0" rtlCol="0" anchor="ctr"/>
-          <a:lstStyle/>
-          <a:p>
-            <a:pPr indent="0" marL="0">
-              <a:buNone/>
-            </a:pPr>
-            <a:r>
-              <a:rPr lang="en-US" sz="4600" b="1" dirty="0">
+            <a:off x="457200" y="1188720"/>
+            <a:ext cx="5760720" cy="868680"/>
+          </a:xfrm>
+          <a:prstGeom prst="rect">
+            <a:avLst/>
+          </a:prstGeom>
+          <a:noFill/>
+          <a:ln/>
+        </p:spPr>
+        <p:txBody>
+          <a:bodyPr wrap="square" lIns="0" tIns="0" rIns="0" bIns="0" rtlCol="0" anchor="ctr"/>
+          <a:lstStyle/>
+          <a:p>
+            <a:pPr indent="0" marL="0">
+              <a:buNone/>
+            </a:pPr>
+            <a:r>
+              <a:rPr lang="en-US" sz="4400" b="1" dirty="0">
                 <a:solidFill>
                   <a:srgbClr val="FFFFFF"/>
                 </a:solidFill>
@@ -29218,7 +29218,7 @@
               <a:buNone/>
             </a:pPr>
             <a:r>
-              <a:rPr lang="en-US" sz="3400" b="1" dirty="0">
+              <a:rPr lang="en-US" sz="3200" b="1" dirty="0">
                 <a:solidFill>
                   <a:srgbClr val="FFFFFF"/>
                 </a:solidFill>
@@ -29228,7 +29228,7 @@
               </a:rPr>
               <a:t>　無料個別相談</a:t>
             </a:r>
-            <a:endParaRPr lang="en-US" sz="4600" dirty="0"/>
+            <a:endParaRPr lang="en-US" sz="4400" dirty="0"/>
           </a:p>
         </p:txBody>
       </p:sp>
@@ -29240,8 +29240,8 @@
         </p:nvSpPr>
         <p:spPr>
           <a:xfrm>
-            <a:off x="457200" y="2286000"/>
-            <a:ext cx="8229600" cy="320040"/>
+            <a:off x="457200" y="2176272"/>
+            <a:ext cx="5760720" cy="320040"/>
           </a:xfrm>
           <a:prstGeom prst="rect">
             <a:avLst/>
@@ -29279,12 +29279,12 @@
         </p:nvSpPr>
         <p:spPr>
           <a:xfrm>
-            <a:off x="457200" y="2697480"/>
-            <a:ext cx="2606040" cy="576072"/>
+            <a:off x="457200" y="2578608"/>
+            <a:ext cx="2743200" cy="512064"/>
           </a:xfrm>
           <a:prstGeom prst="roundRect">
             <a:avLst>
-              <a:gd name="adj" fmla="val 11111"/>
+              <a:gd name="adj" fmla="val 12500"/>
             </a:avLst>
           </a:prstGeom>
           <a:solidFill>
@@ -29306,8 +29306,8 @@
         </p:nvSpPr>
         <p:spPr>
           <a:xfrm>
-            <a:off x="457200" y="2697480"/>
-            <a:ext cx="2606040" cy="576072"/>
+            <a:off x="457200" y="2578608"/>
+            <a:ext cx="2743200" cy="512064"/>
           </a:xfrm>
           <a:prstGeom prst="rect">
             <a:avLst/>
@@ -29323,7 +29323,7 @@
               <a:buNone/>
             </a:pPr>
             <a:r>
-              <a:rPr lang="en-US" sz="1500" b="1" dirty="0">
+              <a:rPr lang="en-US" sz="1400" b="1" dirty="0">
                 <a:solidFill>
                   <a:srgbClr val="FFFFFF"/>
                 </a:solidFill>
@@ -29333,7 +29333,7 @@
               </a:rPr>
               <a:t>次の目標</a:t>
             </a:r>
-            <a:endParaRPr lang="en-US" sz="1500" dirty="0"/>
+            <a:endParaRPr lang="en-US" sz="1400" dirty="0"/>
           </a:p>
         </p:txBody>
       </p:sp>
@@ -29345,12 +29345,12 @@
         </p:nvSpPr>
         <p:spPr>
           <a:xfrm>
-            <a:off x="3246120" y="2697480"/>
-            <a:ext cx="2606040" cy="576072"/>
+            <a:off x="3337560" y="2578608"/>
+            <a:ext cx="2743200" cy="512064"/>
           </a:xfrm>
           <a:prstGeom prst="roundRect">
             <a:avLst>
-              <a:gd name="adj" fmla="val 11111"/>
+              <a:gd name="adj" fmla="val 12500"/>
             </a:avLst>
           </a:prstGeom>
           <a:solidFill>
@@ -29372,8 +29372,8 @@
         </p:nvSpPr>
         <p:spPr>
           <a:xfrm>
-            <a:off x="3246120" y="2697480"/>
-            <a:ext cx="2606040" cy="576072"/>
+            <a:off x="3337560" y="2578608"/>
+            <a:ext cx="2743200" cy="512064"/>
           </a:xfrm>
           <a:prstGeom prst="rect">
             <a:avLst/>
@@ -29389,7 +29389,7 @@
               <a:buNone/>
             </a:pPr>
             <a:r>
-              <a:rPr lang="en-US" sz="1500" b="1" dirty="0">
+              <a:rPr lang="en-US" sz="1400" b="1" dirty="0">
                 <a:solidFill>
                   <a:srgbClr val="FFFFFF"/>
                 </a:solidFill>
@@ -29399,7 +29399,7 @@
               </a:rPr>
               <a:t>今困っていること</a:t>
             </a:r>
-            <a:endParaRPr lang="en-US" sz="1500" dirty="0"/>
+            <a:endParaRPr lang="en-US" sz="1400" dirty="0"/>
           </a:p>
         </p:txBody>
       </p:sp>
@@ -29411,12 +29411,12 @@
         </p:nvSpPr>
         <p:spPr>
           <a:xfrm>
-            <a:off x="6035040" y="2697480"/>
-            <a:ext cx="2606040" cy="576072"/>
+            <a:off x="457200" y="3182112"/>
+            <a:ext cx="2743200" cy="512064"/>
           </a:xfrm>
           <a:prstGeom prst="roundRect">
             <a:avLst>
-              <a:gd name="adj" fmla="val 11111"/>
+              <a:gd name="adj" fmla="val 12500"/>
             </a:avLst>
           </a:prstGeom>
           <a:solidFill>
@@ -29438,8 +29438,8 @@
         </p:nvSpPr>
         <p:spPr>
           <a:xfrm>
-            <a:off x="6035040" y="2697480"/>
-            <a:ext cx="2606040" cy="576072"/>
+            <a:off x="457200" y="3182112"/>
+            <a:ext cx="2743200" cy="512064"/>
           </a:xfrm>
           <a:prstGeom prst="rect">
             <a:avLst/>
@@ -29455,7 +29455,7 @@
               <a:buNone/>
             </a:pPr>
             <a:r>
-              <a:rPr lang="en-US" sz="1500" b="1" dirty="0">
+              <a:rPr lang="en-US" sz="1400" b="1" dirty="0">
                 <a:solidFill>
                   <a:srgbClr val="FFFFFF"/>
                 </a:solidFill>
@@ -29465,7 +29465,7 @@
               </a:rPr>
               <a:t>崩れやすい場面</a:t>
             </a:r>
-            <a:endParaRPr lang="en-US" sz="1500" dirty="0"/>
+            <a:endParaRPr lang="en-US" sz="1400" dirty="0"/>
           </a:p>
         </p:txBody>
       </p:sp>
@@ -29477,12 +29477,12 @@
         </p:nvSpPr>
         <p:spPr>
           <a:xfrm>
-            <a:off x="457200" y="3383280"/>
-            <a:ext cx="2606040" cy="576072"/>
+            <a:off x="3337560" y="3182112"/>
+            <a:ext cx="2743200" cy="512064"/>
           </a:xfrm>
           <a:prstGeom prst="roundRect">
             <a:avLst>
-              <a:gd name="adj" fmla="val 11111"/>
+              <a:gd name="adj" fmla="val 12500"/>
             </a:avLst>
           </a:prstGeom>
           <a:solidFill>
@@ -29504,8 +29504,8 @@
         </p:nvSpPr>
         <p:spPr>
           <a:xfrm>
-            <a:off x="457200" y="3383280"/>
-            <a:ext cx="2606040" cy="576072"/>
+            <a:off x="3337560" y="3182112"/>
+            <a:ext cx="2743200" cy="512064"/>
           </a:xfrm>
           <a:prstGeom prst="rect">
             <a:avLst/>
@@ -29521,7 +29521,7 @@
               <a:buNone/>
             </a:pPr>
             <a:r>
-              <a:rPr lang="en-US" sz="1500" b="1" dirty="0">
+              <a:rPr lang="en-US" sz="1400" b="1" dirty="0">
                 <a:solidFill>
                   <a:srgbClr val="FFFFFF"/>
                 </a:solidFill>
@@ -29531,7 +29531,7 @@
               </a:rPr>
               <a:t>今必要なメンタルスキル</a:t>
             </a:r>
-            <a:endParaRPr lang="en-US" sz="1500" dirty="0"/>
+            <a:endParaRPr lang="en-US" sz="1400" dirty="0"/>
           </a:p>
         </p:txBody>
       </p:sp>
@@ -29543,12 +29543,12 @@
         </p:nvSpPr>
         <p:spPr>
           <a:xfrm>
-            <a:off x="3246120" y="3383280"/>
-            <a:ext cx="2606040" cy="576072"/>
+            <a:off x="457200" y="3785616"/>
+            <a:ext cx="2743200" cy="512064"/>
           </a:xfrm>
           <a:prstGeom prst="roundRect">
             <a:avLst>
-              <a:gd name="adj" fmla="val 11111"/>
+              <a:gd name="adj" fmla="val 12500"/>
             </a:avLst>
           </a:prstGeom>
           <a:solidFill>
@@ -29570,8 +29570,8 @@
         </p:nvSpPr>
         <p:spPr>
           <a:xfrm>
-            <a:off x="3246120" y="3383280"/>
-            <a:ext cx="2606040" cy="576072"/>
+            <a:off x="457200" y="3785616"/>
+            <a:ext cx="2743200" cy="512064"/>
           </a:xfrm>
           <a:prstGeom prst="rect">
             <a:avLst/>
@@ -29587,7 +29587,7 @@
               <a:buNone/>
             </a:pPr>
             <a:r>
-              <a:rPr lang="en-US" sz="1500" b="1" dirty="0">
+              <a:rPr lang="en-US" sz="1400" b="1" dirty="0">
                 <a:solidFill>
                   <a:srgbClr val="FFFFFF"/>
                 </a:solidFill>
@@ -29597,7 +29597,7 @@
               </a:rPr>
               <a:t>次にやること</a:t>
             </a:r>
-            <a:endParaRPr lang="en-US" sz="1500" dirty="0"/>
+            <a:endParaRPr lang="en-US" sz="1400" dirty="0"/>
           </a:p>
         </p:txBody>
       </p:sp>
@@ -29609,24 +29609,24 @@
         </p:nvSpPr>
         <p:spPr>
           <a:xfrm>
-            <a:off x="457200" y="4224528"/>
-            <a:ext cx="7498080" cy="411480"/>
-          </a:xfrm>
-          <a:prstGeom prst="rect">
-            <a:avLst/>
-          </a:prstGeom>
-          <a:noFill/>
-          <a:ln/>
-        </p:spPr>
-        <p:txBody>
-          <a:bodyPr wrap="square" lIns="0" tIns="0" rIns="0" bIns="0" rtlCol="0" anchor="ctr"/>
-          <a:lstStyle/>
-          <a:p>
-            <a:pPr indent="0" marL="0">
-              <a:buNone/>
-            </a:pPr>
-            <a:r>
-              <a:rPr lang="en-US" sz="1900" b="1" dirty="0">
+            <a:off x="457200" y="4434840"/>
+            <a:ext cx="5760720" cy="365760"/>
+          </a:xfrm>
+          <a:prstGeom prst="rect">
+            <a:avLst/>
+          </a:prstGeom>
+          <a:noFill/>
+          <a:ln/>
+        </p:spPr>
+        <p:txBody>
+          <a:bodyPr wrap="square" lIns="0" tIns="0" rIns="0" bIns="0" rtlCol="0" anchor="ctr"/>
+          <a:lstStyle/>
+          <a:p>
+            <a:pPr indent="0" marL="0">
+              <a:buNone/>
+            </a:pPr>
+            <a:r>
+              <a:rPr lang="en-US" sz="1800" b="1" dirty="0">
                 <a:solidFill>
                   <a:srgbClr val="F0B9C3"/>
                 </a:solidFill>
@@ -29636,7 +29636,198 @@
               </a:rPr>
               <a:t>を、一緒に整理します。</a:t>
             </a:r>
-            <a:endParaRPr lang="en-US" sz="1900" dirty="0"/>
+            <a:endParaRPr lang="en-US" sz="1800" dirty="0"/>
+          </a:p>
+        </p:txBody>
+      </p:sp>
+      <p:sp>
+        <p:nvSpPr>
+          <p:cNvPr id="18" name="Shape 16"/>
+          <p:cNvSpPr/>
+          <p:nvPr/>
+        </p:nvSpPr>
+        <p:spPr>
+          <a:xfrm>
+            <a:off x="6355080" y="1188720"/>
+            <a:ext cx="2331720" cy="2697480"/>
+          </a:xfrm>
+          <a:prstGeom prst="roundRect">
+            <a:avLst>
+              <a:gd name="adj" fmla="val 3137"/>
+            </a:avLst>
+          </a:prstGeom>
+          <a:solidFill>
+            <a:srgbClr val="FFFFFF"/>
+          </a:solidFill>
+          <a:ln w="12700">
+            <a:solidFill>
+              <a:srgbClr val="FFFFFF"/>
+            </a:solidFill>
+            <a:prstDash val="solid"/>
+          </a:ln>
+        </p:spPr>
+      </p:sp>
+      <p:pic>
+        <p:nvPicPr>
+          <p:cNvPr id="19" name="Image 0" descr="images/qr.png">    </p:cNvPr>
+          <p:cNvPicPr>
+            <a:picLocks noChangeAspect="1"/>
+          </p:cNvPicPr>
+          <p:nvPr/>
+        </p:nvPicPr>
+        <p:blipFill>
+          <a:blip r:embed="rId1"/>
+          <a:stretch>
+            <a:fillRect/>
+          </a:stretch>
+        </p:blipFill>
+        <p:spPr>
+          <a:xfrm>
+            <a:off x="6675120" y="1417320"/>
+            <a:ext cx="1691640" cy="1691640"/>
+          </a:xfrm>
+          <a:prstGeom prst="rect">
+            <a:avLst/>
+          </a:prstGeom>
+        </p:spPr>
+      </p:pic>
+      <p:sp>
+        <p:nvSpPr>
+          <p:cNvPr id="20" name="Text 17"/>
+          <p:cNvSpPr txBox="1"/>
+          <p:nvPr/>
+        </p:nvSpPr>
+        <p:spPr>
+          <a:xfrm>
+            <a:off x="6355080" y="3154680"/>
+            <a:ext cx="2331720" cy="640080"/>
+          </a:xfrm>
+          <a:prstGeom prst="rect">
+            <a:avLst/>
+          </a:prstGeom>
+          <a:noFill/>
+          <a:ln/>
+        </p:spPr>
+        <p:txBody>
+          <a:bodyPr wrap="square" lIns="0" tIns="0" rIns="0" bIns="0" rtlCol="0" anchor="ctr"/>
+          <a:lstStyle/>
+          <a:p>
+            <a:pPr algn="ctr" indent="0" marL="0">
+              <a:lnSpc>
+                <a:spcPts val="1900"/>
+              </a:lnSpc>
+              <a:buNone/>
+            </a:pPr>
+            <a:r>
+              <a:rPr lang="en-US" sz="1200" b="1" dirty="0">
+                <a:solidFill>
+                  <a:srgbClr val="540E19"/>
+                </a:solidFill>
+                <a:latin typeface="Yu Gothic" pitchFamily="34" charset="0"/>
+                <a:ea typeface="Yu Gothic" pitchFamily="34" charset="-122"/>
+                <a:cs typeface="Yu Gothic" pitchFamily="34" charset="-120"/>
+              </a:rPr>
+              <a:t>スマホのカメラで</a:t>
+            </a:r>
+            <a:endParaRPr lang="en-US" sz="1200" dirty="0"/>
+          </a:p>
+          <a:p>
+            <a:pPr algn="ctr" indent="0" marL="0">
+              <a:lnSpc>
+                <a:spcPts val="1900"/>
+              </a:lnSpc>
+              <a:buNone/>
+            </a:pPr>
+            <a:r>
+              <a:rPr lang="en-US" sz="1200" b="1" dirty="0">
+                <a:solidFill>
+                  <a:srgbClr val="540E19"/>
+                </a:solidFill>
+                <a:latin typeface="Yu Gothic" pitchFamily="34" charset="0"/>
+                <a:ea typeface="Yu Gothic" pitchFamily="34" charset="-122"/>
+                <a:cs typeface="Yu Gothic" pitchFamily="34" charset="-120"/>
+              </a:rPr>
+              <a:t>読み取ってください</a:t>
+            </a:r>
+            <a:endParaRPr lang="en-US" sz="1200" dirty="0"/>
+          </a:p>
+        </p:txBody>
+      </p:sp>
+      <p:sp>
+        <p:nvSpPr>
+          <p:cNvPr id="21" name="Text 18"/>
+          <p:cNvSpPr txBox="1"/>
+          <p:nvPr/>
+        </p:nvSpPr>
+        <p:spPr>
+          <a:xfrm>
+            <a:off x="6355080" y="4023360"/>
+            <a:ext cx="2331720" cy="292608"/>
+          </a:xfrm>
+          <a:prstGeom prst="rect">
+            <a:avLst/>
+          </a:prstGeom>
+          <a:noFill/>
+          <a:ln/>
+        </p:spPr>
+        <p:txBody>
+          <a:bodyPr wrap="square" lIns="0" tIns="0" rIns="0" bIns="0" rtlCol="0" anchor="ctr"/>
+          <a:lstStyle/>
+          <a:p>
+            <a:pPr algn="ctr" indent="0" marL="0">
+              <a:buNone/>
+            </a:pPr>
+            <a:r>
+              <a:rPr lang="en-US" sz="1000" dirty="0">
+                <a:solidFill>
+                  <a:srgbClr val="F0B9C3"/>
+                </a:solidFill>
+                <a:latin typeface="Yu Gothic" pitchFamily="34" charset="0"/>
+                <a:ea typeface="Yu Gothic" pitchFamily="34" charset="-122"/>
+                <a:cs typeface="Yu Gothic" pitchFamily="34" charset="-120"/>
+              </a:rPr>
+              <a:t>mosh.jp/services/404875</a:t>
+            </a:r>
+            <a:endParaRPr lang="en-US" sz="1000" dirty="0"/>
+          </a:p>
+        </p:txBody>
+      </p:sp>
+      <p:sp>
+        <p:nvSpPr>
+          <p:cNvPr id="22" name="Text 19"/>
+          <p:cNvSpPr txBox="1"/>
+          <p:nvPr/>
+        </p:nvSpPr>
+        <p:spPr>
+          <a:xfrm>
+            <a:off x="6355080" y="4370832"/>
+            <a:ext cx="2331720" cy="292608"/>
+          </a:xfrm>
+          <a:prstGeom prst="rect">
+            <a:avLst/>
+          </a:prstGeom>
+          <a:noFill/>
+          <a:ln/>
+        </p:spPr>
+        <p:txBody>
+          <a:bodyPr wrap="square" lIns="0" tIns="0" rIns="0" bIns="0" rtlCol="0" anchor="ctr"/>
+          <a:lstStyle/>
+          <a:p>
+            <a:pPr algn="ctr" indent="0" marL="0">
+              <a:buNone/>
+            </a:pPr>
+            <a:r>
+              <a:rPr lang="en-US" sz="1000" dirty="0">
+                <a:solidFill>
+                  <a:srgbClr val="A5848C"/>
+                </a:solidFill>
+                <a:latin typeface="Yu Gothic" pitchFamily="34" charset="0"/>
+                <a:ea typeface="Yu Gothic" pitchFamily="34" charset="-122"/>
+                <a:cs typeface="Yu Gothic" pitchFamily="34" charset="-120"/>
+              </a:rPr>
+              <a:t>Zoomのチャットにも貼ります</a:t>
+            </a:r>
+            <a:endParaRPr lang="en-US" sz="1000" dirty="0"/>
           </a:p>
         </p:txBody>
       </p:sp>

--- a/seminar/seminar-dekita.pptx
+++ b/seminar/seminar-dekita.pptx
@@ -63,9 +63,14 @@
     <p:sldId id="311" r:id="rId57"/>
     <p:sldId id="312" r:id="rId58"/>
     <p:sldId id="313" r:id="rId59"/>
+    <p:sldId id="314" r:id="rId60"/>
+    <p:sldId id="315" r:id="rId61"/>
+    <p:sldId id="316" r:id="rId62"/>
+    <p:sldId id="317" r:id="rId63"/>
+    <p:sldId id="318" r:id="rId64"/>
   </p:sldIdLst>
   <p:notesMasterIdLst>
-    <p:notesMasterId r:id="rId60"/>
+    <p:notesMasterId r:id="rId65"/>
   </p:notesMasterIdLst>
   <p:sldSz cx="9144000" cy="5143500"/>
   <p:notesSz cx="5143500" cy="9144000"/>
@@ -5265,6 +5270,94 @@
 </p:notes>
 </file>
 
+<file path=ppt/notesSlides/notesSlide59.xml><?xml version="1.0" encoding="utf-8"?>
+<p:notes xmlns:a="http://schemas.openxmlformats.org/drawingml/2006/main" xmlns:r="http://schemas.openxmlformats.org/officeDocument/2006/relationships" xmlns:p="http://schemas.openxmlformats.org/presentationml/2006/main">
+  <p:cSld>
+    <p:spTree>
+      <p:nvGrpSpPr>
+        <p:cNvPr id="1" name=""/>
+        <p:cNvGrpSpPr/>
+        <p:nvPr/>
+      </p:nvGrpSpPr>
+      <p:grpSpPr>
+        <a:xfrm>
+          <a:off x="0" y="0"/>
+          <a:ext cx="0" cy="0"/>
+          <a:chOff x="0" y="0"/>
+          <a:chExt cx="0" cy="0"/>
+        </a:xfrm>
+      </p:grpSpPr>
+      <p:sp>
+        <p:nvSpPr>
+          <p:cNvPr id="2" name="Slide Image Placeholder 1"/>
+          <p:cNvSpPr>
+            <a:spLocks noGrp="1" noRot="1" noChangeAspect="1"/>
+          </p:cNvSpPr>
+          <p:nvPr>
+            <p:ph type="sldImg"/>
+          </p:nvPr>
+        </p:nvSpPr>
+        <p:spPr/>
+      </p:sp>
+      <p:sp>
+        <p:nvSpPr>
+          <p:cNvPr id="3" name="Notes Placeholder 2"/>
+          <p:cNvSpPr>
+            <a:spLocks noGrp="1"/>
+          </p:cNvSpPr>
+          <p:nvPr>
+            <p:ph type="body" idx="1"/>
+          </p:nvPr>
+        </p:nvSpPr>
+        <p:spPr/>
+        <p:txBody>
+          <a:bodyPr/>
+          <a:lstStyle/>
+          <a:p>
+            <a:r>
+              <a:rPr lang="en-US" dirty="0"/>
+              <a:t/>
+            </a:r>
+            <a:endParaRPr lang="en-US" dirty="0"/>
+          </a:p>
+        </p:txBody>
+      </p:sp>
+      <p:sp>
+        <p:nvSpPr>
+          <p:cNvPr id="4" name="Slide Number Placeholder 3"/>
+          <p:cNvSpPr>
+            <a:spLocks noGrp="1"/>
+          </p:cNvSpPr>
+          <p:nvPr>
+            <p:ph type="sldNum" sz="quarter" idx="10"/>
+          </p:nvPr>
+        </p:nvSpPr>
+        <p:spPr/>
+        <p:txBody>
+          <a:bodyPr/>
+          <a:lstStyle/>
+          <a:p>
+            <a:fld id="{F7021451-1387-4CA6-816F-3879F97B5CBC}" type="slidenum">
+              <a:rPr lang="en-US"/>
+              <a:t>59</a:t>
+            </a:fld>
+            <a:endParaRPr lang="en-US"/>
+          </a:p>
+        </p:txBody>
+      </p:sp>
+    </p:spTree>
+    <p:extLst>
+      <p:ext uri="{BB962C8B-B14F-4D97-AF65-F5344CB8AC3E}">
+        <p14:creationId xmlns:p14="http://schemas.microsoft.com/office/powerpoint/2010/main" val="1024086991"/>
+      </p:ext>
+    </p:extLst>
+  </p:cSld>
+  <p:clrMapOvr>
+    <a:masterClrMapping/>
+  </p:clrMapOvr>
+</p:notes>
+</file>
+
 <file path=ppt/notesSlides/notesSlide6.xml><?xml version="1.0" encoding="utf-8"?>
 <p:notes xmlns:a="http://schemas.openxmlformats.org/drawingml/2006/main" xmlns:r="http://schemas.openxmlformats.org/officeDocument/2006/relationships" xmlns:p="http://schemas.openxmlformats.org/presentationml/2006/main">
   <p:cSld>
@@ -5335,6 +5428,358 @@
             <a:fld id="{F7021451-1387-4CA6-816F-3879F97B5CBC}" type="slidenum">
               <a:rPr lang="en-US"/>
               <a:t>6</a:t>
+            </a:fld>
+            <a:endParaRPr lang="en-US"/>
+          </a:p>
+        </p:txBody>
+      </p:sp>
+    </p:spTree>
+    <p:extLst>
+      <p:ext uri="{BB962C8B-B14F-4D97-AF65-F5344CB8AC3E}">
+        <p14:creationId xmlns:p14="http://schemas.microsoft.com/office/powerpoint/2010/main" val="1024086991"/>
+      </p:ext>
+    </p:extLst>
+  </p:cSld>
+  <p:clrMapOvr>
+    <a:masterClrMapping/>
+  </p:clrMapOvr>
+</p:notes>
+</file>
+
+<file path=ppt/notesSlides/notesSlide60.xml><?xml version="1.0" encoding="utf-8"?>
+<p:notes xmlns:a="http://schemas.openxmlformats.org/drawingml/2006/main" xmlns:r="http://schemas.openxmlformats.org/officeDocument/2006/relationships" xmlns:p="http://schemas.openxmlformats.org/presentationml/2006/main">
+  <p:cSld>
+    <p:spTree>
+      <p:nvGrpSpPr>
+        <p:cNvPr id="1" name=""/>
+        <p:cNvGrpSpPr/>
+        <p:nvPr/>
+      </p:nvGrpSpPr>
+      <p:grpSpPr>
+        <a:xfrm>
+          <a:off x="0" y="0"/>
+          <a:ext cx="0" cy="0"/>
+          <a:chOff x="0" y="0"/>
+          <a:chExt cx="0" cy="0"/>
+        </a:xfrm>
+      </p:grpSpPr>
+      <p:sp>
+        <p:nvSpPr>
+          <p:cNvPr id="2" name="Slide Image Placeholder 1"/>
+          <p:cNvSpPr>
+            <a:spLocks noGrp="1" noRot="1" noChangeAspect="1"/>
+          </p:cNvSpPr>
+          <p:nvPr>
+            <p:ph type="sldImg"/>
+          </p:nvPr>
+        </p:nvSpPr>
+        <p:spPr/>
+      </p:sp>
+      <p:sp>
+        <p:nvSpPr>
+          <p:cNvPr id="3" name="Notes Placeholder 2"/>
+          <p:cNvSpPr>
+            <a:spLocks noGrp="1"/>
+          </p:cNvSpPr>
+          <p:nvPr>
+            <p:ph type="body" idx="1"/>
+          </p:nvPr>
+        </p:nvSpPr>
+        <p:spPr/>
+        <p:txBody>
+          <a:bodyPr/>
+          <a:lstStyle/>
+          <a:p>
+            <a:r>
+              <a:rPr lang="en-US" dirty="0"/>
+              <a:t/>
+            </a:r>
+            <a:endParaRPr lang="en-US" dirty="0"/>
+          </a:p>
+        </p:txBody>
+      </p:sp>
+      <p:sp>
+        <p:nvSpPr>
+          <p:cNvPr id="4" name="Slide Number Placeholder 3"/>
+          <p:cNvSpPr>
+            <a:spLocks noGrp="1"/>
+          </p:cNvSpPr>
+          <p:nvPr>
+            <p:ph type="sldNum" sz="quarter" idx="10"/>
+          </p:nvPr>
+        </p:nvSpPr>
+        <p:spPr/>
+        <p:txBody>
+          <a:bodyPr/>
+          <a:lstStyle/>
+          <a:p>
+            <a:fld id="{F7021451-1387-4CA6-816F-3879F97B5CBC}" type="slidenum">
+              <a:rPr lang="en-US"/>
+              <a:t>60</a:t>
+            </a:fld>
+            <a:endParaRPr lang="en-US"/>
+          </a:p>
+        </p:txBody>
+      </p:sp>
+    </p:spTree>
+    <p:extLst>
+      <p:ext uri="{BB962C8B-B14F-4D97-AF65-F5344CB8AC3E}">
+        <p14:creationId xmlns:p14="http://schemas.microsoft.com/office/powerpoint/2010/main" val="1024086991"/>
+      </p:ext>
+    </p:extLst>
+  </p:cSld>
+  <p:clrMapOvr>
+    <a:masterClrMapping/>
+  </p:clrMapOvr>
+</p:notes>
+</file>
+
+<file path=ppt/notesSlides/notesSlide61.xml><?xml version="1.0" encoding="utf-8"?>
+<p:notes xmlns:a="http://schemas.openxmlformats.org/drawingml/2006/main" xmlns:r="http://schemas.openxmlformats.org/officeDocument/2006/relationships" xmlns:p="http://schemas.openxmlformats.org/presentationml/2006/main">
+  <p:cSld>
+    <p:spTree>
+      <p:nvGrpSpPr>
+        <p:cNvPr id="1" name=""/>
+        <p:cNvGrpSpPr/>
+        <p:nvPr/>
+      </p:nvGrpSpPr>
+      <p:grpSpPr>
+        <a:xfrm>
+          <a:off x="0" y="0"/>
+          <a:ext cx="0" cy="0"/>
+          <a:chOff x="0" y="0"/>
+          <a:chExt cx="0" cy="0"/>
+        </a:xfrm>
+      </p:grpSpPr>
+      <p:sp>
+        <p:nvSpPr>
+          <p:cNvPr id="2" name="Slide Image Placeholder 1"/>
+          <p:cNvSpPr>
+            <a:spLocks noGrp="1" noRot="1" noChangeAspect="1"/>
+          </p:cNvSpPr>
+          <p:nvPr>
+            <p:ph type="sldImg"/>
+          </p:nvPr>
+        </p:nvSpPr>
+        <p:spPr/>
+      </p:sp>
+      <p:sp>
+        <p:nvSpPr>
+          <p:cNvPr id="3" name="Notes Placeholder 2"/>
+          <p:cNvSpPr>
+            <a:spLocks noGrp="1"/>
+          </p:cNvSpPr>
+          <p:nvPr>
+            <p:ph type="body" idx="1"/>
+          </p:nvPr>
+        </p:nvSpPr>
+        <p:spPr/>
+        <p:txBody>
+          <a:bodyPr/>
+          <a:lstStyle/>
+          <a:p>
+            <a:r>
+              <a:rPr lang="en-US" dirty="0"/>
+              <a:t/>
+            </a:r>
+            <a:endParaRPr lang="en-US" dirty="0"/>
+          </a:p>
+        </p:txBody>
+      </p:sp>
+      <p:sp>
+        <p:nvSpPr>
+          <p:cNvPr id="4" name="Slide Number Placeholder 3"/>
+          <p:cNvSpPr>
+            <a:spLocks noGrp="1"/>
+          </p:cNvSpPr>
+          <p:nvPr>
+            <p:ph type="sldNum" sz="quarter" idx="10"/>
+          </p:nvPr>
+        </p:nvSpPr>
+        <p:spPr/>
+        <p:txBody>
+          <a:bodyPr/>
+          <a:lstStyle/>
+          <a:p>
+            <a:fld id="{F7021451-1387-4CA6-816F-3879F97B5CBC}" type="slidenum">
+              <a:rPr lang="en-US"/>
+              <a:t>61</a:t>
+            </a:fld>
+            <a:endParaRPr lang="en-US"/>
+          </a:p>
+        </p:txBody>
+      </p:sp>
+    </p:spTree>
+    <p:extLst>
+      <p:ext uri="{BB962C8B-B14F-4D97-AF65-F5344CB8AC3E}">
+        <p14:creationId xmlns:p14="http://schemas.microsoft.com/office/powerpoint/2010/main" val="1024086991"/>
+      </p:ext>
+    </p:extLst>
+  </p:cSld>
+  <p:clrMapOvr>
+    <a:masterClrMapping/>
+  </p:clrMapOvr>
+</p:notes>
+</file>
+
+<file path=ppt/notesSlides/notesSlide62.xml><?xml version="1.0" encoding="utf-8"?>
+<p:notes xmlns:a="http://schemas.openxmlformats.org/drawingml/2006/main" xmlns:r="http://schemas.openxmlformats.org/officeDocument/2006/relationships" xmlns:p="http://schemas.openxmlformats.org/presentationml/2006/main">
+  <p:cSld>
+    <p:spTree>
+      <p:nvGrpSpPr>
+        <p:cNvPr id="1" name=""/>
+        <p:cNvGrpSpPr/>
+        <p:nvPr/>
+      </p:nvGrpSpPr>
+      <p:grpSpPr>
+        <a:xfrm>
+          <a:off x="0" y="0"/>
+          <a:ext cx="0" cy="0"/>
+          <a:chOff x="0" y="0"/>
+          <a:chExt cx="0" cy="0"/>
+        </a:xfrm>
+      </p:grpSpPr>
+      <p:sp>
+        <p:nvSpPr>
+          <p:cNvPr id="2" name="Slide Image Placeholder 1"/>
+          <p:cNvSpPr>
+            <a:spLocks noGrp="1" noRot="1" noChangeAspect="1"/>
+          </p:cNvSpPr>
+          <p:nvPr>
+            <p:ph type="sldImg"/>
+          </p:nvPr>
+        </p:nvSpPr>
+        <p:spPr/>
+      </p:sp>
+      <p:sp>
+        <p:nvSpPr>
+          <p:cNvPr id="3" name="Notes Placeholder 2"/>
+          <p:cNvSpPr>
+            <a:spLocks noGrp="1"/>
+          </p:cNvSpPr>
+          <p:nvPr>
+            <p:ph type="body" idx="1"/>
+          </p:nvPr>
+        </p:nvSpPr>
+        <p:spPr/>
+        <p:txBody>
+          <a:bodyPr/>
+          <a:lstStyle/>
+          <a:p>
+            <a:r>
+              <a:rPr lang="en-US" dirty="0"/>
+              <a:t/>
+            </a:r>
+            <a:endParaRPr lang="en-US" dirty="0"/>
+          </a:p>
+        </p:txBody>
+      </p:sp>
+      <p:sp>
+        <p:nvSpPr>
+          <p:cNvPr id="4" name="Slide Number Placeholder 3"/>
+          <p:cNvSpPr>
+            <a:spLocks noGrp="1"/>
+          </p:cNvSpPr>
+          <p:nvPr>
+            <p:ph type="sldNum" sz="quarter" idx="10"/>
+          </p:nvPr>
+        </p:nvSpPr>
+        <p:spPr/>
+        <p:txBody>
+          <a:bodyPr/>
+          <a:lstStyle/>
+          <a:p>
+            <a:fld id="{F7021451-1387-4CA6-816F-3879F97B5CBC}" type="slidenum">
+              <a:rPr lang="en-US"/>
+              <a:t>62</a:t>
+            </a:fld>
+            <a:endParaRPr lang="en-US"/>
+          </a:p>
+        </p:txBody>
+      </p:sp>
+    </p:spTree>
+    <p:extLst>
+      <p:ext uri="{BB962C8B-B14F-4D97-AF65-F5344CB8AC3E}">
+        <p14:creationId xmlns:p14="http://schemas.microsoft.com/office/powerpoint/2010/main" val="1024086991"/>
+      </p:ext>
+    </p:extLst>
+  </p:cSld>
+  <p:clrMapOvr>
+    <a:masterClrMapping/>
+  </p:clrMapOvr>
+</p:notes>
+</file>
+
+<file path=ppt/notesSlides/notesSlide63.xml><?xml version="1.0" encoding="utf-8"?>
+<p:notes xmlns:a="http://schemas.openxmlformats.org/drawingml/2006/main" xmlns:r="http://schemas.openxmlformats.org/officeDocument/2006/relationships" xmlns:p="http://schemas.openxmlformats.org/presentationml/2006/main">
+  <p:cSld>
+    <p:spTree>
+      <p:nvGrpSpPr>
+        <p:cNvPr id="1" name=""/>
+        <p:cNvGrpSpPr/>
+        <p:nvPr/>
+      </p:nvGrpSpPr>
+      <p:grpSpPr>
+        <a:xfrm>
+          <a:off x="0" y="0"/>
+          <a:ext cx="0" cy="0"/>
+          <a:chOff x="0" y="0"/>
+          <a:chExt cx="0" cy="0"/>
+        </a:xfrm>
+      </p:grpSpPr>
+      <p:sp>
+        <p:nvSpPr>
+          <p:cNvPr id="2" name="Slide Image Placeholder 1"/>
+          <p:cNvSpPr>
+            <a:spLocks noGrp="1" noRot="1" noChangeAspect="1"/>
+          </p:cNvSpPr>
+          <p:nvPr>
+            <p:ph type="sldImg"/>
+          </p:nvPr>
+        </p:nvSpPr>
+        <p:spPr/>
+      </p:sp>
+      <p:sp>
+        <p:nvSpPr>
+          <p:cNvPr id="3" name="Notes Placeholder 2"/>
+          <p:cNvSpPr>
+            <a:spLocks noGrp="1"/>
+          </p:cNvSpPr>
+          <p:nvPr>
+            <p:ph type="body" idx="1"/>
+          </p:nvPr>
+        </p:nvSpPr>
+        <p:spPr/>
+        <p:txBody>
+          <a:bodyPr/>
+          <a:lstStyle/>
+          <a:p>
+            <a:r>
+              <a:rPr lang="en-US" dirty="0"/>
+              <a:t/>
+            </a:r>
+            <a:endParaRPr lang="en-US" dirty="0"/>
+          </a:p>
+        </p:txBody>
+      </p:sp>
+      <p:sp>
+        <p:nvSpPr>
+          <p:cNvPr id="4" name="Slide Number Placeholder 3"/>
+          <p:cNvSpPr>
+            <a:spLocks noGrp="1"/>
+          </p:cNvSpPr>
+          <p:nvPr>
+            <p:ph type="sldNum" sz="quarter" idx="10"/>
+          </p:nvPr>
+        </p:nvSpPr>
+        <p:spPr/>
+        <p:txBody>
+          <a:bodyPr/>
+          <a:lstStyle/>
+          <a:p>
+            <a:fld id="{F7021451-1387-4CA6-816F-3879F97B5CBC}" type="slidenum">
+              <a:rPr lang="en-US"/>
+              <a:t>63</a:t>
             </a:fld>
             <a:endParaRPr lang="en-US"/>
           </a:p>
@@ -30584,12 +31029,12 @@
           <a:p>
             <a:pPr algn="l" indent="0" marL="0">
               <a:lnSpc>
-                <a:spcPts val="4060"/>
+                <a:spcPts val="4350"/>
               </a:lnSpc>
               <a:buNone/>
             </a:pPr>
             <a:r>
-              <a:rPr lang="en-US" sz="2800" b="1" dirty="0">
+              <a:rPr lang="en-US" sz="3000" b="1" dirty="0">
                 <a:solidFill>
                   <a:srgbClr val="141416"/>
                 </a:solidFill>
@@ -30597,9 +31042,9 @@
                 <a:ea typeface="Yu Mincho" pitchFamily="34" charset="-122"/>
                 <a:cs typeface="Yu Mincho" pitchFamily="34" charset="-120"/>
               </a:rPr>
-              <a:t>個別相談で講座の案内をすることもあります</a:t>
-            </a:r>
-            <a:endParaRPr lang="en-US" sz="2800" dirty="0"/>
+              <a:t>講座の話も、今日しておきます</a:t>
+            </a:r>
+            <a:endParaRPr lang="en-US" sz="3000" dirty="0"/>
           </a:p>
         </p:txBody>
       </p:sp>
@@ -30611,8 +31056,8 @@
         </p:nvSpPr>
         <p:spPr>
           <a:xfrm>
-            <a:off x="457200" y="1691640"/>
-            <a:ext cx="8229600" cy="1371600"/>
+            <a:off x="457200" y="1645920"/>
+            <a:ext cx="8229600" cy="1097280"/>
           </a:xfrm>
           <a:prstGeom prst="rect">
             <a:avLst/>
@@ -30639,7 +31084,7 @@
                 <a:ea typeface="Yu Gothic" pitchFamily="34" charset="-122"/>
                 <a:cs typeface="Yu Gothic" pitchFamily="34" charset="-120"/>
               </a:rPr>
-              <a:t>必要だと感じた方には、</a:t>
+              <a:t>「パワーリフターのための実践メンタルトレーニング」という</a:t>
             </a:r>
             <a:endParaRPr lang="en-US" sz="1800" dirty="0"/>
           </a:p>
@@ -30659,27 +31104,7 @@
                 <a:ea typeface="Yu Gothic" pitchFamily="34" charset="-122"/>
                 <a:cs typeface="Yu Gothic" pitchFamily="34" charset="-120"/>
               </a:rPr>
-              <a:t>「パワーリフターのための実践メンタルトレーニング」</a:t>
-            </a:r>
-            <a:endParaRPr lang="en-US" sz="1800" dirty="0"/>
-          </a:p>
-          <a:p>
-            <a:pPr indent="0" marL="0">
-              <a:lnSpc>
-                <a:spcPts val="3000"/>
-              </a:lnSpc>
-              <a:buNone/>
-            </a:pPr>
-            <a:r>
-              <a:rPr lang="en-US" sz="1800" dirty="0">
-                <a:solidFill>
-                  <a:srgbClr val="3B3634"/>
-                </a:solidFill>
-                <a:latin typeface="Yu Gothic" pitchFamily="34" charset="0"/>
-                <a:ea typeface="Yu Gothic" pitchFamily="34" charset="-122"/>
-                <a:cs typeface="Yu Gothic" pitchFamily="34" charset="-120"/>
-              </a:rPr>
-              <a:t>についてもお話しします。</a:t>
+              <a:t>3か月の講座をやっています。</a:t>
             </a:r>
             <a:endParaRPr lang="en-US" sz="1800" dirty="0"/>
           </a:p>
@@ -30693,12 +31118,12 @@
         </p:nvSpPr>
         <p:spPr>
           <a:xfrm>
-            <a:off x="457200" y="3154680"/>
-            <a:ext cx="8229600" cy="731520"/>
+            <a:off x="457200" y="2834640"/>
+            <a:ext cx="8229600" cy="777240"/>
           </a:xfrm>
           <a:prstGeom prst="roundRect">
             <a:avLst>
-              <a:gd name="adj" fmla="val 8750"/>
+              <a:gd name="adj" fmla="val 8235"/>
             </a:avLst>
           </a:prstGeom>
           <a:solidFill>
@@ -30720,8 +31145,8 @@
         </p:nvSpPr>
         <p:spPr>
           <a:xfrm>
-            <a:off x="822960" y="3154680"/>
-            <a:ext cx="7498080" cy="731520"/>
+            <a:off x="822960" y="2834640"/>
+            <a:ext cx="7498080" cy="777240"/>
           </a:xfrm>
           <a:prstGeom prst="rect">
             <a:avLst/>
@@ -30745,7 +31170,7 @@
                 <a:ea typeface="Yu Mincho" pitchFamily="34" charset="-122"/>
                 <a:cs typeface="Yu Mincho" pitchFamily="34" charset="-120"/>
               </a:rPr>
-              <a:t>でも、その場で決める必要はありません。</a:t>
+              <a:t>あとで探さなくていいように、先にお見せします。</a:t>
             </a:r>
             <a:endParaRPr lang="en-US" sz="2100" dirty="0"/>
           </a:p>
@@ -30759,24 +31184,27 @@
         </p:nvSpPr>
         <p:spPr>
           <a:xfrm>
-            <a:off x="457200" y="4114800"/>
-            <a:ext cx="7498080" cy="411480"/>
-          </a:xfrm>
-          <a:prstGeom prst="rect">
-            <a:avLst/>
-          </a:prstGeom>
-          <a:noFill/>
-          <a:ln/>
-        </p:spPr>
-        <p:txBody>
-          <a:bodyPr wrap="square" lIns="0" tIns="0" rIns="0" bIns="0" rtlCol="0" anchor="ctr"/>
-          <a:lstStyle/>
-          <a:p>
-            <a:pPr indent="0" marL="0">
-              <a:buNone/>
-            </a:pPr>
-            <a:r>
-              <a:rPr lang="en-US" sz="1800" b="1" dirty="0">
+            <a:off x="457200" y="3794760"/>
+            <a:ext cx="7863840" cy="822960"/>
+          </a:xfrm>
+          <a:prstGeom prst="rect">
+            <a:avLst/>
+          </a:prstGeom>
+          <a:noFill/>
+          <a:ln/>
+        </p:spPr>
+        <p:txBody>
+          <a:bodyPr wrap="square" lIns="0" tIns="0" rIns="0" bIns="0" rtlCol="0" anchor="ctr"/>
+          <a:lstStyle/>
+          <a:p>
+            <a:pPr indent="0" marL="0">
+              <a:lnSpc>
+                <a:spcPts val="2800"/>
+              </a:lnSpc>
+              <a:buNone/>
+            </a:pPr>
+            <a:r>
+              <a:rPr lang="en-US" sz="1700" b="1" dirty="0">
                 <a:solidFill>
                   <a:srgbClr val="7A1524"/>
                 </a:solidFill>
@@ -30784,9 +31212,29 @@
                 <a:ea typeface="Yu Gothic" pitchFamily="34" charset="-122"/>
                 <a:cs typeface="Yu Gothic" pitchFamily="34" charset="-120"/>
               </a:rPr>
-              <a:t>まずは「自分には何が必要か」を整理することが目的です。</a:t>
-            </a:r>
-            <a:endParaRPr lang="en-US" sz="1800" dirty="0"/>
+              <a:t>今日申し込む必要はまったくありません。</a:t>
+            </a:r>
+            <a:endParaRPr lang="en-US" sz="1700" dirty="0"/>
+          </a:p>
+          <a:p>
+            <a:pPr indent="0" marL="0">
+              <a:lnSpc>
+                <a:spcPts val="2800"/>
+              </a:lnSpc>
+              <a:buNone/>
+            </a:pPr>
+            <a:r>
+              <a:rPr lang="en-US" sz="1700" b="1" dirty="0">
+                <a:solidFill>
+                  <a:srgbClr val="7A1524"/>
+                </a:solidFill>
+                <a:latin typeface="Yu Gothic" pitchFamily="34" charset="0"/>
+                <a:ea typeface="Yu Gothic" pitchFamily="34" charset="-122"/>
+                <a:cs typeface="Yu Gothic" pitchFamily="34" charset="-120"/>
+              </a:rPr>
+              <a:t>「そういうものがあるんだな」で大丈夫です。</a:t>
+            </a:r>
+            <a:endParaRPr lang="en-US" sz="1700" dirty="0"/>
           </a:p>
         </p:txBody>
       </p:sp>
@@ -30855,7 +31303,7 @@
                 <a:ea typeface="Yu Gothic" pitchFamily="34" charset="-122"/>
                 <a:cs typeface="Yu Gothic" pitchFamily="34" charset="-120"/>
               </a:rPr>
-              <a:t>おわりに</a:t>
+              <a:t>講座のご案内</a:t>
             </a:r>
             <a:endParaRPr lang="en-US" sz="1200" dirty="0"/>
           </a:p>
@@ -30908,27 +31356,63 @@
         </p:nvSpPr>
         <p:spPr>
           <a:xfrm>
-            <a:off x="457200" y="777240"/>
-            <a:ext cx="8229600" cy="1188720"/>
-          </a:xfrm>
-          <a:prstGeom prst="rect">
-            <a:avLst/>
-          </a:prstGeom>
-          <a:noFill/>
-          <a:ln/>
-        </p:spPr>
-        <p:txBody>
-          <a:bodyPr wrap="square" lIns="0" tIns="0" rIns="0" bIns="0" rtlCol="0" anchor="t"/>
-          <a:lstStyle/>
-          <a:p>
-            <a:pPr algn="l" indent="0" marL="0">
-              <a:lnSpc>
-                <a:spcPts val="4495"/>
-              </a:lnSpc>
-              <a:buNone/>
-            </a:pPr>
-            <a:r>
-              <a:rPr lang="en-US" sz="3100" b="1" dirty="0">
+            <a:off x="457200" y="749808"/>
+            <a:ext cx="7863840" cy="365760"/>
+          </a:xfrm>
+          <a:prstGeom prst="rect">
+            <a:avLst/>
+          </a:prstGeom>
+          <a:noFill/>
+          <a:ln/>
+        </p:spPr>
+        <p:txBody>
+          <a:bodyPr wrap="square" lIns="0" tIns="0" rIns="0" bIns="0" rtlCol="0" anchor="ctr"/>
+          <a:lstStyle/>
+          <a:p>
+            <a:pPr indent="0" marL="0">
+              <a:buNone/>
+            </a:pPr>
+            <a:r>
+              <a:rPr lang="en-US" sz="1800" b="1" dirty="0">
+                <a:solidFill>
+                  <a:srgbClr val="6B6360"/>
+                </a:solidFill>
+                <a:latin typeface="Yu Gothic" pitchFamily="34" charset="0"/>
+                <a:ea typeface="Yu Gothic" pitchFamily="34" charset="-122"/>
+                <a:cs typeface="Yu Gothic" pitchFamily="34" charset="-120"/>
+              </a:rPr>
+              <a:t>パワーリフターのための</a:t>
+            </a:r>
+            <a:endParaRPr lang="en-US" sz="1800" dirty="0"/>
+          </a:p>
+        </p:txBody>
+      </p:sp>
+      <p:sp>
+        <p:nvSpPr>
+          <p:cNvPr id="5" name="Text 3"/>
+          <p:cNvSpPr txBox="1"/>
+          <p:nvPr/>
+        </p:nvSpPr>
+        <p:spPr>
+          <a:xfrm>
+            <a:off x="457200" y="1097280"/>
+            <a:ext cx="7863840" cy="685800"/>
+          </a:xfrm>
+          <a:prstGeom prst="rect">
+            <a:avLst/>
+          </a:prstGeom>
+          <a:noFill/>
+          <a:ln/>
+        </p:spPr>
+        <p:txBody>
+          <a:bodyPr wrap="square" lIns="0" tIns="0" rIns="0" bIns="0" rtlCol="0" anchor="ctr"/>
+          <a:lstStyle/>
+          <a:p>
+            <a:pPr indent="0" marL="0">
+              <a:buNone/>
+            </a:pPr>
+            <a:r>
+              <a:rPr lang="en-US" sz="3400" b="1" dirty="0">
                 <a:solidFill>
                   <a:srgbClr val="141416"/>
                 </a:solidFill>
@@ -30936,26 +31420,65 @@
                 <a:ea typeface="Yu Mincho" pitchFamily="34" charset="-122"/>
                 <a:cs typeface="Yu Mincho" pitchFamily="34" charset="-120"/>
               </a:rPr>
-              <a:t>今日のゴールは、もう達成しています</a:t>
-            </a:r>
-            <a:endParaRPr lang="en-US" sz="3100" dirty="0"/>
-          </a:p>
-        </p:txBody>
-      </p:sp>
-      <p:sp>
-        <p:nvSpPr>
-          <p:cNvPr id="5" name="Shape 3"/>
+              <a:t>実践メンタルトレーニング</a:t>
+            </a:r>
+            <a:endParaRPr lang="en-US" sz="3400" dirty="0"/>
+          </a:p>
+        </p:txBody>
+      </p:sp>
+      <p:sp>
+        <p:nvSpPr>
+          <p:cNvPr id="6" name="Text 4"/>
+          <p:cNvSpPr txBox="1"/>
+          <p:nvPr/>
+        </p:nvSpPr>
+        <p:spPr>
+          <a:xfrm>
+            <a:off x="457200" y="1828800"/>
+            <a:ext cx="7863840" cy="384048"/>
+          </a:xfrm>
+          <a:prstGeom prst="rect">
+            <a:avLst/>
+          </a:prstGeom>
+          <a:noFill/>
+          <a:ln/>
+        </p:spPr>
+        <p:txBody>
+          <a:bodyPr wrap="square" lIns="0" tIns="0" rIns="0" bIns="0" rtlCol="0" anchor="ctr"/>
+          <a:lstStyle/>
+          <a:p>
+            <a:pPr indent="0" marL="0">
+              <a:buNone/>
+            </a:pPr>
+            <a:r>
+              <a:rPr lang="en-US" sz="1900" b="1" dirty="0">
+                <a:solidFill>
+                  <a:srgbClr val="7A1524"/>
+                </a:solidFill>
+                <a:latin typeface="Yu Mincho" pitchFamily="34" charset="0"/>
+                <a:ea typeface="Yu Mincho" pitchFamily="34" charset="-122"/>
+                <a:cs typeface="Yu Mincho" pitchFamily="34" charset="-120"/>
+              </a:rPr>
+              <a:t>ここぞの一本を、取り切る。</a:t>
+            </a:r>
+            <a:endParaRPr lang="en-US" sz="1900" dirty="0"/>
+          </a:p>
+        </p:txBody>
+      </p:sp>
+      <p:sp>
+        <p:nvSpPr>
+          <p:cNvPr id="7" name="Shape 5"/>
           <p:cNvSpPr/>
           <p:nvPr/>
         </p:nvSpPr>
         <p:spPr>
           <a:xfrm>
-            <a:off x="457200" y="1828800"/>
-            <a:ext cx="8229600" cy="685800"/>
+            <a:off x="457200" y="2395728"/>
+            <a:ext cx="7863840" cy="475488"/>
           </a:xfrm>
           <a:prstGeom prst="roundRect">
             <a:avLst>
-              <a:gd name="adj" fmla="val 8000"/>
+              <a:gd name="adj" fmla="val 11538"/>
             </a:avLst>
           </a:prstGeom>
           <a:solidFill>
@@ -30971,30 +31494,30 @@
       </p:sp>
       <p:sp>
         <p:nvSpPr>
-          <p:cNvPr id="6" name="Text 4"/>
-          <p:cNvSpPr txBox="1"/>
-          <p:nvPr/>
-        </p:nvSpPr>
-        <p:spPr>
-          <a:xfrm>
-            <a:off x="749808" y="1828800"/>
-            <a:ext cx="7644384" cy="685800"/>
-          </a:xfrm>
-          <a:prstGeom prst="rect">
-            <a:avLst/>
-          </a:prstGeom>
-          <a:noFill/>
-          <a:ln/>
-        </p:spPr>
-        <p:txBody>
-          <a:bodyPr wrap="square" lIns="0" tIns="0" rIns="0" bIns="0" rtlCol="0" anchor="ctr"/>
-          <a:lstStyle/>
-          <a:p>
-            <a:pPr indent="0" marL="0">
-              <a:buNone/>
-            </a:pPr>
-            <a:r>
-              <a:rPr lang="en-US" sz="1900" b="1" dirty="0">
+          <p:cNvPr id="8" name="Text 6"/>
+          <p:cNvSpPr txBox="1"/>
+          <p:nvPr/>
+        </p:nvSpPr>
+        <p:spPr>
+          <a:xfrm>
+            <a:off x="777240" y="2395728"/>
+            <a:ext cx="1280160" cy="475488"/>
+          </a:xfrm>
+          <a:prstGeom prst="rect">
+            <a:avLst/>
+          </a:prstGeom>
+          <a:noFill/>
+          <a:ln/>
+        </p:spPr>
+        <p:txBody>
+          <a:bodyPr wrap="square" lIns="0" tIns="0" rIns="0" bIns="0" rtlCol="0" anchor="ctr"/>
+          <a:lstStyle/>
+          <a:p>
+            <a:pPr indent="0" marL="0">
+              <a:buNone/>
+            </a:pPr>
+            <a:r>
+              <a:rPr lang="en-US" sz="1500" b="1" dirty="0">
                 <a:solidFill>
                   <a:srgbClr val="7A1524"/>
                 </a:solidFill>
@@ -31002,26 +31525,65 @@
                 <a:ea typeface="Yu Gothic" pitchFamily="34" charset="-122"/>
                 <a:cs typeface="Yu Gothic" pitchFamily="34" charset="-120"/>
               </a:rPr>
-              <a:t>「私、ちゃんと進んでた」　に気づく。</a:t>
-            </a:r>
-            <a:endParaRPr lang="en-US" sz="1900" dirty="0"/>
-          </a:p>
-        </p:txBody>
-      </p:sp>
-      <p:sp>
-        <p:nvSpPr>
-          <p:cNvPr id="7" name="Shape 5"/>
+              <a:t>期間</a:t>
+            </a:r>
+            <a:endParaRPr lang="en-US" sz="1500" dirty="0"/>
+          </a:p>
+        </p:txBody>
+      </p:sp>
+      <p:sp>
+        <p:nvSpPr>
+          <p:cNvPr id="9" name="Text 7"/>
+          <p:cNvSpPr txBox="1"/>
+          <p:nvPr/>
+        </p:nvSpPr>
+        <p:spPr>
+          <a:xfrm>
+            <a:off x="2103120" y="2395728"/>
+            <a:ext cx="6035040" cy="475488"/>
+          </a:xfrm>
+          <a:prstGeom prst="rect">
+            <a:avLst/>
+          </a:prstGeom>
+          <a:noFill/>
+          <a:ln/>
+        </p:spPr>
+        <p:txBody>
+          <a:bodyPr wrap="square" lIns="0" tIns="0" rIns="0" bIns="0" rtlCol="0" anchor="ctr"/>
+          <a:lstStyle/>
+          <a:p>
+            <a:pPr indent="0" marL="0">
+              <a:buNone/>
+            </a:pPr>
+            <a:r>
+              <a:rPr lang="en-US" sz="1500" dirty="0">
+                <a:solidFill>
+                  <a:srgbClr val="3B3634"/>
+                </a:solidFill>
+                <a:latin typeface="Yu Gothic" pitchFamily="34" charset="0"/>
+                <a:ea typeface="Yu Gothic" pitchFamily="34" charset="-122"/>
+                <a:cs typeface="Yu Gothic" pitchFamily="34" charset="-120"/>
+              </a:rPr>
+              <a:t>3か月</a:t>
+            </a:r>
+            <a:endParaRPr lang="en-US" sz="1500" dirty="0"/>
+          </a:p>
+        </p:txBody>
+      </p:sp>
+      <p:sp>
+        <p:nvSpPr>
+          <p:cNvPr id="10" name="Shape 8"/>
           <p:cNvSpPr/>
           <p:nvPr/>
         </p:nvSpPr>
         <p:spPr>
           <a:xfrm>
-            <a:off x="457200" y="2606040"/>
-            <a:ext cx="8229600" cy="685800"/>
+            <a:off x="457200" y="2944368"/>
+            <a:ext cx="7863840" cy="475488"/>
           </a:xfrm>
           <a:prstGeom prst="roundRect">
             <a:avLst>
-              <a:gd name="adj" fmla="val 8000"/>
+              <a:gd name="adj" fmla="val 11538"/>
             </a:avLst>
           </a:prstGeom>
           <a:solidFill>
@@ -31037,30 +31599,30 @@
       </p:sp>
       <p:sp>
         <p:nvSpPr>
-          <p:cNvPr id="8" name="Text 6"/>
-          <p:cNvSpPr txBox="1"/>
-          <p:nvPr/>
-        </p:nvSpPr>
-        <p:spPr>
-          <a:xfrm>
-            <a:off x="749808" y="2606040"/>
-            <a:ext cx="7644384" cy="685800"/>
-          </a:xfrm>
-          <a:prstGeom prst="rect">
-            <a:avLst/>
-          </a:prstGeom>
-          <a:noFill/>
-          <a:ln/>
-        </p:spPr>
-        <p:txBody>
-          <a:bodyPr wrap="square" lIns="0" tIns="0" rIns="0" bIns="0" rtlCol="0" anchor="ctr"/>
-          <a:lstStyle/>
-          <a:p>
-            <a:pPr indent="0" marL="0">
-              <a:buNone/>
-            </a:pPr>
-            <a:r>
-              <a:rPr lang="en-US" sz="1900" b="1" dirty="0">
+          <p:cNvPr id="11" name="Text 9"/>
+          <p:cNvSpPr txBox="1"/>
+          <p:nvPr/>
+        </p:nvSpPr>
+        <p:spPr>
+          <a:xfrm>
+            <a:off x="777240" y="2944368"/>
+            <a:ext cx="1280160" cy="475488"/>
+          </a:xfrm>
+          <a:prstGeom prst="rect">
+            <a:avLst/>
+          </a:prstGeom>
+          <a:noFill/>
+          <a:ln/>
+        </p:spPr>
+        <p:txBody>
+          <a:bodyPr wrap="square" lIns="0" tIns="0" rIns="0" bIns="0" rtlCol="0" anchor="ctr"/>
+          <a:lstStyle/>
+          <a:p>
+            <a:pPr indent="0" marL="0">
+              <a:buNone/>
+            </a:pPr>
+            <a:r>
+              <a:rPr lang="en-US" sz="1500" b="1" dirty="0">
                 <a:solidFill>
                   <a:srgbClr val="7A1524"/>
                 </a:solidFill>
@@ -31068,34 +31630,73 @@
                 <a:ea typeface="Yu Gothic" pitchFamily="34" charset="-122"/>
                 <a:cs typeface="Yu Gothic" pitchFamily="34" charset="-120"/>
               </a:rPr>
-              <a:t>「じゃあ次、私は何をする？」　を自分で決める。</a:t>
-            </a:r>
-            <a:endParaRPr lang="en-US" sz="1900" dirty="0"/>
-          </a:p>
-        </p:txBody>
-      </p:sp>
-      <p:sp>
-        <p:nvSpPr>
-          <p:cNvPr id="9" name="Shape 7"/>
+              <a:t>回数</a:t>
+            </a:r>
+            <a:endParaRPr lang="en-US" sz="1500" dirty="0"/>
+          </a:p>
+        </p:txBody>
+      </p:sp>
+      <p:sp>
+        <p:nvSpPr>
+          <p:cNvPr id="12" name="Text 10"/>
+          <p:cNvSpPr txBox="1"/>
+          <p:nvPr/>
+        </p:nvSpPr>
+        <p:spPr>
+          <a:xfrm>
+            <a:off x="2103120" y="2944368"/>
+            <a:ext cx="6035040" cy="475488"/>
+          </a:xfrm>
+          <a:prstGeom prst="rect">
+            <a:avLst/>
+          </a:prstGeom>
+          <a:noFill/>
+          <a:ln/>
+        </p:spPr>
+        <p:txBody>
+          <a:bodyPr wrap="square" lIns="0" tIns="0" rIns="0" bIns="0" rtlCol="0" anchor="ctr"/>
+          <a:lstStyle/>
+          <a:p>
+            <a:pPr indent="0" marL="0">
+              <a:buNone/>
+            </a:pPr>
+            <a:r>
+              <a:rPr lang="en-US" sz="1500" dirty="0">
+                <a:solidFill>
+                  <a:srgbClr val="3B3634"/>
+                </a:solidFill>
+                <a:latin typeface="Yu Gothic" pitchFamily="34" charset="0"/>
+                <a:ea typeface="Yu Gothic" pitchFamily="34" charset="-122"/>
+                <a:cs typeface="Yu Gothic" pitchFamily="34" charset="-120"/>
+              </a:rPr>
+              <a:t>個別セッション 最大10回（7〜10回程度）</a:t>
+            </a:r>
+            <a:endParaRPr lang="en-US" sz="1500" dirty="0"/>
+          </a:p>
+        </p:txBody>
+      </p:sp>
+      <p:sp>
+        <p:nvSpPr>
+          <p:cNvPr id="13" name="Shape 11"/>
           <p:cNvSpPr/>
           <p:nvPr/>
         </p:nvSpPr>
         <p:spPr>
           <a:xfrm>
-            <a:off x="457200" y="3703320"/>
-            <a:ext cx="8229600" cy="868680"/>
+            <a:off x="457200" y="3493008"/>
+            <a:ext cx="7863840" cy="475488"/>
           </a:xfrm>
           <a:prstGeom prst="roundRect">
             <a:avLst>
-              <a:gd name="adj" fmla="val 8421"/>
+              <a:gd name="adj" fmla="val 11538"/>
             </a:avLst>
           </a:prstGeom>
           <a:solidFill>
-            <a:srgbClr val="540E19"/>
+            <a:srgbClr val="FAF3F4"/>
           </a:solidFill>
           <a:ln w="12700">
             <a:solidFill>
-              <a:srgbClr val="540E19"/>
+              <a:srgbClr val="FAF3F4"/>
             </a:solidFill>
             <a:prstDash val="solid"/>
           </a:ln>
@@ -31103,43 +31704,184 @@
       </p:sp>
       <p:sp>
         <p:nvSpPr>
-          <p:cNvPr id="10" name="Text 8"/>
-          <p:cNvSpPr txBox="1"/>
-          <p:nvPr/>
-        </p:nvSpPr>
-        <p:spPr>
-          <a:xfrm>
-            <a:off x="822960" y="3703320"/>
-            <a:ext cx="7498080" cy="868680"/>
-          </a:xfrm>
-          <a:prstGeom prst="rect">
-            <a:avLst/>
-          </a:prstGeom>
-          <a:noFill/>
-          <a:ln/>
-        </p:spPr>
-        <p:txBody>
-          <a:bodyPr wrap="square" lIns="0" tIns="0" rIns="0" bIns="0" rtlCol="0" anchor="ctr"/>
-          <a:lstStyle/>
-          <a:p>
-            <a:pPr indent="0" marL="0">
-              <a:lnSpc>
-                <a:spcPts val="3080"/>
-              </a:lnSpc>
-              <a:buNone/>
-            </a:pPr>
-            <a:r>
-              <a:rPr lang="en-US" sz="2200" b="1" dirty="0">
-                <a:solidFill>
-                  <a:srgbClr val="FFFFFF"/>
-                </a:solidFill>
-                <a:latin typeface="Yu Mincho" pitchFamily="34" charset="0"/>
-                <a:ea typeface="Yu Mincho" pitchFamily="34" charset="-122"/>
-                <a:cs typeface="Yu Mincho" pitchFamily="34" charset="-120"/>
-              </a:rPr>
-              <a:t>今日決めた一歩を、ぜひ持ち帰ってください。</a:t>
-            </a:r>
-            <a:endParaRPr lang="en-US" sz="2200" dirty="0"/>
+          <p:cNvPr id="14" name="Text 12"/>
+          <p:cNvSpPr txBox="1"/>
+          <p:nvPr/>
+        </p:nvSpPr>
+        <p:spPr>
+          <a:xfrm>
+            <a:off x="777240" y="3493008"/>
+            <a:ext cx="1280160" cy="475488"/>
+          </a:xfrm>
+          <a:prstGeom prst="rect">
+            <a:avLst/>
+          </a:prstGeom>
+          <a:noFill/>
+          <a:ln/>
+        </p:spPr>
+        <p:txBody>
+          <a:bodyPr wrap="square" lIns="0" tIns="0" rIns="0" bIns="0" rtlCol="0" anchor="ctr"/>
+          <a:lstStyle/>
+          <a:p>
+            <a:pPr indent="0" marL="0">
+              <a:buNone/>
+            </a:pPr>
+            <a:r>
+              <a:rPr lang="en-US" sz="1500" b="1" dirty="0">
+                <a:solidFill>
+                  <a:srgbClr val="7A1524"/>
+                </a:solidFill>
+                <a:latin typeface="Yu Gothic" pitchFamily="34" charset="0"/>
+                <a:ea typeface="Yu Gothic" pitchFamily="34" charset="-122"/>
+                <a:cs typeface="Yu Gothic" pitchFamily="34" charset="-120"/>
+              </a:rPr>
+              <a:t>1回</a:t>
+            </a:r>
+            <a:endParaRPr lang="en-US" sz="1500" dirty="0"/>
+          </a:p>
+        </p:txBody>
+      </p:sp>
+      <p:sp>
+        <p:nvSpPr>
+          <p:cNvPr id="15" name="Text 13"/>
+          <p:cNvSpPr txBox="1"/>
+          <p:nvPr/>
+        </p:nvSpPr>
+        <p:spPr>
+          <a:xfrm>
+            <a:off x="2103120" y="3493008"/>
+            <a:ext cx="6035040" cy="475488"/>
+          </a:xfrm>
+          <a:prstGeom prst="rect">
+            <a:avLst/>
+          </a:prstGeom>
+          <a:noFill/>
+          <a:ln/>
+        </p:spPr>
+        <p:txBody>
+          <a:bodyPr wrap="square" lIns="0" tIns="0" rIns="0" bIns="0" rtlCol="0" anchor="ctr"/>
+          <a:lstStyle/>
+          <a:p>
+            <a:pPr indent="0" marL="0">
+              <a:buNone/>
+            </a:pPr>
+            <a:r>
+              <a:rPr lang="en-US" sz="1500" dirty="0">
+                <a:solidFill>
+                  <a:srgbClr val="3B3634"/>
+                </a:solidFill>
+                <a:latin typeface="Yu Gothic" pitchFamily="34" charset="0"/>
+                <a:ea typeface="Yu Gothic" pitchFamily="34" charset="-122"/>
+                <a:cs typeface="Yu Gothic" pitchFamily="34" charset="-120"/>
+              </a:rPr>
+              <a:t>60分（講義・ワーク30分＋個別コーチング30分）</a:t>
+            </a:r>
+            <a:endParaRPr lang="en-US" sz="1500" dirty="0"/>
+          </a:p>
+        </p:txBody>
+      </p:sp>
+      <p:sp>
+        <p:nvSpPr>
+          <p:cNvPr id="16" name="Shape 14"/>
+          <p:cNvSpPr/>
+          <p:nvPr/>
+        </p:nvSpPr>
+        <p:spPr>
+          <a:xfrm>
+            <a:off x="457200" y="4041648"/>
+            <a:ext cx="7863840" cy="475488"/>
+          </a:xfrm>
+          <a:prstGeom prst="roundRect">
+            <a:avLst>
+              <a:gd name="adj" fmla="val 11538"/>
+            </a:avLst>
+          </a:prstGeom>
+          <a:solidFill>
+            <a:srgbClr val="FAF3F4"/>
+          </a:solidFill>
+          <a:ln w="12700">
+            <a:solidFill>
+              <a:srgbClr val="FAF3F4"/>
+            </a:solidFill>
+            <a:prstDash val="solid"/>
+          </a:ln>
+        </p:spPr>
+      </p:sp>
+      <p:sp>
+        <p:nvSpPr>
+          <p:cNvPr id="17" name="Text 15"/>
+          <p:cNvSpPr txBox="1"/>
+          <p:nvPr/>
+        </p:nvSpPr>
+        <p:spPr>
+          <a:xfrm>
+            <a:off x="777240" y="4041648"/>
+            <a:ext cx="1280160" cy="475488"/>
+          </a:xfrm>
+          <a:prstGeom prst="rect">
+            <a:avLst/>
+          </a:prstGeom>
+          <a:noFill/>
+          <a:ln/>
+        </p:spPr>
+        <p:txBody>
+          <a:bodyPr wrap="square" lIns="0" tIns="0" rIns="0" bIns="0" rtlCol="0" anchor="ctr"/>
+          <a:lstStyle/>
+          <a:p>
+            <a:pPr indent="0" marL="0">
+              <a:buNone/>
+            </a:pPr>
+            <a:r>
+              <a:rPr lang="en-US" sz="1500" b="1" dirty="0">
+                <a:solidFill>
+                  <a:srgbClr val="7A1524"/>
+                </a:solidFill>
+                <a:latin typeface="Yu Gothic" pitchFamily="34" charset="0"/>
+                <a:ea typeface="Yu Gothic" pitchFamily="34" charset="-122"/>
+                <a:cs typeface="Yu Gothic" pitchFamily="34" charset="-120"/>
+              </a:rPr>
+              <a:t>形式</a:t>
+            </a:r>
+            <a:endParaRPr lang="en-US" sz="1500" dirty="0"/>
+          </a:p>
+        </p:txBody>
+      </p:sp>
+      <p:sp>
+        <p:nvSpPr>
+          <p:cNvPr id="18" name="Text 16"/>
+          <p:cNvSpPr txBox="1"/>
+          <p:nvPr/>
+        </p:nvSpPr>
+        <p:spPr>
+          <a:xfrm>
+            <a:off x="2103120" y="4041648"/>
+            <a:ext cx="6035040" cy="475488"/>
+          </a:xfrm>
+          <a:prstGeom prst="rect">
+            <a:avLst/>
+          </a:prstGeom>
+          <a:noFill/>
+          <a:ln/>
+        </p:spPr>
+        <p:txBody>
+          <a:bodyPr wrap="square" lIns="0" tIns="0" rIns="0" bIns="0" rtlCol="0" anchor="ctr"/>
+          <a:lstStyle/>
+          <a:p>
+            <a:pPr indent="0" marL="0">
+              <a:buNone/>
+            </a:pPr>
+            <a:r>
+              <a:rPr lang="en-US" sz="1500" dirty="0">
+                <a:solidFill>
+                  <a:srgbClr val="3B3634"/>
+                </a:solidFill>
+                <a:latin typeface="Yu Gothic" pitchFamily="34" charset="0"/>
+                <a:ea typeface="Yu Gothic" pitchFamily="34" charset="-122"/>
+                <a:cs typeface="Yu Gothic" pitchFamily="34" charset="-120"/>
+              </a:rPr>
+              <a:t>完全1対1／Zoom　※試合日程に合わせて調整</a:t>
+            </a:r>
+            <a:endParaRPr lang="en-US" sz="1500" dirty="0"/>
           </a:p>
         </p:txBody>
       </p:sp>
@@ -31154,6 +31896,827 @@
 <file path=ppt/slides/slide58.xml><?xml version="1.0" encoding="utf-8"?>
 <p:sld xmlns:a="http://schemas.openxmlformats.org/drawingml/2006/main" xmlns:r="http://schemas.openxmlformats.org/officeDocument/2006/relationships" xmlns:p="http://schemas.openxmlformats.org/presentationml/2006/main">
   <p:cSld name="Slide 58">
+    <p:bg>
+      <p:bgPr>
+        <a:solidFill>
+          <a:srgbClr val="FFFFFF"/>
+        </a:solidFill>
+      </p:bgPr>
+    </p:bg>
+    <p:spTree>
+      <p:nvGrpSpPr>
+        <p:cNvPr id="1" name=""/>
+        <p:cNvGrpSpPr/>
+        <p:nvPr/>
+      </p:nvGrpSpPr>
+      <p:grpSpPr>
+        <a:xfrm>
+          <a:off x="0" y="0"/>
+          <a:ext cx="0" cy="0"/>
+          <a:chOff x="0" y="0"/>
+          <a:chExt cx="0" cy="0"/>
+        </a:xfrm>
+      </p:grpSpPr>
+      <p:sp>
+        <p:nvSpPr>
+          <p:cNvPr id="2" name="Text 0"/>
+          <p:cNvSpPr txBox="1"/>
+          <p:nvPr/>
+        </p:nvSpPr>
+        <p:spPr>
+          <a:xfrm>
+            <a:off x="457200" y="237744"/>
+            <a:ext cx="6400800" cy="274320"/>
+          </a:xfrm>
+          <a:prstGeom prst="rect">
+            <a:avLst/>
+          </a:prstGeom>
+          <a:noFill/>
+          <a:ln/>
+        </p:spPr>
+        <p:txBody>
+          <a:bodyPr wrap="square" lIns="0" tIns="0" rIns="0" bIns="0" rtlCol="0" anchor="ctr"/>
+          <a:lstStyle/>
+          <a:p>
+            <a:pPr indent="0" marL="0">
+              <a:buNone/>
+            </a:pPr>
+            <a:r>
+              <a:rPr lang="en-US" sz="1200" b="1" spc="200" kern="0" dirty="0">
+                <a:solidFill>
+                  <a:srgbClr val="7A1524"/>
+                </a:solidFill>
+                <a:latin typeface="Yu Gothic" pitchFamily="34" charset="0"/>
+                <a:ea typeface="Yu Gothic" pitchFamily="34" charset="-122"/>
+                <a:cs typeface="Yu Gothic" pitchFamily="34" charset="-120"/>
+              </a:rPr>
+              <a:t>講座のご案内</a:t>
+            </a:r>
+            <a:endParaRPr lang="en-US" sz="1200" dirty="0"/>
+          </a:p>
+        </p:txBody>
+      </p:sp>
+      <p:sp>
+        <p:nvSpPr>
+          <p:cNvPr id="3" name="Text 1"/>
+          <p:cNvSpPr txBox="1"/>
+          <p:nvPr/>
+        </p:nvSpPr>
+        <p:spPr>
+          <a:xfrm>
+            <a:off x="8138160" y="4832604"/>
+            <a:ext cx="548640" cy="256032"/>
+          </a:xfrm>
+          <a:prstGeom prst="rect">
+            <a:avLst/>
+          </a:prstGeom>
+          <a:noFill/>
+          <a:ln/>
+        </p:spPr>
+        <p:txBody>
+          <a:bodyPr wrap="square" lIns="0" tIns="0" rIns="0" bIns="0" rtlCol="0" anchor="ctr"/>
+          <a:lstStyle/>
+          <a:p>
+            <a:pPr algn="r" indent="0" marL="0">
+              <a:buNone/>
+            </a:pPr>
+            <a:r>
+              <a:rPr lang="en-US" sz="1100" dirty="0">
+                <a:solidFill>
+                  <a:srgbClr val="6B6360"/>
+                </a:solidFill>
+                <a:latin typeface="Yu Gothic" pitchFamily="34" charset="0"/>
+                <a:ea typeface="Yu Gothic" pitchFamily="34" charset="-122"/>
+                <a:cs typeface="Yu Gothic" pitchFamily="34" charset="-120"/>
+              </a:rPr>
+              <a:t>58</a:t>
+            </a:r>
+            <a:endParaRPr lang="en-US" sz="1100" dirty="0"/>
+          </a:p>
+        </p:txBody>
+      </p:sp>
+      <p:sp>
+        <p:nvSpPr>
+          <p:cNvPr id="4" name="Text 2"/>
+          <p:cNvSpPr txBox="1"/>
+          <p:nvPr/>
+        </p:nvSpPr>
+        <p:spPr>
+          <a:xfrm>
+            <a:off x="457200" y="731520"/>
+            <a:ext cx="8229600" cy="731520"/>
+          </a:xfrm>
+          <a:prstGeom prst="rect">
+            <a:avLst/>
+          </a:prstGeom>
+          <a:noFill/>
+          <a:ln/>
+        </p:spPr>
+        <p:txBody>
+          <a:bodyPr wrap="square" lIns="0" tIns="0" rIns="0" bIns="0" rtlCol="0" anchor="t"/>
+          <a:lstStyle/>
+          <a:p>
+            <a:pPr algn="l" indent="0" marL="0">
+              <a:lnSpc>
+                <a:spcPts val="4640"/>
+              </a:lnSpc>
+              <a:buNone/>
+            </a:pPr>
+            <a:r>
+              <a:rPr lang="en-US" sz="3200" b="1" dirty="0">
+                <a:solidFill>
+                  <a:srgbClr val="141416"/>
+                </a:solidFill>
+                <a:latin typeface="Yu Mincho" pitchFamily="34" charset="0"/>
+                <a:ea typeface="Yu Mincho" pitchFamily="34" charset="-122"/>
+                <a:cs typeface="Yu Mincho" pitchFamily="34" charset="-120"/>
+              </a:rPr>
+              <a:t>3か月の流れ</a:t>
+            </a:r>
+            <a:endParaRPr lang="en-US" sz="3200" dirty="0"/>
+          </a:p>
+        </p:txBody>
+      </p:sp>
+      <p:sp>
+        <p:nvSpPr>
+          <p:cNvPr id="5" name="Shape 3"/>
+          <p:cNvSpPr/>
+          <p:nvPr/>
+        </p:nvSpPr>
+        <p:spPr>
+          <a:xfrm>
+            <a:off x="457200" y="1627632"/>
+            <a:ext cx="7863840" cy="402336"/>
+          </a:xfrm>
+          <a:prstGeom prst="roundRect">
+            <a:avLst>
+              <a:gd name="adj" fmla="val 13636"/>
+            </a:avLst>
+          </a:prstGeom>
+          <a:solidFill>
+            <a:srgbClr val="FAF3F4"/>
+          </a:solidFill>
+          <a:ln w="12700">
+            <a:solidFill>
+              <a:srgbClr val="FAF3F4"/>
+            </a:solidFill>
+            <a:prstDash val="solid"/>
+          </a:ln>
+        </p:spPr>
+      </p:sp>
+      <p:sp>
+        <p:nvSpPr>
+          <p:cNvPr id="6" name="Text 4"/>
+          <p:cNvSpPr txBox="1"/>
+          <p:nvPr/>
+        </p:nvSpPr>
+        <p:spPr>
+          <a:xfrm>
+            <a:off x="777240" y="1627632"/>
+            <a:ext cx="1188720" cy="402336"/>
+          </a:xfrm>
+          <a:prstGeom prst="rect">
+            <a:avLst/>
+          </a:prstGeom>
+          <a:noFill/>
+          <a:ln/>
+        </p:spPr>
+        <p:txBody>
+          <a:bodyPr wrap="square" lIns="0" tIns="0" rIns="0" bIns="0" rtlCol="0" anchor="ctr"/>
+          <a:lstStyle/>
+          <a:p>
+            <a:pPr indent="0" marL="0">
+              <a:buNone/>
+            </a:pPr>
+            <a:r>
+              <a:rPr lang="en-US" sz="1200" b="1" spc="100" kern="0" dirty="0">
+                <a:solidFill>
+                  <a:srgbClr val="7A1524"/>
+                </a:solidFill>
+                <a:latin typeface="Yu Gothic" pitchFamily="34" charset="0"/>
+                <a:ea typeface="Yu Gothic" pitchFamily="34" charset="-122"/>
+                <a:cs typeface="Yu Gothic" pitchFamily="34" charset="-120"/>
+              </a:rPr>
+              <a:t>STEP 1</a:t>
+            </a:r>
+            <a:endParaRPr lang="en-US" sz="1200" dirty="0"/>
+          </a:p>
+        </p:txBody>
+      </p:sp>
+      <p:sp>
+        <p:nvSpPr>
+          <p:cNvPr id="7" name="Text 5"/>
+          <p:cNvSpPr txBox="1"/>
+          <p:nvPr/>
+        </p:nvSpPr>
+        <p:spPr>
+          <a:xfrm>
+            <a:off x="2103120" y="1627632"/>
+            <a:ext cx="6035040" cy="402336"/>
+          </a:xfrm>
+          <a:prstGeom prst="rect">
+            <a:avLst/>
+          </a:prstGeom>
+          <a:noFill/>
+          <a:ln/>
+        </p:spPr>
+        <p:txBody>
+          <a:bodyPr wrap="square" lIns="0" tIns="0" rIns="0" bIns="0" rtlCol="0" anchor="ctr"/>
+          <a:lstStyle/>
+          <a:p>
+            <a:pPr indent="0" marL="0">
+              <a:buNone/>
+            </a:pPr>
+            <a:r>
+              <a:rPr lang="en-US" sz="1550" dirty="0">
+                <a:solidFill>
+                  <a:srgbClr val="3B3634"/>
+                </a:solidFill>
+                <a:latin typeface="Yu Gothic" pitchFamily="34" charset="0"/>
+                <a:ea typeface="Yu Gothic" pitchFamily="34" charset="-122"/>
+                <a:cs typeface="Yu Gothic" pitchFamily="34" charset="-120"/>
+              </a:rPr>
+              <a:t>勝ちたい試合・取りたい一本を明確にする</a:t>
+            </a:r>
+            <a:endParaRPr lang="en-US" sz="1550" dirty="0"/>
+          </a:p>
+        </p:txBody>
+      </p:sp>
+      <p:sp>
+        <p:nvSpPr>
+          <p:cNvPr id="8" name="Shape 6"/>
+          <p:cNvSpPr/>
+          <p:nvPr/>
+        </p:nvSpPr>
+        <p:spPr>
+          <a:xfrm>
+            <a:off x="457200" y="2084832"/>
+            <a:ext cx="7863840" cy="402336"/>
+          </a:xfrm>
+          <a:prstGeom prst="roundRect">
+            <a:avLst>
+              <a:gd name="adj" fmla="val 13636"/>
+            </a:avLst>
+          </a:prstGeom>
+          <a:solidFill>
+            <a:srgbClr val="FAF3F4"/>
+          </a:solidFill>
+          <a:ln w="12700">
+            <a:solidFill>
+              <a:srgbClr val="FAF3F4"/>
+            </a:solidFill>
+            <a:prstDash val="solid"/>
+          </a:ln>
+        </p:spPr>
+      </p:sp>
+      <p:sp>
+        <p:nvSpPr>
+          <p:cNvPr id="9" name="Text 7"/>
+          <p:cNvSpPr txBox="1"/>
+          <p:nvPr/>
+        </p:nvSpPr>
+        <p:spPr>
+          <a:xfrm>
+            <a:off x="777240" y="2084832"/>
+            <a:ext cx="1188720" cy="402336"/>
+          </a:xfrm>
+          <a:prstGeom prst="rect">
+            <a:avLst/>
+          </a:prstGeom>
+          <a:noFill/>
+          <a:ln/>
+        </p:spPr>
+        <p:txBody>
+          <a:bodyPr wrap="square" lIns="0" tIns="0" rIns="0" bIns="0" rtlCol="0" anchor="ctr"/>
+          <a:lstStyle/>
+          <a:p>
+            <a:pPr indent="0" marL="0">
+              <a:buNone/>
+            </a:pPr>
+            <a:r>
+              <a:rPr lang="en-US" sz="1200" b="1" spc="100" kern="0" dirty="0">
+                <a:solidFill>
+                  <a:srgbClr val="7A1524"/>
+                </a:solidFill>
+                <a:latin typeface="Yu Gothic" pitchFamily="34" charset="0"/>
+                <a:ea typeface="Yu Gothic" pitchFamily="34" charset="-122"/>
+                <a:cs typeface="Yu Gothic" pitchFamily="34" charset="-120"/>
+              </a:rPr>
+              <a:t>STEP 2</a:t>
+            </a:r>
+            <a:endParaRPr lang="en-US" sz="1200" dirty="0"/>
+          </a:p>
+        </p:txBody>
+      </p:sp>
+      <p:sp>
+        <p:nvSpPr>
+          <p:cNvPr id="10" name="Text 8"/>
+          <p:cNvSpPr txBox="1"/>
+          <p:nvPr/>
+        </p:nvSpPr>
+        <p:spPr>
+          <a:xfrm>
+            <a:off x="2103120" y="2084832"/>
+            <a:ext cx="6035040" cy="402336"/>
+          </a:xfrm>
+          <a:prstGeom prst="rect">
+            <a:avLst/>
+          </a:prstGeom>
+          <a:noFill/>
+          <a:ln/>
+        </p:spPr>
+        <p:txBody>
+          <a:bodyPr wrap="square" lIns="0" tIns="0" rIns="0" bIns="0" rtlCol="0" anchor="ctr"/>
+          <a:lstStyle/>
+          <a:p>
+            <a:pPr indent="0" marL="0">
+              <a:buNone/>
+            </a:pPr>
+            <a:r>
+              <a:rPr lang="en-US" sz="1550" dirty="0">
+                <a:solidFill>
+                  <a:srgbClr val="3B3634"/>
+                </a:solidFill>
+                <a:latin typeface="Yu Gothic" pitchFamily="34" charset="0"/>
+                <a:ea typeface="Yu Gothic" pitchFamily="34" charset="-122"/>
+                <a:cs typeface="Yu Gothic" pitchFamily="34" charset="-120"/>
+              </a:rPr>
+              <a:t>自分が崩れるパターンを知る</a:t>
+            </a:r>
+            <a:endParaRPr lang="en-US" sz="1550" dirty="0"/>
+          </a:p>
+        </p:txBody>
+      </p:sp>
+      <p:sp>
+        <p:nvSpPr>
+          <p:cNvPr id="11" name="Shape 9"/>
+          <p:cNvSpPr/>
+          <p:nvPr/>
+        </p:nvSpPr>
+        <p:spPr>
+          <a:xfrm>
+            <a:off x="457200" y="2542032"/>
+            <a:ext cx="7863840" cy="402336"/>
+          </a:xfrm>
+          <a:prstGeom prst="roundRect">
+            <a:avLst>
+              <a:gd name="adj" fmla="val 13636"/>
+            </a:avLst>
+          </a:prstGeom>
+          <a:solidFill>
+            <a:srgbClr val="FAF3F4"/>
+          </a:solidFill>
+          <a:ln w="12700">
+            <a:solidFill>
+              <a:srgbClr val="FAF3F4"/>
+            </a:solidFill>
+            <a:prstDash val="solid"/>
+          </a:ln>
+        </p:spPr>
+      </p:sp>
+      <p:sp>
+        <p:nvSpPr>
+          <p:cNvPr id="12" name="Text 10"/>
+          <p:cNvSpPr txBox="1"/>
+          <p:nvPr/>
+        </p:nvSpPr>
+        <p:spPr>
+          <a:xfrm>
+            <a:off x="777240" y="2542032"/>
+            <a:ext cx="1188720" cy="402336"/>
+          </a:xfrm>
+          <a:prstGeom prst="rect">
+            <a:avLst/>
+          </a:prstGeom>
+          <a:noFill/>
+          <a:ln/>
+        </p:spPr>
+        <p:txBody>
+          <a:bodyPr wrap="square" lIns="0" tIns="0" rIns="0" bIns="0" rtlCol="0" anchor="ctr"/>
+          <a:lstStyle/>
+          <a:p>
+            <a:pPr indent="0" marL="0">
+              <a:buNone/>
+            </a:pPr>
+            <a:r>
+              <a:rPr lang="en-US" sz="1200" b="1" spc="100" kern="0" dirty="0">
+                <a:solidFill>
+                  <a:srgbClr val="7A1524"/>
+                </a:solidFill>
+                <a:latin typeface="Yu Gothic" pitchFamily="34" charset="0"/>
+                <a:ea typeface="Yu Gothic" pitchFamily="34" charset="-122"/>
+                <a:cs typeface="Yu Gothic" pitchFamily="34" charset="-120"/>
+              </a:rPr>
+              <a:t>STEP 3</a:t>
+            </a:r>
+            <a:endParaRPr lang="en-US" sz="1200" dirty="0"/>
+          </a:p>
+        </p:txBody>
+      </p:sp>
+      <p:sp>
+        <p:nvSpPr>
+          <p:cNvPr id="13" name="Text 11"/>
+          <p:cNvSpPr txBox="1"/>
+          <p:nvPr/>
+        </p:nvSpPr>
+        <p:spPr>
+          <a:xfrm>
+            <a:off x="2103120" y="2542032"/>
+            <a:ext cx="6035040" cy="402336"/>
+          </a:xfrm>
+          <a:prstGeom prst="rect">
+            <a:avLst/>
+          </a:prstGeom>
+          <a:noFill/>
+          <a:ln/>
+        </p:spPr>
+        <p:txBody>
+          <a:bodyPr wrap="square" lIns="0" tIns="0" rIns="0" bIns="0" rtlCol="0" anchor="ctr"/>
+          <a:lstStyle/>
+          <a:p>
+            <a:pPr indent="0" marL="0">
+              <a:buNone/>
+            </a:pPr>
+            <a:r>
+              <a:rPr lang="en-US" sz="1550" dirty="0">
+                <a:solidFill>
+                  <a:srgbClr val="3B3634"/>
+                </a:solidFill>
+                <a:latin typeface="Yu Gothic" pitchFamily="34" charset="0"/>
+                <a:ea typeface="Yu Gothic" pitchFamily="34" charset="-122"/>
+                <a:cs typeface="Yu Gothic" pitchFamily="34" charset="-120"/>
+              </a:rPr>
+              <a:t>自分に合ったメンタルスキルをつくる</a:t>
+            </a:r>
+            <a:endParaRPr lang="en-US" sz="1550" dirty="0"/>
+          </a:p>
+        </p:txBody>
+      </p:sp>
+      <p:sp>
+        <p:nvSpPr>
+          <p:cNvPr id="14" name="Shape 12"/>
+          <p:cNvSpPr/>
+          <p:nvPr/>
+        </p:nvSpPr>
+        <p:spPr>
+          <a:xfrm>
+            <a:off x="457200" y="2999232"/>
+            <a:ext cx="7863840" cy="402336"/>
+          </a:xfrm>
+          <a:prstGeom prst="roundRect">
+            <a:avLst>
+              <a:gd name="adj" fmla="val 13636"/>
+            </a:avLst>
+          </a:prstGeom>
+          <a:solidFill>
+            <a:srgbClr val="FAF3F4"/>
+          </a:solidFill>
+          <a:ln w="12700">
+            <a:solidFill>
+              <a:srgbClr val="FAF3F4"/>
+            </a:solidFill>
+            <a:prstDash val="solid"/>
+          </a:ln>
+        </p:spPr>
+      </p:sp>
+      <p:sp>
+        <p:nvSpPr>
+          <p:cNvPr id="15" name="Text 13"/>
+          <p:cNvSpPr txBox="1"/>
+          <p:nvPr/>
+        </p:nvSpPr>
+        <p:spPr>
+          <a:xfrm>
+            <a:off x="777240" y="2999232"/>
+            <a:ext cx="1188720" cy="402336"/>
+          </a:xfrm>
+          <a:prstGeom prst="rect">
+            <a:avLst/>
+          </a:prstGeom>
+          <a:noFill/>
+          <a:ln/>
+        </p:spPr>
+        <p:txBody>
+          <a:bodyPr wrap="square" lIns="0" tIns="0" rIns="0" bIns="0" rtlCol="0" anchor="ctr"/>
+          <a:lstStyle/>
+          <a:p>
+            <a:pPr indent="0" marL="0">
+              <a:buNone/>
+            </a:pPr>
+            <a:r>
+              <a:rPr lang="en-US" sz="1200" b="1" spc="100" kern="0" dirty="0">
+                <a:solidFill>
+                  <a:srgbClr val="7A1524"/>
+                </a:solidFill>
+                <a:latin typeface="Yu Gothic" pitchFamily="34" charset="0"/>
+                <a:ea typeface="Yu Gothic" pitchFamily="34" charset="-122"/>
+                <a:cs typeface="Yu Gothic" pitchFamily="34" charset="-120"/>
+              </a:rPr>
+              <a:t>STEP 4</a:t>
+            </a:r>
+            <a:endParaRPr lang="en-US" sz="1200" dirty="0"/>
+          </a:p>
+        </p:txBody>
+      </p:sp>
+      <p:sp>
+        <p:nvSpPr>
+          <p:cNvPr id="16" name="Text 14"/>
+          <p:cNvSpPr txBox="1"/>
+          <p:nvPr/>
+        </p:nvSpPr>
+        <p:spPr>
+          <a:xfrm>
+            <a:off x="2103120" y="2999232"/>
+            <a:ext cx="6035040" cy="402336"/>
+          </a:xfrm>
+          <a:prstGeom prst="rect">
+            <a:avLst/>
+          </a:prstGeom>
+          <a:noFill/>
+          <a:ln/>
+        </p:spPr>
+        <p:txBody>
+          <a:bodyPr wrap="square" lIns="0" tIns="0" rIns="0" bIns="0" rtlCol="0" anchor="ctr"/>
+          <a:lstStyle/>
+          <a:p>
+            <a:pPr indent="0" marL="0">
+              <a:buNone/>
+            </a:pPr>
+            <a:r>
+              <a:rPr lang="en-US" sz="1550" dirty="0">
+                <a:solidFill>
+                  <a:srgbClr val="3B3634"/>
+                </a:solidFill>
+                <a:latin typeface="Yu Gothic" pitchFamily="34" charset="0"/>
+                <a:ea typeface="Yu Gothic" pitchFamily="34" charset="-122"/>
+                <a:cs typeface="Yu Gothic" pitchFamily="34" charset="-120"/>
+              </a:rPr>
+              <a:t>自分専用の試合ルーティンをつくる</a:t>
+            </a:r>
+            <a:endParaRPr lang="en-US" sz="1550" dirty="0"/>
+          </a:p>
+        </p:txBody>
+      </p:sp>
+      <p:sp>
+        <p:nvSpPr>
+          <p:cNvPr id="17" name="Shape 15"/>
+          <p:cNvSpPr/>
+          <p:nvPr/>
+        </p:nvSpPr>
+        <p:spPr>
+          <a:xfrm>
+            <a:off x="457200" y="3456432"/>
+            <a:ext cx="7863840" cy="402336"/>
+          </a:xfrm>
+          <a:prstGeom prst="roundRect">
+            <a:avLst>
+              <a:gd name="adj" fmla="val 13636"/>
+            </a:avLst>
+          </a:prstGeom>
+          <a:solidFill>
+            <a:srgbClr val="FAF3F4"/>
+          </a:solidFill>
+          <a:ln w="12700">
+            <a:solidFill>
+              <a:srgbClr val="FAF3F4"/>
+            </a:solidFill>
+            <a:prstDash val="solid"/>
+          </a:ln>
+        </p:spPr>
+      </p:sp>
+      <p:sp>
+        <p:nvSpPr>
+          <p:cNvPr id="18" name="Text 16"/>
+          <p:cNvSpPr txBox="1"/>
+          <p:nvPr/>
+        </p:nvSpPr>
+        <p:spPr>
+          <a:xfrm>
+            <a:off x="777240" y="3456432"/>
+            <a:ext cx="1188720" cy="402336"/>
+          </a:xfrm>
+          <a:prstGeom prst="rect">
+            <a:avLst/>
+          </a:prstGeom>
+          <a:noFill/>
+          <a:ln/>
+        </p:spPr>
+        <p:txBody>
+          <a:bodyPr wrap="square" lIns="0" tIns="0" rIns="0" bIns="0" rtlCol="0" anchor="ctr"/>
+          <a:lstStyle/>
+          <a:p>
+            <a:pPr indent="0" marL="0">
+              <a:buNone/>
+            </a:pPr>
+            <a:r>
+              <a:rPr lang="en-US" sz="1200" b="1" spc="100" kern="0" dirty="0">
+                <a:solidFill>
+                  <a:srgbClr val="7A1524"/>
+                </a:solidFill>
+                <a:latin typeface="Yu Gothic" pitchFamily="34" charset="0"/>
+                <a:ea typeface="Yu Gothic" pitchFamily="34" charset="-122"/>
+                <a:cs typeface="Yu Gothic" pitchFamily="34" charset="-120"/>
+              </a:rPr>
+              <a:t>STEP 5</a:t>
+            </a:r>
+            <a:endParaRPr lang="en-US" sz="1200" dirty="0"/>
+          </a:p>
+        </p:txBody>
+      </p:sp>
+      <p:sp>
+        <p:nvSpPr>
+          <p:cNvPr id="19" name="Text 17"/>
+          <p:cNvSpPr txBox="1"/>
+          <p:nvPr/>
+        </p:nvSpPr>
+        <p:spPr>
+          <a:xfrm>
+            <a:off x="2103120" y="3456432"/>
+            <a:ext cx="6035040" cy="402336"/>
+          </a:xfrm>
+          <a:prstGeom prst="rect">
+            <a:avLst/>
+          </a:prstGeom>
+          <a:noFill/>
+          <a:ln/>
+        </p:spPr>
+        <p:txBody>
+          <a:bodyPr wrap="square" lIns="0" tIns="0" rIns="0" bIns="0" rtlCol="0" anchor="ctr"/>
+          <a:lstStyle/>
+          <a:p>
+            <a:pPr indent="0" marL="0">
+              <a:buNone/>
+            </a:pPr>
+            <a:r>
+              <a:rPr lang="en-US" sz="1550" dirty="0">
+                <a:solidFill>
+                  <a:srgbClr val="3B3634"/>
+                </a:solidFill>
+                <a:latin typeface="Yu Gothic" pitchFamily="34" charset="0"/>
+                <a:ea typeface="Yu Gothic" pitchFamily="34" charset="-122"/>
+                <a:cs typeface="Yu Gothic" pitchFamily="34" charset="-120"/>
+              </a:rPr>
+              <a:t>本番を想定して使ってみる</a:t>
+            </a:r>
+            <a:endParaRPr lang="en-US" sz="1550" dirty="0"/>
+          </a:p>
+        </p:txBody>
+      </p:sp>
+      <p:sp>
+        <p:nvSpPr>
+          <p:cNvPr id="20" name="Shape 18"/>
+          <p:cNvSpPr/>
+          <p:nvPr/>
+        </p:nvSpPr>
+        <p:spPr>
+          <a:xfrm>
+            <a:off x="457200" y="3913632"/>
+            <a:ext cx="7863840" cy="402336"/>
+          </a:xfrm>
+          <a:prstGeom prst="roundRect">
+            <a:avLst>
+              <a:gd name="adj" fmla="val 13636"/>
+            </a:avLst>
+          </a:prstGeom>
+          <a:solidFill>
+            <a:srgbClr val="540E19"/>
+          </a:solidFill>
+          <a:ln w="12700">
+            <a:solidFill>
+              <a:srgbClr val="540E19"/>
+            </a:solidFill>
+            <a:prstDash val="solid"/>
+          </a:ln>
+        </p:spPr>
+      </p:sp>
+      <p:sp>
+        <p:nvSpPr>
+          <p:cNvPr id="21" name="Text 19"/>
+          <p:cNvSpPr txBox="1"/>
+          <p:nvPr/>
+        </p:nvSpPr>
+        <p:spPr>
+          <a:xfrm>
+            <a:off x="777240" y="3913632"/>
+            <a:ext cx="1188720" cy="402336"/>
+          </a:xfrm>
+          <a:prstGeom prst="rect">
+            <a:avLst/>
+          </a:prstGeom>
+          <a:noFill/>
+          <a:ln/>
+        </p:spPr>
+        <p:txBody>
+          <a:bodyPr wrap="square" lIns="0" tIns="0" rIns="0" bIns="0" rtlCol="0" anchor="ctr"/>
+          <a:lstStyle/>
+          <a:p>
+            <a:pPr indent="0" marL="0">
+              <a:buNone/>
+            </a:pPr>
+            <a:r>
+              <a:rPr lang="en-US" sz="1200" b="1" spc="100" kern="0" dirty="0">
+                <a:solidFill>
+                  <a:srgbClr val="F0B9C3"/>
+                </a:solidFill>
+                <a:latin typeface="Yu Gothic" pitchFamily="34" charset="0"/>
+                <a:ea typeface="Yu Gothic" pitchFamily="34" charset="-122"/>
+                <a:cs typeface="Yu Gothic" pitchFamily="34" charset="-120"/>
+              </a:rPr>
+              <a:t>STEP 6</a:t>
+            </a:r>
+            <a:endParaRPr lang="en-US" sz="1200" dirty="0"/>
+          </a:p>
+        </p:txBody>
+      </p:sp>
+      <p:sp>
+        <p:nvSpPr>
+          <p:cNvPr id="22" name="Text 20"/>
+          <p:cNvSpPr txBox="1"/>
+          <p:nvPr/>
+        </p:nvSpPr>
+        <p:spPr>
+          <a:xfrm>
+            <a:off x="2103120" y="3913632"/>
+            <a:ext cx="6035040" cy="402336"/>
+          </a:xfrm>
+          <a:prstGeom prst="rect">
+            <a:avLst/>
+          </a:prstGeom>
+          <a:noFill/>
+          <a:ln/>
+        </p:spPr>
+        <p:txBody>
+          <a:bodyPr wrap="square" lIns="0" tIns="0" rIns="0" bIns="0" rtlCol="0" anchor="ctr"/>
+          <a:lstStyle/>
+          <a:p>
+            <a:pPr indent="0" marL="0">
+              <a:buNone/>
+            </a:pPr>
+            <a:r>
+              <a:rPr lang="en-US" sz="1550" b="1" dirty="0">
+                <a:solidFill>
+                  <a:srgbClr val="FFFFFF"/>
+                </a:solidFill>
+                <a:latin typeface="Yu Gothic" pitchFamily="34" charset="0"/>
+                <a:ea typeface="Yu Gothic" pitchFamily="34" charset="-122"/>
+                <a:cs typeface="Yu Gothic" pitchFamily="34" charset="-120"/>
+              </a:rPr>
+              <a:t>MY BEST LIFT PLAN 完成</a:t>
+            </a:r>
+            <a:endParaRPr lang="en-US" sz="1550" dirty="0"/>
+          </a:p>
+        </p:txBody>
+      </p:sp>
+      <p:sp>
+        <p:nvSpPr>
+          <p:cNvPr id="23" name="Text 21"/>
+          <p:cNvSpPr txBox="1"/>
+          <p:nvPr/>
+        </p:nvSpPr>
+        <p:spPr>
+          <a:xfrm>
+            <a:off x="457200" y="4443984"/>
+            <a:ext cx="7863840" cy="329184"/>
+          </a:xfrm>
+          <a:prstGeom prst="rect">
+            <a:avLst/>
+          </a:prstGeom>
+          <a:noFill/>
+          <a:ln/>
+        </p:spPr>
+        <p:txBody>
+          <a:bodyPr wrap="square" lIns="0" tIns="0" rIns="0" bIns="0" rtlCol="0" anchor="ctr"/>
+          <a:lstStyle/>
+          <a:p>
+            <a:pPr indent="0" marL="0">
+              <a:buNone/>
+            </a:pPr>
+            <a:r>
+              <a:rPr lang="en-US" sz="1400" dirty="0">
+                <a:solidFill>
+                  <a:srgbClr val="6B6360"/>
+                </a:solidFill>
+                <a:latin typeface="Yu Gothic" pitchFamily="34" charset="0"/>
+                <a:ea typeface="Yu Gothic" pitchFamily="34" charset="-122"/>
+                <a:cs typeface="Yu Gothic" pitchFamily="34" charset="-120"/>
+              </a:rPr>
+              <a:t>一斉スタートではありません。あなたの大会日と現在地に合わせて進めます。</a:t>
+            </a:r>
+            <a:endParaRPr lang="en-US" sz="1400" dirty="0"/>
+          </a:p>
+        </p:txBody>
+      </p:sp>
+    </p:spTree>
+  </p:cSld>
+  <p:clrMapOvr>
+    <a:masterClrMapping/>
+  </p:clrMapOvr>
+</p:sld>
+</file>
+
+<file path=ppt/slides/slide59.xml><?xml version="1.0" encoding="utf-8"?>
+<p:sld xmlns:a="http://schemas.openxmlformats.org/drawingml/2006/main" xmlns:r="http://schemas.openxmlformats.org/officeDocument/2006/relationships" xmlns:p="http://schemas.openxmlformats.org/presentationml/2006/main">
+  <p:cSld name="Slide 59">
     <p:bg>
       <p:bgPr>
         <a:solidFill>
@@ -31183,6 +32746,45 @@
         </p:nvSpPr>
         <p:spPr>
           <a:xfrm>
+            <a:off x="457200" y="237744"/>
+            <a:ext cx="6400800" cy="274320"/>
+          </a:xfrm>
+          <a:prstGeom prst="rect">
+            <a:avLst/>
+          </a:prstGeom>
+          <a:noFill/>
+          <a:ln/>
+        </p:spPr>
+        <p:txBody>
+          <a:bodyPr wrap="square" lIns="0" tIns="0" rIns="0" bIns="0" rtlCol="0" anchor="ctr"/>
+          <a:lstStyle/>
+          <a:p>
+            <a:pPr indent="0" marL="0">
+              <a:buNone/>
+            </a:pPr>
+            <a:r>
+              <a:rPr lang="en-US" sz="1200" b="1" spc="200" kern="0" dirty="0">
+                <a:solidFill>
+                  <a:srgbClr val="F0B9C3"/>
+                </a:solidFill>
+                <a:latin typeface="Yu Gothic" pitchFamily="34" charset="0"/>
+                <a:ea typeface="Yu Gothic" pitchFamily="34" charset="-122"/>
+                <a:cs typeface="Yu Gothic" pitchFamily="34" charset="-120"/>
+              </a:rPr>
+              <a:t>講座のご案内</a:t>
+            </a:r>
+            <a:endParaRPr lang="en-US" sz="1200" dirty="0"/>
+          </a:p>
+        </p:txBody>
+      </p:sp>
+      <p:sp>
+        <p:nvSpPr>
+          <p:cNvPr id="3" name="Text 1"/>
+          <p:cNvSpPr txBox="1"/>
+          <p:nvPr/>
+        </p:nvSpPr>
+        <p:spPr>
+          <a:xfrm>
             <a:off x="8138160" y="4832604"/>
             <a:ext cx="548640" cy="256032"/>
           </a:xfrm>
@@ -31208,7 +32810,7 @@
                 <a:ea typeface="Yu Gothic" pitchFamily="34" charset="-122"/>
                 <a:cs typeface="Yu Gothic" pitchFamily="34" charset="-120"/>
               </a:rPr>
-              <a:t>58</a:t>
+              <a:t>59</a:t>
             </a:r>
             <a:endParaRPr lang="en-US" sz="1100" dirty="0"/>
           </a:p>
@@ -31216,33 +32818,69 @@
       </p:sp>
       <p:sp>
         <p:nvSpPr>
-          <p:cNvPr id="3" name="Text 1"/>
-          <p:cNvSpPr txBox="1"/>
-          <p:nvPr/>
-        </p:nvSpPr>
-        <p:spPr>
-          <a:xfrm>
-            <a:off x="457200" y="658368"/>
-            <a:ext cx="8229600" cy="1188720"/>
-          </a:xfrm>
-          <a:prstGeom prst="rect">
-            <a:avLst/>
-          </a:prstGeom>
-          <a:noFill/>
-          <a:ln/>
-        </p:spPr>
-        <p:txBody>
-          <a:bodyPr wrap="square" lIns="0" tIns="0" rIns="0" bIns="0" rtlCol="0" anchor="t"/>
-          <a:lstStyle/>
-          <a:p>
-            <a:pPr algn="l" indent="0" marL="0">
-              <a:lnSpc>
-                <a:spcPts val="4060"/>
-              </a:lnSpc>
-              <a:buNone/>
-            </a:pPr>
-            <a:r>
-              <a:rPr lang="en-US" sz="2800" b="1" dirty="0">
+          <p:cNvPr id="4" name="Text 2"/>
+          <p:cNvSpPr txBox="1"/>
+          <p:nvPr/>
+        </p:nvSpPr>
+        <p:spPr>
+          <a:xfrm>
+            <a:off x="457200" y="804672"/>
+            <a:ext cx="7863840" cy="365760"/>
+          </a:xfrm>
+          <a:prstGeom prst="rect">
+            <a:avLst/>
+          </a:prstGeom>
+          <a:noFill/>
+          <a:ln/>
+        </p:spPr>
+        <p:txBody>
+          <a:bodyPr wrap="square" lIns="0" tIns="0" rIns="0" bIns="0" rtlCol="0" anchor="ctr"/>
+          <a:lstStyle/>
+          <a:p>
+            <a:pPr indent="0" marL="0">
+              <a:buNone/>
+            </a:pPr>
+            <a:r>
+              <a:rPr lang="en-US" sz="1700" b="1" dirty="0">
+                <a:solidFill>
+                  <a:srgbClr val="F0B9C3"/>
+                </a:solidFill>
+                <a:latin typeface="Yu Gothic" pitchFamily="34" charset="0"/>
+                <a:ea typeface="Yu Gothic" pitchFamily="34" charset="-122"/>
+                <a:cs typeface="Yu Gothic" pitchFamily="34" charset="-120"/>
+              </a:rPr>
+              <a:t>この3か月で完成するもの</a:t>
+            </a:r>
+            <a:endParaRPr lang="en-US" sz="1700" dirty="0"/>
+          </a:p>
+        </p:txBody>
+      </p:sp>
+      <p:sp>
+        <p:nvSpPr>
+          <p:cNvPr id="5" name="Text 3"/>
+          <p:cNvSpPr txBox="1"/>
+          <p:nvPr/>
+        </p:nvSpPr>
+        <p:spPr>
+          <a:xfrm>
+            <a:off x="457200" y="1170432"/>
+            <a:ext cx="7863840" cy="731520"/>
+          </a:xfrm>
+          <a:prstGeom prst="rect">
+            <a:avLst/>
+          </a:prstGeom>
+          <a:noFill/>
+          <a:ln/>
+        </p:spPr>
+        <p:txBody>
+          <a:bodyPr wrap="square" lIns="0" tIns="0" rIns="0" bIns="0" rtlCol="0" anchor="ctr"/>
+          <a:lstStyle/>
+          <a:p>
+            <a:pPr indent="0" marL="0">
+              <a:buNone/>
+            </a:pPr>
+            <a:r>
+              <a:rPr lang="en-US" sz="4000" b="1" spc="100" kern="0" dirty="0">
                 <a:solidFill>
                   <a:srgbClr val="FFFFFF"/>
                 </a:solidFill>
@@ -31250,26 +32888,65 @@
                 <a:ea typeface="Yu Mincho" pitchFamily="34" charset="-122"/>
                 <a:cs typeface="Yu Mincho" pitchFamily="34" charset="-120"/>
               </a:rPr>
-              <a:t>小さな「できた」は、次の一本につながる</a:t>
-            </a:r>
-            <a:endParaRPr lang="en-US" sz="2800" dirty="0"/>
-          </a:p>
-        </p:txBody>
-      </p:sp>
-      <p:sp>
-        <p:nvSpPr>
-          <p:cNvPr id="4" name="Shape 2"/>
+              <a:t>MY BEST LIFT PLAN</a:t>
+            </a:r>
+            <a:endParaRPr lang="en-US" sz="4000" dirty="0"/>
+          </a:p>
+        </p:txBody>
+      </p:sp>
+      <p:sp>
+        <p:nvSpPr>
+          <p:cNvPr id="6" name="Text 4"/>
+          <p:cNvSpPr txBox="1"/>
+          <p:nvPr/>
+        </p:nvSpPr>
+        <p:spPr>
+          <a:xfrm>
+            <a:off x="457200" y="1938528"/>
+            <a:ext cx="7863840" cy="365760"/>
+          </a:xfrm>
+          <a:prstGeom prst="rect">
+            <a:avLst/>
+          </a:prstGeom>
+          <a:noFill/>
+          <a:ln/>
+        </p:spPr>
+        <p:txBody>
+          <a:bodyPr wrap="square" lIns="0" tIns="0" rIns="0" bIns="0" rtlCol="0" anchor="ctr"/>
+          <a:lstStyle/>
+          <a:p>
+            <a:pPr indent="0" marL="0">
+              <a:buNone/>
+            </a:pPr>
+            <a:r>
+              <a:rPr lang="en-US" sz="1500" dirty="0">
+                <a:solidFill>
+                  <a:srgbClr val="F2E7E9"/>
+                </a:solidFill>
+                <a:latin typeface="Yu Gothic" pitchFamily="34" charset="0"/>
+                <a:ea typeface="Yu Gothic" pitchFamily="34" charset="-122"/>
+                <a:cs typeface="Yu Gothic" pitchFamily="34" charset="-120"/>
+              </a:rPr>
+              <a:t>「私はこうすれば試合で力を出せる」をまとめた、自分専用の勝負の設計図。</a:t>
+            </a:r>
+            <a:endParaRPr lang="en-US" sz="1500" dirty="0"/>
+          </a:p>
+        </p:txBody>
+      </p:sp>
+      <p:sp>
+        <p:nvSpPr>
+          <p:cNvPr id="7" name="Shape 5"/>
           <p:cNvSpPr/>
           <p:nvPr/>
         </p:nvSpPr>
         <p:spPr>
           <a:xfrm>
-            <a:off x="457200" y="1463040"/>
-            <a:ext cx="5120640" cy="402336"/>
+            <a:off x="457200" y="2487168"/>
+            <a:ext cx="3840480" cy="438912"/>
           </a:xfrm>
           <a:prstGeom prst="roundRect">
             <a:avLst>
-              <a:gd name="adj" fmla="val 11364"/>
+              <a:gd name="adj" fmla="val 10417"/>
             </a:avLst>
           </a:prstGeom>
           <a:solidFill>
@@ -31285,30 +32962,30 @@
       </p:sp>
       <p:sp>
         <p:nvSpPr>
-          <p:cNvPr id="5" name="Text 3"/>
-          <p:cNvSpPr txBox="1"/>
-          <p:nvPr/>
-        </p:nvSpPr>
-        <p:spPr>
-          <a:xfrm>
-            <a:off x="777240" y="1463040"/>
-            <a:ext cx="4663440" cy="402336"/>
-          </a:xfrm>
-          <a:prstGeom prst="rect">
-            <a:avLst/>
-          </a:prstGeom>
-          <a:noFill/>
-          <a:ln/>
-        </p:spPr>
-        <p:txBody>
-          <a:bodyPr wrap="square" lIns="0" tIns="0" rIns="0" bIns="0" rtlCol="0" anchor="ctr"/>
-          <a:lstStyle/>
-          <a:p>
-            <a:pPr indent="0" marL="0">
-              <a:buNone/>
-            </a:pPr>
-            <a:r>
-              <a:rPr lang="en-US" sz="1600" b="1" dirty="0">
+          <p:cNvPr id="8" name="Text 6"/>
+          <p:cNvSpPr txBox="1"/>
+          <p:nvPr/>
+        </p:nvSpPr>
+        <p:spPr>
+          <a:xfrm>
+            <a:off x="640080" y="2487168"/>
+            <a:ext cx="3566160" cy="438912"/>
+          </a:xfrm>
+          <a:prstGeom prst="rect">
+            <a:avLst/>
+          </a:prstGeom>
+          <a:noFill/>
+          <a:ln/>
+        </p:spPr>
+        <p:txBody>
+          <a:bodyPr wrap="square" lIns="0" tIns="0" rIns="0" bIns="0" rtlCol="0" anchor="ctr"/>
+          <a:lstStyle/>
+          <a:p>
+            <a:pPr indent="0" marL="0">
+              <a:buNone/>
+            </a:pPr>
+            <a:r>
+              <a:rPr lang="en-US" sz="1300" dirty="0">
                 <a:solidFill>
                   <a:srgbClr val="FFFFFF"/>
                 </a:solidFill>
@@ -31316,65 +32993,26 @@
                 <a:ea typeface="Yu Gothic" pitchFamily="34" charset="-122"/>
                 <a:cs typeface="Yu Gothic" pitchFamily="34" charset="-120"/>
               </a:rPr>
-              <a:t>できたを見つける。</a:t>
-            </a:r>
-            <a:endParaRPr lang="en-US" sz="1600" dirty="0"/>
-          </a:p>
-        </p:txBody>
-      </p:sp>
-      <p:sp>
-        <p:nvSpPr>
-          <p:cNvPr id="6" name="Text 4"/>
-          <p:cNvSpPr txBox="1"/>
-          <p:nvPr/>
-        </p:nvSpPr>
-        <p:spPr>
-          <a:xfrm>
-            <a:off x="457200" y="1837944"/>
-            <a:ext cx="457200" cy="128016"/>
-          </a:xfrm>
-          <a:prstGeom prst="rect">
-            <a:avLst/>
-          </a:prstGeom>
-          <a:noFill/>
-          <a:ln/>
-        </p:spPr>
-        <p:txBody>
-          <a:bodyPr wrap="square" lIns="0" tIns="0" rIns="0" bIns="0" rtlCol="0" anchor="ctr"/>
-          <a:lstStyle/>
-          <a:p>
-            <a:pPr algn="ctr" indent="0" marL="0">
-              <a:buNone/>
-            </a:pPr>
-            <a:r>
-              <a:rPr lang="en-US" sz="1000" dirty="0">
-                <a:solidFill>
-                  <a:srgbClr val="8A6870"/>
-                </a:solidFill>
-                <a:latin typeface="Yu Gothic" pitchFamily="34" charset="0"/>
-                <a:ea typeface="Yu Gothic" pitchFamily="34" charset="-122"/>
-                <a:cs typeface="Yu Gothic" pitchFamily="34" charset="-120"/>
-              </a:rPr>
-              <a:t>↓</a:t>
-            </a:r>
-            <a:endParaRPr lang="en-US" sz="1000" dirty="0"/>
-          </a:p>
-        </p:txBody>
-      </p:sp>
-      <p:sp>
-        <p:nvSpPr>
-          <p:cNvPr id="7" name="Shape 5"/>
+              <a:t>試合当日の過ごし方</a:t>
+            </a:r>
+            <a:endParaRPr lang="en-US" sz="1300" dirty="0"/>
+          </a:p>
+        </p:txBody>
+      </p:sp>
+      <p:sp>
+        <p:nvSpPr>
+          <p:cNvPr id="9" name="Shape 7"/>
           <p:cNvSpPr/>
           <p:nvPr/>
         </p:nvSpPr>
         <p:spPr>
           <a:xfrm>
-            <a:off x="457200" y="1938528"/>
-            <a:ext cx="5120640" cy="402336"/>
+            <a:off x="4480560" y="2487168"/>
+            <a:ext cx="3840480" cy="438912"/>
           </a:xfrm>
           <a:prstGeom prst="roundRect">
             <a:avLst>
-              <a:gd name="adj" fmla="val 11364"/>
+              <a:gd name="adj" fmla="val 10417"/>
             </a:avLst>
           </a:prstGeom>
           <a:solidFill>
@@ -31390,30 +33028,30 @@
       </p:sp>
       <p:sp>
         <p:nvSpPr>
-          <p:cNvPr id="8" name="Text 6"/>
-          <p:cNvSpPr txBox="1"/>
-          <p:nvPr/>
-        </p:nvSpPr>
-        <p:spPr>
-          <a:xfrm>
-            <a:off x="777240" y="1938528"/>
-            <a:ext cx="4663440" cy="402336"/>
-          </a:xfrm>
-          <a:prstGeom prst="rect">
-            <a:avLst/>
-          </a:prstGeom>
-          <a:noFill/>
-          <a:ln/>
-        </p:spPr>
-        <p:txBody>
-          <a:bodyPr wrap="square" lIns="0" tIns="0" rIns="0" bIns="0" rtlCol="0" anchor="ctr"/>
-          <a:lstStyle/>
-          <a:p>
-            <a:pPr indent="0" marL="0">
-              <a:buNone/>
-            </a:pPr>
-            <a:r>
-              <a:rPr lang="en-US" sz="1600" b="1" dirty="0">
+          <p:cNvPr id="10" name="Text 8"/>
+          <p:cNvSpPr txBox="1"/>
+          <p:nvPr/>
+        </p:nvSpPr>
+        <p:spPr>
+          <a:xfrm>
+            <a:off x="4663440" y="2487168"/>
+            <a:ext cx="3566160" cy="438912"/>
+          </a:xfrm>
+          <a:prstGeom prst="rect">
+            <a:avLst/>
+          </a:prstGeom>
+          <a:noFill/>
+          <a:ln/>
+        </p:spPr>
+        <p:txBody>
+          <a:bodyPr wrap="square" lIns="0" tIns="0" rIns="0" bIns="0" rtlCol="0" anchor="ctr"/>
+          <a:lstStyle/>
+          <a:p>
+            <a:pPr indent="0" marL="0">
+              <a:buNone/>
+            </a:pPr>
+            <a:r>
+              <a:rPr lang="en-US" sz="1300" dirty="0">
                 <a:solidFill>
                   <a:srgbClr val="FFFFFF"/>
                 </a:solidFill>
@@ -31421,65 +33059,26 @@
                 <a:ea typeface="Yu Gothic" pitchFamily="34" charset="-122"/>
                 <a:cs typeface="Yu Gothic" pitchFamily="34" charset="-120"/>
               </a:rPr>
-              <a:t>自分を知る。</a:t>
-            </a:r>
-            <a:endParaRPr lang="en-US" sz="1600" dirty="0"/>
-          </a:p>
-        </p:txBody>
-      </p:sp>
-      <p:sp>
-        <p:nvSpPr>
-          <p:cNvPr id="9" name="Text 7"/>
-          <p:cNvSpPr txBox="1"/>
-          <p:nvPr/>
-        </p:nvSpPr>
-        <p:spPr>
-          <a:xfrm>
-            <a:off x="457200" y="2313432"/>
-            <a:ext cx="457200" cy="128016"/>
-          </a:xfrm>
-          <a:prstGeom prst="rect">
-            <a:avLst/>
-          </a:prstGeom>
-          <a:noFill/>
-          <a:ln/>
-        </p:spPr>
-        <p:txBody>
-          <a:bodyPr wrap="square" lIns="0" tIns="0" rIns="0" bIns="0" rtlCol="0" anchor="ctr"/>
-          <a:lstStyle/>
-          <a:p>
-            <a:pPr algn="ctr" indent="0" marL="0">
-              <a:buNone/>
-            </a:pPr>
-            <a:r>
-              <a:rPr lang="en-US" sz="1000" dirty="0">
-                <a:solidFill>
-                  <a:srgbClr val="8A6870"/>
-                </a:solidFill>
-                <a:latin typeface="Yu Gothic" pitchFamily="34" charset="0"/>
-                <a:ea typeface="Yu Gothic" pitchFamily="34" charset="-122"/>
-                <a:cs typeface="Yu Gothic" pitchFamily="34" charset="-120"/>
-              </a:rPr>
-              <a:t>↓</a:t>
-            </a:r>
-            <a:endParaRPr lang="en-US" sz="1000" dirty="0"/>
-          </a:p>
-        </p:txBody>
-      </p:sp>
-      <p:sp>
-        <p:nvSpPr>
-          <p:cNvPr id="10" name="Shape 8"/>
+              <a:t>緊張したときに戻る手順</a:t>
+            </a:r>
+            <a:endParaRPr lang="en-US" sz="1300" dirty="0"/>
+          </a:p>
+        </p:txBody>
+      </p:sp>
+      <p:sp>
+        <p:nvSpPr>
+          <p:cNvPr id="11" name="Shape 9"/>
           <p:cNvSpPr/>
           <p:nvPr/>
         </p:nvSpPr>
         <p:spPr>
           <a:xfrm>
-            <a:off x="457200" y="2414016"/>
-            <a:ext cx="5120640" cy="402336"/>
+            <a:off x="457200" y="3017520"/>
+            <a:ext cx="3840480" cy="438912"/>
           </a:xfrm>
           <a:prstGeom prst="roundRect">
             <a:avLst>
-              <a:gd name="adj" fmla="val 11364"/>
+              <a:gd name="adj" fmla="val 10417"/>
             </a:avLst>
           </a:prstGeom>
           <a:solidFill>
@@ -31495,30 +33094,30 @@
       </p:sp>
       <p:sp>
         <p:nvSpPr>
-          <p:cNvPr id="11" name="Text 9"/>
-          <p:cNvSpPr txBox="1"/>
-          <p:nvPr/>
-        </p:nvSpPr>
-        <p:spPr>
-          <a:xfrm>
-            <a:off x="777240" y="2414016"/>
-            <a:ext cx="4663440" cy="402336"/>
-          </a:xfrm>
-          <a:prstGeom prst="rect">
-            <a:avLst/>
-          </a:prstGeom>
-          <a:noFill/>
-          <a:ln/>
-        </p:spPr>
-        <p:txBody>
-          <a:bodyPr wrap="square" lIns="0" tIns="0" rIns="0" bIns="0" rtlCol="0" anchor="ctr"/>
-          <a:lstStyle/>
-          <a:p>
-            <a:pPr indent="0" marL="0">
-              <a:buNone/>
-            </a:pPr>
-            <a:r>
-              <a:rPr lang="en-US" sz="1600" b="1" dirty="0">
+          <p:cNvPr id="12" name="Text 10"/>
+          <p:cNvSpPr txBox="1"/>
+          <p:nvPr/>
+        </p:nvSpPr>
+        <p:spPr>
+          <a:xfrm>
+            <a:off x="640080" y="3017520"/>
+            <a:ext cx="3566160" cy="438912"/>
+          </a:xfrm>
+          <a:prstGeom prst="rect">
+            <a:avLst/>
+          </a:prstGeom>
+          <a:noFill/>
+          <a:ln/>
+        </p:spPr>
+        <p:txBody>
+          <a:bodyPr wrap="square" lIns="0" tIns="0" rIns="0" bIns="0" rtlCol="0" anchor="ctr"/>
+          <a:lstStyle/>
+          <a:p>
+            <a:pPr indent="0" marL="0">
+              <a:buNone/>
+            </a:pPr>
+            <a:r>
+              <a:rPr lang="en-US" sz="1300" dirty="0">
                 <a:solidFill>
                   <a:srgbClr val="FFFFFF"/>
                 </a:solidFill>
@@ -31526,48 +33125,9 @@
                 <a:ea typeface="Yu Gothic" pitchFamily="34" charset="-122"/>
                 <a:cs typeface="Yu Gothic" pitchFamily="34" charset="-120"/>
               </a:rPr>
-              <a:t>目標を決める。</a:t>
-            </a:r>
-            <a:endParaRPr lang="en-US" sz="1600" dirty="0"/>
-          </a:p>
-        </p:txBody>
-      </p:sp>
-      <p:sp>
-        <p:nvSpPr>
-          <p:cNvPr id="12" name="Text 10"/>
-          <p:cNvSpPr txBox="1"/>
-          <p:nvPr/>
-        </p:nvSpPr>
-        <p:spPr>
-          <a:xfrm>
-            <a:off x="457200" y="2788920"/>
-            <a:ext cx="457200" cy="128016"/>
-          </a:xfrm>
-          <a:prstGeom prst="rect">
-            <a:avLst/>
-          </a:prstGeom>
-          <a:noFill/>
-          <a:ln/>
-        </p:spPr>
-        <p:txBody>
-          <a:bodyPr wrap="square" lIns="0" tIns="0" rIns="0" bIns="0" rtlCol="0" anchor="ctr"/>
-          <a:lstStyle/>
-          <a:p>
-            <a:pPr algn="ctr" indent="0" marL="0">
-              <a:buNone/>
-            </a:pPr>
-            <a:r>
-              <a:rPr lang="en-US" sz="1000" dirty="0">
-                <a:solidFill>
-                  <a:srgbClr val="8A6870"/>
-                </a:solidFill>
-                <a:latin typeface="Yu Gothic" pitchFamily="34" charset="0"/>
-                <a:ea typeface="Yu Gothic" pitchFamily="34" charset="-122"/>
-                <a:cs typeface="Yu Gothic" pitchFamily="34" charset="-120"/>
-              </a:rPr>
-              <a:t>↓</a:t>
-            </a:r>
-            <a:endParaRPr lang="en-US" sz="1000" dirty="0"/>
+              <a:t>失敗した直後のリセット方法</a:t>
+            </a:r>
+            <a:endParaRPr lang="en-US" sz="1300" dirty="0"/>
           </a:p>
         </p:txBody>
       </p:sp>
@@ -31579,12 +33139,12 @@
         </p:nvSpPr>
         <p:spPr>
           <a:xfrm>
-            <a:off x="457200" y="2889504"/>
-            <a:ext cx="5120640" cy="402336"/>
+            <a:off x="4480560" y="3017520"/>
+            <a:ext cx="3840480" cy="438912"/>
           </a:xfrm>
           <a:prstGeom prst="roundRect">
             <a:avLst>
-              <a:gd name="adj" fmla="val 11364"/>
+              <a:gd name="adj" fmla="val 10417"/>
             </a:avLst>
           </a:prstGeom>
           <a:solidFill>
@@ -31606,24 +33166,24 @@
         </p:nvSpPr>
         <p:spPr>
           <a:xfrm>
-            <a:off x="777240" y="2889504"/>
-            <a:ext cx="4663440" cy="402336"/>
-          </a:xfrm>
-          <a:prstGeom prst="rect">
-            <a:avLst/>
-          </a:prstGeom>
-          <a:noFill/>
-          <a:ln/>
-        </p:spPr>
-        <p:txBody>
-          <a:bodyPr wrap="square" lIns="0" tIns="0" rIns="0" bIns="0" rtlCol="0" anchor="ctr"/>
-          <a:lstStyle/>
-          <a:p>
-            <a:pPr indent="0" marL="0">
-              <a:buNone/>
-            </a:pPr>
-            <a:r>
-              <a:rPr lang="en-US" sz="1600" b="1" dirty="0">
+            <a:off x="4663440" y="3017520"/>
+            <a:ext cx="3566160" cy="438912"/>
+          </a:xfrm>
+          <a:prstGeom prst="rect">
+            <a:avLst/>
+          </a:prstGeom>
+          <a:noFill/>
+          <a:ln/>
+        </p:spPr>
+        <p:txBody>
+          <a:bodyPr wrap="square" lIns="0" tIns="0" rIns="0" bIns="0" rtlCol="0" anchor="ctr"/>
+          <a:lstStyle/>
+          <a:p>
+            <a:pPr indent="0" marL="0">
+              <a:buNone/>
+            </a:pPr>
+            <a:r>
+              <a:rPr lang="en-US" sz="1300" dirty="0">
                 <a:solidFill>
                   <a:srgbClr val="FFFFFF"/>
                 </a:solidFill>
@@ -31631,131 +33191,26 @@
                 <a:ea typeface="Yu Gothic" pitchFamily="34" charset="-122"/>
                 <a:cs typeface="Yu Gothic" pitchFamily="34" charset="-120"/>
               </a:rPr>
-              <a:t>行動を選ぶ。</a:t>
-            </a:r>
-            <a:endParaRPr lang="en-US" sz="1600" dirty="0"/>
-          </a:p>
-        </p:txBody>
-      </p:sp>
-      <p:sp>
-        <p:nvSpPr>
-          <p:cNvPr id="15" name="Text 13"/>
-          <p:cNvSpPr txBox="1"/>
-          <p:nvPr/>
-        </p:nvSpPr>
-        <p:spPr>
-          <a:xfrm>
-            <a:off x="457200" y="3264408"/>
-            <a:ext cx="457200" cy="128016"/>
-          </a:xfrm>
-          <a:prstGeom prst="rect">
-            <a:avLst/>
-          </a:prstGeom>
-          <a:noFill/>
-          <a:ln/>
-        </p:spPr>
-        <p:txBody>
-          <a:bodyPr wrap="square" lIns="0" tIns="0" rIns="0" bIns="0" rtlCol="0" anchor="ctr"/>
-          <a:lstStyle/>
-          <a:p>
-            <a:pPr algn="ctr" indent="0" marL="0">
-              <a:buNone/>
-            </a:pPr>
-            <a:r>
-              <a:rPr lang="en-US" sz="1000" dirty="0">
-                <a:solidFill>
-                  <a:srgbClr val="8A6870"/>
-                </a:solidFill>
-                <a:latin typeface="Yu Gothic" pitchFamily="34" charset="0"/>
-                <a:ea typeface="Yu Gothic" pitchFamily="34" charset="-122"/>
-                <a:cs typeface="Yu Gothic" pitchFamily="34" charset="-120"/>
-              </a:rPr>
-              <a:t>↓</a:t>
-            </a:r>
-            <a:endParaRPr lang="en-US" sz="1000" dirty="0"/>
-          </a:p>
-        </p:txBody>
-      </p:sp>
-      <p:sp>
-        <p:nvSpPr>
-          <p:cNvPr id="16" name="Shape 14"/>
+              <a:t>他人の記録や順位との付き合い方</a:t>
+            </a:r>
+            <a:endParaRPr lang="en-US" sz="1300" dirty="0"/>
+          </a:p>
+        </p:txBody>
+      </p:sp>
+      <p:sp>
+        <p:nvSpPr>
+          <p:cNvPr id="15" name="Shape 13"/>
           <p:cNvSpPr/>
           <p:nvPr/>
         </p:nvSpPr>
         <p:spPr>
           <a:xfrm>
-            <a:off x="457200" y="3364992"/>
-            <a:ext cx="5120640" cy="402336"/>
+            <a:off x="457200" y="3547872"/>
+            <a:ext cx="3840480" cy="438912"/>
           </a:xfrm>
           <a:prstGeom prst="roundRect">
             <a:avLst>
-              <a:gd name="adj" fmla="val 11364"/>
-            </a:avLst>
-          </a:prstGeom>
-          <a:solidFill>
-            <a:srgbClr val="A02236"/>
-          </a:solidFill>
-          <a:ln w="12700">
-            <a:solidFill>
-              <a:srgbClr val="A02236"/>
-            </a:solidFill>
-            <a:prstDash val="solid"/>
-          </a:ln>
-        </p:spPr>
-      </p:sp>
-      <p:sp>
-        <p:nvSpPr>
-          <p:cNvPr id="17" name="Text 15"/>
-          <p:cNvSpPr txBox="1"/>
-          <p:nvPr/>
-        </p:nvSpPr>
-        <p:spPr>
-          <a:xfrm>
-            <a:off x="777240" y="3364992"/>
-            <a:ext cx="4663440" cy="402336"/>
-          </a:xfrm>
-          <a:prstGeom prst="rect">
-            <a:avLst/>
-          </a:prstGeom>
-          <a:noFill/>
-          <a:ln/>
-        </p:spPr>
-        <p:txBody>
-          <a:bodyPr wrap="square" lIns="0" tIns="0" rIns="0" bIns="0" rtlCol="0" anchor="ctr"/>
-          <a:lstStyle/>
-          <a:p>
-            <a:pPr indent="0" marL="0">
-              <a:buNone/>
-            </a:pPr>
-            <a:r>
-              <a:rPr lang="en-US" sz="1600" b="1" dirty="0">
-                <a:solidFill>
-                  <a:srgbClr val="FFFFFF"/>
-                </a:solidFill>
-                <a:latin typeface="Yu Gothic" pitchFamily="34" charset="0"/>
-                <a:ea typeface="Yu Gothic" pitchFamily="34" charset="-122"/>
-                <a:cs typeface="Yu Gothic" pitchFamily="34" charset="-120"/>
-              </a:rPr>
-              <a:t>また、できたが増える。</a:t>
-            </a:r>
-            <a:endParaRPr lang="en-US" sz="1600" dirty="0"/>
-          </a:p>
-        </p:txBody>
-      </p:sp>
-      <p:sp>
-        <p:nvSpPr>
-          <p:cNvPr id="18" name="Shape 16"/>
-          <p:cNvSpPr/>
-          <p:nvPr/>
-        </p:nvSpPr>
-        <p:spPr>
-          <a:xfrm>
-            <a:off x="5806440" y="1463040"/>
-            <a:ext cx="2880360" cy="2231136"/>
-          </a:xfrm>
-          <a:prstGeom prst="roundRect">
-            <a:avLst>
-              <a:gd name="adj" fmla="val 3279"/>
+              <a:gd name="adj" fmla="val 10417"/>
             </a:avLst>
           </a:prstGeom>
           <a:solidFill>
@@ -31771,128 +33226,65 @@
       </p:sp>
       <p:sp>
         <p:nvSpPr>
-          <p:cNvPr id="19" name="Text 17"/>
-          <p:cNvSpPr txBox="1"/>
-          <p:nvPr/>
-        </p:nvSpPr>
-        <p:spPr>
-          <a:xfrm>
-            <a:off x="6080760" y="1463040"/>
-            <a:ext cx="2331720" cy="2231136"/>
-          </a:xfrm>
-          <a:prstGeom prst="rect">
-            <a:avLst/>
-          </a:prstGeom>
-          <a:noFill/>
-          <a:ln/>
-        </p:spPr>
-        <p:txBody>
-          <a:bodyPr wrap="square" lIns="0" tIns="0" rIns="0" bIns="0" rtlCol="0" anchor="ctr"/>
-          <a:lstStyle/>
-          <a:p>
-            <a:pPr indent="0" marL="0">
-              <a:lnSpc>
-                <a:spcPts val="2800"/>
-              </a:lnSpc>
-              <a:buNone/>
-            </a:pPr>
-            <a:r>
-              <a:rPr lang="en-US" sz="1600" b="1" dirty="0">
-                <a:solidFill>
-                  <a:srgbClr val="F2E7E9"/>
-                </a:solidFill>
-                <a:latin typeface="Yu Gothic" pitchFamily="34" charset="0"/>
-                <a:ea typeface="Yu Gothic" pitchFamily="34" charset="-122"/>
-                <a:cs typeface="Yu Gothic" pitchFamily="34" charset="-120"/>
-              </a:rPr>
-              <a:t>その積み重ねが、</a:t>
-            </a:r>
-            <a:endParaRPr lang="en-US" sz="1600" dirty="0"/>
-          </a:p>
-          <a:p>
-            <a:pPr indent="0" marL="0">
-              <a:lnSpc>
-                <a:spcPts val="2800"/>
-              </a:lnSpc>
-              <a:buNone/>
-            </a:pPr>
-            <a:r>
-              <a:rPr lang="en-US" sz="1600" b="1" dirty="0">
-                <a:solidFill>
-                  <a:srgbClr val="F2E7E9"/>
-                </a:solidFill>
-                <a:latin typeface="Yu Gothic" pitchFamily="34" charset="0"/>
-                <a:ea typeface="Yu Gothic" pitchFamily="34" charset="-122"/>
-                <a:cs typeface="Yu Gothic" pitchFamily="34" charset="-120"/>
-              </a:rPr>
-              <a:t>「私なら次も進める」</a:t>
-            </a:r>
-            <a:endParaRPr lang="en-US" sz="1600" dirty="0"/>
-          </a:p>
-          <a:p>
-            <a:pPr indent="0" marL="0">
-              <a:lnSpc>
-                <a:spcPts val="2800"/>
-              </a:lnSpc>
-              <a:buNone/>
-            </a:pPr>
-            <a:r>
-              <a:rPr lang="en-US" sz="1600" b="1" dirty="0">
-                <a:solidFill>
-                  <a:srgbClr val="F2E7E9"/>
-                </a:solidFill>
-                <a:latin typeface="Yu Gothic" pitchFamily="34" charset="0"/>
-                <a:ea typeface="Yu Gothic" pitchFamily="34" charset="-122"/>
-                <a:cs typeface="Yu Gothic" pitchFamily="34" charset="-120"/>
-              </a:rPr>
-              <a:t>という自己信頼に</a:t>
-            </a:r>
-            <a:endParaRPr lang="en-US" sz="1600" dirty="0"/>
-          </a:p>
-          <a:p>
-            <a:pPr indent="0" marL="0">
-              <a:lnSpc>
-                <a:spcPts val="2800"/>
-              </a:lnSpc>
-              <a:buNone/>
-            </a:pPr>
-            <a:r>
-              <a:rPr lang="en-US" sz="1600" b="1" dirty="0">
-                <a:solidFill>
-                  <a:srgbClr val="F2E7E9"/>
-                </a:solidFill>
-                <a:latin typeface="Yu Gothic" pitchFamily="34" charset="0"/>
-                <a:ea typeface="Yu Gothic" pitchFamily="34" charset="-122"/>
-                <a:cs typeface="Yu Gothic" pitchFamily="34" charset="-120"/>
-              </a:rPr>
-              <a:t>なります。</a:t>
-            </a:r>
-            <a:endParaRPr lang="en-US" sz="1600" dirty="0"/>
-          </a:p>
-        </p:txBody>
-      </p:sp>
-      <p:sp>
-        <p:nvSpPr>
-          <p:cNvPr id="20" name="Shape 18"/>
+          <p:cNvPr id="16" name="Text 14"/>
+          <p:cNvSpPr txBox="1"/>
+          <p:nvPr/>
+        </p:nvSpPr>
+        <p:spPr>
+          <a:xfrm>
+            <a:off x="640080" y="3547872"/>
+            <a:ext cx="3566160" cy="438912"/>
+          </a:xfrm>
+          <a:prstGeom prst="rect">
+            <a:avLst/>
+          </a:prstGeom>
+          <a:noFill/>
+          <a:ln/>
+        </p:spPr>
+        <p:txBody>
+          <a:bodyPr wrap="square" lIns="0" tIns="0" rIns="0" bIns="0" rtlCol="0" anchor="ctr"/>
+          <a:lstStyle/>
+          <a:p>
+            <a:pPr indent="0" marL="0">
+              <a:buNone/>
+            </a:pPr>
+            <a:r>
+              <a:rPr lang="en-US" sz="1300" dirty="0">
+                <a:solidFill>
+                  <a:srgbClr val="FFFFFF"/>
+                </a:solidFill>
+                <a:latin typeface="Yu Gothic" pitchFamily="34" charset="0"/>
+                <a:ea typeface="Yu Gothic" pitchFamily="34" charset="-122"/>
+                <a:cs typeface="Yu Gothic" pitchFamily="34" charset="-120"/>
+              </a:rPr>
+              <a:t>1・2・3本目それぞれの考え方</a:t>
+            </a:r>
+            <a:endParaRPr lang="en-US" sz="1300" dirty="0"/>
+          </a:p>
+        </p:txBody>
+      </p:sp>
+      <p:sp>
+        <p:nvSpPr>
+          <p:cNvPr id="17" name="Shape 15"/>
           <p:cNvSpPr/>
           <p:nvPr/>
         </p:nvSpPr>
         <p:spPr>
           <a:xfrm>
-            <a:off x="457200" y="3977640"/>
-            <a:ext cx="8229600" cy="777240"/>
+            <a:off x="4480560" y="3547872"/>
+            <a:ext cx="3840480" cy="438912"/>
           </a:xfrm>
           <a:prstGeom prst="roundRect">
             <a:avLst>
-              <a:gd name="adj" fmla="val 9412"/>
+              <a:gd name="adj" fmla="val 10417"/>
             </a:avLst>
           </a:prstGeom>
           <a:solidFill>
-            <a:srgbClr val="FFFFFF"/>
+            <a:srgbClr val="3A0B12"/>
           </a:solidFill>
           <a:ln w="12700">
             <a:solidFill>
-              <a:srgbClr val="FFFFFF"/>
+              <a:srgbClr val="3A0B12"/>
             </a:solidFill>
             <a:prstDash val="solid"/>
           </a:ln>
@@ -31900,40 +33292,79 @@
       </p:sp>
       <p:sp>
         <p:nvSpPr>
-          <p:cNvPr id="21" name="Text 19"/>
-          <p:cNvSpPr txBox="1"/>
-          <p:nvPr/>
-        </p:nvSpPr>
-        <p:spPr>
-          <a:xfrm>
-            <a:off x="457200" y="3977640"/>
-            <a:ext cx="8229600" cy="777240"/>
-          </a:xfrm>
-          <a:prstGeom prst="rect">
-            <a:avLst/>
-          </a:prstGeom>
-          <a:noFill/>
-          <a:ln/>
-        </p:spPr>
-        <p:txBody>
-          <a:bodyPr wrap="square" lIns="0" tIns="0" rIns="0" bIns="0" rtlCol="0" anchor="ctr"/>
-          <a:lstStyle/>
-          <a:p>
-            <a:pPr algn="ctr" indent="0" marL="0">
-              <a:buNone/>
-            </a:pPr>
-            <a:r>
-              <a:rPr lang="en-US" sz="2200" b="1" dirty="0">
-                <a:solidFill>
-                  <a:srgbClr val="540E19"/>
-                </a:solidFill>
-                <a:latin typeface="Yu Mincho" pitchFamily="34" charset="0"/>
-                <a:ea typeface="Yu Mincho" pitchFamily="34" charset="-122"/>
-                <a:cs typeface="Yu Mincho" pitchFamily="34" charset="-120"/>
-              </a:rPr>
-              <a:t>今日はありがとうございました。</a:t>
-            </a:r>
-            <a:endParaRPr lang="en-US" sz="2200" dirty="0"/>
+          <p:cNvPr id="18" name="Text 16"/>
+          <p:cNvSpPr txBox="1"/>
+          <p:nvPr/>
+        </p:nvSpPr>
+        <p:spPr>
+          <a:xfrm>
+            <a:off x="4663440" y="3547872"/>
+            <a:ext cx="3566160" cy="438912"/>
+          </a:xfrm>
+          <a:prstGeom prst="rect">
+            <a:avLst/>
+          </a:prstGeom>
+          <a:noFill/>
+          <a:ln/>
+        </p:spPr>
+        <p:txBody>
+          <a:bodyPr wrap="square" lIns="0" tIns="0" rIns="0" bIns="0" rtlCol="0" anchor="ctr"/>
+          <a:lstStyle/>
+          <a:p>
+            <a:pPr indent="0" marL="0">
+              <a:buNone/>
+            </a:pPr>
+            <a:r>
+              <a:rPr lang="en-US" sz="1300" dirty="0">
+                <a:solidFill>
+                  <a:srgbClr val="FFFFFF"/>
+                </a:solidFill>
+                <a:latin typeface="Yu Gothic" pitchFamily="34" charset="0"/>
+                <a:ea typeface="Yu Gothic" pitchFamily="34" charset="-122"/>
+                <a:cs typeface="Yu Gothic" pitchFamily="34" charset="-120"/>
+              </a:rPr>
+              <a:t>ここぞの一本で使う「自分のスイッチ」</a:t>
+            </a:r>
+            <a:endParaRPr lang="en-US" sz="1300" dirty="0"/>
+          </a:p>
+        </p:txBody>
+      </p:sp>
+      <p:sp>
+        <p:nvSpPr>
+          <p:cNvPr id="19" name="Text 17"/>
+          <p:cNvSpPr txBox="1"/>
+          <p:nvPr/>
+        </p:nvSpPr>
+        <p:spPr>
+          <a:xfrm>
+            <a:off x="457200" y="4224528"/>
+            <a:ext cx="7863840" cy="320040"/>
+          </a:xfrm>
+          <a:prstGeom prst="rect">
+            <a:avLst/>
+          </a:prstGeom>
+          <a:noFill/>
+          <a:ln/>
+        </p:spPr>
+        <p:txBody>
+          <a:bodyPr wrap="square" lIns="0" tIns="0" rIns="0" bIns="0" rtlCol="0" anchor="ctr"/>
+          <a:lstStyle/>
+          <a:p>
+            <a:pPr indent="0" marL="0">
+              <a:buNone/>
+            </a:pPr>
+            <a:r>
+              <a:rPr lang="en-US" sz="1400" dirty="0">
+                <a:solidFill>
+                  <a:srgbClr val="F0B9C3"/>
+                </a:solidFill>
+                <a:latin typeface="Yu Gothic" pitchFamily="34" charset="0"/>
+                <a:ea typeface="Yu Gothic" pitchFamily="34" charset="-122"/>
+                <a:cs typeface="Yu Gothic" pitchFamily="34" charset="-120"/>
+              </a:rPr>
+              <a:t>正解を押しつけるのではなく、あなた自身の勝負の型を一緒につくります。</a:t>
+            </a:r>
+            <a:endParaRPr lang="en-US" sz="1400" dirty="0"/>
           </a:p>
         </p:txBody>
       </p:sp>
@@ -32421,6 +33852,2469 @@
               <a:t>でも、私の中にはずっと「もっと強くならなきゃ」がありました。</a:t>
             </a:r>
             <a:endParaRPr lang="en-US" sz="1900" dirty="0"/>
+          </a:p>
+        </p:txBody>
+      </p:sp>
+    </p:spTree>
+  </p:cSld>
+  <p:clrMapOvr>
+    <a:masterClrMapping/>
+  </p:clrMapOvr>
+</p:sld>
+</file>
+
+<file path=ppt/slides/slide60.xml><?xml version="1.0" encoding="utf-8"?>
+<p:sld xmlns:a="http://schemas.openxmlformats.org/drawingml/2006/main" xmlns:r="http://schemas.openxmlformats.org/officeDocument/2006/relationships" xmlns:p="http://schemas.openxmlformats.org/presentationml/2006/main">
+  <p:cSld name="Slide 60">
+    <p:bg>
+      <p:bgPr>
+        <a:solidFill>
+          <a:srgbClr val="FFFFFF"/>
+        </a:solidFill>
+      </p:bgPr>
+    </p:bg>
+    <p:spTree>
+      <p:nvGrpSpPr>
+        <p:cNvPr id="1" name=""/>
+        <p:cNvGrpSpPr/>
+        <p:nvPr/>
+      </p:nvGrpSpPr>
+      <p:grpSpPr>
+        <a:xfrm>
+          <a:off x="0" y="0"/>
+          <a:ext cx="0" cy="0"/>
+          <a:chOff x="0" y="0"/>
+          <a:chExt cx="0" cy="0"/>
+        </a:xfrm>
+      </p:grpSpPr>
+      <p:sp>
+        <p:nvSpPr>
+          <p:cNvPr id="2" name="Text 0"/>
+          <p:cNvSpPr txBox="1"/>
+          <p:nvPr/>
+        </p:nvSpPr>
+        <p:spPr>
+          <a:xfrm>
+            <a:off x="457200" y="237744"/>
+            <a:ext cx="6400800" cy="274320"/>
+          </a:xfrm>
+          <a:prstGeom prst="rect">
+            <a:avLst/>
+          </a:prstGeom>
+          <a:noFill/>
+          <a:ln/>
+        </p:spPr>
+        <p:txBody>
+          <a:bodyPr wrap="square" lIns="0" tIns="0" rIns="0" bIns="0" rtlCol="0" anchor="ctr"/>
+          <a:lstStyle/>
+          <a:p>
+            <a:pPr indent="0" marL="0">
+              <a:buNone/>
+            </a:pPr>
+            <a:r>
+              <a:rPr lang="en-US" sz="1200" b="1" spc="200" kern="0" dirty="0">
+                <a:solidFill>
+                  <a:srgbClr val="7A1524"/>
+                </a:solidFill>
+                <a:latin typeface="Yu Gothic" pitchFamily="34" charset="0"/>
+                <a:ea typeface="Yu Gothic" pitchFamily="34" charset="-122"/>
+                <a:cs typeface="Yu Gothic" pitchFamily="34" charset="-120"/>
+              </a:rPr>
+              <a:t>講座のご案内</a:t>
+            </a:r>
+            <a:endParaRPr lang="en-US" sz="1200" dirty="0"/>
+          </a:p>
+        </p:txBody>
+      </p:sp>
+      <p:sp>
+        <p:nvSpPr>
+          <p:cNvPr id="3" name="Text 1"/>
+          <p:cNvSpPr txBox="1"/>
+          <p:nvPr/>
+        </p:nvSpPr>
+        <p:spPr>
+          <a:xfrm>
+            <a:off x="8138160" y="4832604"/>
+            <a:ext cx="548640" cy="256032"/>
+          </a:xfrm>
+          <a:prstGeom prst="rect">
+            <a:avLst/>
+          </a:prstGeom>
+          <a:noFill/>
+          <a:ln/>
+        </p:spPr>
+        <p:txBody>
+          <a:bodyPr wrap="square" lIns="0" tIns="0" rIns="0" bIns="0" rtlCol="0" anchor="ctr"/>
+          <a:lstStyle/>
+          <a:p>
+            <a:pPr algn="r" indent="0" marL="0">
+              <a:buNone/>
+            </a:pPr>
+            <a:r>
+              <a:rPr lang="en-US" sz="1100" dirty="0">
+                <a:solidFill>
+                  <a:srgbClr val="6B6360"/>
+                </a:solidFill>
+                <a:latin typeface="Yu Gothic" pitchFamily="34" charset="0"/>
+                <a:ea typeface="Yu Gothic" pitchFamily="34" charset="-122"/>
+                <a:cs typeface="Yu Gothic" pitchFamily="34" charset="-120"/>
+              </a:rPr>
+              <a:t>60</a:t>
+            </a:r>
+            <a:endParaRPr lang="en-US" sz="1100" dirty="0"/>
+          </a:p>
+        </p:txBody>
+      </p:sp>
+      <p:sp>
+        <p:nvSpPr>
+          <p:cNvPr id="4" name="Text 2"/>
+          <p:cNvSpPr txBox="1"/>
+          <p:nvPr/>
+        </p:nvSpPr>
+        <p:spPr>
+          <a:xfrm>
+            <a:off x="457200" y="731520"/>
+            <a:ext cx="8229600" cy="731520"/>
+          </a:xfrm>
+          <a:prstGeom prst="rect">
+            <a:avLst/>
+          </a:prstGeom>
+          <a:noFill/>
+          <a:ln/>
+        </p:spPr>
+        <p:txBody>
+          <a:bodyPr wrap="square" lIns="0" tIns="0" rIns="0" bIns="0" rtlCol="0" anchor="t"/>
+          <a:lstStyle/>
+          <a:p>
+            <a:pPr algn="l" indent="0" marL="0">
+              <a:lnSpc>
+                <a:spcPts val="4640"/>
+              </a:lnSpc>
+              <a:buNone/>
+            </a:pPr>
+            <a:r>
+              <a:rPr lang="en-US" sz="3200" b="1" dirty="0">
+                <a:solidFill>
+                  <a:srgbClr val="141416"/>
+                </a:solidFill>
+                <a:latin typeface="Yu Mincho" pitchFamily="34" charset="0"/>
+                <a:ea typeface="Yu Mincho" pitchFamily="34" charset="-122"/>
+                <a:cs typeface="Yu Mincho" pitchFamily="34" charset="-120"/>
+              </a:rPr>
+              <a:t>一人ひとり、中身が違います</a:t>
+            </a:r>
+            <a:endParaRPr lang="en-US" sz="3200" dirty="0"/>
+          </a:p>
+        </p:txBody>
+      </p:sp>
+      <p:sp>
+        <p:nvSpPr>
+          <p:cNvPr id="5" name="Text 3"/>
+          <p:cNvSpPr txBox="1"/>
+          <p:nvPr/>
+        </p:nvSpPr>
+        <p:spPr>
+          <a:xfrm>
+            <a:off x="457200" y="1572768"/>
+            <a:ext cx="7863840" cy="365760"/>
+          </a:xfrm>
+          <a:prstGeom prst="rect">
+            <a:avLst/>
+          </a:prstGeom>
+          <a:noFill/>
+          <a:ln/>
+        </p:spPr>
+        <p:txBody>
+          <a:bodyPr wrap="square" lIns="0" tIns="0" rIns="0" bIns="0" rtlCol="0" anchor="ctr"/>
+          <a:lstStyle/>
+          <a:p>
+            <a:pPr indent="0" marL="0">
+              <a:buNone/>
+            </a:pPr>
+            <a:r>
+              <a:rPr lang="en-US" sz="1600" dirty="0">
+                <a:solidFill>
+                  <a:srgbClr val="3B3634"/>
+                </a:solidFill>
+                <a:latin typeface="Yu Gothic" pitchFamily="34" charset="0"/>
+                <a:ea typeface="Yu Gothic" pitchFamily="34" charset="-122"/>
+                <a:cs typeface="Yu Gothic" pitchFamily="34" charset="-120"/>
+              </a:rPr>
+              <a:t>たくさんの方へ一斉に教える講座ではありません。次の5つを見て、組み立てます。</a:t>
+            </a:r>
+            <a:endParaRPr lang="en-US" sz="1600" dirty="0"/>
+          </a:p>
+        </p:txBody>
+      </p:sp>
+      <p:sp>
+        <p:nvSpPr>
+          <p:cNvPr id="6" name="Shape 4"/>
+          <p:cNvSpPr/>
+          <p:nvPr/>
+        </p:nvSpPr>
+        <p:spPr>
+          <a:xfrm>
+            <a:off x="457200" y="2103120"/>
+            <a:ext cx="2514600" cy="548640"/>
+          </a:xfrm>
+          <a:prstGeom prst="roundRect">
+            <a:avLst>
+              <a:gd name="adj" fmla="val 11667"/>
+            </a:avLst>
+          </a:prstGeom>
+          <a:solidFill>
+            <a:srgbClr val="FAF3F4"/>
+          </a:solidFill>
+          <a:ln w="12700">
+            <a:solidFill>
+              <a:srgbClr val="FAF3F4"/>
+            </a:solidFill>
+            <a:prstDash val="solid"/>
+          </a:ln>
+        </p:spPr>
+      </p:sp>
+      <p:sp>
+        <p:nvSpPr>
+          <p:cNvPr id="7" name="Text 5"/>
+          <p:cNvSpPr txBox="1"/>
+          <p:nvPr/>
+        </p:nvSpPr>
+        <p:spPr>
+          <a:xfrm>
+            <a:off x="457200" y="2103120"/>
+            <a:ext cx="2514600" cy="548640"/>
+          </a:xfrm>
+          <a:prstGeom prst="rect">
+            <a:avLst/>
+          </a:prstGeom>
+          <a:noFill/>
+          <a:ln/>
+        </p:spPr>
+        <p:txBody>
+          <a:bodyPr wrap="square" lIns="0" tIns="0" rIns="0" bIns="0" rtlCol="0" anchor="ctr"/>
+          <a:lstStyle/>
+          <a:p>
+            <a:pPr algn="ctr" indent="0" marL="0">
+              <a:buNone/>
+            </a:pPr>
+            <a:r>
+              <a:rPr lang="en-US" sz="1500" b="1" dirty="0">
+                <a:solidFill>
+                  <a:srgbClr val="7A1524"/>
+                </a:solidFill>
+                <a:latin typeface="Yu Gothic" pitchFamily="34" charset="0"/>
+                <a:ea typeface="Yu Gothic" pitchFamily="34" charset="-122"/>
+                <a:cs typeface="Yu Gothic" pitchFamily="34" charset="-120"/>
+              </a:rPr>
+              <a:t>次の大会</a:t>
+            </a:r>
+            <a:endParaRPr lang="en-US" sz="1500" dirty="0"/>
+          </a:p>
+        </p:txBody>
+      </p:sp>
+      <p:sp>
+        <p:nvSpPr>
+          <p:cNvPr id="8" name="Shape 6"/>
+          <p:cNvSpPr/>
+          <p:nvPr/>
+        </p:nvSpPr>
+        <p:spPr>
+          <a:xfrm>
+            <a:off x="3154680" y="2103120"/>
+            <a:ext cx="2514600" cy="548640"/>
+          </a:xfrm>
+          <a:prstGeom prst="roundRect">
+            <a:avLst>
+              <a:gd name="adj" fmla="val 11667"/>
+            </a:avLst>
+          </a:prstGeom>
+          <a:solidFill>
+            <a:srgbClr val="FAF3F4"/>
+          </a:solidFill>
+          <a:ln w="12700">
+            <a:solidFill>
+              <a:srgbClr val="FAF3F4"/>
+            </a:solidFill>
+            <a:prstDash val="solid"/>
+          </a:ln>
+        </p:spPr>
+      </p:sp>
+      <p:sp>
+        <p:nvSpPr>
+          <p:cNvPr id="9" name="Text 7"/>
+          <p:cNvSpPr txBox="1"/>
+          <p:nvPr/>
+        </p:nvSpPr>
+        <p:spPr>
+          <a:xfrm>
+            <a:off x="3154680" y="2103120"/>
+            <a:ext cx="2514600" cy="548640"/>
+          </a:xfrm>
+          <a:prstGeom prst="rect">
+            <a:avLst/>
+          </a:prstGeom>
+          <a:noFill/>
+          <a:ln/>
+        </p:spPr>
+        <p:txBody>
+          <a:bodyPr wrap="square" lIns="0" tIns="0" rIns="0" bIns="0" rtlCol="0" anchor="ctr"/>
+          <a:lstStyle/>
+          <a:p>
+            <a:pPr algn="ctr" indent="0" marL="0">
+              <a:buNone/>
+            </a:pPr>
+            <a:r>
+              <a:rPr lang="en-US" sz="1500" b="1" dirty="0">
+                <a:solidFill>
+                  <a:srgbClr val="7A1524"/>
+                </a:solidFill>
+                <a:latin typeface="Yu Gothic" pitchFamily="34" charset="0"/>
+                <a:ea typeface="Yu Gothic" pitchFamily="34" charset="-122"/>
+                <a:cs typeface="Yu Gothic" pitchFamily="34" charset="-120"/>
+              </a:rPr>
+              <a:t>取りたい記録</a:t>
+            </a:r>
+            <a:endParaRPr lang="en-US" sz="1500" dirty="0"/>
+          </a:p>
+        </p:txBody>
+      </p:sp>
+      <p:sp>
+        <p:nvSpPr>
+          <p:cNvPr id="10" name="Shape 8"/>
+          <p:cNvSpPr/>
+          <p:nvPr/>
+        </p:nvSpPr>
+        <p:spPr>
+          <a:xfrm>
+            <a:off x="5852160" y="2103120"/>
+            <a:ext cx="2514600" cy="548640"/>
+          </a:xfrm>
+          <a:prstGeom prst="roundRect">
+            <a:avLst>
+              <a:gd name="adj" fmla="val 11667"/>
+            </a:avLst>
+          </a:prstGeom>
+          <a:solidFill>
+            <a:srgbClr val="FAF3F4"/>
+          </a:solidFill>
+          <a:ln w="12700">
+            <a:solidFill>
+              <a:srgbClr val="FAF3F4"/>
+            </a:solidFill>
+            <a:prstDash val="solid"/>
+          </a:ln>
+        </p:spPr>
+      </p:sp>
+      <p:sp>
+        <p:nvSpPr>
+          <p:cNvPr id="11" name="Text 9"/>
+          <p:cNvSpPr txBox="1"/>
+          <p:nvPr/>
+        </p:nvSpPr>
+        <p:spPr>
+          <a:xfrm>
+            <a:off x="5852160" y="2103120"/>
+            <a:ext cx="2514600" cy="548640"/>
+          </a:xfrm>
+          <a:prstGeom prst="rect">
+            <a:avLst/>
+          </a:prstGeom>
+          <a:noFill/>
+          <a:ln/>
+        </p:spPr>
+        <p:txBody>
+          <a:bodyPr wrap="square" lIns="0" tIns="0" rIns="0" bIns="0" rtlCol="0" anchor="ctr"/>
+          <a:lstStyle/>
+          <a:p>
+            <a:pPr algn="ctr" indent="0" marL="0">
+              <a:buNone/>
+            </a:pPr>
+            <a:r>
+              <a:rPr lang="en-US" sz="1500" b="1" dirty="0">
+                <a:solidFill>
+                  <a:srgbClr val="7A1524"/>
+                </a:solidFill>
+                <a:latin typeface="Yu Gothic" pitchFamily="34" charset="0"/>
+                <a:ea typeface="Yu Gothic" pitchFamily="34" charset="-122"/>
+                <a:cs typeface="Yu Gothic" pitchFamily="34" charset="-120"/>
+              </a:rPr>
+              <a:t>過去の試合</a:t>
+            </a:r>
+            <a:endParaRPr lang="en-US" sz="1500" dirty="0"/>
+          </a:p>
+        </p:txBody>
+      </p:sp>
+      <p:sp>
+        <p:nvSpPr>
+          <p:cNvPr id="12" name="Shape 10"/>
+          <p:cNvSpPr/>
+          <p:nvPr/>
+        </p:nvSpPr>
+        <p:spPr>
+          <a:xfrm>
+            <a:off x="457200" y="2761488"/>
+            <a:ext cx="2514600" cy="548640"/>
+          </a:xfrm>
+          <a:prstGeom prst="roundRect">
+            <a:avLst>
+              <a:gd name="adj" fmla="val 11667"/>
+            </a:avLst>
+          </a:prstGeom>
+          <a:solidFill>
+            <a:srgbClr val="FAF3F4"/>
+          </a:solidFill>
+          <a:ln w="12700">
+            <a:solidFill>
+              <a:srgbClr val="FAF3F4"/>
+            </a:solidFill>
+            <a:prstDash val="solid"/>
+          </a:ln>
+        </p:spPr>
+      </p:sp>
+      <p:sp>
+        <p:nvSpPr>
+          <p:cNvPr id="13" name="Text 11"/>
+          <p:cNvSpPr txBox="1"/>
+          <p:nvPr/>
+        </p:nvSpPr>
+        <p:spPr>
+          <a:xfrm>
+            <a:off x="457200" y="2761488"/>
+            <a:ext cx="2514600" cy="548640"/>
+          </a:xfrm>
+          <a:prstGeom prst="rect">
+            <a:avLst/>
+          </a:prstGeom>
+          <a:noFill/>
+          <a:ln/>
+        </p:spPr>
+        <p:txBody>
+          <a:bodyPr wrap="square" lIns="0" tIns="0" rIns="0" bIns="0" rtlCol="0" anchor="ctr"/>
+          <a:lstStyle/>
+          <a:p>
+            <a:pPr algn="ctr" indent="0" marL="0">
+              <a:buNone/>
+            </a:pPr>
+            <a:r>
+              <a:rPr lang="en-US" sz="1500" b="1" dirty="0">
+                <a:solidFill>
+                  <a:srgbClr val="7A1524"/>
+                </a:solidFill>
+                <a:latin typeface="Yu Gothic" pitchFamily="34" charset="0"/>
+                <a:ea typeface="Yu Gothic" pitchFamily="34" charset="-122"/>
+                <a:cs typeface="Yu Gothic" pitchFamily="34" charset="-120"/>
+              </a:rPr>
+              <a:t>考え方の特徴</a:t>
+            </a:r>
+            <a:endParaRPr lang="en-US" sz="1500" dirty="0"/>
+          </a:p>
+        </p:txBody>
+      </p:sp>
+      <p:sp>
+        <p:nvSpPr>
+          <p:cNvPr id="14" name="Shape 12"/>
+          <p:cNvSpPr/>
+          <p:nvPr/>
+        </p:nvSpPr>
+        <p:spPr>
+          <a:xfrm>
+            <a:off x="3154680" y="2761488"/>
+            <a:ext cx="2514600" cy="548640"/>
+          </a:xfrm>
+          <a:prstGeom prst="roundRect">
+            <a:avLst>
+              <a:gd name="adj" fmla="val 11667"/>
+            </a:avLst>
+          </a:prstGeom>
+          <a:solidFill>
+            <a:srgbClr val="FAF3F4"/>
+          </a:solidFill>
+          <a:ln w="12700">
+            <a:solidFill>
+              <a:srgbClr val="FAF3F4"/>
+            </a:solidFill>
+            <a:prstDash val="solid"/>
+          </a:ln>
+        </p:spPr>
+      </p:sp>
+      <p:sp>
+        <p:nvSpPr>
+          <p:cNvPr id="15" name="Text 13"/>
+          <p:cNvSpPr txBox="1"/>
+          <p:nvPr/>
+        </p:nvSpPr>
+        <p:spPr>
+          <a:xfrm>
+            <a:off x="3154680" y="2761488"/>
+            <a:ext cx="2514600" cy="548640"/>
+          </a:xfrm>
+          <a:prstGeom prst="rect">
+            <a:avLst/>
+          </a:prstGeom>
+          <a:noFill/>
+          <a:ln/>
+        </p:spPr>
+        <p:txBody>
+          <a:bodyPr wrap="square" lIns="0" tIns="0" rIns="0" bIns="0" rtlCol="0" anchor="ctr"/>
+          <a:lstStyle/>
+          <a:p>
+            <a:pPr algn="ctr" indent="0" marL="0">
+              <a:buNone/>
+            </a:pPr>
+            <a:r>
+              <a:rPr lang="en-US" sz="1500" b="1" dirty="0">
+                <a:solidFill>
+                  <a:srgbClr val="7A1524"/>
+                </a:solidFill>
+                <a:latin typeface="Yu Gothic" pitchFamily="34" charset="0"/>
+                <a:ea typeface="Yu Gothic" pitchFamily="34" charset="-122"/>
+                <a:cs typeface="Yu Gothic" pitchFamily="34" charset="-120"/>
+              </a:rPr>
+              <a:t>必要なメンタルスキル</a:t>
+            </a:r>
+            <a:endParaRPr lang="en-US" sz="1500" dirty="0"/>
+          </a:p>
+        </p:txBody>
+      </p:sp>
+      <p:sp>
+        <p:nvSpPr>
+          <p:cNvPr id="16" name="Shape 14"/>
+          <p:cNvSpPr/>
+          <p:nvPr/>
+        </p:nvSpPr>
+        <p:spPr>
+          <a:xfrm>
+            <a:off x="457200" y="3657600"/>
+            <a:ext cx="8229600" cy="777240"/>
+          </a:xfrm>
+          <a:prstGeom prst="roundRect">
+            <a:avLst>
+              <a:gd name="adj" fmla="val 9412"/>
+            </a:avLst>
+          </a:prstGeom>
+          <a:solidFill>
+            <a:srgbClr val="540E19"/>
+          </a:solidFill>
+          <a:ln w="12700">
+            <a:solidFill>
+              <a:srgbClr val="540E19"/>
+            </a:solidFill>
+            <a:prstDash val="solid"/>
+          </a:ln>
+        </p:spPr>
+      </p:sp>
+      <p:sp>
+        <p:nvSpPr>
+          <p:cNvPr id="17" name="Text 15"/>
+          <p:cNvSpPr txBox="1"/>
+          <p:nvPr/>
+        </p:nvSpPr>
+        <p:spPr>
+          <a:xfrm>
+            <a:off x="822960" y="3657600"/>
+            <a:ext cx="7498080" cy="777240"/>
+          </a:xfrm>
+          <a:prstGeom prst="rect">
+            <a:avLst/>
+          </a:prstGeom>
+          <a:noFill/>
+          <a:ln/>
+        </p:spPr>
+        <p:txBody>
+          <a:bodyPr wrap="square" lIns="0" tIns="0" rIns="0" bIns="0" rtlCol="0" anchor="ctr"/>
+          <a:lstStyle/>
+          <a:p>
+            <a:pPr indent="0" marL="0">
+              <a:lnSpc>
+                <a:spcPts val="2940"/>
+              </a:lnSpc>
+              <a:buNone/>
+            </a:pPr>
+            <a:r>
+              <a:rPr lang="en-US" sz="2100" b="1" dirty="0">
+                <a:solidFill>
+                  <a:srgbClr val="FFFFFF"/>
+                </a:solidFill>
+                <a:latin typeface="Yu Mincho" pitchFamily="34" charset="0"/>
+                <a:ea typeface="Yu Mincho" pitchFamily="34" charset="-122"/>
+                <a:cs typeface="Yu Mincho" pitchFamily="34" charset="-120"/>
+              </a:rPr>
+              <a:t>だから、同じ内容を全員には渡しません。</a:t>
+            </a:r>
+            <a:endParaRPr lang="en-US" sz="2100" dirty="0"/>
+          </a:p>
+        </p:txBody>
+      </p:sp>
+    </p:spTree>
+  </p:cSld>
+  <p:clrMapOvr>
+    <a:masterClrMapping/>
+  </p:clrMapOvr>
+</p:sld>
+</file>
+
+<file path=ppt/slides/slide61.xml><?xml version="1.0" encoding="utf-8"?>
+<p:sld xmlns:a="http://schemas.openxmlformats.org/drawingml/2006/main" xmlns:r="http://schemas.openxmlformats.org/officeDocument/2006/relationships" xmlns:p="http://schemas.openxmlformats.org/presentationml/2006/main">
+  <p:cSld name="Slide 61">
+    <p:bg>
+      <p:bgPr>
+        <a:solidFill>
+          <a:srgbClr val="FFFFFF"/>
+        </a:solidFill>
+      </p:bgPr>
+    </p:bg>
+    <p:spTree>
+      <p:nvGrpSpPr>
+        <p:cNvPr id="1" name=""/>
+        <p:cNvGrpSpPr/>
+        <p:nvPr/>
+      </p:nvGrpSpPr>
+      <p:grpSpPr>
+        <a:xfrm>
+          <a:off x="0" y="0"/>
+          <a:ext cx="0" cy="0"/>
+          <a:chOff x="0" y="0"/>
+          <a:chExt cx="0" cy="0"/>
+        </a:xfrm>
+      </p:grpSpPr>
+      <p:sp>
+        <p:nvSpPr>
+          <p:cNvPr id="2" name="Text 0"/>
+          <p:cNvSpPr txBox="1"/>
+          <p:nvPr/>
+        </p:nvSpPr>
+        <p:spPr>
+          <a:xfrm>
+            <a:off x="457200" y="237744"/>
+            <a:ext cx="6400800" cy="274320"/>
+          </a:xfrm>
+          <a:prstGeom prst="rect">
+            <a:avLst/>
+          </a:prstGeom>
+          <a:noFill/>
+          <a:ln/>
+        </p:spPr>
+        <p:txBody>
+          <a:bodyPr wrap="square" lIns="0" tIns="0" rIns="0" bIns="0" rtlCol="0" anchor="ctr"/>
+          <a:lstStyle/>
+          <a:p>
+            <a:pPr indent="0" marL="0">
+              <a:buNone/>
+            </a:pPr>
+            <a:r>
+              <a:rPr lang="en-US" sz="1200" b="1" spc="200" kern="0" dirty="0">
+                <a:solidFill>
+                  <a:srgbClr val="7A1524"/>
+                </a:solidFill>
+                <a:latin typeface="Yu Gothic" pitchFamily="34" charset="0"/>
+                <a:ea typeface="Yu Gothic" pitchFamily="34" charset="-122"/>
+                <a:cs typeface="Yu Gothic" pitchFamily="34" charset="-120"/>
+              </a:rPr>
+              <a:t>講座のご案内</a:t>
+            </a:r>
+            <a:endParaRPr lang="en-US" sz="1200" dirty="0"/>
+          </a:p>
+        </p:txBody>
+      </p:sp>
+      <p:sp>
+        <p:nvSpPr>
+          <p:cNvPr id="3" name="Text 1"/>
+          <p:cNvSpPr txBox="1"/>
+          <p:nvPr/>
+        </p:nvSpPr>
+        <p:spPr>
+          <a:xfrm>
+            <a:off x="8138160" y="4832604"/>
+            <a:ext cx="548640" cy="256032"/>
+          </a:xfrm>
+          <a:prstGeom prst="rect">
+            <a:avLst/>
+          </a:prstGeom>
+          <a:noFill/>
+          <a:ln/>
+        </p:spPr>
+        <p:txBody>
+          <a:bodyPr wrap="square" lIns="0" tIns="0" rIns="0" bIns="0" rtlCol="0" anchor="ctr"/>
+          <a:lstStyle/>
+          <a:p>
+            <a:pPr algn="r" indent="0" marL="0">
+              <a:buNone/>
+            </a:pPr>
+            <a:r>
+              <a:rPr lang="en-US" sz="1100" dirty="0">
+                <a:solidFill>
+                  <a:srgbClr val="6B6360"/>
+                </a:solidFill>
+                <a:latin typeface="Yu Gothic" pitchFamily="34" charset="0"/>
+                <a:ea typeface="Yu Gothic" pitchFamily="34" charset="-122"/>
+                <a:cs typeface="Yu Gothic" pitchFamily="34" charset="-120"/>
+              </a:rPr>
+              <a:t>61</a:t>
+            </a:r>
+            <a:endParaRPr lang="en-US" sz="1100" dirty="0"/>
+          </a:p>
+        </p:txBody>
+      </p:sp>
+      <p:sp>
+        <p:nvSpPr>
+          <p:cNvPr id="4" name="Text 2"/>
+          <p:cNvSpPr txBox="1"/>
+          <p:nvPr/>
+        </p:nvSpPr>
+        <p:spPr>
+          <a:xfrm>
+            <a:off x="457200" y="777240"/>
+            <a:ext cx="8229600" cy="457200"/>
+          </a:xfrm>
+          <a:prstGeom prst="rect">
+            <a:avLst/>
+          </a:prstGeom>
+          <a:noFill/>
+          <a:ln/>
+        </p:spPr>
+        <p:txBody>
+          <a:bodyPr wrap="square" lIns="0" tIns="0" rIns="0" bIns="0" rtlCol="0" anchor="t"/>
+          <a:lstStyle/>
+          <a:p>
+            <a:pPr algn="l" indent="0" marL="0">
+              <a:lnSpc>
+                <a:spcPts val="3190"/>
+              </a:lnSpc>
+              <a:buNone/>
+            </a:pPr>
+            <a:r>
+              <a:rPr lang="en-US" sz="2200" b="1" dirty="0">
+                <a:solidFill>
+                  <a:srgbClr val="6B6360"/>
+                </a:solidFill>
+                <a:latin typeface="Yu Mincho" pitchFamily="34" charset="0"/>
+                <a:ea typeface="Yu Mincho" pitchFamily="34" charset="-122"/>
+                <a:cs typeface="Yu Mincho" pitchFamily="34" charset="-120"/>
+              </a:rPr>
+              <a:t>受講料</a:t>
+            </a:r>
+            <a:endParaRPr lang="en-US" sz="2200" dirty="0"/>
+          </a:p>
+        </p:txBody>
+      </p:sp>
+      <p:sp>
+        <p:nvSpPr>
+          <p:cNvPr id="5" name="Text 3"/>
+          <p:cNvSpPr txBox="1"/>
+          <p:nvPr/>
+        </p:nvSpPr>
+        <p:spPr>
+          <a:xfrm>
+            <a:off x="457200" y="1188720"/>
+            <a:ext cx="5669280" cy="1005840"/>
+          </a:xfrm>
+          <a:prstGeom prst="rect">
+            <a:avLst/>
+          </a:prstGeom>
+          <a:noFill/>
+          <a:ln/>
+        </p:spPr>
+        <p:txBody>
+          <a:bodyPr wrap="square" lIns="0" tIns="0" rIns="0" bIns="0" rtlCol="0" anchor="b"/>
+          <a:lstStyle/>
+          <a:p>
+            <a:pPr indent="0" marL="0">
+              <a:buNone/>
+            </a:pPr>
+            <a:r>
+              <a:rPr lang="en-US" sz="6400" b="1" dirty="0">
+                <a:solidFill>
+                  <a:srgbClr val="7A1524"/>
+                </a:solidFill>
+                <a:latin typeface="Yu Mincho" pitchFamily="34" charset="0"/>
+                <a:ea typeface="Yu Mincho" pitchFamily="34" charset="-122"/>
+                <a:cs typeface="Yu Mincho" pitchFamily="34" charset="-120"/>
+              </a:rPr>
+              <a:t>98,000</a:t>
+            </a:r>
+            <a:pPr indent="0" marL="0">
+              <a:buNone/>
+            </a:pPr>
+            <a:r>
+              <a:rPr lang="en-US" sz="2000" b="1" dirty="0">
+                <a:solidFill>
+                  <a:srgbClr val="7A1524"/>
+                </a:solidFill>
+                <a:latin typeface="Yu Mincho" pitchFamily="34" charset="0"/>
+                <a:ea typeface="Yu Mincho" pitchFamily="34" charset="-122"/>
+                <a:cs typeface="Yu Mincho" pitchFamily="34" charset="-120"/>
+              </a:rPr>
+              <a:t>　円（税込）</a:t>
+            </a:r>
+            <a:endParaRPr lang="en-US" sz="6400" dirty="0"/>
+          </a:p>
+        </p:txBody>
+      </p:sp>
+      <p:sp>
+        <p:nvSpPr>
+          <p:cNvPr id="6" name="Shape 4"/>
+          <p:cNvSpPr/>
+          <p:nvPr/>
+        </p:nvSpPr>
+        <p:spPr>
+          <a:xfrm>
+            <a:off x="457200" y="2395728"/>
+            <a:ext cx="1417320" cy="512064"/>
+          </a:xfrm>
+          <a:prstGeom prst="roundRect">
+            <a:avLst>
+              <a:gd name="adj" fmla="val 50000"/>
+            </a:avLst>
+          </a:prstGeom>
+          <a:solidFill>
+            <a:srgbClr val="FAF3F4"/>
+          </a:solidFill>
+          <a:ln w="12700">
+            <a:solidFill>
+              <a:srgbClr val="FAF3F4"/>
+            </a:solidFill>
+            <a:prstDash val="solid"/>
+          </a:ln>
+        </p:spPr>
+      </p:sp>
+      <p:sp>
+        <p:nvSpPr>
+          <p:cNvPr id="7" name="Text 5"/>
+          <p:cNvSpPr txBox="1"/>
+          <p:nvPr/>
+        </p:nvSpPr>
+        <p:spPr>
+          <a:xfrm>
+            <a:off x="457200" y="2395728"/>
+            <a:ext cx="1417320" cy="512064"/>
+          </a:xfrm>
+          <a:prstGeom prst="rect">
+            <a:avLst/>
+          </a:prstGeom>
+          <a:noFill/>
+          <a:ln/>
+        </p:spPr>
+        <p:txBody>
+          <a:bodyPr wrap="square" lIns="0" tIns="0" rIns="0" bIns="0" rtlCol="0" anchor="ctr"/>
+          <a:lstStyle/>
+          <a:p>
+            <a:pPr algn="ctr" indent="0" marL="0">
+              <a:buNone/>
+            </a:pPr>
+            <a:r>
+              <a:rPr lang="en-US" sz="1400" b="1" dirty="0">
+                <a:solidFill>
+                  <a:srgbClr val="7A1524"/>
+                </a:solidFill>
+                <a:latin typeface="Yu Gothic" pitchFamily="34" charset="0"/>
+                <a:ea typeface="Yu Gothic" pitchFamily="34" charset="-122"/>
+                <a:cs typeface="Yu Gothic" pitchFamily="34" charset="-120"/>
+              </a:rPr>
+              <a:t>3か月</a:t>
+            </a:r>
+            <a:endParaRPr lang="en-US" sz="1400" dirty="0"/>
+          </a:p>
+        </p:txBody>
+      </p:sp>
+      <p:sp>
+        <p:nvSpPr>
+          <p:cNvPr id="8" name="Shape 6"/>
+          <p:cNvSpPr/>
+          <p:nvPr/>
+        </p:nvSpPr>
+        <p:spPr>
+          <a:xfrm>
+            <a:off x="2011680" y="2395728"/>
+            <a:ext cx="1417320" cy="512064"/>
+          </a:xfrm>
+          <a:prstGeom prst="roundRect">
+            <a:avLst>
+              <a:gd name="adj" fmla="val 50000"/>
+            </a:avLst>
+          </a:prstGeom>
+          <a:solidFill>
+            <a:srgbClr val="FAF3F4"/>
+          </a:solidFill>
+          <a:ln w="12700">
+            <a:solidFill>
+              <a:srgbClr val="FAF3F4"/>
+            </a:solidFill>
+            <a:prstDash val="solid"/>
+          </a:ln>
+        </p:spPr>
+      </p:sp>
+      <p:sp>
+        <p:nvSpPr>
+          <p:cNvPr id="9" name="Text 7"/>
+          <p:cNvSpPr txBox="1"/>
+          <p:nvPr/>
+        </p:nvSpPr>
+        <p:spPr>
+          <a:xfrm>
+            <a:off x="2011680" y="2395728"/>
+            <a:ext cx="1417320" cy="512064"/>
+          </a:xfrm>
+          <a:prstGeom prst="rect">
+            <a:avLst/>
+          </a:prstGeom>
+          <a:noFill/>
+          <a:ln/>
+        </p:spPr>
+        <p:txBody>
+          <a:bodyPr wrap="square" lIns="0" tIns="0" rIns="0" bIns="0" rtlCol="0" anchor="ctr"/>
+          <a:lstStyle/>
+          <a:p>
+            <a:pPr algn="ctr" indent="0" marL="0">
+              <a:buNone/>
+            </a:pPr>
+            <a:r>
+              <a:rPr lang="en-US" sz="1400" b="1" dirty="0">
+                <a:solidFill>
+                  <a:srgbClr val="7A1524"/>
+                </a:solidFill>
+                <a:latin typeface="Yu Gothic" pitchFamily="34" charset="0"/>
+                <a:ea typeface="Yu Gothic" pitchFamily="34" charset="-122"/>
+                <a:cs typeface="Yu Gothic" pitchFamily="34" charset="-120"/>
+              </a:rPr>
+              <a:t>最大10回</a:t>
+            </a:r>
+            <a:endParaRPr lang="en-US" sz="1400" dirty="0"/>
+          </a:p>
+        </p:txBody>
+      </p:sp>
+      <p:sp>
+        <p:nvSpPr>
+          <p:cNvPr id="10" name="Shape 8"/>
+          <p:cNvSpPr/>
+          <p:nvPr/>
+        </p:nvSpPr>
+        <p:spPr>
+          <a:xfrm>
+            <a:off x="457200" y="3017520"/>
+            <a:ext cx="1417320" cy="512064"/>
+          </a:xfrm>
+          <a:prstGeom prst="roundRect">
+            <a:avLst>
+              <a:gd name="adj" fmla="val 50000"/>
+            </a:avLst>
+          </a:prstGeom>
+          <a:solidFill>
+            <a:srgbClr val="FAF3F4"/>
+          </a:solidFill>
+          <a:ln w="12700">
+            <a:solidFill>
+              <a:srgbClr val="FAF3F4"/>
+            </a:solidFill>
+            <a:prstDash val="solid"/>
+          </a:ln>
+        </p:spPr>
+      </p:sp>
+      <p:sp>
+        <p:nvSpPr>
+          <p:cNvPr id="11" name="Text 9"/>
+          <p:cNvSpPr txBox="1"/>
+          <p:nvPr/>
+        </p:nvSpPr>
+        <p:spPr>
+          <a:xfrm>
+            <a:off x="457200" y="3017520"/>
+            <a:ext cx="1417320" cy="512064"/>
+          </a:xfrm>
+          <a:prstGeom prst="rect">
+            <a:avLst/>
+          </a:prstGeom>
+          <a:noFill/>
+          <a:ln/>
+        </p:spPr>
+        <p:txBody>
+          <a:bodyPr wrap="square" lIns="0" tIns="0" rIns="0" bIns="0" rtlCol="0" anchor="ctr"/>
+          <a:lstStyle/>
+          <a:p>
+            <a:pPr algn="ctr" indent="0" marL="0">
+              <a:buNone/>
+            </a:pPr>
+            <a:r>
+              <a:rPr lang="en-US" sz="1400" b="1" dirty="0">
+                <a:solidFill>
+                  <a:srgbClr val="7A1524"/>
+                </a:solidFill>
+                <a:latin typeface="Yu Gothic" pitchFamily="34" charset="0"/>
+                <a:ea typeface="Yu Gothic" pitchFamily="34" charset="-122"/>
+                <a:cs typeface="Yu Gothic" pitchFamily="34" charset="-120"/>
+              </a:rPr>
+              <a:t>1回60分</a:t>
+            </a:r>
+            <a:endParaRPr lang="en-US" sz="1400" dirty="0"/>
+          </a:p>
+        </p:txBody>
+      </p:sp>
+      <p:sp>
+        <p:nvSpPr>
+          <p:cNvPr id="12" name="Shape 10"/>
+          <p:cNvSpPr/>
+          <p:nvPr/>
+        </p:nvSpPr>
+        <p:spPr>
+          <a:xfrm>
+            <a:off x="2011680" y="3017520"/>
+            <a:ext cx="1417320" cy="512064"/>
+          </a:xfrm>
+          <a:prstGeom prst="roundRect">
+            <a:avLst>
+              <a:gd name="adj" fmla="val 50000"/>
+            </a:avLst>
+          </a:prstGeom>
+          <a:solidFill>
+            <a:srgbClr val="FAF3F4"/>
+          </a:solidFill>
+          <a:ln w="12700">
+            <a:solidFill>
+              <a:srgbClr val="FAF3F4"/>
+            </a:solidFill>
+            <a:prstDash val="solid"/>
+          </a:ln>
+        </p:spPr>
+      </p:sp>
+      <p:sp>
+        <p:nvSpPr>
+          <p:cNvPr id="13" name="Text 11"/>
+          <p:cNvSpPr txBox="1"/>
+          <p:nvPr/>
+        </p:nvSpPr>
+        <p:spPr>
+          <a:xfrm>
+            <a:off x="2011680" y="3017520"/>
+            <a:ext cx="1417320" cy="512064"/>
+          </a:xfrm>
+          <a:prstGeom prst="rect">
+            <a:avLst/>
+          </a:prstGeom>
+          <a:noFill/>
+          <a:ln/>
+        </p:spPr>
+        <p:txBody>
+          <a:bodyPr wrap="square" lIns="0" tIns="0" rIns="0" bIns="0" rtlCol="0" anchor="ctr"/>
+          <a:lstStyle/>
+          <a:p>
+            <a:pPr algn="ctr" indent="0" marL="0">
+              <a:buNone/>
+            </a:pPr>
+            <a:r>
+              <a:rPr lang="en-US" sz="1400" b="1" dirty="0">
+                <a:solidFill>
+                  <a:srgbClr val="7A1524"/>
+                </a:solidFill>
+                <a:latin typeface="Yu Gothic" pitchFamily="34" charset="0"/>
+                <a:ea typeface="Yu Gothic" pitchFamily="34" charset="-122"/>
+                <a:cs typeface="Yu Gothic" pitchFamily="34" charset="-120"/>
+              </a:rPr>
+              <a:t>完全1対1</a:t>
+            </a:r>
+            <a:endParaRPr lang="en-US" sz="1400" dirty="0"/>
+          </a:p>
+        </p:txBody>
+      </p:sp>
+      <p:sp>
+        <p:nvSpPr>
+          <p:cNvPr id="14" name="Shape 12"/>
+          <p:cNvSpPr/>
+          <p:nvPr/>
+        </p:nvSpPr>
+        <p:spPr>
+          <a:xfrm>
+            <a:off x="457200" y="3794760"/>
+            <a:ext cx="5394960" cy="749808"/>
+          </a:xfrm>
+          <a:prstGeom prst="roundRect">
+            <a:avLst>
+              <a:gd name="adj" fmla="val 8537"/>
+            </a:avLst>
+          </a:prstGeom>
+          <a:solidFill>
+            <a:srgbClr val="540E19"/>
+          </a:solidFill>
+          <a:ln w="12700">
+            <a:solidFill>
+              <a:srgbClr val="540E19"/>
+            </a:solidFill>
+            <a:prstDash val="solid"/>
+          </a:ln>
+        </p:spPr>
+      </p:sp>
+      <p:sp>
+        <p:nvSpPr>
+          <p:cNvPr id="15" name="Text 13"/>
+          <p:cNvSpPr txBox="1"/>
+          <p:nvPr/>
+        </p:nvSpPr>
+        <p:spPr>
+          <a:xfrm>
+            <a:off x="731520" y="3794760"/>
+            <a:ext cx="4846320" cy="749808"/>
+          </a:xfrm>
+          <a:prstGeom prst="rect">
+            <a:avLst/>
+          </a:prstGeom>
+          <a:noFill/>
+          <a:ln/>
+        </p:spPr>
+        <p:txBody>
+          <a:bodyPr wrap="square" lIns="0" tIns="0" rIns="0" bIns="0" rtlCol="0" anchor="ctr"/>
+          <a:lstStyle/>
+          <a:p>
+            <a:pPr indent="0" marL="0">
+              <a:buNone/>
+            </a:pPr>
+            <a:r>
+              <a:rPr lang="en-US" sz="1700" b="1" dirty="0">
+                <a:solidFill>
+                  <a:srgbClr val="FFFFFF"/>
+                </a:solidFill>
+                <a:latin typeface="Yu Mincho" pitchFamily="34" charset="0"/>
+                <a:ea typeface="Yu Mincho" pitchFamily="34" charset="-122"/>
+                <a:cs typeface="Yu Mincho" pitchFamily="34" charset="-120"/>
+              </a:rPr>
+              <a:t>お申し込みの前に、まず無料個別相談へ。</a:t>
+            </a:r>
+            <a:endParaRPr lang="en-US" sz="1700" dirty="0"/>
+          </a:p>
+        </p:txBody>
+      </p:sp>
+      <p:sp>
+        <p:nvSpPr>
+          <p:cNvPr id="16" name="Shape 14"/>
+          <p:cNvSpPr/>
+          <p:nvPr/>
+        </p:nvSpPr>
+        <p:spPr>
+          <a:xfrm>
+            <a:off x="6172200" y="1051560"/>
+            <a:ext cx="2514600" cy="2834640"/>
+          </a:xfrm>
+          <a:prstGeom prst="roundRect">
+            <a:avLst>
+              <a:gd name="adj" fmla="val 2909"/>
+            </a:avLst>
+          </a:prstGeom>
+          <a:solidFill>
+            <a:srgbClr val="FAF3F4"/>
+          </a:solidFill>
+          <a:ln w="12700">
+            <a:solidFill>
+              <a:srgbClr val="FAF3F4"/>
+            </a:solidFill>
+            <a:prstDash val="solid"/>
+          </a:ln>
+        </p:spPr>
+      </p:sp>
+      <p:pic>
+        <p:nvPicPr>
+          <p:cNvPr id="17" name="Image 0" descr="images/qr.png">    </p:cNvPr>
+          <p:cNvPicPr>
+            <a:picLocks noChangeAspect="1"/>
+          </p:cNvPicPr>
+          <p:nvPr/>
+        </p:nvPicPr>
+        <p:blipFill>
+          <a:blip r:embed="rId1"/>
+          <a:stretch>
+            <a:fillRect/>
+          </a:stretch>
+        </p:blipFill>
+        <p:spPr>
+          <a:xfrm>
+            <a:off x="6583680" y="1325880"/>
+            <a:ext cx="1691640" cy="1691640"/>
+          </a:xfrm>
+          <a:prstGeom prst="rect">
+            <a:avLst/>
+          </a:prstGeom>
+        </p:spPr>
+      </p:pic>
+      <p:sp>
+        <p:nvSpPr>
+          <p:cNvPr id="18" name="Text 15"/>
+          <p:cNvSpPr txBox="1"/>
+          <p:nvPr/>
+        </p:nvSpPr>
+        <p:spPr>
+          <a:xfrm>
+            <a:off x="6172200" y="3108960"/>
+            <a:ext cx="2514600" cy="292608"/>
+          </a:xfrm>
+          <a:prstGeom prst="rect">
+            <a:avLst/>
+          </a:prstGeom>
+          <a:noFill/>
+          <a:ln/>
+        </p:spPr>
+        <p:txBody>
+          <a:bodyPr wrap="square" lIns="0" tIns="0" rIns="0" bIns="0" rtlCol="0" anchor="ctr"/>
+          <a:lstStyle/>
+          <a:p>
+            <a:pPr algn="ctr" indent="0" marL="0">
+              <a:buNone/>
+            </a:pPr>
+            <a:r>
+              <a:rPr lang="en-US" sz="1300" b="1" dirty="0">
+                <a:solidFill>
+                  <a:srgbClr val="7A1524"/>
+                </a:solidFill>
+                <a:latin typeface="Yu Gothic" pitchFamily="34" charset="0"/>
+                <a:ea typeface="Yu Gothic" pitchFamily="34" charset="-122"/>
+                <a:cs typeface="Yu Gothic" pitchFamily="34" charset="-120"/>
+              </a:rPr>
+              <a:t>60分・無料個別相談</a:t>
+            </a:r>
+            <a:endParaRPr lang="en-US" sz="1300" dirty="0"/>
+          </a:p>
+        </p:txBody>
+      </p:sp>
+      <p:sp>
+        <p:nvSpPr>
+          <p:cNvPr id="19" name="Text 16"/>
+          <p:cNvSpPr txBox="1"/>
+          <p:nvPr/>
+        </p:nvSpPr>
+        <p:spPr>
+          <a:xfrm>
+            <a:off x="6172200" y="3401568"/>
+            <a:ext cx="2514600" cy="457200"/>
+          </a:xfrm>
+          <a:prstGeom prst="rect">
+            <a:avLst/>
+          </a:prstGeom>
+          <a:noFill/>
+          <a:ln/>
+        </p:spPr>
+        <p:txBody>
+          <a:bodyPr wrap="square" lIns="0" tIns="0" rIns="0" bIns="0" rtlCol="0" anchor="ctr"/>
+          <a:lstStyle/>
+          <a:p>
+            <a:pPr algn="ctr" indent="0" marL="0">
+              <a:lnSpc>
+                <a:spcPts val="1600"/>
+              </a:lnSpc>
+              <a:buNone/>
+            </a:pPr>
+            <a:r>
+              <a:rPr lang="en-US" sz="1100" dirty="0">
+                <a:solidFill>
+                  <a:srgbClr val="3B3634"/>
+                </a:solidFill>
+                <a:latin typeface="Yu Gothic" pitchFamily="34" charset="0"/>
+                <a:ea typeface="Yu Gothic" pitchFamily="34" charset="-122"/>
+                <a:cs typeface="Yu Gothic" pitchFamily="34" charset="-120"/>
+              </a:rPr>
+              <a:t>自分に必要かどうかを</a:t>
+            </a:r>
+            <a:endParaRPr lang="en-US" sz="1100" dirty="0"/>
+          </a:p>
+          <a:p>
+            <a:pPr algn="ctr" indent="0" marL="0">
+              <a:lnSpc>
+                <a:spcPts val="1600"/>
+              </a:lnSpc>
+              <a:buNone/>
+            </a:pPr>
+            <a:r>
+              <a:rPr lang="en-US" sz="1100" dirty="0">
+                <a:solidFill>
+                  <a:srgbClr val="3B3634"/>
+                </a:solidFill>
+                <a:latin typeface="Yu Gothic" pitchFamily="34" charset="0"/>
+                <a:ea typeface="Yu Gothic" pitchFamily="34" charset="-122"/>
+                <a:cs typeface="Yu Gothic" pitchFamily="34" charset="-120"/>
+              </a:rPr>
+              <a:t>確かめる時間です</a:t>
+            </a:r>
+            <a:endParaRPr lang="en-US" sz="1100" dirty="0"/>
+          </a:p>
+        </p:txBody>
+      </p:sp>
+      <p:sp>
+        <p:nvSpPr>
+          <p:cNvPr id="20" name="Text 17"/>
+          <p:cNvSpPr txBox="1"/>
+          <p:nvPr/>
+        </p:nvSpPr>
+        <p:spPr>
+          <a:xfrm>
+            <a:off x="6172200" y="4041648"/>
+            <a:ext cx="2514600" cy="274320"/>
+          </a:xfrm>
+          <a:prstGeom prst="rect">
+            <a:avLst/>
+          </a:prstGeom>
+          <a:noFill/>
+          <a:ln/>
+        </p:spPr>
+        <p:txBody>
+          <a:bodyPr wrap="square" lIns="0" tIns="0" rIns="0" bIns="0" rtlCol="0" anchor="ctr"/>
+          <a:lstStyle/>
+          <a:p>
+            <a:pPr algn="ctr" indent="0" marL="0">
+              <a:buNone/>
+            </a:pPr>
+            <a:r>
+              <a:rPr lang="en-US" sz="1000" dirty="0">
+                <a:solidFill>
+                  <a:srgbClr val="6B6360"/>
+                </a:solidFill>
+                <a:latin typeface="Yu Gothic" pitchFamily="34" charset="0"/>
+                <a:ea typeface="Yu Gothic" pitchFamily="34" charset="-122"/>
+                <a:cs typeface="Yu Gothic" pitchFamily="34" charset="-120"/>
+              </a:rPr>
+              <a:t>Zoomのチャットにも貼ります</a:t>
+            </a:r>
+            <a:endParaRPr lang="en-US" sz="1000" dirty="0"/>
+          </a:p>
+        </p:txBody>
+      </p:sp>
+    </p:spTree>
+  </p:cSld>
+  <p:clrMapOvr>
+    <a:masterClrMapping/>
+  </p:clrMapOvr>
+</p:sld>
+</file>
+
+<file path=ppt/slides/slide62.xml><?xml version="1.0" encoding="utf-8"?>
+<p:sld xmlns:a="http://schemas.openxmlformats.org/drawingml/2006/main" xmlns:r="http://schemas.openxmlformats.org/officeDocument/2006/relationships" xmlns:p="http://schemas.openxmlformats.org/presentationml/2006/main">
+  <p:cSld name="Slide 62">
+    <p:bg>
+      <p:bgPr>
+        <a:solidFill>
+          <a:srgbClr val="FFFFFF"/>
+        </a:solidFill>
+      </p:bgPr>
+    </p:bg>
+    <p:spTree>
+      <p:nvGrpSpPr>
+        <p:cNvPr id="1" name=""/>
+        <p:cNvGrpSpPr/>
+        <p:nvPr/>
+      </p:nvGrpSpPr>
+      <p:grpSpPr>
+        <a:xfrm>
+          <a:off x="0" y="0"/>
+          <a:ext cx="0" cy="0"/>
+          <a:chOff x="0" y="0"/>
+          <a:chExt cx="0" cy="0"/>
+        </a:xfrm>
+      </p:grpSpPr>
+      <p:sp>
+        <p:nvSpPr>
+          <p:cNvPr id="2" name="Text 0"/>
+          <p:cNvSpPr txBox="1"/>
+          <p:nvPr/>
+        </p:nvSpPr>
+        <p:spPr>
+          <a:xfrm>
+            <a:off x="457200" y="237744"/>
+            <a:ext cx="6400800" cy="274320"/>
+          </a:xfrm>
+          <a:prstGeom prst="rect">
+            <a:avLst/>
+          </a:prstGeom>
+          <a:noFill/>
+          <a:ln/>
+        </p:spPr>
+        <p:txBody>
+          <a:bodyPr wrap="square" lIns="0" tIns="0" rIns="0" bIns="0" rtlCol="0" anchor="ctr"/>
+          <a:lstStyle/>
+          <a:p>
+            <a:pPr indent="0" marL="0">
+              <a:buNone/>
+            </a:pPr>
+            <a:r>
+              <a:rPr lang="en-US" sz="1200" b="1" spc="200" kern="0" dirty="0">
+                <a:solidFill>
+                  <a:srgbClr val="7A1524"/>
+                </a:solidFill>
+                <a:latin typeface="Yu Gothic" pitchFamily="34" charset="0"/>
+                <a:ea typeface="Yu Gothic" pitchFamily="34" charset="-122"/>
+                <a:cs typeface="Yu Gothic" pitchFamily="34" charset="-120"/>
+              </a:rPr>
+              <a:t>おわりに</a:t>
+            </a:r>
+            <a:endParaRPr lang="en-US" sz="1200" dirty="0"/>
+          </a:p>
+        </p:txBody>
+      </p:sp>
+      <p:sp>
+        <p:nvSpPr>
+          <p:cNvPr id="3" name="Text 1"/>
+          <p:cNvSpPr txBox="1"/>
+          <p:nvPr/>
+        </p:nvSpPr>
+        <p:spPr>
+          <a:xfrm>
+            <a:off x="8138160" y="4832604"/>
+            <a:ext cx="548640" cy="256032"/>
+          </a:xfrm>
+          <a:prstGeom prst="rect">
+            <a:avLst/>
+          </a:prstGeom>
+          <a:noFill/>
+          <a:ln/>
+        </p:spPr>
+        <p:txBody>
+          <a:bodyPr wrap="square" lIns="0" tIns="0" rIns="0" bIns="0" rtlCol="0" anchor="ctr"/>
+          <a:lstStyle/>
+          <a:p>
+            <a:pPr algn="r" indent="0" marL="0">
+              <a:buNone/>
+            </a:pPr>
+            <a:r>
+              <a:rPr lang="en-US" sz="1100" dirty="0">
+                <a:solidFill>
+                  <a:srgbClr val="6B6360"/>
+                </a:solidFill>
+                <a:latin typeface="Yu Gothic" pitchFamily="34" charset="0"/>
+                <a:ea typeface="Yu Gothic" pitchFamily="34" charset="-122"/>
+                <a:cs typeface="Yu Gothic" pitchFamily="34" charset="-120"/>
+              </a:rPr>
+              <a:t>62</a:t>
+            </a:r>
+            <a:endParaRPr lang="en-US" sz="1100" dirty="0"/>
+          </a:p>
+        </p:txBody>
+      </p:sp>
+      <p:sp>
+        <p:nvSpPr>
+          <p:cNvPr id="4" name="Text 2"/>
+          <p:cNvSpPr txBox="1"/>
+          <p:nvPr/>
+        </p:nvSpPr>
+        <p:spPr>
+          <a:xfrm>
+            <a:off x="457200" y="777240"/>
+            <a:ext cx="8229600" cy="1188720"/>
+          </a:xfrm>
+          <a:prstGeom prst="rect">
+            <a:avLst/>
+          </a:prstGeom>
+          <a:noFill/>
+          <a:ln/>
+        </p:spPr>
+        <p:txBody>
+          <a:bodyPr wrap="square" lIns="0" tIns="0" rIns="0" bIns="0" rtlCol="0" anchor="t"/>
+          <a:lstStyle/>
+          <a:p>
+            <a:pPr algn="l" indent="0" marL="0">
+              <a:lnSpc>
+                <a:spcPts val="4495"/>
+              </a:lnSpc>
+              <a:buNone/>
+            </a:pPr>
+            <a:r>
+              <a:rPr lang="en-US" sz="3100" b="1" dirty="0">
+                <a:solidFill>
+                  <a:srgbClr val="141416"/>
+                </a:solidFill>
+                <a:latin typeface="Yu Mincho" pitchFamily="34" charset="0"/>
+                <a:ea typeface="Yu Mincho" pitchFamily="34" charset="-122"/>
+                <a:cs typeface="Yu Mincho" pitchFamily="34" charset="-120"/>
+              </a:rPr>
+              <a:t>今日のゴールは、もう達成しています</a:t>
+            </a:r>
+            <a:endParaRPr lang="en-US" sz="3100" dirty="0"/>
+          </a:p>
+        </p:txBody>
+      </p:sp>
+      <p:sp>
+        <p:nvSpPr>
+          <p:cNvPr id="5" name="Shape 3"/>
+          <p:cNvSpPr/>
+          <p:nvPr/>
+        </p:nvSpPr>
+        <p:spPr>
+          <a:xfrm>
+            <a:off x="457200" y="1828800"/>
+            <a:ext cx="8229600" cy="685800"/>
+          </a:xfrm>
+          <a:prstGeom prst="roundRect">
+            <a:avLst>
+              <a:gd name="adj" fmla="val 8000"/>
+            </a:avLst>
+          </a:prstGeom>
+          <a:solidFill>
+            <a:srgbClr val="FAF3F4"/>
+          </a:solidFill>
+          <a:ln w="12700">
+            <a:solidFill>
+              <a:srgbClr val="FAF3F4"/>
+            </a:solidFill>
+            <a:prstDash val="solid"/>
+          </a:ln>
+        </p:spPr>
+      </p:sp>
+      <p:sp>
+        <p:nvSpPr>
+          <p:cNvPr id="6" name="Text 4"/>
+          <p:cNvSpPr txBox="1"/>
+          <p:nvPr/>
+        </p:nvSpPr>
+        <p:spPr>
+          <a:xfrm>
+            <a:off x="749808" y="1828800"/>
+            <a:ext cx="7644384" cy="685800"/>
+          </a:xfrm>
+          <a:prstGeom prst="rect">
+            <a:avLst/>
+          </a:prstGeom>
+          <a:noFill/>
+          <a:ln/>
+        </p:spPr>
+        <p:txBody>
+          <a:bodyPr wrap="square" lIns="0" tIns="0" rIns="0" bIns="0" rtlCol="0" anchor="ctr"/>
+          <a:lstStyle/>
+          <a:p>
+            <a:pPr indent="0" marL="0">
+              <a:buNone/>
+            </a:pPr>
+            <a:r>
+              <a:rPr lang="en-US" sz="1900" b="1" dirty="0">
+                <a:solidFill>
+                  <a:srgbClr val="7A1524"/>
+                </a:solidFill>
+                <a:latin typeface="Yu Gothic" pitchFamily="34" charset="0"/>
+                <a:ea typeface="Yu Gothic" pitchFamily="34" charset="-122"/>
+                <a:cs typeface="Yu Gothic" pitchFamily="34" charset="-120"/>
+              </a:rPr>
+              <a:t>「私、ちゃんと進んでた」　に気づく。</a:t>
+            </a:r>
+            <a:endParaRPr lang="en-US" sz="1900" dirty="0"/>
+          </a:p>
+        </p:txBody>
+      </p:sp>
+      <p:sp>
+        <p:nvSpPr>
+          <p:cNvPr id="7" name="Shape 5"/>
+          <p:cNvSpPr/>
+          <p:nvPr/>
+        </p:nvSpPr>
+        <p:spPr>
+          <a:xfrm>
+            <a:off x="457200" y="2606040"/>
+            <a:ext cx="8229600" cy="685800"/>
+          </a:xfrm>
+          <a:prstGeom prst="roundRect">
+            <a:avLst>
+              <a:gd name="adj" fmla="val 8000"/>
+            </a:avLst>
+          </a:prstGeom>
+          <a:solidFill>
+            <a:srgbClr val="FAF3F4"/>
+          </a:solidFill>
+          <a:ln w="12700">
+            <a:solidFill>
+              <a:srgbClr val="FAF3F4"/>
+            </a:solidFill>
+            <a:prstDash val="solid"/>
+          </a:ln>
+        </p:spPr>
+      </p:sp>
+      <p:sp>
+        <p:nvSpPr>
+          <p:cNvPr id="8" name="Text 6"/>
+          <p:cNvSpPr txBox="1"/>
+          <p:nvPr/>
+        </p:nvSpPr>
+        <p:spPr>
+          <a:xfrm>
+            <a:off x="749808" y="2606040"/>
+            <a:ext cx="7644384" cy="685800"/>
+          </a:xfrm>
+          <a:prstGeom prst="rect">
+            <a:avLst/>
+          </a:prstGeom>
+          <a:noFill/>
+          <a:ln/>
+        </p:spPr>
+        <p:txBody>
+          <a:bodyPr wrap="square" lIns="0" tIns="0" rIns="0" bIns="0" rtlCol="0" anchor="ctr"/>
+          <a:lstStyle/>
+          <a:p>
+            <a:pPr indent="0" marL="0">
+              <a:buNone/>
+            </a:pPr>
+            <a:r>
+              <a:rPr lang="en-US" sz="1900" b="1" dirty="0">
+                <a:solidFill>
+                  <a:srgbClr val="7A1524"/>
+                </a:solidFill>
+                <a:latin typeface="Yu Gothic" pitchFamily="34" charset="0"/>
+                <a:ea typeface="Yu Gothic" pitchFamily="34" charset="-122"/>
+                <a:cs typeface="Yu Gothic" pitchFamily="34" charset="-120"/>
+              </a:rPr>
+              <a:t>「じゃあ次、私は何をする？」　を自分で決める。</a:t>
+            </a:r>
+            <a:endParaRPr lang="en-US" sz="1900" dirty="0"/>
+          </a:p>
+        </p:txBody>
+      </p:sp>
+      <p:sp>
+        <p:nvSpPr>
+          <p:cNvPr id="9" name="Shape 7"/>
+          <p:cNvSpPr/>
+          <p:nvPr/>
+        </p:nvSpPr>
+        <p:spPr>
+          <a:xfrm>
+            <a:off x="457200" y="3703320"/>
+            <a:ext cx="8229600" cy="868680"/>
+          </a:xfrm>
+          <a:prstGeom prst="roundRect">
+            <a:avLst>
+              <a:gd name="adj" fmla="val 8421"/>
+            </a:avLst>
+          </a:prstGeom>
+          <a:solidFill>
+            <a:srgbClr val="540E19"/>
+          </a:solidFill>
+          <a:ln w="12700">
+            <a:solidFill>
+              <a:srgbClr val="540E19"/>
+            </a:solidFill>
+            <a:prstDash val="solid"/>
+          </a:ln>
+        </p:spPr>
+      </p:sp>
+      <p:sp>
+        <p:nvSpPr>
+          <p:cNvPr id="10" name="Text 8"/>
+          <p:cNvSpPr txBox="1"/>
+          <p:nvPr/>
+        </p:nvSpPr>
+        <p:spPr>
+          <a:xfrm>
+            <a:off x="822960" y="3703320"/>
+            <a:ext cx="7498080" cy="868680"/>
+          </a:xfrm>
+          <a:prstGeom prst="rect">
+            <a:avLst/>
+          </a:prstGeom>
+          <a:noFill/>
+          <a:ln/>
+        </p:spPr>
+        <p:txBody>
+          <a:bodyPr wrap="square" lIns="0" tIns="0" rIns="0" bIns="0" rtlCol="0" anchor="ctr"/>
+          <a:lstStyle/>
+          <a:p>
+            <a:pPr indent="0" marL="0">
+              <a:lnSpc>
+                <a:spcPts val="3080"/>
+              </a:lnSpc>
+              <a:buNone/>
+            </a:pPr>
+            <a:r>
+              <a:rPr lang="en-US" sz="2200" b="1" dirty="0">
+                <a:solidFill>
+                  <a:srgbClr val="FFFFFF"/>
+                </a:solidFill>
+                <a:latin typeface="Yu Mincho" pitchFamily="34" charset="0"/>
+                <a:ea typeface="Yu Mincho" pitchFamily="34" charset="-122"/>
+                <a:cs typeface="Yu Mincho" pitchFamily="34" charset="-120"/>
+              </a:rPr>
+              <a:t>今日決めた一歩を、ぜひ持ち帰ってください。</a:t>
+            </a:r>
+            <a:endParaRPr lang="en-US" sz="2200" dirty="0"/>
+          </a:p>
+        </p:txBody>
+      </p:sp>
+    </p:spTree>
+  </p:cSld>
+  <p:clrMapOvr>
+    <a:masterClrMapping/>
+  </p:clrMapOvr>
+</p:sld>
+</file>
+
+<file path=ppt/slides/slide63.xml><?xml version="1.0" encoding="utf-8"?>
+<p:sld xmlns:a="http://schemas.openxmlformats.org/drawingml/2006/main" xmlns:r="http://schemas.openxmlformats.org/officeDocument/2006/relationships" xmlns:p="http://schemas.openxmlformats.org/presentationml/2006/main">
+  <p:cSld name="Slide 63">
+    <p:bg>
+      <p:bgPr>
+        <a:solidFill>
+          <a:srgbClr val="540E19"/>
+        </a:solidFill>
+      </p:bgPr>
+    </p:bg>
+    <p:spTree>
+      <p:nvGrpSpPr>
+        <p:cNvPr id="1" name=""/>
+        <p:cNvGrpSpPr/>
+        <p:nvPr/>
+      </p:nvGrpSpPr>
+      <p:grpSpPr>
+        <a:xfrm>
+          <a:off x="0" y="0"/>
+          <a:ext cx="0" cy="0"/>
+          <a:chOff x="0" y="0"/>
+          <a:chExt cx="0" cy="0"/>
+        </a:xfrm>
+      </p:grpSpPr>
+      <p:sp>
+        <p:nvSpPr>
+          <p:cNvPr id="2" name="Text 0"/>
+          <p:cNvSpPr txBox="1"/>
+          <p:nvPr/>
+        </p:nvSpPr>
+        <p:spPr>
+          <a:xfrm>
+            <a:off x="8138160" y="4832604"/>
+            <a:ext cx="548640" cy="256032"/>
+          </a:xfrm>
+          <a:prstGeom prst="rect">
+            <a:avLst/>
+          </a:prstGeom>
+          <a:noFill/>
+          <a:ln/>
+        </p:spPr>
+        <p:txBody>
+          <a:bodyPr wrap="square" lIns="0" tIns="0" rIns="0" bIns="0" rtlCol="0" anchor="ctr"/>
+          <a:lstStyle/>
+          <a:p>
+            <a:pPr algn="r" indent="0" marL="0">
+              <a:buNone/>
+            </a:pPr>
+            <a:r>
+              <a:rPr lang="en-US" sz="1100" dirty="0">
+                <a:solidFill>
+                  <a:srgbClr val="8A6870"/>
+                </a:solidFill>
+                <a:latin typeface="Yu Gothic" pitchFamily="34" charset="0"/>
+                <a:ea typeface="Yu Gothic" pitchFamily="34" charset="-122"/>
+                <a:cs typeface="Yu Gothic" pitchFamily="34" charset="-120"/>
+              </a:rPr>
+              <a:t>63</a:t>
+            </a:r>
+            <a:endParaRPr lang="en-US" sz="1100" dirty="0"/>
+          </a:p>
+        </p:txBody>
+      </p:sp>
+      <p:sp>
+        <p:nvSpPr>
+          <p:cNvPr id="3" name="Text 1"/>
+          <p:cNvSpPr txBox="1"/>
+          <p:nvPr/>
+        </p:nvSpPr>
+        <p:spPr>
+          <a:xfrm>
+            <a:off x="457200" y="658368"/>
+            <a:ext cx="8229600" cy="1188720"/>
+          </a:xfrm>
+          <a:prstGeom prst="rect">
+            <a:avLst/>
+          </a:prstGeom>
+          <a:noFill/>
+          <a:ln/>
+        </p:spPr>
+        <p:txBody>
+          <a:bodyPr wrap="square" lIns="0" tIns="0" rIns="0" bIns="0" rtlCol="0" anchor="t"/>
+          <a:lstStyle/>
+          <a:p>
+            <a:pPr algn="l" indent="0" marL="0">
+              <a:lnSpc>
+                <a:spcPts val="4060"/>
+              </a:lnSpc>
+              <a:buNone/>
+            </a:pPr>
+            <a:r>
+              <a:rPr lang="en-US" sz="2800" b="1" dirty="0">
+                <a:solidFill>
+                  <a:srgbClr val="FFFFFF"/>
+                </a:solidFill>
+                <a:latin typeface="Yu Mincho" pitchFamily="34" charset="0"/>
+                <a:ea typeface="Yu Mincho" pitchFamily="34" charset="-122"/>
+                <a:cs typeface="Yu Mincho" pitchFamily="34" charset="-120"/>
+              </a:rPr>
+              <a:t>小さな「できた」は、次の一本につながる</a:t>
+            </a:r>
+            <a:endParaRPr lang="en-US" sz="2800" dirty="0"/>
+          </a:p>
+        </p:txBody>
+      </p:sp>
+      <p:sp>
+        <p:nvSpPr>
+          <p:cNvPr id="4" name="Shape 2"/>
+          <p:cNvSpPr/>
+          <p:nvPr/>
+        </p:nvSpPr>
+        <p:spPr>
+          <a:xfrm>
+            <a:off x="457200" y="1463040"/>
+            <a:ext cx="5120640" cy="402336"/>
+          </a:xfrm>
+          <a:prstGeom prst="roundRect">
+            <a:avLst>
+              <a:gd name="adj" fmla="val 11364"/>
+            </a:avLst>
+          </a:prstGeom>
+          <a:solidFill>
+            <a:srgbClr val="3A0B12"/>
+          </a:solidFill>
+          <a:ln w="12700">
+            <a:solidFill>
+              <a:srgbClr val="3A0B12"/>
+            </a:solidFill>
+            <a:prstDash val="solid"/>
+          </a:ln>
+        </p:spPr>
+      </p:sp>
+      <p:sp>
+        <p:nvSpPr>
+          <p:cNvPr id="5" name="Text 3"/>
+          <p:cNvSpPr txBox="1"/>
+          <p:nvPr/>
+        </p:nvSpPr>
+        <p:spPr>
+          <a:xfrm>
+            <a:off x="777240" y="1463040"/>
+            <a:ext cx="4663440" cy="402336"/>
+          </a:xfrm>
+          <a:prstGeom prst="rect">
+            <a:avLst/>
+          </a:prstGeom>
+          <a:noFill/>
+          <a:ln/>
+        </p:spPr>
+        <p:txBody>
+          <a:bodyPr wrap="square" lIns="0" tIns="0" rIns="0" bIns="0" rtlCol="0" anchor="ctr"/>
+          <a:lstStyle/>
+          <a:p>
+            <a:pPr indent="0" marL="0">
+              <a:buNone/>
+            </a:pPr>
+            <a:r>
+              <a:rPr lang="en-US" sz="1600" b="1" dirty="0">
+                <a:solidFill>
+                  <a:srgbClr val="FFFFFF"/>
+                </a:solidFill>
+                <a:latin typeface="Yu Gothic" pitchFamily="34" charset="0"/>
+                <a:ea typeface="Yu Gothic" pitchFamily="34" charset="-122"/>
+                <a:cs typeface="Yu Gothic" pitchFamily="34" charset="-120"/>
+              </a:rPr>
+              <a:t>できたを見つける。</a:t>
+            </a:r>
+            <a:endParaRPr lang="en-US" sz="1600" dirty="0"/>
+          </a:p>
+        </p:txBody>
+      </p:sp>
+      <p:sp>
+        <p:nvSpPr>
+          <p:cNvPr id="6" name="Text 4"/>
+          <p:cNvSpPr txBox="1"/>
+          <p:nvPr/>
+        </p:nvSpPr>
+        <p:spPr>
+          <a:xfrm>
+            <a:off x="457200" y="1837944"/>
+            <a:ext cx="457200" cy="128016"/>
+          </a:xfrm>
+          <a:prstGeom prst="rect">
+            <a:avLst/>
+          </a:prstGeom>
+          <a:noFill/>
+          <a:ln/>
+        </p:spPr>
+        <p:txBody>
+          <a:bodyPr wrap="square" lIns="0" tIns="0" rIns="0" bIns="0" rtlCol="0" anchor="ctr"/>
+          <a:lstStyle/>
+          <a:p>
+            <a:pPr algn="ctr" indent="0" marL="0">
+              <a:buNone/>
+            </a:pPr>
+            <a:r>
+              <a:rPr lang="en-US" sz="1000" dirty="0">
+                <a:solidFill>
+                  <a:srgbClr val="8A6870"/>
+                </a:solidFill>
+                <a:latin typeface="Yu Gothic" pitchFamily="34" charset="0"/>
+                <a:ea typeface="Yu Gothic" pitchFamily="34" charset="-122"/>
+                <a:cs typeface="Yu Gothic" pitchFamily="34" charset="-120"/>
+              </a:rPr>
+              <a:t>↓</a:t>
+            </a:r>
+            <a:endParaRPr lang="en-US" sz="1000" dirty="0"/>
+          </a:p>
+        </p:txBody>
+      </p:sp>
+      <p:sp>
+        <p:nvSpPr>
+          <p:cNvPr id="7" name="Shape 5"/>
+          <p:cNvSpPr/>
+          <p:nvPr/>
+        </p:nvSpPr>
+        <p:spPr>
+          <a:xfrm>
+            <a:off x="457200" y="1938528"/>
+            <a:ext cx="5120640" cy="402336"/>
+          </a:xfrm>
+          <a:prstGeom prst="roundRect">
+            <a:avLst>
+              <a:gd name="adj" fmla="val 11364"/>
+            </a:avLst>
+          </a:prstGeom>
+          <a:solidFill>
+            <a:srgbClr val="3A0B12"/>
+          </a:solidFill>
+          <a:ln w="12700">
+            <a:solidFill>
+              <a:srgbClr val="3A0B12"/>
+            </a:solidFill>
+            <a:prstDash val="solid"/>
+          </a:ln>
+        </p:spPr>
+      </p:sp>
+      <p:sp>
+        <p:nvSpPr>
+          <p:cNvPr id="8" name="Text 6"/>
+          <p:cNvSpPr txBox="1"/>
+          <p:nvPr/>
+        </p:nvSpPr>
+        <p:spPr>
+          <a:xfrm>
+            <a:off x="777240" y="1938528"/>
+            <a:ext cx="4663440" cy="402336"/>
+          </a:xfrm>
+          <a:prstGeom prst="rect">
+            <a:avLst/>
+          </a:prstGeom>
+          <a:noFill/>
+          <a:ln/>
+        </p:spPr>
+        <p:txBody>
+          <a:bodyPr wrap="square" lIns="0" tIns="0" rIns="0" bIns="0" rtlCol="0" anchor="ctr"/>
+          <a:lstStyle/>
+          <a:p>
+            <a:pPr indent="0" marL="0">
+              <a:buNone/>
+            </a:pPr>
+            <a:r>
+              <a:rPr lang="en-US" sz="1600" b="1" dirty="0">
+                <a:solidFill>
+                  <a:srgbClr val="FFFFFF"/>
+                </a:solidFill>
+                <a:latin typeface="Yu Gothic" pitchFamily="34" charset="0"/>
+                <a:ea typeface="Yu Gothic" pitchFamily="34" charset="-122"/>
+                <a:cs typeface="Yu Gothic" pitchFamily="34" charset="-120"/>
+              </a:rPr>
+              <a:t>自分を知る。</a:t>
+            </a:r>
+            <a:endParaRPr lang="en-US" sz="1600" dirty="0"/>
+          </a:p>
+        </p:txBody>
+      </p:sp>
+      <p:sp>
+        <p:nvSpPr>
+          <p:cNvPr id="9" name="Text 7"/>
+          <p:cNvSpPr txBox="1"/>
+          <p:nvPr/>
+        </p:nvSpPr>
+        <p:spPr>
+          <a:xfrm>
+            <a:off x="457200" y="2313432"/>
+            <a:ext cx="457200" cy="128016"/>
+          </a:xfrm>
+          <a:prstGeom prst="rect">
+            <a:avLst/>
+          </a:prstGeom>
+          <a:noFill/>
+          <a:ln/>
+        </p:spPr>
+        <p:txBody>
+          <a:bodyPr wrap="square" lIns="0" tIns="0" rIns="0" bIns="0" rtlCol="0" anchor="ctr"/>
+          <a:lstStyle/>
+          <a:p>
+            <a:pPr algn="ctr" indent="0" marL="0">
+              <a:buNone/>
+            </a:pPr>
+            <a:r>
+              <a:rPr lang="en-US" sz="1000" dirty="0">
+                <a:solidFill>
+                  <a:srgbClr val="8A6870"/>
+                </a:solidFill>
+                <a:latin typeface="Yu Gothic" pitchFamily="34" charset="0"/>
+                <a:ea typeface="Yu Gothic" pitchFamily="34" charset="-122"/>
+                <a:cs typeface="Yu Gothic" pitchFamily="34" charset="-120"/>
+              </a:rPr>
+              <a:t>↓</a:t>
+            </a:r>
+            <a:endParaRPr lang="en-US" sz="1000" dirty="0"/>
+          </a:p>
+        </p:txBody>
+      </p:sp>
+      <p:sp>
+        <p:nvSpPr>
+          <p:cNvPr id="10" name="Shape 8"/>
+          <p:cNvSpPr/>
+          <p:nvPr/>
+        </p:nvSpPr>
+        <p:spPr>
+          <a:xfrm>
+            <a:off x="457200" y="2414016"/>
+            <a:ext cx="5120640" cy="402336"/>
+          </a:xfrm>
+          <a:prstGeom prst="roundRect">
+            <a:avLst>
+              <a:gd name="adj" fmla="val 11364"/>
+            </a:avLst>
+          </a:prstGeom>
+          <a:solidFill>
+            <a:srgbClr val="3A0B12"/>
+          </a:solidFill>
+          <a:ln w="12700">
+            <a:solidFill>
+              <a:srgbClr val="3A0B12"/>
+            </a:solidFill>
+            <a:prstDash val="solid"/>
+          </a:ln>
+        </p:spPr>
+      </p:sp>
+      <p:sp>
+        <p:nvSpPr>
+          <p:cNvPr id="11" name="Text 9"/>
+          <p:cNvSpPr txBox="1"/>
+          <p:nvPr/>
+        </p:nvSpPr>
+        <p:spPr>
+          <a:xfrm>
+            <a:off x="777240" y="2414016"/>
+            <a:ext cx="4663440" cy="402336"/>
+          </a:xfrm>
+          <a:prstGeom prst="rect">
+            <a:avLst/>
+          </a:prstGeom>
+          <a:noFill/>
+          <a:ln/>
+        </p:spPr>
+        <p:txBody>
+          <a:bodyPr wrap="square" lIns="0" tIns="0" rIns="0" bIns="0" rtlCol="0" anchor="ctr"/>
+          <a:lstStyle/>
+          <a:p>
+            <a:pPr indent="0" marL="0">
+              <a:buNone/>
+            </a:pPr>
+            <a:r>
+              <a:rPr lang="en-US" sz="1600" b="1" dirty="0">
+                <a:solidFill>
+                  <a:srgbClr val="FFFFFF"/>
+                </a:solidFill>
+                <a:latin typeface="Yu Gothic" pitchFamily="34" charset="0"/>
+                <a:ea typeface="Yu Gothic" pitchFamily="34" charset="-122"/>
+                <a:cs typeface="Yu Gothic" pitchFamily="34" charset="-120"/>
+              </a:rPr>
+              <a:t>目標を決める。</a:t>
+            </a:r>
+            <a:endParaRPr lang="en-US" sz="1600" dirty="0"/>
+          </a:p>
+        </p:txBody>
+      </p:sp>
+      <p:sp>
+        <p:nvSpPr>
+          <p:cNvPr id="12" name="Text 10"/>
+          <p:cNvSpPr txBox="1"/>
+          <p:nvPr/>
+        </p:nvSpPr>
+        <p:spPr>
+          <a:xfrm>
+            <a:off x="457200" y="2788920"/>
+            <a:ext cx="457200" cy="128016"/>
+          </a:xfrm>
+          <a:prstGeom prst="rect">
+            <a:avLst/>
+          </a:prstGeom>
+          <a:noFill/>
+          <a:ln/>
+        </p:spPr>
+        <p:txBody>
+          <a:bodyPr wrap="square" lIns="0" tIns="0" rIns="0" bIns="0" rtlCol="0" anchor="ctr"/>
+          <a:lstStyle/>
+          <a:p>
+            <a:pPr algn="ctr" indent="0" marL="0">
+              <a:buNone/>
+            </a:pPr>
+            <a:r>
+              <a:rPr lang="en-US" sz="1000" dirty="0">
+                <a:solidFill>
+                  <a:srgbClr val="8A6870"/>
+                </a:solidFill>
+                <a:latin typeface="Yu Gothic" pitchFamily="34" charset="0"/>
+                <a:ea typeface="Yu Gothic" pitchFamily="34" charset="-122"/>
+                <a:cs typeface="Yu Gothic" pitchFamily="34" charset="-120"/>
+              </a:rPr>
+              <a:t>↓</a:t>
+            </a:r>
+            <a:endParaRPr lang="en-US" sz="1000" dirty="0"/>
+          </a:p>
+        </p:txBody>
+      </p:sp>
+      <p:sp>
+        <p:nvSpPr>
+          <p:cNvPr id="13" name="Shape 11"/>
+          <p:cNvSpPr/>
+          <p:nvPr/>
+        </p:nvSpPr>
+        <p:spPr>
+          <a:xfrm>
+            <a:off x="457200" y="2889504"/>
+            <a:ext cx="5120640" cy="402336"/>
+          </a:xfrm>
+          <a:prstGeom prst="roundRect">
+            <a:avLst>
+              <a:gd name="adj" fmla="val 11364"/>
+            </a:avLst>
+          </a:prstGeom>
+          <a:solidFill>
+            <a:srgbClr val="3A0B12"/>
+          </a:solidFill>
+          <a:ln w="12700">
+            <a:solidFill>
+              <a:srgbClr val="3A0B12"/>
+            </a:solidFill>
+            <a:prstDash val="solid"/>
+          </a:ln>
+        </p:spPr>
+      </p:sp>
+      <p:sp>
+        <p:nvSpPr>
+          <p:cNvPr id="14" name="Text 12"/>
+          <p:cNvSpPr txBox="1"/>
+          <p:nvPr/>
+        </p:nvSpPr>
+        <p:spPr>
+          <a:xfrm>
+            <a:off x="777240" y="2889504"/>
+            <a:ext cx="4663440" cy="402336"/>
+          </a:xfrm>
+          <a:prstGeom prst="rect">
+            <a:avLst/>
+          </a:prstGeom>
+          <a:noFill/>
+          <a:ln/>
+        </p:spPr>
+        <p:txBody>
+          <a:bodyPr wrap="square" lIns="0" tIns="0" rIns="0" bIns="0" rtlCol="0" anchor="ctr"/>
+          <a:lstStyle/>
+          <a:p>
+            <a:pPr indent="0" marL="0">
+              <a:buNone/>
+            </a:pPr>
+            <a:r>
+              <a:rPr lang="en-US" sz="1600" b="1" dirty="0">
+                <a:solidFill>
+                  <a:srgbClr val="FFFFFF"/>
+                </a:solidFill>
+                <a:latin typeface="Yu Gothic" pitchFamily="34" charset="0"/>
+                <a:ea typeface="Yu Gothic" pitchFamily="34" charset="-122"/>
+                <a:cs typeface="Yu Gothic" pitchFamily="34" charset="-120"/>
+              </a:rPr>
+              <a:t>行動を選ぶ。</a:t>
+            </a:r>
+            <a:endParaRPr lang="en-US" sz="1600" dirty="0"/>
+          </a:p>
+        </p:txBody>
+      </p:sp>
+      <p:sp>
+        <p:nvSpPr>
+          <p:cNvPr id="15" name="Text 13"/>
+          <p:cNvSpPr txBox="1"/>
+          <p:nvPr/>
+        </p:nvSpPr>
+        <p:spPr>
+          <a:xfrm>
+            <a:off x="457200" y="3264408"/>
+            <a:ext cx="457200" cy="128016"/>
+          </a:xfrm>
+          <a:prstGeom prst="rect">
+            <a:avLst/>
+          </a:prstGeom>
+          <a:noFill/>
+          <a:ln/>
+        </p:spPr>
+        <p:txBody>
+          <a:bodyPr wrap="square" lIns="0" tIns="0" rIns="0" bIns="0" rtlCol="0" anchor="ctr"/>
+          <a:lstStyle/>
+          <a:p>
+            <a:pPr algn="ctr" indent="0" marL="0">
+              <a:buNone/>
+            </a:pPr>
+            <a:r>
+              <a:rPr lang="en-US" sz="1000" dirty="0">
+                <a:solidFill>
+                  <a:srgbClr val="8A6870"/>
+                </a:solidFill>
+                <a:latin typeface="Yu Gothic" pitchFamily="34" charset="0"/>
+                <a:ea typeface="Yu Gothic" pitchFamily="34" charset="-122"/>
+                <a:cs typeface="Yu Gothic" pitchFamily="34" charset="-120"/>
+              </a:rPr>
+              <a:t>↓</a:t>
+            </a:r>
+            <a:endParaRPr lang="en-US" sz="1000" dirty="0"/>
+          </a:p>
+        </p:txBody>
+      </p:sp>
+      <p:sp>
+        <p:nvSpPr>
+          <p:cNvPr id="16" name="Shape 14"/>
+          <p:cNvSpPr/>
+          <p:nvPr/>
+        </p:nvSpPr>
+        <p:spPr>
+          <a:xfrm>
+            <a:off x="457200" y="3364992"/>
+            <a:ext cx="5120640" cy="402336"/>
+          </a:xfrm>
+          <a:prstGeom prst="roundRect">
+            <a:avLst>
+              <a:gd name="adj" fmla="val 11364"/>
+            </a:avLst>
+          </a:prstGeom>
+          <a:solidFill>
+            <a:srgbClr val="A02236"/>
+          </a:solidFill>
+          <a:ln w="12700">
+            <a:solidFill>
+              <a:srgbClr val="A02236"/>
+            </a:solidFill>
+            <a:prstDash val="solid"/>
+          </a:ln>
+        </p:spPr>
+      </p:sp>
+      <p:sp>
+        <p:nvSpPr>
+          <p:cNvPr id="17" name="Text 15"/>
+          <p:cNvSpPr txBox="1"/>
+          <p:nvPr/>
+        </p:nvSpPr>
+        <p:spPr>
+          <a:xfrm>
+            <a:off x="777240" y="3364992"/>
+            <a:ext cx="4663440" cy="402336"/>
+          </a:xfrm>
+          <a:prstGeom prst="rect">
+            <a:avLst/>
+          </a:prstGeom>
+          <a:noFill/>
+          <a:ln/>
+        </p:spPr>
+        <p:txBody>
+          <a:bodyPr wrap="square" lIns="0" tIns="0" rIns="0" bIns="0" rtlCol="0" anchor="ctr"/>
+          <a:lstStyle/>
+          <a:p>
+            <a:pPr indent="0" marL="0">
+              <a:buNone/>
+            </a:pPr>
+            <a:r>
+              <a:rPr lang="en-US" sz="1600" b="1" dirty="0">
+                <a:solidFill>
+                  <a:srgbClr val="FFFFFF"/>
+                </a:solidFill>
+                <a:latin typeface="Yu Gothic" pitchFamily="34" charset="0"/>
+                <a:ea typeface="Yu Gothic" pitchFamily="34" charset="-122"/>
+                <a:cs typeface="Yu Gothic" pitchFamily="34" charset="-120"/>
+              </a:rPr>
+              <a:t>また、できたが増える。</a:t>
+            </a:r>
+            <a:endParaRPr lang="en-US" sz="1600" dirty="0"/>
+          </a:p>
+        </p:txBody>
+      </p:sp>
+      <p:sp>
+        <p:nvSpPr>
+          <p:cNvPr id="18" name="Shape 16"/>
+          <p:cNvSpPr/>
+          <p:nvPr/>
+        </p:nvSpPr>
+        <p:spPr>
+          <a:xfrm>
+            <a:off x="5806440" y="1463040"/>
+            <a:ext cx="2880360" cy="2231136"/>
+          </a:xfrm>
+          <a:prstGeom prst="roundRect">
+            <a:avLst>
+              <a:gd name="adj" fmla="val 3279"/>
+            </a:avLst>
+          </a:prstGeom>
+          <a:solidFill>
+            <a:srgbClr val="3A0B12"/>
+          </a:solidFill>
+          <a:ln w="12700">
+            <a:solidFill>
+              <a:srgbClr val="3A0B12"/>
+            </a:solidFill>
+            <a:prstDash val="solid"/>
+          </a:ln>
+        </p:spPr>
+      </p:sp>
+      <p:sp>
+        <p:nvSpPr>
+          <p:cNvPr id="19" name="Text 17"/>
+          <p:cNvSpPr txBox="1"/>
+          <p:nvPr/>
+        </p:nvSpPr>
+        <p:spPr>
+          <a:xfrm>
+            <a:off x="6080760" y="1463040"/>
+            <a:ext cx="2331720" cy="2231136"/>
+          </a:xfrm>
+          <a:prstGeom prst="rect">
+            <a:avLst/>
+          </a:prstGeom>
+          <a:noFill/>
+          <a:ln/>
+        </p:spPr>
+        <p:txBody>
+          <a:bodyPr wrap="square" lIns="0" tIns="0" rIns="0" bIns="0" rtlCol="0" anchor="ctr"/>
+          <a:lstStyle/>
+          <a:p>
+            <a:pPr indent="0" marL="0">
+              <a:lnSpc>
+                <a:spcPts val="2800"/>
+              </a:lnSpc>
+              <a:buNone/>
+            </a:pPr>
+            <a:r>
+              <a:rPr lang="en-US" sz="1600" b="1" dirty="0">
+                <a:solidFill>
+                  <a:srgbClr val="F2E7E9"/>
+                </a:solidFill>
+                <a:latin typeface="Yu Gothic" pitchFamily="34" charset="0"/>
+                <a:ea typeface="Yu Gothic" pitchFamily="34" charset="-122"/>
+                <a:cs typeface="Yu Gothic" pitchFamily="34" charset="-120"/>
+              </a:rPr>
+              <a:t>その積み重ねが、</a:t>
+            </a:r>
+            <a:endParaRPr lang="en-US" sz="1600" dirty="0"/>
+          </a:p>
+          <a:p>
+            <a:pPr indent="0" marL="0">
+              <a:lnSpc>
+                <a:spcPts val="2800"/>
+              </a:lnSpc>
+              <a:buNone/>
+            </a:pPr>
+            <a:r>
+              <a:rPr lang="en-US" sz="1600" b="1" dirty="0">
+                <a:solidFill>
+                  <a:srgbClr val="F2E7E9"/>
+                </a:solidFill>
+                <a:latin typeface="Yu Gothic" pitchFamily="34" charset="0"/>
+                <a:ea typeface="Yu Gothic" pitchFamily="34" charset="-122"/>
+                <a:cs typeface="Yu Gothic" pitchFamily="34" charset="-120"/>
+              </a:rPr>
+              <a:t>「私なら次も進める」</a:t>
+            </a:r>
+            <a:endParaRPr lang="en-US" sz="1600" dirty="0"/>
+          </a:p>
+          <a:p>
+            <a:pPr indent="0" marL="0">
+              <a:lnSpc>
+                <a:spcPts val="2800"/>
+              </a:lnSpc>
+              <a:buNone/>
+            </a:pPr>
+            <a:r>
+              <a:rPr lang="en-US" sz="1600" b="1" dirty="0">
+                <a:solidFill>
+                  <a:srgbClr val="F2E7E9"/>
+                </a:solidFill>
+                <a:latin typeface="Yu Gothic" pitchFamily="34" charset="0"/>
+                <a:ea typeface="Yu Gothic" pitchFamily="34" charset="-122"/>
+                <a:cs typeface="Yu Gothic" pitchFamily="34" charset="-120"/>
+              </a:rPr>
+              <a:t>という自己信頼に</a:t>
+            </a:r>
+            <a:endParaRPr lang="en-US" sz="1600" dirty="0"/>
+          </a:p>
+          <a:p>
+            <a:pPr indent="0" marL="0">
+              <a:lnSpc>
+                <a:spcPts val="2800"/>
+              </a:lnSpc>
+              <a:buNone/>
+            </a:pPr>
+            <a:r>
+              <a:rPr lang="en-US" sz="1600" b="1" dirty="0">
+                <a:solidFill>
+                  <a:srgbClr val="F2E7E9"/>
+                </a:solidFill>
+                <a:latin typeface="Yu Gothic" pitchFamily="34" charset="0"/>
+                <a:ea typeface="Yu Gothic" pitchFamily="34" charset="-122"/>
+                <a:cs typeface="Yu Gothic" pitchFamily="34" charset="-120"/>
+              </a:rPr>
+              <a:t>なります。</a:t>
+            </a:r>
+            <a:endParaRPr lang="en-US" sz="1600" dirty="0"/>
+          </a:p>
+        </p:txBody>
+      </p:sp>
+      <p:sp>
+        <p:nvSpPr>
+          <p:cNvPr id="20" name="Shape 18"/>
+          <p:cNvSpPr/>
+          <p:nvPr/>
+        </p:nvSpPr>
+        <p:spPr>
+          <a:xfrm>
+            <a:off x="457200" y="3977640"/>
+            <a:ext cx="8229600" cy="777240"/>
+          </a:xfrm>
+          <a:prstGeom prst="roundRect">
+            <a:avLst>
+              <a:gd name="adj" fmla="val 9412"/>
+            </a:avLst>
+          </a:prstGeom>
+          <a:solidFill>
+            <a:srgbClr val="FFFFFF"/>
+          </a:solidFill>
+          <a:ln w="12700">
+            <a:solidFill>
+              <a:srgbClr val="FFFFFF"/>
+            </a:solidFill>
+            <a:prstDash val="solid"/>
+          </a:ln>
+        </p:spPr>
+      </p:sp>
+      <p:sp>
+        <p:nvSpPr>
+          <p:cNvPr id="21" name="Text 19"/>
+          <p:cNvSpPr txBox="1"/>
+          <p:nvPr/>
+        </p:nvSpPr>
+        <p:spPr>
+          <a:xfrm>
+            <a:off x="457200" y="3977640"/>
+            <a:ext cx="8229600" cy="777240"/>
+          </a:xfrm>
+          <a:prstGeom prst="rect">
+            <a:avLst/>
+          </a:prstGeom>
+          <a:noFill/>
+          <a:ln/>
+        </p:spPr>
+        <p:txBody>
+          <a:bodyPr wrap="square" lIns="0" tIns="0" rIns="0" bIns="0" rtlCol="0" anchor="ctr"/>
+          <a:lstStyle/>
+          <a:p>
+            <a:pPr algn="ctr" indent="0" marL="0">
+              <a:buNone/>
+            </a:pPr>
+            <a:r>
+              <a:rPr lang="en-US" sz="2200" b="1" dirty="0">
+                <a:solidFill>
+                  <a:srgbClr val="540E19"/>
+                </a:solidFill>
+                <a:latin typeface="Yu Mincho" pitchFamily="34" charset="0"/>
+                <a:ea typeface="Yu Mincho" pitchFamily="34" charset="-122"/>
+                <a:cs typeface="Yu Mincho" pitchFamily="34" charset="-120"/>
+              </a:rPr>
+              <a:t>今日はありがとうございました。</a:t>
+            </a:r>
+            <a:endParaRPr lang="en-US" sz="2200" dirty="0"/>
           </a:p>
         </p:txBody>
       </p:sp>

--- a/seminar/seminar-dekita.pptx
+++ b/seminar/seminar-dekita.pptx
@@ -6440,7 +6440,7 @@
         </p:nvSpPr>
         <p:spPr>
           <a:xfrm>
-            <a:off x="640080" y="777240"/>
+            <a:off x="640080" y="731520"/>
             <a:ext cx="7863840" cy="411480"/>
           </a:xfrm>
           <a:prstGeom prst="rect">
@@ -6479,7 +6479,7 @@
         </p:nvSpPr>
         <p:spPr>
           <a:xfrm>
-            <a:off x="640080" y="1325880"/>
+            <a:off x="640080" y="1207008"/>
             <a:ext cx="7863840" cy="1188720"/>
           </a:xfrm>
           <a:prstGeom prst="rect">
@@ -6494,12 +6494,12 @@
           <a:p>
             <a:pPr algn="l" indent="0" marL="0">
               <a:lnSpc>
-                <a:spcPts val="6670"/>
+                <a:spcPts val="6380"/>
               </a:lnSpc>
               <a:buNone/>
             </a:pPr>
             <a:r>
-              <a:rPr lang="en-US" sz="4600" b="1" dirty="0">
+              <a:rPr lang="en-US" sz="4400" b="1" dirty="0">
                 <a:solidFill>
                   <a:srgbClr val="141416"/>
                 </a:solidFill>
@@ -6509,17 +6509,17 @@
               </a:rPr>
               <a:t>できたのかけら</a:t>
             </a:r>
-            <a:endParaRPr lang="en-US" sz="4600" dirty="0"/>
+            <a:endParaRPr lang="en-US" sz="4400" dirty="0"/>
           </a:p>
           <a:p>
             <a:pPr algn="l" indent="0" marL="0">
               <a:lnSpc>
-                <a:spcPts val="6670"/>
+                <a:spcPts val="6380"/>
               </a:lnSpc>
               <a:buNone/>
             </a:pPr>
             <a:r>
-              <a:rPr lang="en-US" sz="4600" b="1" dirty="0">
+              <a:rPr lang="en-US" sz="4400" b="1" dirty="0">
                 <a:solidFill>
                   <a:srgbClr val="141416"/>
                 </a:solidFill>
@@ -6529,7 +6529,7 @@
               </a:rPr>
               <a:t>ワークショップ</a:t>
             </a:r>
-            <a:endParaRPr lang="en-US" sz="4600" dirty="0"/>
+            <a:endParaRPr lang="en-US" sz="4400" dirty="0"/>
           </a:p>
         </p:txBody>
       </p:sp>
@@ -6541,7 +6541,7 @@
         </p:nvSpPr>
         <p:spPr>
           <a:xfrm>
-            <a:off x="640080" y="3246120"/>
+            <a:off x="640080" y="3346704"/>
             <a:ext cx="1188720" cy="36576"/>
           </a:xfrm>
           <a:prstGeom prst="rect">
@@ -6566,24 +6566,24 @@
         </p:nvSpPr>
         <p:spPr>
           <a:xfrm>
-            <a:off x="640080" y="3520440"/>
-            <a:ext cx="7863840" cy="411480"/>
-          </a:xfrm>
-          <a:prstGeom prst="rect">
-            <a:avLst/>
-          </a:prstGeom>
-          <a:noFill/>
-          <a:ln/>
-        </p:spPr>
-        <p:txBody>
-          <a:bodyPr wrap="square" lIns="0" tIns="0" rIns="0" bIns="0" rtlCol="0" anchor="ctr"/>
-          <a:lstStyle/>
-          <a:p>
-            <a:pPr indent="0" marL="0">
-              <a:buNone/>
-            </a:pPr>
-            <a:r>
-              <a:rPr lang="en-US" sz="1800" b="1" dirty="0">
+            <a:off x="640080" y="3584448"/>
+            <a:ext cx="7863840" cy="384048"/>
+          </a:xfrm>
+          <a:prstGeom prst="rect">
+            <a:avLst/>
+          </a:prstGeom>
+          <a:noFill/>
+          <a:ln/>
+        </p:spPr>
+        <p:txBody>
+          <a:bodyPr wrap="square" lIns="0" tIns="0" rIns="0" bIns="0" rtlCol="0" anchor="ctr"/>
+          <a:lstStyle/>
+          <a:p>
+            <a:pPr indent="0" marL="0">
+              <a:buNone/>
+            </a:pPr>
+            <a:r>
+              <a:rPr lang="en-US" sz="1700" b="1" dirty="0">
                 <a:solidFill>
                   <a:srgbClr val="3B3634"/>
                 </a:solidFill>
@@ -6593,7 +6593,7 @@
               </a:rPr>
               <a:t>絶対に取りたい記録、勝ちたい試合があるパワーリフターへ。</a:t>
             </a:r>
-            <a:endParaRPr lang="en-US" sz="1800" dirty="0"/>
+            <a:endParaRPr lang="en-US" sz="1700" dirty="0"/>
           </a:p>
         </p:txBody>
       </p:sp>
@@ -6605,7 +6605,7 @@
         </p:nvSpPr>
         <p:spPr>
           <a:xfrm>
-            <a:off x="640080" y="4023360"/>
+            <a:off x="640080" y="4041648"/>
             <a:ext cx="7863840" cy="822960"/>
           </a:xfrm>
           <a:prstGeom prst="rect">
@@ -6620,12 +6620,12 @@
           <a:p>
             <a:pPr indent="0" marL="0">
               <a:lnSpc>
-                <a:spcPts val="2800"/>
+                <a:spcPts val="2700"/>
               </a:lnSpc>
               <a:buNone/>
             </a:pPr>
             <a:r>
-              <a:rPr lang="en-US" sz="1700" dirty="0">
+              <a:rPr lang="en-US" sz="1600" dirty="0">
                 <a:solidFill>
                   <a:srgbClr val="6B6360"/>
                 </a:solidFill>
@@ -6635,17 +6635,17 @@
               </a:rPr>
               <a:t>今日は、「メンタルを強くする方法」ではなく、</a:t>
             </a:r>
-            <a:endParaRPr lang="en-US" sz="1700" dirty="0"/>
+            <a:endParaRPr lang="en-US" sz="1600" dirty="0"/>
           </a:p>
           <a:p>
             <a:pPr indent="0" marL="0">
               <a:lnSpc>
-                <a:spcPts val="2800"/>
+                <a:spcPts val="2700"/>
               </a:lnSpc>
               <a:buNone/>
             </a:pPr>
             <a:r>
-              <a:rPr lang="en-US" sz="1700" dirty="0">
+              <a:rPr lang="en-US" sz="1600" dirty="0">
                 <a:solidFill>
                   <a:srgbClr val="6B6360"/>
                 </a:solidFill>
@@ -6655,7 +6655,7 @@
               </a:rPr>
               <a:t>「自分のメンタルをどう扱うか」を一緒に考えていきます。</a:t>
             </a:r>
-            <a:endParaRPr lang="en-US" sz="1700" dirty="0"/>
+            <a:endParaRPr lang="en-US" sz="1600" dirty="0"/>
           </a:p>
         </p:txBody>
       </p:sp>
@@ -11687,12 +11687,12 @@
           <a:p>
             <a:pPr algn="l" indent="0" marL="0">
               <a:lnSpc>
-                <a:spcPts val="4640"/>
+                <a:spcPts val="4350"/>
               </a:lnSpc>
               <a:buNone/>
             </a:pPr>
             <a:r>
-              <a:rPr lang="en-US" sz="3200" b="1" dirty="0">
+              <a:rPr lang="en-US" sz="3000" b="1" dirty="0">
                 <a:solidFill>
                   <a:srgbClr val="141416"/>
                 </a:solidFill>
@@ -11702,7 +11702,7 @@
               </a:rPr>
               <a:t>こんな経験、ありませんか？</a:t>
             </a:r>
-            <a:endParaRPr lang="en-US" sz="3200" dirty="0"/>
+            <a:endParaRPr lang="en-US" sz="3000" dirty="0"/>
           </a:p>
         </p:txBody>
       </p:sp>
@@ -28326,12 +28326,12 @@
           <a:p>
             <a:pPr algn="l" indent="0" marL="0">
               <a:lnSpc>
-                <a:spcPts val="3915"/>
+                <a:spcPts val="3625"/>
               </a:lnSpc>
               <a:buNone/>
             </a:pPr>
             <a:r>
-              <a:rPr lang="en-US" sz="2700" b="1" dirty="0">
+              <a:rPr lang="en-US" sz="2500" b="1" dirty="0">
                 <a:solidFill>
                   <a:srgbClr val="141416"/>
                 </a:solidFill>
@@ -28341,7 +28341,7 @@
               </a:rPr>
               <a:t>「できた」を結果につなげるチェックシート</a:t>
             </a:r>
-            <a:endParaRPr lang="en-US" sz="2700" dirty="0"/>
+            <a:endParaRPr lang="en-US" sz="2500" dirty="0"/>
           </a:p>
         </p:txBody>
       </p:sp>

--- a/seminar/seminar-dekita.pptx
+++ b/seminar/seminar-dekita.pptx
@@ -30231,7 +30231,7 @@
                 <a:ea typeface="Yu Gothic" pitchFamily="34" charset="-122"/>
                 <a:cs typeface="Yu Gothic" pitchFamily="34" charset="-120"/>
               </a:rPr>
-              <a:t>mosh.jp/services/404875</a:t>
+              <a:t>forms.gle/UFiioc2R9Jgg8DSq8</a:t>
             </a:r>
             <a:endParaRPr lang="en-US" sz="1000" dirty="0"/>
           </a:p>
